--- a/incoming_files/cio_jmux_presentation.pptx
+++ b/incoming_files/cio_jmux_presentation.pptx
@@ -14,6 +14,7 @@
     <p:sldId id="262" r:id="rId13"/>
     <p:sldId id="263" r:id="rId14"/>
     <p:sldId id="264" r:id="rId15"/>
+    <p:sldId id="265" r:id="rId16"/>
   </p:sldIdLst>
   <p:sldSz cx="12191695" cy="6858000" type="screen4x3"/>
   <p:notesSz cx="6858000" cy="9144000"/>
@@ -3348,6 +3349,3432 @@
                 </a:solidFill>
               </a:rPr>
               <a:t>CONFIDENTIAL</a:t>
+            </a:r>
+          </a:p>
+        </p:txBody>
+      </p:sp>
+    </p:spTree>
+  </p:cSld>
+  <p:clrMapOvr>
+    <a:masterClrMapping/>
+  </p:clrMapOvr>
+</p:sld>
+</file>
+
+<file path=ppt/slides/slide10.xml><?xml version="1.0" encoding="utf-8"?>
+<p:sld xmlns:a="http://schemas.openxmlformats.org/drawingml/2006/main" xmlns:p="http://schemas.openxmlformats.org/presentationml/2006/main" xmlns:r="http://schemas.openxmlformats.org/officeDocument/2006/relationships">
+  <p:cSld>
+    <p:spTree>
+      <p:nvGrpSpPr>
+        <p:cNvPr id="1" name=""/>
+        <p:cNvGrpSpPr/>
+        <p:nvPr/>
+      </p:nvGrpSpPr>
+      <p:grpSpPr/>
+      <p:sp>
+        <p:nvSpPr>
+          <p:cNvPr id="2" name="Rectangle 1"/>
+          <p:cNvSpPr/>
+          <p:nvPr/>
+        </p:nvSpPr>
+        <p:spPr>
+          <a:xfrm>
+            <a:off x="0" y="0"/>
+            <a:ext cx="12191695" cy="914400"/>
+          </a:xfrm>
+          <a:prstGeom prst="rect">
+            <a:avLst/>
+          </a:prstGeom>
+          <a:solidFill>
+            <a:srgbClr val="003387"/>
+          </a:solidFill>
+          <a:ln>
+            <a:noFill/>
+          </a:ln>
+        </p:spPr>
+        <p:style>
+          <a:lnRef idx="1">
+            <a:schemeClr val="accent1"/>
+          </a:lnRef>
+          <a:fillRef idx="3">
+            <a:schemeClr val="accent1"/>
+          </a:fillRef>
+          <a:effectRef idx="2">
+            <a:schemeClr val="accent1"/>
+          </a:effectRef>
+          <a:fontRef idx="minor">
+            <a:schemeClr val="lt1"/>
+          </a:fontRef>
+        </p:style>
+        <p:txBody>
+          <a:bodyPr rtlCol="0" anchor="ctr"/>
+          <a:lstStyle/>
+          <a:p>
+            <a:pPr algn="ctr"/>
+          </a:p>
+        </p:txBody>
+      </p:sp>
+      <p:sp>
+        <p:nvSpPr>
+          <p:cNvPr id="3" name="Rectangle 2"/>
+          <p:cNvSpPr/>
+          <p:nvPr/>
+        </p:nvSpPr>
+        <p:spPr>
+          <a:xfrm>
+            <a:off x="0" y="777240"/>
+            <a:ext cx="12191695" cy="109728"/>
+          </a:xfrm>
+          <a:prstGeom prst="rect">
+            <a:avLst/>
+          </a:prstGeom>
+          <a:solidFill>
+            <a:srgbClr val="F7941D"/>
+          </a:solidFill>
+          <a:ln>
+            <a:noFill/>
+          </a:ln>
+        </p:spPr>
+        <p:style>
+          <a:lnRef idx="1">
+            <a:schemeClr val="accent1"/>
+          </a:lnRef>
+          <a:fillRef idx="3">
+            <a:schemeClr val="accent1"/>
+          </a:fillRef>
+          <a:effectRef idx="2">
+            <a:schemeClr val="accent1"/>
+          </a:effectRef>
+          <a:fontRef idx="minor">
+            <a:schemeClr val="lt1"/>
+          </a:fontRef>
+        </p:style>
+        <p:txBody>
+          <a:bodyPr rtlCol="0" anchor="ctr"/>
+          <a:lstStyle/>
+          <a:p>
+            <a:pPr algn="ctr"/>
+          </a:p>
+        </p:txBody>
+      </p:sp>
+      <p:sp>
+        <p:nvSpPr>
+          <p:cNvPr id="4" name="TextBox 3"/>
+          <p:cNvSpPr txBox="1"/>
+          <p:nvPr/>
+        </p:nvSpPr>
+        <p:spPr>
+          <a:xfrm>
+            <a:off x="274320" y="109728"/>
+            <a:ext cx="9144000" cy="594360"/>
+          </a:xfrm>
+          <a:prstGeom prst="rect">
+            <a:avLst/>
+          </a:prstGeom>
+          <a:noFill/>
+        </p:spPr>
+        <p:txBody>
+          <a:bodyPr wrap="square">
+            <a:spAutoFit/>
+          </a:bodyPr>
+          <a:lstStyle/>
+          <a:p>
+            <a:pPr algn="l"/>
+            <a:r>
+              <a:rPr sz="2400" b="1" i="0">
+                <a:solidFill>
+                  <a:srgbClr val="FFFFFF"/>
+                </a:solidFill>
+              </a:rPr>
+              <a:t>Goals &amp; Objectives</a:t>
+            </a:r>
+          </a:p>
+        </p:txBody>
+      </p:sp>
+      <p:sp>
+        <p:nvSpPr>
+          <p:cNvPr id="5" name="TextBox 4"/>
+          <p:cNvSpPr txBox="1"/>
+          <p:nvPr/>
+        </p:nvSpPr>
+        <p:spPr>
+          <a:xfrm>
+            <a:off x="274320" y="548640"/>
+            <a:ext cx="9144000" cy="292608"/>
+          </a:xfrm>
+          <a:prstGeom prst="rect">
+            <a:avLst/>
+          </a:prstGeom>
+          <a:noFill/>
+        </p:spPr>
+        <p:txBody>
+          <a:bodyPr wrap="square">
+            <a:spAutoFit/>
+          </a:bodyPr>
+          <a:lstStyle/>
+          <a:p>
+            <a:pPr algn="l"/>
+            <a:r>
+              <a:rPr sz="1200" b="0" i="0">
+                <a:solidFill>
+                  <a:srgbClr val="F7941D"/>
+                </a:solidFill>
+              </a:rPr>
+              <a:t>JMUX Replacement: Private Field Area Network</a:t>
+            </a:r>
+          </a:p>
+        </p:txBody>
+      </p:sp>
+      <p:sp>
+        <p:nvSpPr>
+          <p:cNvPr id="6" name="Rectangle 5"/>
+          <p:cNvSpPr/>
+          <p:nvPr/>
+        </p:nvSpPr>
+        <p:spPr>
+          <a:xfrm>
+            <a:off x="0" y="6583680"/>
+            <a:ext cx="12191695" cy="274320"/>
+          </a:xfrm>
+          <a:prstGeom prst="rect">
+            <a:avLst/>
+          </a:prstGeom>
+          <a:solidFill>
+            <a:srgbClr val="003387"/>
+          </a:solidFill>
+          <a:ln>
+            <a:noFill/>
+          </a:ln>
+        </p:spPr>
+        <p:style>
+          <a:lnRef idx="1">
+            <a:schemeClr val="accent1"/>
+          </a:lnRef>
+          <a:fillRef idx="3">
+            <a:schemeClr val="accent1"/>
+          </a:fillRef>
+          <a:effectRef idx="2">
+            <a:schemeClr val="accent1"/>
+          </a:effectRef>
+          <a:fontRef idx="minor">
+            <a:schemeClr val="lt1"/>
+          </a:fontRef>
+        </p:style>
+        <p:txBody>
+          <a:bodyPr rtlCol="0" anchor="ctr"/>
+          <a:lstStyle/>
+          <a:p>
+            <a:pPr algn="ctr"/>
+          </a:p>
+        </p:txBody>
+      </p:sp>
+      <p:sp>
+        <p:nvSpPr>
+          <p:cNvPr id="7" name="TextBox 6"/>
+          <p:cNvSpPr txBox="1"/>
+          <p:nvPr/>
+        </p:nvSpPr>
+        <p:spPr>
+          <a:xfrm>
+            <a:off x="274320" y="6601968"/>
+            <a:ext cx="10972800" cy="228600"/>
+          </a:xfrm>
+          <a:prstGeom prst="rect">
+            <a:avLst/>
+          </a:prstGeom>
+          <a:noFill/>
+        </p:spPr>
+        <p:txBody>
+          <a:bodyPr wrap="square">
+            <a:spAutoFit/>
+          </a:bodyPr>
+          <a:lstStyle/>
+          <a:p>
+            <a:pPr algn="l"/>
+            <a:r>
+              <a:rPr sz="800" b="0" i="0">
+                <a:solidFill>
+                  <a:srgbClr val="FFFFFF"/>
+                </a:solidFill>
+              </a:rPr>
+              <a:t>PSEG Long Island | JMUX Replacement Program | Confidential | March 2026</a:t>
+            </a:r>
+          </a:p>
+        </p:txBody>
+      </p:sp>
+      <p:sp>
+        <p:nvSpPr>
+          <p:cNvPr id="8" name="Rectangle 7"/>
+          <p:cNvSpPr/>
+          <p:nvPr/>
+        </p:nvSpPr>
+        <p:spPr>
+          <a:xfrm>
+            <a:off x="274320" y="1005840"/>
+            <a:ext cx="11612880" cy="530352"/>
+          </a:xfrm>
+          <a:prstGeom prst="rect">
+            <a:avLst/>
+          </a:prstGeom>
+          <a:solidFill>
+            <a:srgbClr val="F2F2F2"/>
+          </a:solidFill>
+          <a:ln w="19050">
+            <a:solidFill>
+              <a:srgbClr val="F7941D"/>
+            </a:solidFill>
+          </a:ln>
+        </p:spPr>
+        <p:style>
+          <a:lnRef idx="1">
+            <a:schemeClr val="accent1"/>
+          </a:lnRef>
+          <a:fillRef idx="3">
+            <a:schemeClr val="accent1"/>
+          </a:fillRef>
+          <a:effectRef idx="2">
+            <a:schemeClr val="accent1"/>
+          </a:effectRef>
+          <a:fontRef idx="minor">
+            <a:schemeClr val="lt1"/>
+          </a:fontRef>
+        </p:style>
+        <p:txBody>
+          <a:bodyPr rtlCol="0" anchor="ctr"/>
+          <a:lstStyle/>
+          <a:p>
+            <a:pPr algn="ctr"/>
+          </a:p>
+        </p:txBody>
+      </p:sp>
+      <p:sp>
+        <p:nvSpPr>
+          <p:cNvPr id="9" name="TextBox 8"/>
+          <p:cNvSpPr txBox="1"/>
+          <p:nvPr/>
+        </p:nvSpPr>
+        <p:spPr>
+          <a:xfrm>
+            <a:off x="457200" y="1042415"/>
+            <a:ext cx="11247120" cy="457200"/>
+          </a:xfrm>
+          <a:prstGeom prst="rect">
+            <a:avLst/>
+          </a:prstGeom>
+          <a:noFill/>
+        </p:spPr>
+        <p:txBody>
+          <a:bodyPr wrap="square">
+            <a:spAutoFit/>
+          </a:bodyPr>
+          <a:lstStyle/>
+          <a:p>
+            <a:pPr algn="l"/>
+            <a:r>
+              <a:rPr sz="1200" b="0" i="1">
+                <a:solidFill>
+                  <a:srgbClr val="003387"/>
+                </a:solidFill>
+              </a:rPr>
+              <a:t>Modernize PSEG LI's substation communications by replacing legacy JMUX with MPLS nodes to deliver a reliable, scalable, and future-ready network.</a:t>
+            </a:r>
+          </a:p>
+        </p:txBody>
+      </p:sp>
+      <p:sp>
+        <p:nvSpPr>
+          <p:cNvPr id="10" name="Rectangle 9"/>
+          <p:cNvSpPr/>
+          <p:nvPr/>
+        </p:nvSpPr>
+        <p:spPr>
+          <a:xfrm>
+            <a:off x="274320" y="1645920"/>
+            <a:ext cx="3749039" cy="438912"/>
+          </a:xfrm>
+          <a:prstGeom prst="rect">
+            <a:avLst/>
+          </a:prstGeom>
+          <a:solidFill>
+            <a:srgbClr val="003387"/>
+          </a:solidFill>
+          <a:ln>
+            <a:noFill/>
+          </a:ln>
+        </p:spPr>
+        <p:style>
+          <a:lnRef idx="1">
+            <a:schemeClr val="accent1"/>
+          </a:lnRef>
+          <a:fillRef idx="3">
+            <a:schemeClr val="accent1"/>
+          </a:fillRef>
+          <a:effectRef idx="2">
+            <a:schemeClr val="accent1"/>
+          </a:effectRef>
+          <a:fontRef idx="minor">
+            <a:schemeClr val="lt1"/>
+          </a:fontRef>
+        </p:style>
+        <p:txBody>
+          <a:bodyPr rtlCol="0" anchor="ctr"/>
+          <a:lstStyle/>
+          <a:p>
+            <a:pPr algn="ctr"/>
+          </a:p>
+        </p:txBody>
+      </p:sp>
+      <p:sp>
+        <p:nvSpPr>
+          <p:cNvPr id="11" name="TextBox 10"/>
+          <p:cNvSpPr txBox="1"/>
+          <p:nvPr/>
+        </p:nvSpPr>
+        <p:spPr>
+          <a:xfrm>
+            <a:off x="365760" y="1673352"/>
+            <a:ext cx="3566160" cy="365760"/>
+          </a:xfrm>
+          <a:prstGeom prst="rect">
+            <a:avLst/>
+          </a:prstGeom>
+          <a:noFill/>
+        </p:spPr>
+        <p:txBody>
+          <a:bodyPr wrap="square">
+            <a:spAutoFit/>
+          </a:bodyPr>
+          <a:lstStyle/>
+          <a:p>
+            <a:pPr algn="l"/>
+            <a:r>
+              <a:rPr sz="1200" b="1" i="0">
+                <a:solidFill>
+                  <a:srgbClr val="FFFFFF"/>
+                </a:solidFill>
+              </a:rPr>
+              <a:t>🔧  Engineering Services</a:t>
+            </a:r>
+          </a:p>
+        </p:txBody>
+      </p:sp>
+      <p:sp>
+        <p:nvSpPr>
+          <p:cNvPr id="12" name="Rectangle 11"/>
+          <p:cNvSpPr/>
+          <p:nvPr/>
+        </p:nvSpPr>
+        <p:spPr>
+          <a:xfrm>
+            <a:off x="274320" y="2084831"/>
+            <a:ext cx="3749039" cy="3200400"/>
+          </a:xfrm>
+          <a:prstGeom prst="rect">
+            <a:avLst/>
+          </a:prstGeom>
+          <a:solidFill>
+            <a:srgbClr val="FFFFFF"/>
+          </a:solidFill>
+          <a:ln w="19050">
+            <a:solidFill>
+              <a:srgbClr val="003387"/>
+            </a:solidFill>
+          </a:ln>
+        </p:spPr>
+        <p:style>
+          <a:lnRef idx="1">
+            <a:schemeClr val="accent1"/>
+          </a:lnRef>
+          <a:fillRef idx="3">
+            <a:schemeClr val="accent1"/>
+          </a:fillRef>
+          <a:effectRef idx="2">
+            <a:schemeClr val="accent1"/>
+          </a:effectRef>
+          <a:fontRef idx="minor">
+            <a:schemeClr val="lt1"/>
+          </a:fontRef>
+        </p:style>
+        <p:txBody>
+          <a:bodyPr rtlCol="0" anchor="ctr"/>
+          <a:lstStyle/>
+          <a:p>
+            <a:pPr algn="ctr"/>
+          </a:p>
+        </p:txBody>
+      </p:sp>
+      <p:sp>
+        <p:nvSpPr>
+          <p:cNvPr id="13" name="Rectangle 12"/>
+          <p:cNvSpPr/>
+          <p:nvPr/>
+        </p:nvSpPr>
+        <p:spPr>
+          <a:xfrm>
+            <a:off x="384048" y="2203704"/>
+            <a:ext cx="164592" cy="164592"/>
+          </a:xfrm>
+          <a:prstGeom prst="rect">
+            <a:avLst/>
+          </a:prstGeom>
+          <a:solidFill>
+            <a:srgbClr val="003387"/>
+          </a:solidFill>
+          <a:ln>
+            <a:noFill/>
+          </a:ln>
+        </p:spPr>
+        <p:style>
+          <a:lnRef idx="1">
+            <a:schemeClr val="accent1"/>
+          </a:lnRef>
+          <a:fillRef idx="3">
+            <a:schemeClr val="accent1"/>
+          </a:fillRef>
+          <a:effectRef idx="2">
+            <a:schemeClr val="accent1"/>
+          </a:effectRef>
+          <a:fontRef idx="minor">
+            <a:schemeClr val="lt1"/>
+          </a:fontRef>
+        </p:style>
+        <p:txBody>
+          <a:bodyPr rtlCol="0" anchor="ctr"/>
+          <a:lstStyle/>
+          <a:p>
+            <a:pPr algn="ctr"/>
+          </a:p>
+        </p:txBody>
+      </p:sp>
+      <p:sp>
+        <p:nvSpPr>
+          <p:cNvPr id="14" name="TextBox 13"/>
+          <p:cNvSpPr txBox="1"/>
+          <p:nvPr/>
+        </p:nvSpPr>
+        <p:spPr>
+          <a:xfrm>
+            <a:off x="640080" y="2148840"/>
+            <a:ext cx="3291840" cy="365760"/>
+          </a:xfrm>
+          <a:prstGeom prst="rect">
+            <a:avLst/>
+          </a:prstGeom>
+          <a:noFill/>
+        </p:spPr>
+        <p:txBody>
+          <a:bodyPr wrap="square">
+            <a:spAutoFit/>
+          </a:bodyPr>
+          <a:lstStyle/>
+          <a:p>
+            <a:pPr algn="l"/>
+            <a:r>
+              <a:rPr sz="1000" b="0" i="0">
+                <a:solidFill>
+                  <a:srgbClr val="404040"/>
+                </a:solidFill>
+              </a:rPr>
+              <a:t>Detailed site surveys at all substations</a:t>
+            </a:r>
+          </a:p>
+        </p:txBody>
+      </p:sp>
+      <p:sp>
+        <p:nvSpPr>
+          <p:cNvPr id="15" name="Rectangle 14"/>
+          <p:cNvSpPr/>
+          <p:nvPr/>
+        </p:nvSpPr>
+        <p:spPr>
+          <a:xfrm>
+            <a:off x="384048" y="2583180"/>
+            <a:ext cx="164592" cy="164592"/>
+          </a:xfrm>
+          <a:prstGeom prst="rect">
+            <a:avLst/>
+          </a:prstGeom>
+          <a:solidFill>
+            <a:srgbClr val="003387"/>
+          </a:solidFill>
+          <a:ln>
+            <a:noFill/>
+          </a:ln>
+        </p:spPr>
+        <p:style>
+          <a:lnRef idx="1">
+            <a:schemeClr val="accent1"/>
+          </a:lnRef>
+          <a:fillRef idx="3">
+            <a:schemeClr val="accent1"/>
+          </a:fillRef>
+          <a:effectRef idx="2">
+            <a:schemeClr val="accent1"/>
+          </a:effectRef>
+          <a:fontRef idx="minor">
+            <a:schemeClr val="lt1"/>
+          </a:fontRef>
+        </p:style>
+        <p:txBody>
+          <a:bodyPr rtlCol="0" anchor="ctr"/>
+          <a:lstStyle/>
+          <a:p>
+            <a:pPr algn="ctr"/>
+          </a:p>
+        </p:txBody>
+      </p:sp>
+      <p:sp>
+        <p:nvSpPr>
+          <p:cNvPr id="16" name="TextBox 15"/>
+          <p:cNvSpPr txBox="1"/>
+          <p:nvPr/>
+        </p:nvSpPr>
+        <p:spPr>
+          <a:xfrm>
+            <a:off x="640080" y="2528316"/>
+            <a:ext cx="3291840" cy="365760"/>
+          </a:xfrm>
+          <a:prstGeom prst="rect">
+            <a:avLst/>
+          </a:prstGeom>
+          <a:noFill/>
+        </p:spPr>
+        <p:txBody>
+          <a:bodyPr wrap="square">
+            <a:spAutoFit/>
+          </a:bodyPr>
+          <a:lstStyle/>
+          <a:p>
+            <a:pPr algn="l"/>
+            <a:r>
+              <a:rPr sz="1000" b="0" i="0">
+                <a:solidFill>
+                  <a:srgbClr val="404040"/>
+                </a:solidFill>
+              </a:rPr>
+              <a:t>Rack elevations, power design &amp; supplemental docs</a:t>
+            </a:r>
+          </a:p>
+        </p:txBody>
+      </p:sp>
+      <p:sp>
+        <p:nvSpPr>
+          <p:cNvPr id="17" name="Rectangle 16"/>
+          <p:cNvSpPr/>
+          <p:nvPr/>
+        </p:nvSpPr>
+        <p:spPr>
+          <a:xfrm>
+            <a:off x="384048" y="2962656"/>
+            <a:ext cx="164592" cy="164592"/>
+          </a:xfrm>
+          <a:prstGeom prst="rect">
+            <a:avLst/>
+          </a:prstGeom>
+          <a:solidFill>
+            <a:srgbClr val="003387"/>
+          </a:solidFill>
+          <a:ln>
+            <a:noFill/>
+          </a:ln>
+        </p:spPr>
+        <p:style>
+          <a:lnRef idx="1">
+            <a:schemeClr val="accent1"/>
+          </a:lnRef>
+          <a:fillRef idx="3">
+            <a:schemeClr val="accent1"/>
+          </a:fillRef>
+          <a:effectRef idx="2">
+            <a:schemeClr val="accent1"/>
+          </a:effectRef>
+          <a:fontRef idx="minor">
+            <a:schemeClr val="lt1"/>
+          </a:fontRef>
+        </p:style>
+        <p:txBody>
+          <a:bodyPr rtlCol="0" anchor="ctr"/>
+          <a:lstStyle/>
+          <a:p>
+            <a:pPr algn="ctr"/>
+          </a:p>
+        </p:txBody>
+      </p:sp>
+      <p:sp>
+        <p:nvSpPr>
+          <p:cNvPr id="18" name="TextBox 17"/>
+          <p:cNvSpPr txBox="1"/>
+          <p:nvPr/>
+        </p:nvSpPr>
+        <p:spPr>
+          <a:xfrm>
+            <a:off x="640080" y="2907792"/>
+            <a:ext cx="3291840" cy="365760"/>
+          </a:xfrm>
+          <a:prstGeom prst="rect">
+            <a:avLst/>
+          </a:prstGeom>
+          <a:noFill/>
+        </p:spPr>
+        <p:txBody>
+          <a:bodyPr wrap="square">
+            <a:spAutoFit/>
+          </a:bodyPr>
+          <a:lstStyle/>
+          <a:p>
+            <a:pPr algn="l"/>
+            <a:r>
+              <a:rPr sz="1000" b="0" i="0">
+                <a:solidFill>
+                  <a:srgbClr val="404040"/>
+                </a:solidFill>
+              </a:rPr>
+              <a:t>As-builts for each completed site</a:t>
+            </a:r>
+          </a:p>
+        </p:txBody>
+      </p:sp>
+      <p:sp>
+        <p:nvSpPr>
+          <p:cNvPr id="19" name="Rectangle 18"/>
+          <p:cNvSpPr/>
+          <p:nvPr/>
+        </p:nvSpPr>
+        <p:spPr>
+          <a:xfrm>
+            <a:off x="384048" y="3342132"/>
+            <a:ext cx="164592" cy="164592"/>
+          </a:xfrm>
+          <a:prstGeom prst="rect">
+            <a:avLst/>
+          </a:prstGeom>
+          <a:solidFill>
+            <a:srgbClr val="003387"/>
+          </a:solidFill>
+          <a:ln>
+            <a:noFill/>
+          </a:ln>
+        </p:spPr>
+        <p:style>
+          <a:lnRef idx="1">
+            <a:schemeClr val="accent1"/>
+          </a:lnRef>
+          <a:fillRef idx="3">
+            <a:schemeClr val="accent1"/>
+          </a:fillRef>
+          <a:effectRef idx="2">
+            <a:schemeClr val="accent1"/>
+          </a:effectRef>
+          <a:fontRef idx="minor">
+            <a:schemeClr val="lt1"/>
+          </a:fontRef>
+        </p:style>
+        <p:txBody>
+          <a:bodyPr rtlCol="0" anchor="ctr"/>
+          <a:lstStyle/>
+          <a:p>
+            <a:pPr algn="ctr"/>
+          </a:p>
+        </p:txBody>
+      </p:sp>
+      <p:sp>
+        <p:nvSpPr>
+          <p:cNvPr id="20" name="TextBox 19"/>
+          <p:cNvSpPr txBox="1"/>
+          <p:nvPr/>
+        </p:nvSpPr>
+        <p:spPr>
+          <a:xfrm>
+            <a:off x="640080" y="3287268"/>
+            <a:ext cx="3291840" cy="365760"/>
+          </a:xfrm>
+          <a:prstGeom prst="rect">
+            <a:avLst/>
+          </a:prstGeom>
+          <a:noFill/>
+        </p:spPr>
+        <p:txBody>
+          <a:bodyPr wrap="square">
+            <a:spAutoFit/>
+          </a:bodyPr>
+          <a:lstStyle/>
+          <a:p>
+            <a:pPr algn="l"/>
+            <a:r>
+              <a:rPr sz="1000" b="0" i="0">
+                <a:solidFill>
+                  <a:srgbClr val="404040"/>
+                </a:solidFill>
+              </a:rPr>
+              <a:t>All substations aligned to PSEG LI standards</a:t>
+            </a:r>
+          </a:p>
+        </p:txBody>
+      </p:sp>
+      <p:sp>
+        <p:nvSpPr>
+          <p:cNvPr id="21" name="Rectangle 20"/>
+          <p:cNvSpPr/>
+          <p:nvPr/>
+        </p:nvSpPr>
+        <p:spPr>
+          <a:xfrm>
+            <a:off x="384048" y="3721607"/>
+            <a:ext cx="164592" cy="164592"/>
+          </a:xfrm>
+          <a:prstGeom prst="rect">
+            <a:avLst/>
+          </a:prstGeom>
+          <a:solidFill>
+            <a:srgbClr val="003387"/>
+          </a:solidFill>
+          <a:ln>
+            <a:noFill/>
+          </a:ln>
+        </p:spPr>
+        <p:style>
+          <a:lnRef idx="1">
+            <a:schemeClr val="accent1"/>
+          </a:lnRef>
+          <a:fillRef idx="3">
+            <a:schemeClr val="accent1"/>
+          </a:fillRef>
+          <a:effectRef idx="2">
+            <a:schemeClr val="accent1"/>
+          </a:effectRef>
+          <a:fontRef idx="minor">
+            <a:schemeClr val="lt1"/>
+          </a:fontRef>
+        </p:style>
+        <p:txBody>
+          <a:bodyPr rtlCol="0" anchor="ctr"/>
+          <a:lstStyle/>
+          <a:p>
+            <a:pPr algn="ctr"/>
+          </a:p>
+        </p:txBody>
+      </p:sp>
+      <p:sp>
+        <p:nvSpPr>
+          <p:cNvPr id="22" name="TextBox 21"/>
+          <p:cNvSpPr txBox="1"/>
+          <p:nvPr/>
+        </p:nvSpPr>
+        <p:spPr>
+          <a:xfrm>
+            <a:off x="640080" y="3666744"/>
+            <a:ext cx="3291840" cy="365760"/>
+          </a:xfrm>
+          <a:prstGeom prst="rect">
+            <a:avLst/>
+          </a:prstGeom>
+          <a:noFill/>
+        </p:spPr>
+        <p:txBody>
+          <a:bodyPr wrap="square">
+            <a:spAutoFit/>
+          </a:bodyPr>
+          <a:lstStyle/>
+          <a:p>
+            <a:pPr algn="l"/>
+            <a:r>
+              <a:rPr sz="1000" b="0" i="0">
+                <a:solidFill>
+                  <a:srgbClr val="404040"/>
+                </a:solidFill>
+              </a:rPr>
+              <a:t>Phase 1 As-Builts: BMcD in progress</a:t>
+            </a:r>
+          </a:p>
+        </p:txBody>
+      </p:sp>
+      <p:sp>
+        <p:nvSpPr>
+          <p:cNvPr id="23" name="Rectangle 22"/>
+          <p:cNvSpPr/>
+          <p:nvPr/>
+        </p:nvSpPr>
+        <p:spPr>
+          <a:xfrm>
+            <a:off x="384048" y="4101083"/>
+            <a:ext cx="164592" cy="164592"/>
+          </a:xfrm>
+          <a:prstGeom prst="rect">
+            <a:avLst/>
+          </a:prstGeom>
+          <a:solidFill>
+            <a:srgbClr val="003387"/>
+          </a:solidFill>
+          <a:ln>
+            <a:noFill/>
+          </a:ln>
+        </p:spPr>
+        <p:style>
+          <a:lnRef idx="1">
+            <a:schemeClr val="accent1"/>
+          </a:lnRef>
+          <a:fillRef idx="3">
+            <a:schemeClr val="accent1"/>
+          </a:fillRef>
+          <a:effectRef idx="2">
+            <a:schemeClr val="accent1"/>
+          </a:effectRef>
+          <a:fontRef idx="minor">
+            <a:schemeClr val="lt1"/>
+          </a:fontRef>
+        </p:style>
+        <p:txBody>
+          <a:bodyPr rtlCol="0" anchor="ctr"/>
+          <a:lstStyle/>
+          <a:p>
+            <a:pPr algn="ctr"/>
+          </a:p>
+        </p:txBody>
+      </p:sp>
+      <p:sp>
+        <p:nvSpPr>
+          <p:cNvPr id="24" name="TextBox 23"/>
+          <p:cNvSpPr txBox="1"/>
+          <p:nvPr/>
+        </p:nvSpPr>
+        <p:spPr>
+          <a:xfrm>
+            <a:off x="640080" y="4046220"/>
+            <a:ext cx="3291840" cy="365760"/>
+          </a:xfrm>
+          <a:prstGeom prst="rect">
+            <a:avLst/>
+          </a:prstGeom>
+          <a:noFill/>
+        </p:spPr>
+        <p:txBody>
+          <a:bodyPr wrap="square">
+            <a:spAutoFit/>
+          </a:bodyPr>
+          <a:lstStyle/>
+          <a:p>
+            <a:pPr algn="l"/>
+            <a:r>
+              <a:rPr sz="1000" b="0" i="0">
+                <a:solidFill>
+                  <a:srgbClr val="404040"/>
+                </a:solidFill>
+              </a:rPr>
+              <a:t>Phase 2 surveys: Completed during Phase 1</a:t>
+            </a:r>
+          </a:p>
+        </p:txBody>
+      </p:sp>
+      <p:sp>
+        <p:nvSpPr>
+          <p:cNvPr id="25" name="Rectangle 24"/>
+          <p:cNvSpPr/>
+          <p:nvPr/>
+        </p:nvSpPr>
+        <p:spPr>
+          <a:xfrm>
+            <a:off x="384048" y="4480559"/>
+            <a:ext cx="164592" cy="164592"/>
+          </a:xfrm>
+          <a:prstGeom prst="rect">
+            <a:avLst/>
+          </a:prstGeom>
+          <a:solidFill>
+            <a:srgbClr val="003387"/>
+          </a:solidFill>
+          <a:ln>
+            <a:noFill/>
+          </a:ln>
+        </p:spPr>
+        <p:style>
+          <a:lnRef idx="1">
+            <a:schemeClr val="accent1"/>
+          </a:lnRef>
+          <a:fillRef idx="3">
+            <a:schemeClr val="accent1"/>
+          </a:fillRef>
+          <a:effectRef idx="2">
+            <a:schemeClr val="accent1"/>
+          </a:effectRef>
+          <a:fontRef idx="minor">
+            <a:schemeClr val="lt1"/>
+          </a:fontRef>
+        </p:style>
+        <p:txBody>
+          <a:bodyPr rtlCol="0" anchor="ctr"/>
+          <a:lstStyle/>
+          <a:p>
+            <a:pPr algn="ctr"/>
+          </a:p>
+        </p:txBody>
+      </p:sp>
+      <p:sp>
+        <p:nvSpPr>
+          <p:cNvPr id="26" name="TextBox 25"/>
+          <p:cNvSpPr txBox="1"/>
+          <p:nvPr/>
+        </p:nvSpPr>
+        <p:spPr>
+          <a:xfrm>
+            <a:off x="640080" y="4425696"/>
+            <a:ext cx="3291840" cy="365760"/>
+          </a:xfrm>
+          <a:prstGeom prst="rect">
+            <a:avLst/>
+          </a:prstGeom>
+          <a:noFill/>
+        </p:spPr>
+        <p:txBody>
+          <a:bodyPr wrap="square">
+            <a:spAutoFit/>
+          </a:bodyPr>
+          <a:lstStyle/>
+          <a:p>
+            <a:pPr algn="l"/>
+            <a:r>
+              <a:rPr sz="1000" b="0" i="0">
+                <a:solidFill>
+                  <a:srgbClr val="404040"/>
+                </a:solidFill>
+              </a:rPr>
+              <a:t>Phase 2 IFRs: Being issued by BMcD</a:t>
+            </a:r>
+          </a:p>
+        </p:txBody>
+      </p:sp>
+      <p:sp>
+        <p:nvSpPr>
+          <p:cNvPr id="27" name="Rectangle 26"/>
+          <p:cNvSpPr/>
+          <p:nvPr/>
+        </p:nvSpPr>
+        <p:spPr>
+          <a:xfrm>
+            <a:off x="384048" y="4860036"/>
+            <a:ext cx="164592" cy="164592"/>
+          </a:xfrm>
+          <a:prstGeom prst="rect">
+            <a:avLst/>
+          </a:prstGeom>
+          <a:solidFill>
+            <a:srgbClr val="003387"/>
+          </a:solidFill>
+          <a:ln>
+            <a:noFill/>
+          </a:ln>
+        </p:spPr>
+        <p:style>
+          <a:lnRef idx="1">
+            <a:schemeClr val="accent1"/>
+          </a:lnRef>
+          <a:fillRef idx="3">
+            <a:schemeClr val="accent1"/>
+          </a:fillRef>
+          <a:effectRef idx="2">
+            <a:schemeClr val="accent1"/>
+          </a:effectRef>
+          <a:fontRef idx="minor">
+            <a:schemeClr val="lt1"/>
+          </a:fontRef>
+        </p:style>
+        <p:txBody>
+          <a:bodyPr rtlCol="0" anchor="ctr"/>
+          <a:lstStyle/>
+          <a:p>
+            <a:pPr algn="ctr"/>
+          </a:p>
+        </p:txBody>
+      </p:sp>
+      <p:sp>
+        <p:nvSpPr>
+          <p:cNvPr id="28" name="TextBox 27"/>
+          <p:cNvSpPr txBox="1"/>
+          <p:nvPr/>
+        </p:nvSpPr>
+        <p:spPr>
+          <a:xfrm>
+            <a:off x="640080" y="4805172"/>
+            <a:ext cx="3291840" cy="365760"/>
+          </a:xfrm>
+          <a:prstGeom prst="rect">
+            <a:avLst/>
+          </a:prstGeom>
+          <a:noFill/>
+        </p:spPr>
+        <p:txBody>
+          <a:bodyPr wrap="square">
+            <a:spAutoFit/>
+          </a:bodyPr>
+          <a:lstStyle/>
+          <a:p>
+            <a:pPr algn="l"/>
+            <a:r>
+              <a:rPr sz="1000" b="0" i="0">
+                <a:solidFill>
+                  <a:srgbClr val="404040"/>
+                </a:solidFill>
+              </a:rPr>
+              <a:t>Phase 2 IFCs: In progress</a:t>
+            </a:r>
+          </a:p>
+        </p:txBody>
+      </p:sp>
+      <p:sp>
+        <p:nvSpPr>
+          <p:cNvPr id="29" name="Rectangle 28"/>
+          <p:cNvSpPr/>
+          <p:nvPr/>
+        </p:nvSpPr>
+        <p:spPr>
+          <a:xfrm>
+            <a:off x="4206240" y="1645920"/>
+            <a:ext cx="3749039" cy="438912"/>
+          </a:xfrm>
+          <a:prstGeom prst="rect">
+            <a:avLst/>
+          </a:prstGeom>
+          <a:solidFill>
+            <a:srgbClr val="F7941D"/>
+          </a:solidFill>
+          <a:ln>
+            <a:noFill/>
+          </a:ln>
+        </p:spPr>
+        <p:style>
+          <a:lnRef idx="1">
+            <a:schemeClr val="accent1"/>
+          </a:lnRef>
+          <a:fillRef idx="3">
+            <a:schemeClr val="accent1"/>
+          </a:fillRef>
+          <a:effectRef idx="2">
+            <a:schemeClr val="accent1"/>
+          </a:effectRef>
+          <a:fontRef idx="minor">
+            <a:schemeClr val="lt1"/>
+          </a:fontRef>
+        </p:style>
+        <p:txBody>
+          <a:bodyPr rtlCol="0" anchor="ctr"/>
+          <a:lstStyle/>
+          <a:p>
+            <a:pPr algn="ctr"/>
+          </a:p>
+        </p:txBody>
+      </p:sp>
+      <p:sp>
+        <p:nvSpPr>
+          <p:cNvPr id="30" name="TextBox 29"/>
+          <p:cNvSpPr txBox="1"/>
+          <p:nvPr/>
+        </p:nvSpPr>
+        <p:spPr>
+          <a:xfrm>
+            <a:off x="4297679" y="1673352"/>
+            <a:ext cx="3566160" cy="365760"/>
+          </a:xfrm>
+          <a:prstGeom prst="rect">
+            <a:avLst/>
+          </a:prstGeom>
+          <a:noFill/>
+        </p:spPr>
+        <p:txBody>
+          <a:bodyPr wrap="square">
+            <a:spAutoFit/>
+          </a:bodyPr>
+          <a:lstStyle/>
+          <a:p>
+            <a:pPr algn="l"/>
+            <a:r>
+              <a:rPr sz="1200" b="1" i="0">
+                <a:solidFill>
+                  <a:srgbClr val="FFFFFF"/>
+                </a:solidFill>
+              </a:rPr>
+              <a:t>📦  Procurement &amp; Staging</a:t>
+            </a:r>
+          </a:p>
+        </p:txBody>
+      </p:sp>
+      <p:sp>
+        <p:nvSpPr>
+          <p:cNvPr id="31" name="Rectangle 30"/>
+          <p:cNvSpPr/>
+          <p:nvPr/>
+        </p:nvSpPr>
+        <p:spPr>
+          <a:xfrm>
+            <a:off x="4206240" y="2084831"/>
+            <a:ext cx="3749039" cy="3200400"/>
+          </a:xfrm>
+          <a:prstGeom prst="rect">
+            <a:avLst/>
+          </a:prstGeom>
+          <a:solidFill>
+            <a:srgbClr val="FFFFFF"/>
+          </a:solidFill>
+          <a:ln w="19050">
+            <a:solidFill>
+              <a:srgbClr val="F7941D"/>
+            </a:solidFill>
+          </a:ln>
+        </p:spPr>
+        <p:style>
+          <a:lnRef idx="1">
+            <a:schemeClr val="accent1"/>
+          </a:lnRef>
+          <a:fillRef idx="3">
+            <a:schemeClr val="accent1"/>
+          </a:fillRef>
+          <a:effectRef idx="2">
+            <a:schemeClr val="accent1"/>
+          </a:effectRef>
+          <a:fontRef idx="minor">
+            <a:schemeClr val="lt1"/>
+          </a:fontRef>
+        </p:style>
+        <p:txBody>
+          <a:bodyPr rtlCol="0" anchor="ctr"/>
+          <a:lstStyle/>
+          <a:p>
+            <a:pPr algn="ctr"/>
+          </a:p>
+        </p:txBody>
+      </p:sp>
+      <p:sp>
+        <p:nvSpPr>
+          <p:cNvPr id="32" name="Rectangle 31"/>
+          <p:cNvSpPr/>
+          <p:nvPr/>
+        </p:nvSpPr>
+        <p:spPr>
+          <a:xfrm>
+            <a:off x="4315968" y="2203704"/>
+            <a:ext cx="164592" cy="164592"/>
+          </a:xfrm>
+          <a:prstGeom prst="rect">
+            <a:avLst/>
+          </a:prstGeom>
+          <a:solidFill>
+            <a:srgbClr val="F7941D"/>
+          </a:solidFill>
+          <a:ln>
+            <a:noFill/>
+          </a:ln>
+        </p:spPr>
+        <p:style>
+          <a:lnRef idx="1">
+            <a:schemeClr val="accent1"/>
+          </a:lnRef>
+          <a:fillRef idx="3">
+            <a:schemeClr val="accent1"/>
+          </a:fillRef>
+          <a:effectRef idx="2">
+            <a:schemeClr val="accent1"/>
+          </a:effectRef>
+          <a:fontRef idx="minor">
+            <a:schemeClr val="lt1"/>
+          </a:fontRef>
+        </p:style>
+        <p:txBody>
+          <a:bodyPr rtlCol="0" anchor="ctr"/>
+          <a:lstStyle/>
+          <a:p>
+            <a:pPr algn="ctr"/>
+          </a:p>
+        </p:txBody>
+      </p:sp>
+      <p:sp>
+        <p:nvSpPr>
+          <p:cNvPr id="33" name="TextBox 32"/>
+          <p:cNvSpPr txBox="1"/>
+          <p:nvPr/>
+        </p:nvSpPr>
+        <p:spPr>
+          <a:xfrm>
+            <a:off x="4572000" y="2148840"/>
+            <a:ext cx="3291840" cy="365760"/>
+          </a:xfrm>
+          <a:prstGeom prst="rect">
+            <a:avLst/>
+          </a:prstGeom>
+          <a:noFill/>
+        </p:spPr>
+        <p:txBody>
+          <a:bodyPr wrap="square">
+            <a:spAutoFit/>
+          </a:bodyPr>
+          <a:lstStyle/>
+          <a:p>
+            <a:pPr algn="l"/>
+            <a:r>
+              <a:rPr sz="1000" b="0" i="0">
+                <a:solidFill>
+                  <a:srgbClr val="404040"/>
+                </a:solidFill>
+              </a:rPr>
+              <a:t>All Phase 1 equipment purchased by PSEG LI</a:t>
+            </a:r>
+          </a:p>
+        </p:txBody>
+      </p:sp>
+      <p:sp>
+        <p:nvSpPr>
+          <p:cNvPr id="34" name="Rectangle 33"/>
+          <p:cNvSpPr/>
+          <p:nvPr/>
+        </p:nvSpPr>
+        <p:spPr>
+          <a:xfrm>
+            <a:off x="4315968" y="2583180"/>
+            <a:ext cx="164592" cy="164592"/>
+          </a:xfrm>
+          <a:prstGeom prst="rect">
+            <a:avLst/>
+          </a:prstGeom>
+          <a:solidFill>
+            <a:srgbClr val="F7941D"/>
+          </a:solidFill>
+          <a:ln>
+            <a:noFill/>
+          </a:ln>
+        </p:spPr>
+        <p:style>
+          <a:lnRef idx="1">
+            <a:schemeClr val="accent1"/>
+          </a:lnRef>
+          <a:fillRef idx="3">
+            <a:schemeClr val="accent1"/>
+          </a:fillRef>
+          <a:effectRef idx="2">
+            <a:schemeClr val="accent1"/>
+          </a:effectRef>
+          <a:fontRef idx="minor">
+            <a:schemeClr val="lt1"/>
+          </a:fontRef>
+        </p:style>
+        <p:txBody>
+          <a:bodyPr rtlCol="0" anchor="ctr"/>
+          <a:lstStyle/>
+          <a:p>
+            <a:pPr algn="ctr"/>
+          </a:p>
+        </p:txBody>
+      </p:sp>
+      <p:sp>
+        <p:nvSpPr>
+          <p:cNvPr id="35" name="TextBox 34"/>
+          <p:cNvSpPr txBox="1"/>
+          <p:nvPr/>
+        </p:nvSpPr>
+        <p:spPr>
+          <a:xfrm>
+            <a:off x="4572000" y="2528316"/>
+            <a:ext cx="3291840" cy="365760"/>
+          </a:xfrm>
+          <a:prstGeom prst="rect">
+            <a:avLst/>
+          </a:prstGeom>
+          <a:noFill/>
+        </p:spPr>
+        <p:txBody>
+          <a:bodyPr wrap="square">
+            <a:spAutoFit/>
+          </a:bodyPr>
+          <a:lstStyle/>
+          <a:p>
+            <a:pPr algn="l"/>
+            <a:r>
+              <a:rPr sz="1000" b="0" i="0">
+                <a:solidFill>
+                  <a:srgbClr val="404040"/>
+                </a:solidFill>
+              </a:rPr>
+              <a:t>Equipment shipped &amp; delivered to Hawkeye staging facility</a:t>
+            </a:r>
+          </a:p>
+        </p:txBody>
+      </p:sp>
+      <p:sp>
+        <p:nvSpPr>
+          <p:cNvPr id="36" name="Rectangle 35"/>
+          <p:cNvSpPr/>
+          <p:nvPr/>
+        </p:nvSpPr>
+        <p:spPr>
+          <a:xfrm>
+            <a:off x="4315968" y="2962656"/>
+            <a:ext cx="164592" cy="164592"/>
+          </a:xfrm>
+          <a:prstGeom prst="rect">
+            <a:avLst/>
+          </a:prstGeom>
+          <a:solidFill>
+            <a:srgbClr val="F7941D"/>
+          </a:solidFill>
+          <a:ln>
+            <a:noFill/>
+          </a:ln>
+        </p:spPr>
+        <p:style>
+          <a:lnRef idx="1">
+            <a:schemeClr val="accent1"/>
+          </a:lnRef>
+          <a:fillRef idx="3">
+            <a:schemeClr val="accent1"/>
+          </a:fillRef>
+          <a:effectRef idx="2">
+            <a:schemeClr val="accent1"/>
+          </a:effectRef>
+          <a:fontRef idx="minor">
+            <a:schemeClr val="lt1"/>
+          </a:fontRef>
+        </p:style>
+        <p:txBody>
+          <a:bodyPr rtlCol="0" anchor="ctr"/>
+          <a:lstStyle/>
+          <a:p>
+            <a:pPr algn="ctr"/>
+          </a:p>
+        </p:txBody>
+      </p:sp>
+      <p:sp>
+        <p:nvSpPr>
+          <p:cNvPr id="37" name="TextBox 36"/>
+          <p:cNvSpPr txBox="1"/>
+          <p:nvPr/>
+        </p:nvSpPr>
+        <p:spPr>
+          <a:xfrm>
+            <a:off x="4572000" y="2907792"/>
+            <a:ext cx="3291840" cy="365760"/>
+          </a:xfrm>
+          <a:prstGeom prst="rect">
+            <a:avLst/>
+          </a:prstGeom>
+          <a:noFill/>
+        </p:spPr>
+        <p:txBody>
+          <a:bodyPr wrap="square">
+            <a:spAutoFit/>
+          </a:bodyPr>
+          <a:lstStyle/>
+          <a:p>
+            <a:pPr algn="l"/>
+            <a:r>
+              <a:rPr sz="1000" b="0" i="0">
+                <a:solidFill>
+                  <a:srgbClr val="404040"/>
+                </a:solidFill>
+              </a:rPr>
+              <a:t>Phase 1 staging completed: Sept 29, 2025</a:t>
+            </a:r>
+          </a:p>
+        </p:txBody>
+      </p:sp>
+      <p:sp>
+        <p:nvSpPr>
+          <p:cNvPr id="38" name="Rectangle 37"/>
+          <p:cNvSpPr/>
+          <p:nvPr/>
+        </p:nvSpPr>
+        <p:spPr>
+          <a:xfrm>
+            <a:off x="4315968" y="3342132"/>
+            <a:ext cx="164592" cy="164592"/>
+          </a:xfrm>
+          <a:prstGeom prst="rect">
+            <a:avLst/>
+          </a:prstGeom>
+          <a:solidFill>
+            <a:srgbClr val="F7941D"/>
+          </a:solidFill>
+          <a:ln>
+            <a:noFill/>
+          </a:ln>
+        </p:spPr>
+        <p:style>
+          <a:lnRef idx="1">
+            <a:schemeClr val="accent1"/>
+          </a:lnRef>
+          <a:fillRef idx="3">
+            <a:schemeClr val="accent1"/>
+          </a:fillRef>
+          <a:effectRef idx="2">
+            <a:schemeClr val="accent1"/>
+          </a:effectRef>
+          <a:fontRef idx="minor">
+            <a:schemeClr val="lt1"/>
+          </a:fontRef>
+        </p:style>
+        <p:txBody>
+          <a:bodyPr rtlCol="0" anchor="ctr"/>
+          <a:lstStyle/>
+          <a:p>
+            <a:pPr algn="ctr"/>
+          </a:p>
+        </p:txBody>
+      </p:sp>
+      <p:sp>
+        <p:nvSpPr>
+          <p:cNvPr id="39" name="TextBox 38"/>
+          <p:cNvSpPr txBox="1"/>
+          <p:nvPr/>
+        </p:nvSpPr>
+        <p:spPr>
+          <a:xfrm>
+            <a:off x="4572000" y="3287268"/>
+            <a:ext cx="3291840" cy="365760"/>
+          </a:xfrm>
+          <a:prstGeom prst="rect">
+            <a:avLst/>
+          </a:prstGeom>
+          <a:noFill/>
+        </p:spPr>
+        <p:txBody>
+          <a:bodyPr wrap="square">
+            <a:spAutoFit/>
+          </a:bodyPr>
+          <a:lstStyle/>
+          <a:p>
+            <a:pPr algn="l"/>
+            <a:r>
+              <a:rPr sz="1000" b="0" i="0">
+                <a:solidFill>
+                  <a:srgbClr val="404040"/>
+                </a:solidFill>
+              </a:rPr>
+              <a:t>Nokia Phase 2 equipment delivered: Feb 19, 2026</a:t>
+            </a:r>
+          </a:p>
+        </p:txBody>
+      </p:sp>
+      <p:sp>
+        <p:nvSpPr>
+          <p:cNvPr id="40" name="Rectangle 39"/>
+          <p:cNvSpPr/>
+          <p:nvPr/>
+        </p:nvSpPr>
+        <p:spPr>
+          <a:xfrm>
+            <a:off x="4315968" y="3721607"/>
+            <a:ext cx="164592" cy="164592"/>
+          </a:xfrm>
+          <a:prstGeom prst="rect">
+            <a:avLst/>
+          </a:prstGeom>
+          <a:solidFill>
+            <a:srgbClr val="F7941D"/>
+          </a:solidFill>
+          <a:ln>
+            <a:noFill/>
+          </a:ln>
+        </p:spPr>
+        <p:style>
+          <a:lnRef idx="1">
+            <a:schemeClr val="accent1"/>
+          </a:lnRef>
+          <a:fillRef idx="3">
+            <a:schemeClr val="accent1"/>
+          </a:fillRef>
+          <a:effectRef idx="2">
+            <a:schemeClr val="accent1"/>
+          </a:effectRef>
+          <a:fontRef idx="minor">
+            <a:schemeClr val="lt1"/>
+          </a:fontRef>
+        </p:style>
+        <p:txBody>
+          <a:bodyPr rtlCol="0" anchor="ctr"/>
+          <a:lstStyle/>
+          <a:p>
+            <a:pPr algn="ctr"/>
+          </a:p>
+        </p:txBody>
+      </p:sp>
+      <p:sp>
+        <p:nvSpPr>
+          <p:cNvPr id="41" name="TextBox 40"/>
+          <p:cNvSpPr txBox="1"/>
+          <p:nvPr/>
+        </p:nvSpPr>
+        <p:spPr>
+          <a:xfrm>
+            <a:off x="4572000" y="3666744"/>
+            <a:ext cx="3291840" cy="365760"/>
+          </a:xfrm>
+          <a:prstGeom prst="rect">
+            <a:avLst/>
+          </a:prstGeom>
+          <a:noFill/>
+        </p:spPr>
+        <p:txBody>
+          <a:bodyPr wrap="square">
+            <a:spAutoFit/>
+          </a:bodyPr>
+          <a:lstStyle/>
+          <a:p>
+            <a:pPr algn="l"/>
+            <a:r>
+              <a:rPr sz="1000" b="0" i="0">
+                <a:solidFill>
+                  <a:srgbClr val="404040"/>
+                </a:solidFill>
+              </a:rPr>
+              <a:t>Equipment safely stored at Hawkeye warehouse</a:t>
+            </a:r>
+          </a:p>
+        </p:txBody>
+      </p:sp>
+      <p:sp>
+        <p:nvSpPr>
+          <p:cNvPr id="42" name="Rectangle 41"/>
+          <p:cNvSpPr/>
+          <p:nvPr/>
+        </p:nvSpPr>
+        <p:spPr>
+          <a:xfrm>
+            <a:off x="8138160" y="1645920"/>
+            <a:ext cx="3749039" cy="438912"/>
+          </a:xfrm>
+          <a:prstGeom prst="rect">
+            <a:avLst/>
+          </a:prstGeom>
+          <a:solidFill>
+            <a:srgbClr val="008000"/>
+          </a:solidFill>
+          <a:ln>
+            <a:noFill/>
+          </a:ln>
+        </p:spPr>
+        <p:style>
+          <a:lnRef idx="1">
+            <a:schemeClr val="accent1"/>
+          </a:lnRef>
+          <a:fillRef idx="3">
+            <a:schemeClr val="accent1"/>
+          </a:fillRef>
+          <a:effectRef idx="2">
+            <a:schemeClr val="accent1"/>
+          </a:effectRef>
+          <a:fontRef idx="minor">
+            <a:schemeClr val="lt1"/>
+          </a:fontRef>
+        </p:style>
+        <p:txBody>
+          <a:bodyPr rtlCol="0" anchor="ctr"/>
+          <a:lstStyle/>
+          <a:p>
+            <a:pPr algn="ctr"/>
+          </a:p>
+        </p:txBody>
+      </p:sp>
+      <p:sp>
+        <p:nvSpPr>
+          <p:cNvPr id="43" name="TextBox 42"/>
+          <p:cNvSpPr txBox="1"/>
+          <p:nvPr/>
+        </p:nvSpPr>
+        <p:spPr>
+          <a:xfrm>
+            <a:off x="8229600" y="1673352"/>
+            <a:ext cx="3566160" cy="365760"/>
+          </a:xfrm>
+          <a:prstGeom prst="rect">
+            <a:avLst/>
+          </a:prstGeom>
+          <a:noFill/>
+        </p:spPr>
+        <p:txBody>
+          <a:bodyPr wrap="square">
+            <a:spAutoFit/>
+          </a:bodyPr>
+          <a:lstStyle/>
+          <a:p>
+            <a:pPr algn="l"/>
+            <a:r>
+              <a:rPr sz="1200" b="1" i="0">
+                <a:solidFill>
+                  <a:srgbClr val="FFFFFF"/>
+                </a:solidFill>
+              </a:rPr>
+              <a:t>🏗  Construction &amp; Installation</a:t>
+            </a:r>
+          </a:p>
+        </p:txBody>
+      </p:sp>
+      <p:sp>
+        <p:nvSpPr>
+          <p:cNvPr id="44" name="Rectangle 43"/>
+          <p:cNvSpPr/>
+          <p:nvPr/>
+        </p:nvSpPr>
+        <p:spPr>
+          <a:xfrm>
+            <a:off x="8138160" y="2084831"/>
+            <a:ext cx="3749039" cy="3200400"/>
+          </a:xfrm>
+          <a:prstGeom prst="rect">
+            <a:avLst/>
+          </a:prstGeom>
+          <a:solidFill>
+            <a:srgbClr val="FFFFFF"/>
+          </a:solidFill>
+          <a:ln w="19050">
+            <a:solidFill>
+              <a:srgbClr val="008000"/>
+            </a:solidFill>
+          </a:ln>
+        </p:spPr>
+        <p:style>
+          <a:lnRef idx="1">
+            <a:schemeClr val="accent1"/>
+          </a:lnRef>
+          <a:fillRef idx="3">
+            <a:schemeClr val="accent1"/>
+          </a:fillRef>
+          <a:effectRef idx="2">
+            <a:schemeClr val="accent1"/>
+          </a:effectRef>
+          <a:fontRef idx="minor">
+            <a:schemeClr val="lt1"/>
+          </a:fontRef>
+        </p:style>
+        <p:txBody>
+          <a:bodyPr rtlCol="0" anchor="ctr"/>
+          <a:lstStyle/>
+          <a:p>
+            <a:pPr algn="ctr"/>
+          </a:p>
+        </p:txBody>
+      </p:sp>
+      <p:sp>
+        <p:nvSpPr>
+          <p:cNvPr id="45" name="Rectangle 44"/>
+          <p:cNvSpPr/>
+          <p:nvPr/>
+        </p:nvSpPr>
+        <p:spPr>
+          <a:xfrm>
+            <a:off x="8247888" y="2203704"/>
+            <a:ext cx="164592" cy="164592"/>
+          </a:xfrm>
+          <a:prstGeom prst="rect">
+            <a:avLst/>
+          </a:prstGeom>
+          <a:solidFill>
+            <a:srgbClr val="008000"/>
+          </a:solidFill>
+          <a:ln>
+            <a:noFill/>
+          </a:ln>
+        </p:spPr>
+        <p:style>
+          <a:lnRef idx="1">
+            <a:schemeClr val="accent1"/>
+          </a:lnRef>
+          <a:fillRef idx="3">
+            <a:schemeClr val="accent1"/>
+          </a:fillRef>
+          <a:effectRef idx="2">
+            <a:schemeClr val="accent1"/>
+          </a:effectRef>
+          <a:fontRef idx="minor">
+            <a:schemeClr val="lt1"/>
+          </a:fontRef>
+        </p:style>
+        <p:txBody>
+          <a:bodyPr rtlCol="0" anchor="ctr"/>
+          <a:lstStyle/>
+          <a:p>
+            <a:pPr algn="ctr"/>
+          </a:p>
+        </p:txBody>
+      </p:sp>
+      <p:sp>
+        <p:nvSpPr>
+          <p:cNvPr id="46" name="TextBox 45"/>
+          <p:cNvSpPr txBox="1"/>
+          <p:nvPr/>
+        </p:nvSpPr>
+        <p:spPr>
+          <a:xfrm>
+            <a:off x="8503920" y="2148840"/>
+            <a:ext cx="3291840" cy="365760"/>
+          </a:xfrm>
+          <a:prstGeom prst="rect">
+            <a:avLst/>
+          </a:prstGeom>
+          <a:noFill/>
+        </p:spPr>
+        <p:txBody>
+          <a:bodyPr wrap="square">
+            <a:spAutoFit/>
+          </a:bodyPr>
+          <a:lstStyle/>
+          <a:p>
+            <a:pPr algn="l"/>
+            <a:r>
+              <a:rPr sz="1000" b="0" i="0">
+                <a:solidFill>
+                  <a:srgbClr val="404040"/>
+                </a:solidFill>
+              </a:rPr>
+              <a:t>BMcD on-site coordination throughout Phase 1</a:t>
+            </a:r>
+          </a:p>
+        </p:txBody>
+      </p:sp>
+      <p:sp>
+        <p:nvSpPr>
+          <p:cNvPr id="47" name="Rectangle 46"/>
+          <p:cNvSpPr/>
+          <p:nvPr/>
+        </p:nvSpPr>
+        <p:spPr>
+          <a:xfrm>
+            <a:off x="8247888" y="2583180"/>
+            <a:ext cx="164592" cy="164592"/>
+          </a:xfrm>
+          <a:prstGeom prst="rect">
+            <a:avLst/>
+          </a:prstGeom>
+          <a:solidFill>
+            <a:srgbClr val="008000"/>
+          </a:solidFill>
+          <a:ln>
+            <a:noFill/>
+          </a:ln>
+        </p:spPr>
+        <p:style>
+          <a:lnRef idx="1">
+            <a:schemeClr val="accent1"/>
+          </a:lnRef>
+          <a:fillRef idx="3">
+            <a:schemeClr val="accent1"/>
+          </a:fillRef>
+          <a:effectRef idx="2">
+            <a:schemeClr val="accent1"/>
+          </a:effectRef>
+          <a:fontRef idx="minor">
+            <a:schemeClr val="lt1"/>
+          </a:fontRef>
+        </p:style>
+        <p:txBody>
+          <a:bodyPr rtlCol="0" anchor="ctr"/>
+          <a:lstStyle/>
+          <a:p>
+            <a:pPr algn="ctr"/>
+          </a:p>
+        </p:txBody>
+      </p:sp>
+      <p:sp>
+        <p:nvSpPr>
+          <p:cNvPr id="48" name="TextBox 47"/>
+          <p:cNvSpPr txBox="1"/>
+          <p:nvPr/>
+        </p:nvSpPr>
+        <p:spPr>
+          <a:xfrm>
+            <a:off x="8503920" y="2528316"/>
+            <a:ext cx="3291840" cy="365760"/>
+          </a:xfrm>
+          <a:prstGeom prst="rect">
+            <a:avLst/>
+          </a:prstGeom>
+          <a:noFill/>
+        </p:spPr>
+        <p:txBody>
+          <a:bodyPr wrap="square">
+            <a:spAutoFit/>
+          </a:bodyPr>
+          <a:lstStyle/>
+          <a:p>
+            <a:pPr algn="l"/>
+            <a:r>
+              <a:rPr sz="1000" b="0" i="0">
+                <a:solidFill>
+                  <a:srgbClr val="404040"/>
+                </a:solidFill>
+              </a:rPr>
+              <a:t>Technical support &amp; commissioning oversight</a:t>
+            </a:r>
+          </a:p>
+        </p:txBody>
+      </p:sp>
+      <p:sp>
+        <p:nvSpPr>
+          <p:cNvPr id="49" name="Rectangle 48"/>
+          <p:cNvSpPr/>
+          <p:nvPr/>
+        </p:nvSpPr>
+        <p:spPr>
+          <a:xfrm>
+            <a:off x="8247888" y="2962656"/>
+            <a:ext cx="164592" cy="164592"/>
+          </a:xfrm>
+          <a:prstGeom prst="rect">
+            <a:avLst/>
+          </a:prstGeom>
+          <a:solidFill>
+            <a:srgbClr val="008000"/>
+          </a:solidFill>
+          <a:ln>
+            <a:noFill/>
+          </a:ln>
+        </p:spPr>
+        <p:style>
+          <a:lnRef idx="1">
+            <a:schemeClr val="accent1"/>
+          </a:lnRef>
+          <a:fillRef idx="3">
+            <a:schemeClr val="accent1"/>
+          </a:fillRef>
+          <a:effectRef idx="2">
+            <a:schemeClr val="accent1"/>
+          </a:effectRef>
+          <a:fontRef idx="minor">
+            <a:schemeClr val="lt1"/>
+          </a:fontRef>
+        </p:style>
+        <p:txBody>
+          <a:bodyPr rtlCol="0" anchor="ctr"/>
+          <a:lstStyle/>
+          <a:p>
+            <a:pPr algn="ctr"/>
+          </a:p>
+        </p:txBody>
+      </p:sp>
+      <p:sp>
+        <p:nvSpPr>
+          <p:cNvPr id="50" name="TextBox 49"/>
+          <p:cNvSpPr txBox="1"/>
+          <p:nvPr/>
+        </p:nvSpPr>
+        <p:spPr>
+          <a:xfrm>
+            <a:off x="8503920" y="2907792"/>
+            <a:ext cx="3291840" cy="365760"/>
+          </a:xfrm>
+          <a:prstGeom prst="rect">
+            <a:avLst/>
+          </a:prstGeom>
+          <a:noFill/>
+        </p:spPr>
+        <p:txBody>
+          <a:bodyPr wrap="square">
+            <a:spAutoFit/>
+          </a:bodyPr>
+          <a:lstStyle/>
+          <a:p>
+            <a:pPr algn="l"/>
+            <a:r>
+              <a:rPr sz="1000" b="0" i="0">
+                <a:solidFill>
+                  <a:srgbClr val="404040"/>
+                </a:solidFill>
+              </a:rPr>
+              <a:t>31/31 Phase 1 sites installed &amp; commissioned</a:t>
+            </a:r>
+          </a:p>
+        </p:txBody>
+      </p:sp>
+      <p:sp>
+        <p:nvSpPr>
+          <p:cNvPr id="51" name="Rectangle 50"/>
+          <p:cNvSpPr/>
+          <p:nvPr/>
+        </p:nvSpPr>
+        <p:spPr>
+          <a:xfrm>
+            <a:off x="8247888" y="3342132"/>
+            <a:ext cx="164592" cy="164592"/>
+          </a:xfrm>
+          <a:prstGeom prst="rect">
+            <a:avLst/>
+          </a:prstGeom>
+          <a:solidFill>
+            <a:srgbClr val="008000"/>
+          </a:solidFill>
+          <a:ln>
+            <a:noFill/>
+          </a:ln>
+        </p:spPr>
+        <p:style>
+          <a:lnRef idx="1">
+            <a:schemeClr val="accent1"/>
+          </a:lnRef>
+          <a:fillRef idx="3">
+            <a:schemeClr val="accent1"/>
+          </a:fillRef>
+          <a:effectRef idx="2">
+            <a:schemeClr val="accent1"/>
+          </a:effectRef>
+          <a:fontRef idx="minor">
+            <a:schemeClr val="lt1"/>
+          </a:fontRef>
+        </p:style>
+        <p:txBody>
+          <a:bodyPr rtlCol="0" anchor="ctr"/>
+          <a:lstStyle/>
+          <a:p>
+            <a:pPr algn="ctr"/>
+          </a:p>
+        </p:txBody>
+      </p:sp>
+      <p:sp>
+        <p:nvSpPr>
+          <p:cNvPr id="52" name="TextBox 51"/>
+          <p:cNvSpPr txBox="1"/>
+          <p:nvPr/>
+        </p:nvSpPr>
+        <p:spPr>
+          <a:xfrm>
+            <a:off x="8503920" y="3287268"/>
+            <a:ext cx="3291840" cy="365760"/>
+          </a:xfrm>
+          <a:prstGeom prst="rect">
+            <a:avLst/>
+          </a:prstGeom>
+          <a:noFill/>
+        </p:spPr>
+        <p:txBody>
+          <a:bodyPr wrap="square">
+            <a:spAutoFit/>
+          </a:bodyPr>
+          <a:lstStyle/>
+          <a:p>
+            <a:pPr algn="l"/>
+            <a:r>
+              <a:rPr sz="1000" b="0" i="0">
+                <a:solidFill>
+                  <a:srgbClr val="404040"/>
+                </a:solidFill>
+              </a:rPr>
+              <a:t>SSP documentation: Submitted &amp; approved</a:t>
+            </a:r>
+          </a:p>
+        </p:txBody>
+      </p:sp>
+      <p:sp>
+        <p:nvSpPr>
+          <p:cNvPr id="53" name="Rectangle 52"/>
+          <p:cNvSpPr/>
+          <p:nvPr/>
+        </p:nvSpPr>
+        <p:spPr>
+          <a:xfrm>
+            <a:off x="8247888" y="3721607"/>
+            <a:ext cx="164592" cy="164592"/>
+          </a:xfrm>
+          <a:prstGeom prst="rect">
+            <a:avLst/>
+          </a:prstGeom>
+          <a:solidFill>
+            <a:srgbClr val="008000"/>
+          </a:solidFill>
+          <a:ln>
+            <a:noFill/>
+          </a:ln>
+        </p:spPr>
+        <p:style>
+          <a:lnRef idx="1">
+            <a:schemeClr val="accent1"/>
+          </a:lnRef>
+          <a:fillRef idx="3">
+            <a:schemeClr val="accent1"/>
+          </a:fillRef>
+          <a:effectRef idx="2">
+            <a:schemeClr val="accent1"/>
+          </a:effectRef>
+          <a:fontRef idx="minor">
+            <a:schemeClr val="lt1"/>
+          </a:fontRef>
+        </p:style>
+        <p:txBody>
+          <a:bodyPr rtlCol="0" anchor="ctr"/>
+          <a:lstStyle/>
+          <a:p>
+            <a:pPr algn="ctr"/>
+          </a:p>
+        </p:txBody>
+      </p:sp>
+      <p:sp>
+        <p:nvSpPr>
+          <p:cNvPr id="54" name="TextBox 53"/>
+          <p:cNvSpPr txBox="1"/>
+          <p:nvPr/>
+        </p:nvSpPr>
+        <p:spPr>
+          <a:xfrm>
+            <a:off x="8503920" y="3666744"/>
+            <a:ext cx="3291840" cy="365760"/>
+          </a:xfrm>
+          <a:prstGeom prst="rect">
+            <a:avLst/>
+          </a:prstGeom>
+          <a:noFill/>
+        </p:spPr>
+        <p:txBody>
+          <a:bodyPr wrap="square">
+            <a:spAutoFit/>
+          </a:bodyPr>
+          <a:lstStyle/>
+          <a:p>
+            <a:pPr algn="l"/>
+            <a:r>
+              <a:rPr sz="1000" b="0" i="0">
+                <a:solidFill>
+                  <a:srgbClr val="404040"/>
+                </a:solidFill>
+              </a:rPr>
+              <a:t>Remote connectivity to nodes: In progress</a:t>
+            </a:r>
+          </a:p>
+        </p:txBody>
+      </p:sp>
+      <p:sp>
+        <p:nvSpPr>
+          <p:cNvPr id="55" name="Rectangle 54"/>
+          <p:cNvSpPr/>
+          <p:nvPr/>
+        </p:nvSpPr>
+        <p:spPr>
+          <a:xfrm>
+            <a:off x="8247888" y="4101083"/>
+            <a:ext cx="164592" cy="164592"/>
+          </a:xfrm>
+          <a:prstGeom prst="rect">
+            <a:avLst/>
+          </a:prstGeom>
+          <a:solidFill>
+            <a:srgbClr val="008000"/>
+          </a:solidFill>
+          <a:ln>
+            <a:noFill/>
+          </a:ln>
+        </p:spPr>
+        <p:style>
+          <a:lnRef idx="1">
+            <a:schemeClr val="accent1"/>
+          </a:lnRef>
+          <a:fillRef idx="3">
+            <a:schemeClr val="accent1"/>
+          </a:fillRef>
+          <a:effectRef idx="2">
+            <a:schemeClr val="accent1"/>
+          </a:effectRef>
+          <a:fontRef idx="minor">
+            <a:schemeClr val="lt1"/>
+          </a:fontRef>
+        </p:style>
+        <p:txBody>
+          <a:bodyPr rtlCol="0" anchor="ctr"/>
+          <a:lstStyle/>
+          <a:p>
+            <a:pPr algn="ctr"/>
+          </a:p>
+        </p:txBody>
+      </p:sp>
+      <p:sp>
+        <p:nvSpPr>
+          <p:cNvPr id="56" name="TextBox 55"/>
+          <p:cNvSpPr txBox="1"/>
+          <p:nvPr/>
+        </p:nvSpPr>
+        <p:spPr>
+          <a:xfrm>
+            <a:off x="8503920" y="4046220"/>
+            <a:ext cx="3291840" cy="365760"/>
+          </a:xfrm>
+          <a:prstGeom prst="rect">
+            <a:avLst/>
+          </a:prstGeom>
+          <a:noFill/>
+        </p:spPr>
+        <p:txBody>
+          <a:bodyPr wrap="square">
+            <a:spAutoFit/>
+          </a:bodyPr>
+          <a:lstStyle/>
+          <a:p>
+            <a:pPr algn="l"/>
+            <a:r>
+              <a:rPr sz="1000" b="0" i="0">
+                <a:solidFill>
+                  <a:srgbClr val="404040"/>
+                </a:solidFill>
+              </a:rPr>
+              <a:t>Phase 2 construction: Pending IFC completion</a:t>
+            </a:r>
+          </a:p>
+        </p:txBody>
+      </p:sp>
+      <p:sp>
+        <p:nvSpPr>
+          <p:cNvPr id="57" name="Rectangle 56"/>
+          <p:cNvSpPr/>
+          <p:nvPr/>
+        </p:nvSpPr>
+        <p:spPr>
+          <a:xfrm>
+            <a:off x="274320" y="5394960"/>
+            <a:ext cx="11612880" cy="347472"/>
+          </a:xfrm>
+          <a:prstGeom prst="rect">
+            <a:avLst/>
+          </a:prstGeom>
+          <a:solidFill>
+            <a:srgbClr val="003387"/>
+          </a:solidFill>
+          <a:ln>
+            <a:noFill/>
+          </a:ln>
+        </p:spPr>
+        <p:style>
+          <a:lnRef idx="1">
+            <a:schemeClr val="accent1"/>
+          </a:lnRef>
+          <a:fillRef idx="3">
+            <a:schemeClr val="accent1"/>
+          </a:fillRef>
+          <a:effectRef idx="2">
+            <a:schemeClr val="accent1"/>
+          </a:effectRef>
+          <a:fontRef idx="minor">
+            <a:schemeClr val="lt1"/>
+          </a:fontRef>
+        </p:style>
+        <p:txBody>
+          <a:bodyPr rtlCol="0" anchor="ctr"/>
+          <a:lstStyle/>
+          <a:p>
+            <a:pPr algn="ctr"/>
+          </a:p>
+        </p:txBody>
+      </p:sp>
+      <p:sp>
+        <p:nvSpPr>
+          <p:cNvPr id="58" name="TextBox 57"/>
+          <p:cNvSpPr txBox="1"/>
+          <p:nvPr/>
+        </p:nvSpPr>
+        <p:spPr>
+          <a:xfrm>
+            <a:off x="457200" y="5422392"/>
+            <a:ext cx="3657600" cy="274320"/>
+          </a:xfrm>
+          <a:prstGeom prst="rect">
+            <a:avLst/>
+          </a:prstGeom>
+          <a:noFill/>
+        </p:spPr>
+        <p:txBody>
+          <a:bodyPr wrap="square">
+            <a:spAutoFit/>
+          </a:bodyPr>
+          <a:lstStyle/>
+          <a:p>
+            <a:pPr algn="l"/>
+            <a:r>
+              <a:rPr sz="1100" b="1" i="0">
+                <a:solidFill>
+                  <a:srgbClr val="FFFFFF"/>
+                </a:solidFill>
+              </a:rPr>
+              <a:t>PROGRAM SCOPE SUMMARY</a:t>
+            </a:r>
+          </a:p>
+        </p:txBody>
+      </p:sp>
+      <p:sp>
+        <p:nvSpPr>
+          <p:cNvPr id="59" name="TextBox 58"/>
+          <p:cNvSpPr txBox="1"/>
+          <p:nvPr/>
+        </p:nvSpPr>
+        <p:spPr>
+          <a:xfrm>
+            <a:off x="320040" y="5422392"/>
+            <a:ext cx="1371600" cy="274320"/>
+          </a:xfrm>
+          <a:prstGeom prst="rect">
+            <a:avLst/>
+          </a:prstGeom>
+          <a:noFill/>
+        </p:spPr>
+        <p:txBody>
+          <a:bodyPr wrap="square">
+            <a:spAutoFit/>
+          </a:bodyPr>
+          <a:lstStyle/>
+          <a:p>
+            <a:pPr algn="ctr"/>
+            <a:r>
+              <a:rPr sz="900" b="1" i="0">
+                <a:solidFill>
+                  <a:srgbClr val="FFFFFF"/>
+                </a:solidFill>
+              </a:rPr>
+              <a:t>Phase</a:t>
+            </a:r>
+          </a:p>
+        </p:txBody>
+      </p:sp>
+      <p:sp>
+        <p:nvSpPr>
+          <p:cNvPr id="60" name="TextBox 59"/>
+          <p:cNvSpPr txBox="1"/>
+          <p:nvPr/>
+        </p:nvSpPr>
+        <p:spPr>
+          <a:xfrm>
+            <a:off x="1691640" y="5422392"/>
+            <a:ext cx="2011680" cy="274320"/>
+          </a:xfrm>
+          <a:prstGeom prst="rect">
+            <a:avLst/>
+          </a:prstGeom>
+          <a:noFill/>
+        </p:spPr>
+        <p:txBody>
+          <a:bodyPr wrap="square">
+            <a:spAutoFit/>
+          </a:bodyPr>
+          <a:lstStyle/>
+          <a:p>
+            <a:pPr algn="ctr"/>
+            <a:r>
+              <a:rPr sz="900" b="1" i="0">
+                <a:solidFill>
+                  <a:srgbClr val="FFFFFF"/>
+                </a:solidFill>
+              </a:rPr>
+              <a:t>Total Substations</a:t>
+            </a:r>
+          </a:p>
+        </p:txBody>
+      </p:sp>
+      <p:sp>
+        <p:nvSpPr>
+          <p:cNvPr id="61" name="TextBox 60"/>
+          <p:cNvSpPr txBox="1"/>
+          <p:nvPr/>
+        </p:nvSpPr>
+        <p:spPr>
+          <a:xfrm>
+            <a:off x="3703320" y="5422392"/>
+            <a:ext cx="1737360" cy="274320"/>
+          </a:xfrm>
+          <a:prstGeom prst="rect">
+            <a:avLst/>
+          </a:prstGeom>
+          <a:noFill/>
+        </p:spPr>
+        <p:txBody>
+          <a:bodyPr wrap="square">
+            <a:spAutoFit/>
+          </a:bodyPr>
+          <a:lstStyle/>
+          <a:p>
+            <a:pPr algn="ctr"/>
+            <a:r>
+              <a:rPr sz="900" b="1" i="0">
+                <a:solidFill>
+                  <a:srgbClr val="FFFFFF"/>
+                </a:solidFill>
+              </a:rPr>
+              <a:t>MPLS Sites</a:t>
+            </a:r>
+          </a:p>
+        </p:txBody>
+      </p:sp>
+      <p:sp>
+        <p:nvSpPr>
+          <p:cNvPr id="62" name="TextBox 61"/>
+          <p:cNvSpPr txBox="1"/>
+          <p:nvPr/>
+        </p:nvSpPr>
+        <p:spPr>
+          <a:xfrm>
+            <a:off x="5440680" y="5422392"/>
+            <a:ext cx="1737360" cy="274320"/>
+          </a:xfrm>
+          <a:prstGeom prst="rect">
+            <a:avLst/>
+          </a:prstGeom>
+          <a:noFill/>
+        </p:spPr>
+        <p:txBody>
+          <a:bodyPr wrap="square">
+            <a:spAutoFit/>
+          </a:bodyPr>
+          <a:lstStyle/>
+          <a:p>
+            <a:pPr algn="ctr"/>
+            <a:r>
+              <a:rPr sz="900" b="1" i="0">
+                <a:solidFill>
+                  <a:srgbClr val="FFFFFF"/>
+                </a:solidFill>
+              </a:rPr>
+              <a:t>DF RTU Sites</a:t>
+            </a:r>
+          </a:p>
+        </p:txBody>
+      </p:sp>
+      <p:sp>
+        <p:nvSpPr>
+          <p:cNvPr id="63" name="TextBox 62"/>
+          <p:cNvSpPr txBox="1"/>
+          <p:nvPr/>
+        </p:nvSpPr>
+        <p:spPr>
+          <a:xfrm>
+            <a:off x="7178040" y="5422392"/>
+            <a:ext cx="2103120" cy="274320"/>
+          </a:xfrm>
+          <a:prstGeom prst="rect">
+            <a:avLst/>
+          </a:prstGeom>
+          <a:noFill/>
+        </p:spPr>
+        <p:txBody>
+          <a:bodyPr wrap="square">
+            <a:spAutoFit/>
+          </a:bodyPr>
+          <a:lstStyle/>
+          <a:p>
+            <a:pPr algn="ctr"/>
+            <a:r>
+              <a:rPr sz="900" b="1" i="0">
+                <a:solidFill>
+                  <a:srgbClr val="FFFFFF"/>
+                </a:solidFill>
+              </a:rPr>
+              <a:t>Radio Shelter Sites</a:t>
+            </a:r>
+          </a:p>
+        </p:txBody>
+      </p:sp>
+      <p:sp>
+        <p:nvSpPr>
+          <p:cNvPr id="64" name="TextBox 63"/>
+          <p:cNvSpPr txBox="1"/>
+          <p:nvPr/>
+        </p:nvSpPr>
+        <p:spPr>
+          <a:xfrm>
+            <a:off x="9281160" y="5422392"/>
+            <a:ext cx="2194560" cy="274320"/>
+          </a:xfrm>
+          <a:prstGeom prst="rect">
+            <a:avLst/>
+          </a:prstGeom>
+          <a:noFill/>
+        </p:spPr>
+        <p:txBody>
+          <a:bodyPr wrap="square">
+            <a:spAutoFit/>
+          </a:bodyPr>
+          <a:lstStyle/>
+          <a:p>
+            <a:pPr algn="ctr"/>
+            <a:r>
+              <a:rPr sz="900" b="1" i="0">
+                <a:solidFill>
+                  <a:srgbClr val="FFFFFF"/>
+                </a:solidFill>
+              </a:rPr>
+              <a:t>Nokia MPLS Nodes</a:t>
+            </a:r>
+          </a:p>
+        </p:txBody>
+      </p:sp>
+      <p:sp>
+        <p:nvSpPr>
+          <p:cNvPr id="65" name="Rectangle 64"/>
+          <p:cNvSpPr/>
+          <p:nvPr/>
+        </p:nvSpPr>
+        <p:spPr>
+          <a:xfrm>
+            <a:off x="274320" y="5779008"/>
+            <a:ext cx="11612880" cy="301752"/>
+          </a:xfrm>
+          <a:prstGeom prst="rect">
+            <a:avLst/>
+          </a:prstGeom>
+          <a:solidFill>
+            <a:srgbClr val="F2F2F2"/>
+          </a:solidFill>
+          <a:ln>
+            <a:noFill/>
+          </a:ln>
+        </p:spPr>
+        <p:style>
+          <a:lnRef idx="1">
+            <a:schemeClr val="accent1"/>
+          </a:lnRef>
+          <a:fillRef idx="3">
+            <a:schemeClr val="accent1"/>
+          </a:fillRef>
+          <a:effectRef idx="2">
+            <a:schemeClr val="accent1"/>
+          </a:effectRef>
+          <a:fontRef idx="minor">
+            <a:schemeClr val="lt1"/>
+          </a:fontRef>
+        </p:style>
+        <p:txBody>
+          <a:bodyPr rtlCol="0" anchor="ctr"/>
+          <a:lstStyle/>
+          <a:p>
+            <a:pPr algn="ctr"/>
+          </a:p>
+        </p:txBody>
+      </p:sp>
+      <p:sp>
+        <p:nvSpPr>
+          <p:cNvPr id="66" name="TextBox 65"/>
+          <p:cNvSpPr txBox="1"/>
+          <p:nvPr/>
+        </p:nvSpPr>
+        <p:spPr>
+          <a:xfrm>
+            <a:off x="320040" y="5815584"/>
+            <a:ext cx="1371600" cy="237744"/>
+          </a:xfrm>
+          <a:prstGeom prst="rect">
+            <a:avLst/>
+          </a:prstGeom>
+          <a:noFill/>
+        </p:spPr>
+        <p:txBody>
+          <a:bodyPr wrap="square">
+            <a:spAutoFit/>
+          </a:bodyPr>
+          <a:lstStyle/>
+          <a:p>
+            <a:pPr algn="ctr"/>
+            <a:r>
+              <a:rPr sz="1000" b="0" i="0">
+                <a:solidFill>
+                  <a:srgbClr val="404040"/>
+                </a:solidFill>
+              </a:rPr>
+              <a:t>Phase 1</a:t>
+            </a:r>
+          </a:p>
+        </p:txBody>
+      </p:sp>
+      <p:sp>
+        <p:nvSpPr>
+          <p:cNvPr id="67" name="TextBox 66"/>
+          <p:cNvSpPr txBox="1"/>
+          <p:nvPr/>
+        </p:nvSpPr>
+        <p:spPr>
+          <a:xfrm>
+            <a:off x="1691640" y="5815584"/>
+            <a:ext cx="2011680" cy="237744"/>
+          </a:xfrm>
+          <a:prstGeom prst="rect">
+            <a:avLst/>
+          </a:prstGeom>
+          <a:noFill/>
+        </p:spPr>
+        <p:txBody>
+          <a:bodyPr wrap="square">
+            <a:spAutoFit/>
+          </a:bodyPr>
+          <a:lstStyle/>
+          <a:p>
+            <a:pPr algn="ctr"/>
+            <a:r>
+              <a:rPr sz="1000" b="0" i="0">
+                <a:solidFill>
+                  <a:srgbClr val="404040"/>
+                </a:solidFill>
+              </a:rPr>
+              <a:t>49</a:t>
+            </a:r>
+          </a:p>
+        </p:txBody>
+      </p:sp>
+      <p:sp>
+        <p:nvSpPr>
+          <p:cNvPr id="68" name="TextBox 67"/>
+          <p:cNvSpPr txBox="1"/>
+          <p:nvPr/>
+        </p:nvSpPr>
+        <p:spPr>
+          <a:xfrm>
+            <a:off x="3703320" y="5815584"/>
+            <a:ext cx="1737360" cy="237744"/>
+          </a:xfrm>
+          <a:prstGeom prst="rect">
+            <a:avLst/>
+          </a:prstGeom>
+          <a:noFill/>
+        </p:spPr>
+        <p:txBody>
+          <a:bodyPr wrap="square">
+            <a:spAutoFit/>
+          </a:bodyPr>
+          <a:lstStyle/>
+          <a:p>
+            <a:pPr algn="ctr"/>
+            <a:r>
+              <a:rPr sz="1000" b="0" i="0">
+                <a:solidFill>
+                  <a:srgbClr val="404040"/>
+                </a:solidFill>
+              </a:rPr>
+              <a:t>26</a:t>
+            </a:r>
+          </a:p>
+        </p:txBody>
+      </p:sp>
+      <p:sp>
+        <p:nvSpPr>
+          <p:cNvPr id="69" name="TextBox 68"/>
+          <p:cNvSpPr txBox="1"/>
+          <p:nvPr/>
+        </p:nvSpPr>
+        <p:spPr>
+          <a:xfrm>
+            <a:off x="5440680" y="5815584"/>
+            <a:ext cx="1737360" cy="237744"/>
+          </a:xfrm>
+          <a:prstGeom prst="rect">
+            <a:avLst/>
+          </a:prstGeom>
+          <a:noFill/>
+        </p:spPr>
+        <p:txBody>
+          <a:bodyPr wrap="square">
+            <a:spAutoFit/>
+          </a:bodyPr>
+          <a:lstStyle/>
+          <a:p>
+            <a:pPr algn="ctr"/>
+            <a:r>
+              <a:rPr sz="1000" b="0" i="0">
+                <a:solidFill>
+                  <a:srgbClr val="404040"/>
+                </a:solidFill>
+              </a:rPr>
+              <a:t>17</a:t>
+            </a:r>
+          </a:p>
+        </p:txBody>
+      </p:sp>
+      <p:sp>
+        <p:nvSpPr>
+          <p:cNvPr id="70" name="TextBox 69"/>
+          <p:cNvSpPr txBox="1"/>
+          <p:nvPr/>
+        </p:nvSpPr>
+        <p:spPr>
+          <a:xfrm>
+            <a:off x="7178040" y="5815584"/>
+            <a:ext cx="2103120" cy="237744"/>
+          </a:xfrm>
+          <a:prstGeom prst="rect">
+            <a:avLst/>
+          </a:prstGeom>
+          <a:noFill/>
+        </p:spPr>
+        <p:txBody>
+          <a:bodyPr wrap="square">
+            <a:spAutoFit/>
+          </a:bodyPr>
+          <a:lstStyle/>
+          <a:p>
+            <a:pPr algn="ctr"/>
+            <a:r>
+              <a:rPr sz="1000" b="0" i="0">
+                <a:solidFill>
+                  <a:srgbClr val="404040"/>
+                </a:solidFill>
+              </a:rPr>
+              <a:t>6</a:t>
+            </a:r>
+          </a:p>
+        </p:txBody>
+      </p:sp>
+      <p:sp>
+        <p:nvSpPr>
+          <p:cNvPr id="71" name="TextBox 70"/>
+          <p:cNvSpPr txBox="1"/>
+          <p:nvPr/>
+        </p:nvSpPr>
+        <p:spPr>
+          <a:xfrm>
+            <a:off x="9281160" y="5815584"/>
+            <a:ext cx="2194560" cy="237744"/>
+          </a:xfrm>
+          <a:prstGeom prst="rect">
+            <a:avLst/>
+          </a:prstGeom>
+          <a:noFill/>
+        </p:spPr>
+        <p:txBody>
+          <a:bodyPr wrap="square">
+            <a:spAutoFit/>
+          </a:bodyPr>
+          <a:lstStyle/>
+          <a:p>
+            <a:pPr algn="ctr"/>
+            <a:r>
+              <a:rPr sz="1000" b="0" i="0">
+                <a:solidFill>
+                  <a:srgbClr val="404040"/>
+                </a:solidFill>
+              </a:rPr>
+              <a:t>31</a:t>
+            </a:r>
+          </a:p>
+        </p:txBody>
+      </p:sp>
+      <p:sp>
+        <p:nvSpPr>
+          <p:cNvPr id="72" name="Rectangle 71"/>
+          <p:cNvSpPr/>
+          <p:nvPr/>
+        </p:nvSpPr>
+        <p:spPr>
+          <a:xfrm>
+            <a:off x="274320" y="6099048"/>
+            <a:ext cx="11612880" cy="301752"/>
+          </a:xfrm>
+          <a:prstGeom prst="rect">
+            <a:avLst/>
+          </a:prstGeom>
+          <a:solidFill>
+            <a:srgbClr val="FFFFFF"/>
+          </a:solidFill>
+          <a:ln>
+            <a:noFill/>
+          </a:ln>
+        </p:spPr>
+        <p:style>
+          <a:lnRef idx="1">
+            <a:schemeClr val="accent1"/>
+          </a:lnRef>
+          <a:fillRef idx="3">
+            <a:schemeClr val="accent1"/>
+          </a:fillRef>
+          <a:effectRef idx="2">
+            <a:schemeClr val="accent1"/>
+          </a:effectRef>
+          <a:fontRef idx="minor">
+            <a:schemeClr val="lt1"/>
+          </a:fontRef>
+        </p:style>
+        <p:txBody>
+          <a:bodyPr rtlCol="0" anchor="ctr"/>
+          <a:lstStyle/>
+          <a:p>
+            <a:pPr algn="ctr"/>
+          </a:p>
+        </p:txBody>
+      </p:sp>
+      <p:sp>
+        <p:nvSpPr>
+          <p:cNvPr id="73" name="TextBox 72"/>
+          <p:cNvSpPr txBox="1"/>
+          <p:nvPr/>
+        </p:nvSpPr>
+        <p:spPr>
+          <a:xfrm>
+            <a:off x="320040" y="6135624"/>
+            <a:ext cx="1371600" cy="237744"/>
+          </a:xfrm>
+          <a:prstGeom prst="rect">
+            <a:avLst/>
+          </a:prstGeom>
+          <a:noFill/>
+        </p:spPr>
+        <p:txBody>
+          <a:bodyPr wrap="square">
+            <a:spAutoFit/>
+          </a:bodyPr>
+          <a:lstStyle/>
+          <a:p>
+            <a:pPr algn="ctr"/>
+            <a:r>
+              <a:rPr sz="1000" b="0" i="0">
+                <a:solidFill>
+                  <a:srgbClr val="404040"/>
+                </a:solidFill>
+              </a:rPr>
+              <a:t>Phase 2</a:t>
+            </a:r>
+          </a:p>
+        </p:txBody>
+      </p:sp>
+      <p:sp>
+        <p:nvSpPr>
+          <p:cNvPr id="74" name="TextBox 73"/>
+          <p:cNvSpPr txBox="1"/>
+          <p:nvPr/>
+        </p:nvSpPr>
+        <p:spPr>
+          <a:xfrm>
+            <a:off x="1691640" y="6135624"/>
+            <a:ext cx="2011680" cy="237744"/>
+          </a:xfrm>
+          <a:prstGeom prst="rect">
+            <a:avLst/>
+          </a:prstGeom>
+          <a:noFill/>
+        </p:spPr>
+        <p:txBody>
+          <a:bodyPr wrap="square">
+            <a:spAutoFit/>
+          </a:bodyPr>
+          <a:lstStyle/>
+          <a:p>
+            <a:pPr algn="ctr"/>
+            <a:r>
+              <a:rPr sz="1000" b="0" i="0">
+                <a:solidFill>
+                  <a:srgbClr val="404040"/>
+                </a:solidFill>
+              </a:rPr>
+              <a:t>45</a:t>
+            </a:r>
+          </a:p>
+        </p:txBody>
+      </p:sp>
+      <p:sp>
+        <p:nvSpPr>
+          <p:cNvPr id="75" name="TextBox 74"/>
+          <p:cNvSpPr txBox="1"/>
+          <p:nvPr/>
+        </p:nvSpPr>
+        <p:spPr>
+          <a:xfrm>
+            <a:off x="3703320" y="6135624"/>
+            <a:ext cx="1737360" cy="237744"/>
+          </a:xfrm>
+          <a:prstGeom prst="rect">
+            <a:avLst/>
+          </a:prstGeom>
+          <a:noFill/>
+        </p:spPr>
+        <p:txBody>
+          <a:bodyPr wrap="square">
+            <a:spAutoFit/>
+          </a:bodyPr>
+          <a:lstStyle/>
+          <a:p>
+            <a:pPr algn="ctr"/>
+            <a:r>
+              <a:rPr sz="1000" b="0" i="0">
+                <a:solidFill>
+                  <a:srgbClr val="404040"/>
+                </a:solidFill>
+              </a:rPr>
+              <a:t>26</a:t>
+            </a:r>
+          </a:p>
+        </p:txBody>
+      </p:sp>
+      <p:sp>
+        <p:nvSpPr>
+          <p:cNvPr id="76" name="TextBox 75"/>
+          <p:cNvSpPr txBox="1"/>
+          <p:nvPr/>
+        </p:nvSpPr>
+        <p:spPr>
+          <a:xfrm>
+            <a:off x="5440680" y="6135624"/>
+            <a:ext cx="1737360" cy="237744"/>
+          </a:xfrm>
+          <a:prstGeom prst="rect">
+            <a:avLst/>
+          </a:prstGeom>
+          <a:noFill/>
+        </p:spPr>
+        <p:txBody>
+          <a:bodyPr wrap="square">
+            <a:spAutoFit/>
+          </a:bodyPr>
+          <a:lstStyle/>
+          <a:p>
+            <a:pPr algn="ctr"/>
+            <a:r>
+              <a:rPr sz="1000" b="0" i="0">
+                <a:solidFill>
+                  <a:srgbClr val="404040"/>
+                </a:solidFill>
+              </a:rPr>
+              <a:t>12</a:t>
+            </a:r>
+          </a:p>
+        </p:txBody>
+      </p:sp>
+      <p:sp>
+        <p:nvSpPr>
+          <p:cNvPr id="77" name="TextBox 76"/>
+          <p:cNvSpPr txBox="1"/>
+          <p:nvPr/>
+        </p:nvSpPr>
+        <p:spPr>
+          <a:xfrm>
+            <a:off x="7178040" y="6135624"/>
+            <a:ext cx="2103120" cy="237744"/>
+          </a:xfrm>
+          <a:prstGeom prst="rect">
+            <a:avLst/>
+          </a:prstGeom>
+          <a:noFill/>
+        </p:spPr>
+        <p:txBody>
+          <a:bodyPr wrap="square">
+            <a:spAutoFit/>
+          </a:bodyPr>
+          <a:lstStyle/>
+          <a:p>
+            <a:pPr algn="ctr"/>
+            <a:r>
+              <a:rPr sz="1000" b="0" i="0">
+                <a:solidFill>
+                  <a:srgbClr val="404040"/>
+                </a:solidFill>
+              </a:rPr>
+              <a:t>7</a:t>
+            </a:r>
+          </a:p>
+        </p:txBody>
+      </p:sp>
+      <p:sp>
+        <p:nvSpPr>
+          <p:cNvPr id="78" name="TextBox 77"/>
+          <p:cNvSpPr txBox="1"/>
+          <p:nvPr/>
+        </p:nvSpPr>
+        <p:spPr>
+          <a:xfrm>
+            <a:off x="9281160" y="6135624"/>
+            <a:ext cx="2194560" cy="237744"/>
+          </a:xfrm>
+          <a:prstGeom prst="rect">
+            <a:avLst/>
+          </a:prstGeom>
+          <a:noFill/>
+        </p:spPr>
+        <p:txBody>
+          <a:bodyPr wrap="square">
+            <a:spAutoFit/>
+          </a:bodyPr>
+          <a:lstStyle/>
+          <a:p>
+            <a:pPr algn="ctr"/>
+            <a:r>
+              <a:rPr sz="1000" b="0" i="0">
+                <a:solidFill>
+                  <a:srgbClr val="404040"/>
+                </a:solidFill>
+              </a:rPr>
+              <a:t>26</a:t>
+            </a:r>
+          </a:p>
+        </p:txBody>
+      </p:sp>
+      <p:sp>
+        <p:nvSpPr>
+          <p:cNvPr id="79" name="Rectangle 78"/>
+          <p:cNvSpPr/>
+          <p:nvPr/>
+        </p:nvSpPr>
+        <p:spPr>
+          <a:xfrm>
+            <a:off x="274320" y="6419088"/>
+            <a:ext cx="11612880" cy="301752"/>
+          </a:xfrm>
+          <a:prstGeom prst="rect">
+            <a:avLst/>
+          </a:prstGeom>
+          <a:solidFill>
+            <a:srgbClr val="F2F2F2"/>
+          </a:solidFill>
+          <a:ln>
+            <a:noFill/>
+          </a:ln>
+        </p:spPr>
+        <p:style>
+          <a:lnRef idx="1">
+            <a:schemeClr val="accent1"/>
+          </a:lnRef>
+          <a:fillRef idx="3">
+            <a:schemeClr val="accent1"/>
+          </a:fillRef>
+          <a:effectRef idx="2">
+            <a:schemeClr val="accent1"/>
+          </a:effectRef>
+          <a:fontRef idx="minor">
+            <a:schemeClr val="lt1"/>
+          </a:fontRef>
+        </p:style>
+        <p:txBody>
+          <a:bodyPr rtlCol="0" anchor="ctr"/>
+          <a:lstStyle/>
+          <a:p>
+            <a:pPr algn="ctr"/>
+          </a:p>
+        </p:txBody>
+      </p:sp>
+      <p:sp>
+        <p:nvSpPr>
+          <p:cNvPr id="80" name="TextBox 79"/>
+          <p:cNvSpPr txBox="1"/>
+          <p:nvPr/>
+        </p:nvSpPr>
+        <p:spPr>
+          <a:xfrm>
+            <a:off x="320040" y="6455664"/>
+            <a:ext cx="1371600" cy="237744"/>
+          </a:xfrm>
+          <a:prstGeom prst="rect">
+            <a:avLst/>
+          </a:prstGeom>
+          <a:noFill/>
+        </p:spPr>
+        <p:txBody>
+          <a:bodyPr wrap="square">
+            <a:spAutoFit/>
+          </a:bodyPr>
+          <a:lstStyle/>
+          <a:p>
+            <a:pPr algn="ctr"/>
+            <a:r>
+              <a:rPr sz="1000" b="0" i="0">
+                <a:solidFill>
+                  <a:srgbClr val="404040"/>
+                </a:solidFill>
+              </a:rPr>
+              <a:t>Phase 3</a:t>
+            </a:r>
+          </a:p>
+        </p:txBody>
+      </p:sp>
+      <p:sp>
+        <p:nvSpPr>
+          <p:cNvPr id="81" name="TextBox 80"/>
+          <p:cNvSpPr txBox="1"/>
+          <p:nvPr/>
+        </p:nvSpPr>
+        <p:spPr>
+          <a:xfrm>
+            <a:off x="1691640" y="6455664"/>
+            <a:ext cx="2011680" cy="237744"/>
+          </a:xfrm>
+          <a:prstGeom prst="rect">
+            <a:avLst/>
+          </a:prstGeom>
+          <a:noFill/>
+        </p:spPr>
+        <p:txBody>
+          <a:bodyPr wrap="square">
+            <a:spAutoFit/>
+          </a:bodyPr>
+          <a:lstStyle/>
+          <a:p>
+            <a:pPr algn="ctr"/>
+            <a:r>
+              <a:rPr sz="1000" b="0" i="0">
+                <a:solidFill>
+                  <a:srgbClr val="404040"/>
+                </a:solidFill>
+              </a:rPr>
+              <a:t>35</a:t>
+            </a:r>
+          </a:p>
+        </p:txBody>
+      </p:sp>
+      <p:sp>
+        <p:nvSpPr>
+          <p:cNvPr id="82" name="TextBox 81"/>
+          <p:cNvSpPr txBox="1"/>
+          <p:nvPr/>
+        </p:nvSpPr>
+        <p:spPr>
+          <a:xfrm>
+            <a:off x="3703320" y="6455664"/>
+            <a:ext cx="1737360" cy="237744"/>
+          </a:xfrm>
+          <a:prstGeom prst="rect">
+            <a:avLst/>
+          </a:prstGeom>
+          <a:noFill/>
+        </p:spPr>
+        <p:txBody>
+          <a:bodyPr wrap="square">
+            <a:spAutoFit/>
+          </a:bodyPr>
+          <a:lstStyle/>
+          <a:p>
+            <a:pPr algn="ctr"/>
+            <a:r>
+              <a:rPr sz="1000" b="0" i="0">
+                <a:solidFill>
+                  <a:srgbClr val="404040"/>
+                </a:solidFill>
+              </a:rPr>
+              <a:t>22</a:t>
+            </a:r>
+          </a:p>
+        </p:txBody>
+      </p:sp>
+      <p:sp>
+        <p:nvSpPr>
+          <p:cNvPr id="83" name="TextBox 82"/>
+          <p:cNvSpPr txBox="1"/>
+          <p:nvPr/>
+        </p:nvSpPr>
+        <p:spPr>
+          <a:xfrm>
+            <a:off x="5440680" y="6455664"/>
+            <a:ext cx="1737360" cy="237744"/>
+          </a:xfrm>
+          <a:prstGeom prst="rect">
+            <a:avLst/>
+          </a:prstGeom>
+          <a:noFill/>
+        </p:spPr>
+        <p:txBody>
+          <a:bodyPr wrap="square">
+            <a:spAutoFit/>
+          </a:bodyPr>
+          <a:lstStyle/>
+          <a:p>
+            <a:pPr algn="ctr"/>
+            <a:r>
+              <a:rPr sz="1000" b="0" i="0">
+                <a:solidFill>
+                  <a:srgbClr val="404040"/>
+                </a:solidFill>
+              </a:rPr>
+              <a:t>7</a:t>
+            </a:r>
+          </a:p>
+        </p:txBody>
+      </p:sp>
+      <p:sp>
+        <p:nvSpPr>
+          <p:cNvPr id="84" name="TextBox 83"/>
+          <p:cNvSpPr txBox="1"/>
+          <p:nvPr/>
+        </p:nvSpPr>
+        <p:spPr>
+          <a:xfrm>
+            <a:off x="7178040" y="6455664"/>
+            <a:ext cx="2103120" cy="237744"/>
+          </a:xfrm>
+          <a:prstGeom prst="rect">
+            <a:avLst/>
+          </a:prstGeom>
+          <a:noFill/>
+        </p:spPr>
+        <p:txBody>
+          <a:bodyPr wrap="square">
+            <a:spAutoFit/>
+          </a:bodyPr>
+          <a:lstStyle/>
+          <a:p>
+            <a:pPr algn="ctr"/>
+            <a:r>
+              <a:rPr sz="1000" b="0" i="0">
+                <a:solidFill>
+                  <a:srgbClr val="404040"/>
+                </a:solidFill>
+              </a:rPr>
+              <a:t>6</a:t>
+            </a:r>
+          </a:p>
+        </p:txBody>
+      </p:sp>
+      <p:sp>
+        <p:nvSpPr>
+          <p:cNvPr id="85" name="TextBox 84"/>
+          <p:cNvSpPr txBox="1"/>
+          <p:nvPr/>
+        </p:nvSpPr>
+        <p:spPr>
+          <a:xfrm>
+            <a:off x="9281160" y="6455664"/>
+            <a:ext cx="2194560" cy="237744"/>
+          </a:xfrm>
+          <a:prstGeom prst="rect">
+            <a:avLst/>
+          </a:prstGeom>
+          <a:noFill/>
+        </p:spPr>
+        <p:txBody>
+          <a:bodyPr wrap="square">
+            <a:spAutoFit/>
+          </a:bodyPr>
+          <a:lstStyle/>
+          <a:p>
+            <a:pPr algn="ctr"/>
+            <a:r>
+              <a:rPr sz="1000" b="0" i="0">
+                <a:solidFill>
+                  <a:srgbClr val="404040"/>
+                </a:solidFill>
+              </a:rPr>
+              <a:t>22</a:t>
+            </a:r>
+          </a:p>
+        </p:txBody>
+      </p:sp>
+      <p:sp>
+        <p:nvSpPr>
+          <p:cNvPr id="86" name="Rectangle 85"/>
+          <p:cNvSpPr/>
+          <p:nvPr/>
+        </p:nvSpPr>
+        <p:spPr>
+          <a:xfrm>
+            <a:off x="274320" y="6739128"/>
+            <a:ext cx="11612880" cy="301752"/>
+          </a:xfrm>
+          <a:prstGeom prst="rect">
+            <a:avLst/>
+          </a:prstGeom>
+          <a:solidFill>
+            <a:srgbClr val="D6E4F7"/>
+          </a:solidFill>
+          <a:ln>
+            <a:noFill/>
+          </a:ln>
+        </p:spPr>
+        <p:style>
+          <a:lnRef idx="1">
+            <a:schemeClr val="accent1"/>
+          </a:lnRef>
+          <a:fillRef idx="3">
+            <a:schemeClr val="accent1"/>
+          </a:fillRef>
+          <a:effectRef idx="2">
+            <a:schemeClr val="accent1"/>
+          </a:effectRef>
+          <a:fontRef idx="minor">
+            <a:schemeClr val="lt1"/>
+          </a:fontRef>
+        </p:style>
+        <p:txBody>
+          <a:bodyPr rtlCol="0" anchor="ctr"/>
+          <a:lstStyle/>
+          <a:p>
+            <a:pPr algn="ctr"/>
+          </a:p>
+        </p:txBody>
+      </p:sp>
+      <p:sp>
+        <p:nvSpPr>
+          <p:cNvPr id="87" name="TextBox 86"/>
+          <p:cNvSpPr txBox="1"/>
+          <p:nvPr/>
+        </p:nvSpPr>
+        <p:spPr>
+          <a:xfrm>
+            <a:off x="320040" y="6775704"/>
+            <a:ext cx="1371600" cy="237744"/>
+          </a:xfrm>
+          <a:prstGeom prst="rect">
+            <a:avLst/>
+          </a:prstGeom>
+          <a:noFill/>
+        </p:spPr>
+        <p:txBody>
+          <a:bodyPr wrap="square">
+            <a:spAutoFit/>
+          </a:bodyPr>
+          <a:lstStyle/>
+          <a:p>
+            <a:pPr algn="ctr"/>
+            <a:r>
+              <a:rPr sz="1000" b="1" i="0">
+                <a:solidFill>
+                  <a:srgbClr val="003387"/>
+                </a:solidFill>
+              </a:rPr>
+              <a:t>TOTAL</a:t>
+            </a:r>
+          </a:p>
+        </p:txBody>
+      </p:sp>
+      <p:sp>
+        <p:nvSpPr>
+          <p:cNvPr id="88" name="TextBox 87"/>
+          <p:cNvSpPr txBox="1"/>
+          <p:nvPr/>
+        </p:nvSpPr>
+        <p:spPr>
+          <a:xfrm>
+            <a:off x="1691640" y="6775704"/>
+            <a:ext cx="2011680" cy="237744"/>
+          </a:xfrm>
+          <a:prstGeom prst="rect">
+            <a:avLst/>
+          </a:prstGeom>
+          <a:noFill/>
+        </p:spPr>
+        <p:txBody>
+          <a:bodyPr wrap="square">
+            <a:spAutoFit/>
+          </a:bodyPr>
+          <a:lstStyle/>
+          <a:p>
+            <a:pPr algn="ctr"/>
+            <a:r>
+              <a:rPr sz="1000" b="1" i="0">
+                <a:solidFill>
+                  <a:srgbClr val="003387"/>
+                </a:solidFill>
+              </a:rPr>
+              <a:t>129</a:t>
+            </a:r>
+          </a:p>
+        </p:txBody>
+      </p:sp>
+      <p:sp>
+        <p:nvSpPr>
+          <p:cNvPr id="89" name="TextBox 88"/>
+          <p:cNvSpPr txBox="1"/>
+          <p:nvPr/>
+        </p:nvSpPr>
+        <p:spPr>
+          <a:xfrm>
+            <a:off x="3703320" y="6775704"/>
+            <a:ext cx="1737360" cy="237744"/>
+          </a:xfrm>
+          <a:prstGeom prst="rect">
+            <a:avLst/>
+          </a:prstGeom>
+          <a:noFill/>
+        </p:spPr>
+        <p:txBody>
+          <a:bodyPr wrap="square">
+            <a:spAutoFit/>
+          </a:bodyPr>
+          <a:lstStyle/>
+          <a:p>
+            <a:pPr algn="ctr"/>
+            <a:r>
+              <a:rPr sz="1000" b="1" i="0">
+                <a:solidFill>
+                  <a:srgbClr val="003387"/>
+                </a:solidFill>
+              </a:rPr>
+              <a:t>74</a:t>
+            </a:r>
+          </a:p>
+        </p:txBody>
+      </p:sp>
+      <p:sp>
+        <p:nvSpPr>
+          <p:cNvPr id="90" name="TextBox 89"/>
+          <p:cNvSpPr txBox="1"/>
+          <p:nvPr/>
+        </p:nvSpPr>
+        <p:spPr>
+          <a:xfrm>
+            <a:off x="5440680" y="6775704"/>
+            <a:ext cx="1737360" cy="237744"/>
+          </a:xfrm>
+          <a:prstGeom prst="rect">
+            <a:avLst/>
+          </a:prstGeom>
+          <a:noFill/>
+        </p:spPr>
+        <p:txBody>
+          <a:bodyPr wrap="square">
+            <a:spAutoFit/>
+          </a:bodyPr>
+          <a:lstStyle/>
+          <a:p>
+            <a:pPr algn="ctr"/>
+            <a:r>
+              <a:rPr sz="1000" b="1" i="0">
+                <a:solidFill>
+                  <a:srgbClr val="003387"/>
+                </a:solidFill>
+              </a:rPr>
+              <a:t>36</a:t>
+            </a:r>
+          </a:p>
+        </p:txBody>
+      </p:sp>
+      <p:sp>
+        <p:nvSpPr>
+          <p:cNvPr id="91" name="TextBox 90"/>
+          <p:cNvSpPr txBox="1"/>
+          <p:nvPr/>
+        </p:nvSpPr>
+        <p:spPr>
+          <a:xfrm>
+            <a:off x="7178040" y="6775704"/>
+            <a:ext cx="2103120" cy="237744"/>
+          </a:xfrm>
+          <a:prstGeom prst="rect">
+            <a:avLst/>
+          </a:prstGeom>
+          <a:noFill/>
+        </p:spPr>
+        <p:txBody>
+          <a:bodyPr wrap="square">
+            <a:spAutoFit/>
+          </a:bodyPr>
+          <a:lstStyle/>
+          <a:p>
+            <a:pPr algn="ctr"/>
+            <a:r>
+              <a:rPr sz="1000" b="1" i="0">
+                <a:solidFill>
+                  <a:srgbClr val="003387"/>
+                </a:solidFill>
+              </a:rPr>
+              <a:t>19</a:t>
+            </a:r>
+          </a:p>
+        </p:txBody>
+      </p:sp>
+      <p:sp>
+        <p:nvSpPr>
+          <p:cNvPr id="92" name="TextBox 91"/>
+          <p:cNvSpPr txBox="1"/>
+          <p:nvPr/>
+        </p:nvSpPr>
+        <p:spPr>
+          <a:xfrm>
+            <a:off x="9281160" y="6775704"/>
+            <a:ext cx="2194560" cy="237744"/>
+          </a:xfrm>
+          <a:prstGeom prst="rect">
+            <a:avLst/>
+          </a:prstGeom>
+          <a:noFill/>
+        </p:spPr>
+        <p:txBody>
+          <a:bodyPr wrap="square">
+            <a:spAutoFit/>
+          </a:bodyPr>
+          <a:lstStyle/>
+          <a:p>
+            <a:pPr algn="ctr"/>
+            <a:r>
+              <a:rPr sz="1000" b="1" i="0">
+                <a:solidFill>
+                  <a:srgbClr val="003387"/>
+                </a:solidFill>
+              </a:rPr>
+              <a:t>79</a:t>
             </a:r>
           </a:p>
         </p:txBody>

--- a/incoming_files/cio_jmux_presentation.pptx
+++ b/incoming_files/cio_jmux_presentation.pptx
@@ -15,6 +15,7 @@
     <p:sldId id="263" r:id="rId14"/>
     <p:sldId id="264" r:id="rId15"/>
     <p:sldId id="265" r:id="rId16"/>
+    <p:sldId id="266" r:id="rId17"/>
   </p:sldIdLst>
   <p:sldSz cx="12191695" cy="6858000" type="screen4x3"/>
   <p:notesSz cx="6858000" cy="9144000"/>
@@ -6775,6 +6776,3209 @@
                 </a:solidFill>
               </a:rPr>
               <a:t>79</a:t>
+            </a:r>
+          </a:p>
+        </p:txBody>
+      </p:sp>
+    </p:spTree>
+  </p:cSld>
+  <p:clrMapOvr>
+    <a:masterClrMapping/>
+  </p:clrMapOvr>
+</p:sld>
+</file>
+
+<file path=ppt/slides/slide11.xml><?xml version="1.0" encoding="utf-8"?>
+<p:sld xmlns:a="http://schemas.openxmlformats.org/drawingml/2006/main" xmlns:p="http://schemas.openxmlformats.org/presentationml/2006/main" xmlns:r="http://schemas.openxmlformats.org/officeDocument/2006/relationships">
+  <p:cSld>
+    <p:spTree>
+      <p:nvGrpSpPr>
+        <p:cNvPr id="1" name=""/>
+        <p:cNvGrpSpPr/>
+        <p:nvPr/>
+      </p:nvGrpSpPr>
+      <p:grpSpPr/>
+      <p:sp>
+        <p:nvSpPr>
+          <p:cNvPr id="2" name="Rectangle 1"/>
+          <p:cNvSpPr/>
+          <p:nvPr/>
+        </p:nvSpPr>
+        <p:spPr>
+          <a:xfrm>
+            <a:off x="0" y="0"/>
+            <a:ext cx="12191695" cy="914400"/>
+          </a:xfrm>
+          <a:prstGeom prst="rect">
+            <a:avLst/>
+          </a:prstGeom>
+          <a:solidFill>
+            <a:srgbClr val="003387"/>
+          </a:solidFill>
+          <a:ln>
+            <a:noFill/>
+          </a:ln>
+        </p:spPr>
+        <p:style>
+          <a:lnRef idx="1">
+            <a:schemeClr val="accent1"/>
+          </a:lnRef>
+          <a:fillRef idx="3">
+            <a:schemeClr val="accent1"/>
+          </a:fillRef>
+          <a:effectRef idx="2">
+            <a:schemeClr val="accent1"/>
+          </a:effectRef>
+          <a:fontRef idx="minor">
+            <a:schemeClr val="lt1"/>
+          </a:fontRef>
+        </p:style>
+        <p:txBody>
+          <a:bodyPr rtlCol="0" anchor="ctr"/>
+          <a:lstStyle/>
+          <a:p>
+            <a:pPr algn="ctr"/>
+          </a:p>
+        </p:txBody>
+      </p:sp>
+      <p:sp>
+        <p:nvSpPr>
+          <p:cNvPr id="3" name="Rectangle 2"/>
+          <p:cNvSpPr/>
+          <p:nvPr/>
+        </p:nvSpPr>
+        <p:spPr>
+          <a:xfrm>
+            <a:off x="0" y="777240"/>
+            <a:ext cx="12191695" cy="109728"/>
+          </a:xfrm>
+          <a:prstGeom prst="rect">
+            <a:avLst/>
+          </a:prstGeom>
+          <a:solidFill>
+            <a:srgbClr val="F7941D"/>
+          </a:solidFill>
+          <a:ln>
+            <a:noFill/>
+          </a:ln>
+        </p:spPr>
+        <p:style>
+          <a:lnRef idx="1">
+            <a:schemeClr val="accent1"/>
+          </a:lnRef>
+          <a:fillRef idx="3">
+            <a:schemeClr val="accent1"/>
+          </a:fillRef>
+          <a:effectRef idx="2">
+            <a:schemeClr val="accent1"/>
+          </a:effectRef>
+          <a:fontRef idx="minor">
+            <a:schemeClr val="lt1"/>
+          </a:fontRef>
+        </p:style>
+        <p:txBody>
+          <a:bodyPr rtlCol="0" anchor="ctr"/>
+          <a:lstStyle/>
+          <a:p>
+            <a:pPr algn="ctr"/>
+          </a:p>
+        </p:txBody>
+      </p:sp>
+      <p:sp>
+        <p:nvSpPr>
+          <p:cNvPr id="4" name="TextBox 3"/>
+          <p:cNvSpPr txBox="1"/>
+          <p:nvPr/>
+        </p:nvSpPr>
+        <p:spPr>
+          <a:xfrm>
+            <a:off x="274320" y="109728"/>
+            <a:ext cx="9144000" cy="594360"/>
+          </a:xfrm>
+          <a:prstGeom prst="rect">
+            <a:avLst/>
+          </a:prstGeom>
+          <a:noFill/>
+        </p:spPr>
+        <p:txBody>
+          <a:bodyPr wrap="square">
+            <a:spAutoFit/>
+          </a:bodyPr>
+          <a:lstStyle/>
+          <a:p>
+            <a:pPr algn="l"/>
+            <a:r>
+              <a:rPr sz="2400" b="1" i="0">
+                <a:solidFill>
+                  <a:srgbClr val="FFFFFF"/>
+                </a:solidFill>
+              </a:rPr>
+              <a:t>2026 Financial Exposure</a:t>
+            </a:r>
+          </a:p>
+        </p:txBody>
+      </p:sp>
+      <p:sp>
+        <p:nvSpPr>
+          <p:cNvPr id="5" name="TextBox 4"/>
+          <p:cNvSpPr txBox="1"/>
+          <p:nvPr/>
+        </p:nvSpPr>
+        <p:spPr>
+          <a:xfrm>
+            <a:off x="274320" y="548640"/>
+            <a:ext cx="10972800" cy="292608"/>
+          </a:xfrm>
+          <a:prstGeom prst="rect">
+            <a:avLst/>
+          </a:prstGeom>
+          <a:noFill/>
+        </p:spPr>
+        <p:txBody>
+          <a:bodyPr wrap="square">
+            <a:spAutoFit/>
+          </a:bodyPr>
+          <a:lstStyle/>
+          <a:p>
+            <a:pPr algn="l"/>
+            <a:r>
+              <a:rPr sz="1100" b="0" i="0">
+                <a:solidFill>
+                  <a:srgbClr val="F7941D"/>
+                </a:solidFill>
+              </a:rPr>
+              <a:t>Full picture including Hawkeye Phase 2 SOW ($632K) — Updated March 12, 2026</a:t>
+            </a:r>
+          </a:p>
+        </p:txBody>
+      </p:sp>
+      <p:sp>
+        <p:nvSpPr>
+          <p:cNvPr id="6" name="Rectangle 5"/>
+          <p:cNvSpPr/>
+          <p:nvPr/>
+        </p:nvSpPr>
+        <p:spPr>
+          <a:xfrm>
+            <a:off x="0" y="6583680"/>
+            <a:ext cx="12191695" cy="274320"/>
+          </a:xfrm>
+          <a:prstGeom prst="rect">
+            <a:avLst/>
+          </a:prstGeom>
+          <a:solidFill>
+            <a:srgbClr val="003387"/>
+          </a:solidFill>
+          <a:ln>
+            <a:noFill/>
+          </a:ln>
+        </p:spPr>
+        <p:style>
+          <a:lnRef idx="1">
+            <a:schemeClr val="accent1"/>
+          </a:lnRef>
+          <a:fillRef idx="3">
+            <a:schemeClr val="accent1"/>
+          </a:fillRef>
+          <a:effectRef idx="2">
+            <a:schemeClr val="accent1"/>
+          </a:effectRef>
+          <a:fontRef idx="minor">
+            <a:schemeClr val="lt1"/>
+          </a:fontRef>
+        </p:style>
+        <p:txBody>
+          <a:bodyPr rtlCol="0" anchor="ctr"/>
+          <a:lstStyle/>
+          <a:p>
+            <a:pPr algn="ctr"/>
+          </a:p>
+        </p:txBody>
+      </p:sp>
+      <p:sp>
+        <p:nvSpPr>
+          <p:cNvPr id="7" name="TextBox 6"/>
+          <p:cNvSpPr txBox="1"/>
+          <p:nvPr/>
+        </p:nvSpPr>
+        <p:spPr>
+          <a:xfrm>
+            <a:off x="274320" y="6601968"/>
+            <a:ext cx="10972800" cy="228600"/>
+          </a:xfrm>
+          <a:prstGeom prst="rect">
+            <a:avLst/>
+          </a:prstGeom>
+          <a:noFill/>
+        </p:spPr>
+        <p:txBody>
+          <a:bodyPr wrap="square">
+            <a:spAutoFit/>
+          </a:bodyPr>
+          <a:lstStyle/>
+          <a:p>
+            <a:pPr algn="l"/>
+            <a:r>
+              <a:rPr sz="800" b="0" i="0">
+                <a:solidFill>
+                  <a:srgbClr val="FFFFFF"/>
+                </a:solidFill>
+              </a:rPr>
+              <a:t>PSEG Long Island | JMUX Replacement Program | Confidential | March 2026</a:t>
+            </a:r>
+          </a:p>
+        </p:txBody>
+      </p:sp>
+      <p:sp>
+        <p:nvSpPr>
+          <p:cNvPr id="8" name="Rectangle 7"/>
+          <p:cNvSpPr/>
+          <p:nvPr/>
+        </p:nvSpPr>
+        <p:spPr>
+          <a:xfrm>
+            <a:off x="274320" y="1005840"/>
+            <a:ext cx="2743200" cy="1097280"/>
+          </a:xfrm>
+          <a:prstGeom prst="rect">
+            <a:avLst/>
+          </a:prstGeom>
+          <a:solidFill>
+            <a:srgbClr val="003387"/>
+          </a:solidFill>
+          <a:ln>
+            <a:noFill/>
+          </a:ln>
+        </p:spPr>
+        <p:style>
+          <a:lnRef idx="1">
+            <a:schemeClr val="accent1"/>
+          </a:lnRef>
+          <a:fillRef idx="3">
+            <a:schemeClr val="accent1"/>
+          </a:fillRef>
+          <a:effectRef idx="2">
+            <a:schemeClr val="accent1"/>
+          </a:effectRef>
+          <a:fontRef idx="minor">
+            <a:schemeClr val="lt1"/>
+          </a:fontRef>
+        </p:style>
+        <p:txBody>
+          <a:bodyPr rtlCol="0" anchor="ctr"/>
+          <a:lstStyle/>
+          <a:p>
+            <a:pPr algn="ctr"/>
+          </a:p>
+        </p:txBody>
+      </p:sp>
+      <p:sp>
+        <p:nvSpPr>
+          <p:cNvPr id="9" name="TextBox 8"/>
+          <p:cNvSpPr txBox="1"/>
+          <p:nvPr/>
+        </p:nvSpPr>
+        <p:spPr>
+          <a:xfrm>
+            <a:off x="365760" y="1051560"/>
+            <a:ext cx="2560320" cy="594360"/>
+          </a:xfrm>
+          <a:prstGeom prst="rect">
+            <a:avLst/>
+          </a:prstGeom>
+          <a:noFill/>
+        </p:spPr>
+        <p:txBody>
+          <a:bodyPr wrap="square">
+            <a:spAutoFit/>
+          </a:bodyPr>
+          <a:lstStyle/>
+          <a:p>
+            <a:pPr algn="ctr"/>
+            <a:r>
+              <a:rPr sz="1800" b="1" i="0">
+                <a:solidFill>
+                  <a:srgbClr val="FFFFFF"/>
+                </a:solidFill>
+              </a:rPr>
+              <a:t>$2,600,000</a:t>
+            </a:r>
+          </a:p>
+        </p:txBody>
+      </p:sp>
+      <p:sp>
+        <p:nvSpPr>
+          <p:cNvPr id="10" name="TextBox 9"/>
+          <p:cNvSpPr txBox="1"/>
+          <p:nvPr/>
+        </p:nvSpPr>
+        <p:spPr>
+          <a:xfrm>
+            <a:off x="365760" y="1600200"/>
+            <a:ext cx="2560320" cy="411480"/>
+          </a:xfrm>
+          <a:prstGeom prst="rect">
+            <a:avLst/>
+          </a:prstGeom>
+          <a:noFill/>
+        </p:spPr>
+        <p:txBody>
+          <a:bodyPr wrap="square">
+            <a:spAutoFit/>
+          </a:bodyPr>
+          <a:lstStyle/>
+          <a:p>
+            <a:pPr algn="ctr"/>
+            <a:r>
+              <a:rPr sz="1000" b="0" i="0">
+                <a:solidFill>
+                  <a:srgbClr val="FFFFFF"/>
+                </a:solidFill>
+              </a:rPr>
+              <a:t>2026 Capital Budget</a:t>
+            </a:r>
+          </a:p>
+        </p:txBody>
+      </p:sp>
+      <p:sp>
+        <p:nvSpPr>
+          <p:cNvPr id="11" name="Rectangle 10"/>
+          <p:cNvSpPr/>
+          <p:nvPr/>
+        </p:nvSpPr>
+        <p:spPr>
+          <a:xfrm>
+            <a:off x="3218688" y="1005840"/>
+            <a:ext cx="2743200" cy="1097280"/>
+          </a:xfrm>
+          <a:prstGeom prst="rect">
+            <a:avLst/>
+          </a:prstGeom>
+          <a:solidFill>
+            <a:srgbClr val="008000"/>
+          </a:solidFill>
+          <a:ln>
+            <a:noFill/>
+          </a:ln>
+        </p:spPr>
+        <p:style>
+          <a:lnRef idx="1">
+            <a:schemeClr val="accent1"/>
+          </a:lnRef>
+          <a:fillRef idx="3">
+            <a:schemeClr val="accent1"/>
+          </a:fillRef>
+          <a:effectRef idx="2">
+            <a:schemeClr val="accent1"/>
+          </a:effectRef>
+          <a:fontRef idx="minor">
+            <a:schemeClr val="lt1"/>
+          </a:fontRef>
+        </p:style>
+        <p:txBody>
+          <a:bodyPr rtlCol="0" anchor="ctr"/>
+          <a:lstStyle/>
+          <a:p>
+            <a:pPr algn="ctr"/>
+          </a:p>
+        </p:txBody>
+      </p:sp>
+      <p:sp>
+        <p:nvSpPr>
+          <p:cNvPr id="12" name="TextBox 11"/>
+          <p:cNvSpPr txBox="1"/>
+          <p:nvPr/>
+        </p:nvSpPr>
+        <p:spPr>
+          <a:xfrm>
+            <a:off x="3310128" y="1051560"/>
+            <a:ext cx="2560320" cy="594360"/>
+          </a:xfrm>
+          <a:prstGeom prst="rect">
+            <a:avLst/>
+          </a:prstGeom>
+          <a:noFill/>
+        </p:spPr>
+        <p:txBody>
+          <a:bodyPr wrap="square">
+            <a:spAutoFit/>
+          </a:bodyPr>
+          <a:lstStyle/>
+          <a:p>
+            <a:pPr algn="ctr"/>
+            <a:r>
+              <a:rPr sz="1800" b="1" i="0">
+                <a:solidFill>
+                  <a:srgbClr val="FFFFFF"/>
+                </a:solidFill>
+              </a:rPr>
+              <a:t>$851,055</a:t>
+            </a:r>
+          </a:p>
+        </p:txBody>
+      </p:sp>
+      <p:sp>
+        <p:nvSpPr>
+          <p:cNvPr id="13" name="TextBox 12"/>
+          <p:cNvSpPr txBox="1"/>
+          <p:nvPr/>
+        </p:nvSpPr>
+        <p:spPr>
+          <a:xfrm>
+            <a:off x="3310128" y="1600200"/>
+            <a:ext cx="2560320" cy="411480"/>
+          </a:xfrm>
+          <a:prstGeom prst="rect">
+            <a:avLst/>
+          </a:prstGeom>
+          <a:noFill/>
+        </p:spPr>
+        <p:txBody>
+          <a:bodyPr wrap="square">
+            <a:spAutoFit/>
+          </a:bodyPr>
+          <a:lstStyle/>
+          <a:p>
+            <a:pPr algn="ctr"/>
+            <a:r>
+              <a:rPr sz="1000" b="0" i="0">
+                <a:solidFill>
+                  <a:srgbClr val="FFFFFF"/>
+                </a:solidFill>
+              </a:rPr>
+              <a:t>Spent to Date (33%)</a:t>
+            </a:r>
+          </a:p>
+        </p:txBody>
+      </p:sp>
+      <p:sp>
+        <p:nvSpPr>
+          <p:cNvPr id="14" name="Rectangle 13"/>
+          <p:cNvSpPr/>
+          <p:nvPr/>
+        </p:nvSpPr>
+        <p:spPr>
+          <a:xfrm>
+            <a:off x="6163056" y="1005840"/>
+            <a:ext cx="2743200" cy="1097280"/>
+          </a:xfrm>
+          <a:prstGeom prst="rect">
+            <a:avLst/>
+          </a:prstGeom>
+          <a:solidFill>
+            <a:srgbClr val="C00000"/>
+          </a:solidFill>
+          <a:ln>
+            <a:noFill/>
+          </a:ln>
+        </p:spPr>
+        <p:style>
+          <a:lnRef idx="1">
+            <a:schemeClr val="accent1"/>
+          </a:lnRef>
+          <a:fillRef idx="3">
+            <a:schemeClr val="accent1"/>
+          </a:fillRef>
+          <a:effectRef idx="2">
+            <a:schemeClr val="accent1"/>
+          </a:effectRef>
+          <a:fontRef idx="minor">
+            <a:schemeClr val="lt1"/>
+          </a:fontRef>
+        </p:style>
+        <p:txBody>
+          <a:bodyPr rtlCol="0" anchor="ctr"/>
+          <a:lstStyle/>
+          <a:p>
+            <a:pPr algn="ctr"/>
+          </a:p>
+        </p:txBody>
+      </p:sp>
+      <p:sp>
+        <p:nvSpPr>
+          <p:cNvPr id="15" name="TextBox 14"/>
+          <p:cNvSpPr txBox="1"/>
+          <p:nvPr/>
+        </p:nvSpPr>
+        <p:spPr>
+          <a:xfrm>
+            <a:off x="6254496" y="1051560"/>
+            <a:ext cx="2560320" cy="594360"/>
+          </a:xfrm>
+          <a:prstGeom prst="rect">
+            <a:avLst/>
+          </a:prstGeom>
+          <a:noFill/>
+        </p:spPr>
+        <p:txBody>
+          <a:bodyPr wrap="square">
+            <a:spAutoFit/>
+          </a:bodyPr>
+          <a:lstStyle/>
+          <a:p>
+            <a:pPr algn="ctr"/>
+            <a:r>
+              <a:rPr sz="1800" b="1" i="0">
+                <a:solidFill>
+                  <a:srgbClr val="FFFFFF"/>
+                </a:solidFill>
+              </a:rPr>
+              <a:t>$2,921,137</a:t>
+            </a:r>
+          </a:p>
+        </p:txBody>
+      </p:sp>
+      <p:sp>
+        <p:nvSpPr>
+          <p:cNvPr id="16" name="TextBox 15"/>
+          <p:cNvSpPr txBox="1"/>
+          <p:nvPr/>
+        </p:nvSpPr>
+        <p:spPr>
+          <a:xfrm>
+            <a:off x="6254496" y="1600200"/>
+            <a:ext cx="2560320" cy="411480"/>
+          </a:xfrm>
+          <a:prstGeom prst="rect">
+            <a:avLst/>
+          </a:prstGeom>
+          <a:noFill/>
+        </p:spPr>
+        <p:txBody>
+          <a:bodyPr wrap="square">
+            <a:spAutoFit/>
+          </a:bodyPr>
+          <a:lstStyle/>
+          <a:p>
+            <a:pPr algn="ctr"/>
+            <a:r>
+              <a:rPr sz="1000" b="0" i="0">
+                <a:solidFill>
+                  <a:srgbClr val="FFFFFF"/>
+                </a:solidFill>
+              </a:rPr>
+              <a:t>Total ETC (Known)</a:t>
+            </a:r>
+          </a:p>
+        </p:txBody>
+      </p:sp>
+      <p:sp>
+        <p:nvSpPr>
+          <p:cNvPr id="17" name="Rectangle 16"/>
+          <p:cNvSpPr/>
+          <p:nvPr/>
+        </p:nvSpPr>
+        <p:spPr>
+          <a:xfrm>
+            <a:off x="9107424" y="1005840"/>
+            <a:ext cx="2743200" cy="1097280"/>
+          </a:xfrm>
+          <a:prstGeom prst="rect">
+            <a:avLst/>
+          </a:prstGeom>
+          <a:solidFill>
+            <a:srgbClr val="C00000"/>
+          </a:solidFill>
+          <a:ln>
+            <a:noFill/>
+          </a:ln>
+        </p:spPr>
+        <p:style>
+          <a:lnRef idx="1">
+            <a:schemeClr val="accent1"/>
+          </a:lnRef>
+          <a:fillRef idx="3">
+            <a:schemeClr val="accent1"/>
+          </a:fillRef>
+          <a:effectRef idx="2">
+            <a:schemeClr val="accent1"/>
+          </a:effectRef>
+          <a:fontRef idx="minor">
+            <a:schemeClr val="lt1"/>
+          </a:fontRef>
+        </p:style>
+        <p:txBody>
+          <a:bodyPr rtlCol="0" anchor="ctr"/>
+          <a:lstStyle/>
+          <a:p>
+            <a:pPr algn="ctr"/>
+          </a:p>
+        </p:txBody>
+      </p:sp>
+      <p:sp>
+        <p:nvSpPr>
+          <p:cNvPr id="18" name="TextBox 17"/>
+          <p:cNvSpPr txBox="1"/>
+          <p:nvPr/>
+        </p:nvSpPr>
+        <p:spPr>
+          <a:xfrm>
+            <a:off x="9198864" y="1051560"/>
+            <a:ext cx="2560320" cy="594360"/>
+          </a:xfrm>
+          <a:prstGeom prst="rect">
+            <a:avLst/>
+          </a:prstGeom>
+          <a:noFill/>
+        </p:spPr>
+        <p:txBody>
+          <a:bodyPr wrap="square">
+            <a:spAutoFit/>
+          </a:bodyPr>
+          <a:lstStyle/>
+          <a:p>
+            <a:pPr algn="ctr"/>
+            <a:r>
+              <a:rPr sz="1800" b="1" i="0">
+                <a:solidFill>
+                  <a:srgbClr val="FFFFFF"/>
+                </a:solidFill>
+              </a:rPr>
+              <a:t>-$1,172,192
+(-45%)</a:t>
+            </a:r>
+          </a:p>
+        </p:txBody>
+      </p:sp>
+      <p:sp>
+        <p:nvSpPr>
+          <p:cNvPr id="19" name="TextBox 18"/>
+          <p:cNvSpPr txBox="1"/>
+          <p:nvPr/>
+        </p:nvSpPr>
+        <p:spPr>
+          <a:xfrm>
+            <a:off x="9198864" y="1600200"/>
+            <a:ext cx="2560320" cy="411480"/>
+          </a:xfrm>
+          <a:prstGeom prst="rect">
+            <a:avLst/>
+          </a:prstGeom>
+          <a:noFill/>
+        </p:spPr>
+        <p:txBody>
+          <a:bodyPr wrap="square">
+            <a:spAutoFit/>
+          </a:bodyPr>
+          <a:lstStyle/>
+          <a:p>
+            <a:pPr algn="ctr"/>
+            <a:r>
+              <a:rPr sz="1000" b="0" i="0">
+                <a:solidFill>
+                  <a:srgbClr val="FFFFFF"/>
+                </a:solidFill>
+              </a:rPr>
+              <a:t>2026 Projected Variance</a:t>
+            </a:r>
+          </a:p>
+        </p:txBody>
+      </p:sp>
+      <p:sp>
+        <p:nvSpPr>
+          <p:cNvPr id="20" name="TextBox 19"/>
+          <p:cNvSpPr txBox="1"/>
+          <p:nvPr/>
+        </p:nvSpPr>
+        <p:spPr>
+          <a:xfrm>
+            <a:off x="274320" y="2240280"/>
+            <a:ext cx="7315200" cy="274320"/>
+          </a:xfrm>
+          <a:prstGeom prst="rect">
+            <a:avLst/>
+          </a:prstGeom>
+          <a:noFill/>
+        </p:spPr>
+        <p:txBody>
+          <a:bodyPr wrap="square">
+            <a:spAutoFit/>
+          </a:bodyPr>
+          <a:lstStyle/>
+          <a:p>
+            <a:pPr algn="l"/>
+            <a:r>
+              <a:rPr sz="1100" b="1" i="0">
+                <a:solidFill>
+                  <a:srgbClr val="404040"/>
+                </a:solidFill>
+              </a:rPr>
+              <a:t>2026 Budget Utilization &amp; Exposure</a:t>
+            </a:r>
+          </a:p>
+        </p:txBody>
+      </p:sp>
+      <p:sp>
+        <p:nvSpPr>
+          <p:cNvPr id="21" name="Rectangle 20"/>
+          <p:cNvSpPr/>
+          <p:nvPr/>
+        </p:nvSpPr>
+        <p:spPr>
+          <a:xfrm>
+            <a:off x="274320" y="2542032"/>
+            <a:ext cx="11612880" cy="347472"/>
+          </a:xfrm>
+          <a:prstGeom prst="rect">
+            <a:avLst/>
+          </a:prstGeom>
+          <a:solidFill>
+            <a:srgbClr val="F2F2F2"/>
+          </a:solidFill>
+          <a:ln>
+            <a:noFill/>
+          </a:ln>
+        </p:spPr>
+        <p:style>
+          <a:lnRef idx="1">
+            <a:schemeClr val="accent1"/>
+          </a:lnRef>
+          <a:fillRef idx="3">
+            <a:schemeClr val="accent1"/>
+          </a:fillRef>
+          <a:effectRef idx="2">
+            <a:schemeClr val="accent1"/>
+          </a:effectRef>
+          <a:fontRef idx="minor">
+            <a:schemeClr val="lt1"/>
+          </a:fontRef>
+        </p:style>
+        <p:txBody>
+          <a:bodyPr rtlCol="0" anchor="ctr"/>
+          <a:lstStyle/>
+          <a:p>
+            <a:pPr algn="ctr"/>
+          </a:p>
+        </p:txBody>
+      </p:sp>
+      <p:sp>
+        <p:nvSpPr>
+          <p:cNvPr id="22" name="Rectangle 21"/>
+          <p:cNvSpPr/>
+          <p:nvPr/>
+        </p:nvSpPr>
+        <p:spPr>
+          <a:xfrm>
+            <a:off x="274320" y="2542032"/>
+            <a:ext cx="3801230" cy="347472"/>
+          </a:xfrm>
+          <a:prstGeom prst="rect">
+            <a:avLst/>
+          </a:prstGeom>
+          <a:solidFill>
+            <a:srgbClr val="008000"/>
+          </a:solidFill>
+          <a:ln>
+            <a:noFill/>
+          </a:ln>
+        </p:spPr>
+        <p:style>
+          <a:lnRef idx="1">
+            <a:schemeClr val="accent1"/>
+          </a:lnRef>
+          <a:fillRef idx="3">
+            <a:schemeClr val="accent1"/>
+          </a:fillRef>
+          <a:effectRef idx="2">
+            <a:schemeClr val="accent1"/>
+          </a:effectRef>
+          <a:fontRef idx="minor">
+            <a:schemeClr val="lt1"/>
+          </a:fontRef>
+        </p:style>
+        <p:txBody>
+          <a:bodyPr rtlCol="0" anchor="ctr"/>
+          <a:lstStyle/>
+          <a:p>
+            <a:pPr algn="ctr"/>
+          </a:p>
+        </p:txBody>
+      </p:sp>
+      <p:sp>
+        <p:nvSpPr>
+          <p:cNvPr id="23" name="Rectangle 22"/>
+          <p:cNvSpPr/>
+          <p:nvPr/>
+        </p:nvSpPr>
+        <p:spPr>
+          <a:xfrm>
+            <a:off x="4075550" y="2542032"/>
+            <a:ext cx="7811649" cy="347472"/>
+          </a:xfrm>
+          <a:prstGeom prst="rect">
+            <a:avLst/>
+          </a:prstGeom>
+          <a:solidFill>
+            <a:srgbClr val="C00000"/>
+          </a:solidFill>
+          <a:ln>
+            <a:noFill/>
+          </a:ln>
+        </p:spPr>
+        <p:style>
+          <a:lnRef idx="1">
+            <a:schemeClr val="accent1"/>
+          </a:lnRef>
+          <a:fillRef idx="3">
+            <a:schemeClr val="accent1"/>
+          </a:fillRef>
+          <a:effectRef idx="2">
+            <a:schemeClr val="accent1"/>
+          </a:effectRef>
+          <a:fontRef idx="minor">
+            <a:schemeClr val="lt1"/>
+          </a:fontRef>
+        </p:style>
+        <p:txBody>
+          <a:bodyPr rtlCol="0" anchor="ctr"/>
+          <a:lstStyle/>
+          <a:p>
+            <a:pPr algn="ctr"/>
+          </a:p>
+        </p:txBody>
+      </p:sp>
+      <p:sp>
+        <p:nvSpPr>
+          <p:cNvPr id="24" name="TextBox 23"/>
+          <p:cNvSpPr txBox="1"/>
+          <p:nvPr/>
+        </p:nvSpPr>
+        <p:spPr>
+          <a:xfrm>
+            <a:off x="320040" y="2578608"/>
+            <a:ext cx="2743200" cy="274320"/>
+          </a:xfrm>
+          <a:prstGeom prst="rect">
+            <a:avLst/>
+          </a:prstGeom>
+          <a:noFill/>
+        </p:spPr>
+        <p:txBody>
+          <a:bodyPr wrap="square">
+            <a:spAutoFit/>
+          </a:bodyPr>
+          <a:lstStyle/>
+          <a:p>
+            <a:pPr algn="l"/>
+            <a:r>
+              <a:rPr sz="900" b="1" i="0">
+                <a:solidFill>
+                  <a:srgbClr val="FFFFFF"/>
+                </a:solidFill>
+              </a:rPr>
+              <a:t>▲ Spent: $851K (33%)</a:t>
+            </a:r>
+          </a:p>
+        </p:txBody>
+      </p:sp>
+      <p:sp>
+        <p:nvSpPr>
+          <p:cNvPr id="25" name="TextBox 24"/>
+          <p:cNvSpPr txBox="1"/>
+          <p:nvPr/>
+        </p:nvSpPr>
+        <p:spPr>
+          <a:xfrm>
+            <a:off x="4114800" y="2578608"/>
+            <a:ext cx="6400800" cy="274320"/>
+          </a:xfrm>
+          <a:prstGeom prst="rect">
+            <a:avLst/>
+          </a:prstGeom>
+          <a:noFill/>
+        </p:spPr>
+        <p:txBody>
+          <a:bodyPr wrap="square">
+            <a:spAutoFit/>
+          </a:bodyPr>
+          <a:lstStyle/>
+          <a:p>
+            <a:pPr algn="l"/>
+            <a:r>
+              <a:rPr sz="900" b="1" i="0">
+                <a:solidFill>
+                  <a:srgbClr val="FFFFFF"/>
+                </a:solidFill>
+              </a:rPr>
+              <a:t>▲ ETC: $2.92M — EXCEEDS BUDGET by $1.17M</a:t>
+            </a:r>
+          </a:p>
+        </p:txBody>
+      </p:sp>
+      <p:sp>
+        <p:nvSpPr>
+          <p:cNvPr id="26" name="Rectangle 25"/>
+          <p:cNvSpPr/>
+          <p:nvPr/>
+        </p:nvSpPr>
+        <p:spPr>
+          <a:xfrm>
+            <a:off x="11887200" y="2450592"/>
+            <a:ext cx="27432" cy="530352"/>
+          </a:xfrm>
+          <a:prstGeom prst="rect">
+            <a:avLst/>
+          </a:prstGeom>
+          <a:solidFill>
+            <a:srgbClr val="F7941D"/>
+          </a:solidFill>
+          <a:ln>
+            <a:noFill/>
+          </a:ln>
+        </p:spPr>
+        <p:style>
+          <a:lnRef idx="1">
+            <a:schemeClr val="accent1"/>
+          </a:lnRef>
+          <a:fillRef idx="3">
+            <a:schemeClr val="accent1"/>
+          </a:fillRef>
+          <a:effectRef idx="2">
+            <a:schemeClr val="accent1"/>
+          </a:effectRef>
+          <a:fontRef idx="minor">
+            <a:schemeClr val="lt1"/>
+          </a:fontRef>
+        </p:style>
+        <p:txBody>
+          <a:bodyPr rtlCol="0" anchor="ctr"/>
+          <a:lstStyle/>
+          <a:p>
+            <a:pPr algn="ctr"/>
+          </a:p>
+        </p:txBody>
+      </p:sp>
+      <p:sp>
+        <p:nvSpPr>
+          <p:cNvPr id="27" name="TextBox 26"/>
+          <p:cNvSpPr txBox="1"/>
+          <p:nvPr/>
+        </p:nvSpPr>
+        <p:spPr>
+          <a:xfrm>
+            <a:off x="11521440" y="2423160"/>
+            <a:ext cx="914400" cy="411480"/>
+          </a:xfrm>
+          <a:prstGeom prst="rect">
+            <a:avLst/>
+          </a:prstGeom>
+          <a:noFill/>
+        </p:spPr>
+        <p:txBody>
+          <a:bodyPr wrap="square">
+            <a:spAutoFit/>
+          </a:bodyPr>
+          <a:lstStyle/>
+          <a:p>
+            <a:pPr algn="l"/>
+            <a:r>
+              <a:rPr sz="800" b="1" i="0">
+                <a:solidFill>
+                  <a:srgbClr val="F7941D"/>
+                </a:solidFill>
+              </a:rPr>
+              <a:t>Budget
+$2.6M</a:t>
+            </a:r>
+          </a:p>
+        </p:txBody>
+      </p:sp>
+      <p:sp>
+        <p:nvSpPr>
+          <p:cNvPr id="28" name="Rectangle 27"/>
+          <p:cNvSpPr/>
+          <p:nvPr/>
+        </p:nvSpPr>
+        <p:spPr>
+          <a:xfrm>
+            <a:off x="274320" y="2999232"/>
+            <a:ext cx="6492240" cy="329184"/>
+          </a:xfrm>
+          <a:prstGeom prst="rect">
+            <a:avLst/>
+          </a:prstGeom>
+          <a:solidFill>
+            <a:srgbClr val="C00000"/>
+          </a:solidFill>
+          <a:ln>
+            <a:noFill/>
+          </a:ln>
+        </p:spPr>
+        <p:style>
+          <a:lnRef idx="1">
+            <a:schemeClr val="accent1"/>
+          </a:lnRef>
+          <a:fillRef idx="3">
+            <a:schemeClr val="accent1"/>
+          </a:fillRef>
+          <a:effectRef idx="2">
+            <a:schemeClr val="accent1"/>
+          </a:effectRef>
+          <a:fontRef idx="minor">
+            <a:schemeClr val="lt1"/>
+          </a:fontRef>
+        </p:style>
+        <p:txBody>
+          <a:bodyPr rtlCol="0" anchor="ctr"/>
+          <a:lstStyle/>
+          <a:p>
+            <a:pPr algn="ctr"/>
+          </a:p>
+        </p:txBody>
+      </p:sp>
+      <p:sp>
+        <p:nvSpPr>
+          <p:cNvPr id="29" name="TextBox 28"/>
+          <p:cNvSpPr txBox="1"/>
+          <p:nvPr/>
+        </p:nvSpPr>
+        <p:spPr>
+          <a:xfrm>
+            <a:off x="365760" y="3017520"/>
+            <a:ext cx="6400800" cy="274320"/>
+          </a:xfrm>
+          <a:prstGeom prst="rect">
+            <a:avLst/>
+          </a:prstGeom>
+          <a:noFill/>
+        </p:spPr>
+        <p:txBody>
+          <a:bodyPr wrap="square">
+            <a:spAutoFit/>
+          </a:bodyPr>
+          <a:lstStyle/>
+          <a:p>
+            <a:pPr algn="l"/>
+            <a:r>
+              <a:rPr sz="1100" b="1" i="0">
+                <a:solidFill>
+                  <a:srgbClr val="FFFFFF"/>
+                </a:solidFill>
+              </a:rPr>
+              <a:t>⚠  2026 COST DRIVERS</a:t>
+            </a:r>
+          </a:p>
+        </p:txBody>
+      </p:sp>
+      <p:sp>
+        <p:nvSpPr>
+          <p:cNvPr id="30" name="Rectangle 29"/>
+          <p:cNvSpPr/>
+          <p:nvPr/>
+        </p:nvSpPr>
+        <p:spPr>
+          <a:xfrm>
+            <a:off x="274320" y="3364992"/>
+            <a:ext cx="6492240" cy="374904"/>
+          </a:xfrm>
+          <a:prstGeom prst="rect">
+            <a:avLst/>
+          </a:prstGeom>
+          <a:solidFill>
+            <a:srgbClr val="FFE0E0"/>
+          </a:solidFill>
+          <a:ln w="6350">
+            <a:solidFill>
+              <a:srgbClr val="CCCCCC"/>
+            </a:solidFill>
+          </a:ln>
+        </p:spPr>
+        <p:style>
+          <a:lnRef idx="1">
+            <a:schemeClr val="accent1"/>
+          </a:lnRef>
+          <a:fillRef idx="3">
+            <a:schemeClr val="accent1"/>
+          </a:fillRef>
+          <a:effectRef idx="2">
+            <a:schemeClr val="accent1"/>
+          </a:effectRef>
+          <a:fontRef idx="minor">
+            <a:schemeClr val="lt1"/>
+          </a:fontRef>
+        </p:style>
+        <p:txBody>
+          <a:bodyPr rtlCol="0" anchor="ctr"/>
+          <a:lstStyle/>
+          <a:p>
+            <a:pPr algn="ctr"/>
+          </a:p>
+        </p:txBody>
+      </p:sp>
+      <p:sp>
+        <p:nvSpPr>
+          <p:cNvPr id="31" name="TextBox 30"/>
+          <p:cNvSpPr txBox="1"/>
+          <p:nvPr/>
+        </p:nvSpPr>
+        <p:spPr>
+          <a:xfrm>
+            <a:off x="365760" y="3401568"/>
+            <a:ext cx="5029200" cy="292608"/>
+          </a:xfrm>
+          <a:prstGeom prst="rect">
+            <a:avLst/>
+          </a:prstGeom>
+          <a:noFill/>
+        </p:spPr>
+        <p:txBody>
+          <a:bodyPr wrap="square">
+            <a:spAutoFit/>
+          </a:bodyPr>
+          <a:lstStyle/>
+          <a:p>
+            <a:pPr algn="l"/>
+            <a:r>
+              <a:rPr sz="1000" b="0" i="0">
+                <a:solidFill>
+                  <a:srgbClr val="404040"/>
+                </a:solidFill>
+              </a:rPr>
+              <a:t>Burns &amp; McDonnell Phase 2 SOW (reduced)</a:t>
+            </a:r>
+          </a:p>
+        </p:txBody>
+      </p:sp>
+      <p:sp>
+        <p:nvSpPr>
+          <p:cNvPr id="32" name="TextBox 31"/>
+          <p:cNvSpPr txBox="1"/>
+          <p:nvPr/>
+        </p:nvSpPr>
+        <p:spPr>
+          <a:xfrm>
+            <a:off x="5212080" y="3401568"/>
+            <a:ext cx="1463040" cy="292608"/>
+          </a:xfrm>
+          <a:prstGeom prst="rect">
+            <a:avLst/>
+          </a:prstGeom>
+          <a:noFill/>
+        </p:spPr>
+        <p:txBody>
+          <a:bodyPr wrap="square">
+            <a:spAutoFit/>
+          </a:bodyPr>
+          <a:lstStyle/>
+          <a:p>
+            <a:pPr algn="r"/>
+            <a:r>
+              <a:rPr sz="1000" b="0" i="0">
+                <a:solidFill>
+                  <a:srgbClr val="C00000"/>
+                </a:solidFill>
+              </a:rPr>
+              <a:t>$859,520</a:t>
+            </a:r>
+          </a:p>
+        </p:txBody>
+      </p:sp>
+      <p:sp>
+        <p:nvSpPr>
+          <p:cNvPr id="33" name="Rectangle 32"/>
+          <p:cNvSpPr/>
+          <p:nvPr/>
+        </p:nvSpPr>
+        <p:spPr>
+          <a:xfrm>
+            <a:off x="274320" y="3767328"/>
+            <a:ext cx="6492240" cy="374904"/>
+          </a:xfrm>
+          <a:prstGeom prst="rect">
+            <a:avLst/>
+          </a:prstGeom>
+          <a:solidFill>
+            <a:srgbClr val="FFE0E0"/>
+          </a:solidFill>
+          <a:ln w="6350">
+            <a:solidFill>
+              <a:srgbClr val="CCCCCC"/>
+            </a:solidFill>
+          </a:ln>
+        </p:spPr>
+        <p:style>
+          <a:lnRef idx="1">
+            <a:schemeClr val="accent1"/>
+          </a:lnRef>
+          <a:fillRef idx="3">
+            <a:schemeClr val="accent1"/>
+          </a:fillRef>
+          <a:effectRef idx="2">
+            <a:schemeClr val="accent1"/>
+          </a:effectRef>
+          <a:fontRef idx="minor">
+            <a:schemeClr val="lt1"/>
+          </a:fontRef>
+        </p:style>
+        <p:txBody>
+          <a:bodyPr rtlCol="0" anchor="ctr"/>
+          <a:lstStyle/>
+          <a:p>
+            <a:pPr algn="ctr"/>
+          </a:p>
+        </p:txBody>
+      </p:sp>
+      <p:sp>
+        <p:nvSpPr>
+          <p:cNvPr id="34" name="TextBox 33"/>
+          <p:cNvSpPr txBox="1"/>
+          <p:nvPr/>
+        </p:nvSpPr>
+        <p:spPr>
+          <a:xfrm>
+            <a:off x="365760" y="3803904"/>
+            <a:ext cx="5029200" cy="292608"/>
+          </a:xfrm>
+          <a:prstGeom prst="rect">
+            <a:avLst/>
+          </a:prstGeom>
+          <a:noFill/>
+        </p:spPr>
+        <p:txBody>
+          <a:bodyPr wrap="square">
+            <a:spAutoFit/>
+          </a:bodyPr>
+          <a:lstStyle/>
+          <a:p>
+            <a:pPr algn="l"/>
+            <a:r>
+              <a:rPr sz="1000" b="0" i="0">
+                <a:solidFill>
+                  <a:srgbClr val="404040"/>
+                </a:solidFill>
+              </a:rPr>
+              <a:t>Burns &amp; McDonnell Phase 3 (2026 portion)</a:t>
+            </a:r>
+          </a:p>
+        </p:txBody>
+      </p:sp>
+      <p:sp>
+        <p:nvSpPr>
+          <p:cNvPr id="35" name="TextBox 34"/>
+          <p:cNvSpPr txBox="1"/>
+          <p:nvPr/>
+        </p:nvSpPr>
+        <p:spPr>
+          <a:xfrm>
+            <a:off x="5212080" y="3803904"/>
+            <a:ext cx="1463040" cy="292608"/>
+          </a:xfrm>
+          <a:prstGeom prst="rect">
+            <a:avLst/>
+          </a:prstGeom>
+          <a:noFill/>
+        </p:spPr>
+        <p:txBody>
+          <a:bodyPr wrap="square">
+            <a:spAutoFit/>
+          </a:bodyPr>
+          <a:lstStyle/>
+          <a:p>
+            <a:pPr algn="r"/>
+            <a:r>
+              <a:rPr sz="1000" b="0" i="0">
+                <a:solidFill>
+                  <a:srgbClr val="C00000"/>
+                </a:solidFill>
+              </a:rPr>
+              <a:t>$588,011</a:t>
+            </a:r>
+          </a:p>
+        </p:txBody>
+      </p:sp>
+      <p:sp>
+        <p:nvSpPr>
+          <p:cNvPr id="36" name="Rectangle 35"/>
+          <p:cNvSpPr/>
+          <p:nvPr/>
+        </p:nvSpPr>
+        <p:spPr>
+          <a:xfrm>
+            <a:off x="274320" y="4169664"/>
+            <a:ext cx="6492240" cy="374904"/>
+          </a:xfrm>
+          <a:prstGeom prst="rect">
+            <a:avLst/>
+          </a:prstGeom>
+          <a:solidFill>
+            <a:srgbClr val="FFE0E0"/>
+          </a:solidFill>
+          <a:ln w="6350">
+            <a:solidFill>
+              <a:srgbClr val="CCCCCC"/>
+            </a:solidFill>
+          </a:ln>
+        </p:spPr>
+        <p:style>
+          <a:lnRef idx="1">
+            <a:schemeClr val="accent1"/>
+          </a:lnRef>
+          <a:fillRef idx="3">
+            <a:schemeClr val="accent1"/>
+          </a:fillRef>
+          <a:effectRef idx="2">
+            <a:schemeClr val="accent1"/>
+          </a:effectRef>
+          <a:fontRef idx="minor">
+            <a:schemeClr val="lt1"/>
+          </a:fontRef>
+        </p:style>
+        <p:txBody>
+          <a:bodyPr rtlCol="0" anchor="ctr"/>
+          <a:lstStyle/>
+          <a:p>
+            <a:pPr algn="ctr"/>
+          </a:p>
+        </p:txBody>
+      </p:sp>
+      <p:sp>
+        <p:nvSpPr>
+          <p:cNvPr id="37" name="TextBox 36"/>
+          <p:cNvSpPr txBox="1"/>
+          <p:nvPr/>
+        </p:nvSpPr>
+        <p:spPr>
+          <a:xfrm>
+            <a:off x="365760" y="4206240"/>
+            <a:ext cx="5029200" cy="292608"/>
+          </a:xfrm>
+          <a:prstGeom prst="rect">
+            <a:avLst/>
+          </a:prstGeom>
+          <a:noFill/>
+        </p:spPr>
+        <p:txBody>
+          <a:bodyPr wrap="square">
+            <a:spAutoFit/>
+          </a:bodyPr>
+          <a:lstStyle/>
+          <a:p>
+            <a:pPr algn="l"/>
+            <a:r>
+              <a:rPr sz="1000" b="0" i="0">
+                <a:solidFill>
+                  <a:srgbClr val="404040"/>
+                </a:solidFill>
+              </a:rPr>
+              <a:t>Nokia PO 7000001857 (added March 2026)</a:t>
+            </a:r>
+          </a:p>
+        </p:txBody>
+      </p:sp>
+      <p:sp>
+        <p:nvSpPr>
+          <p:cNvPr id="38" name="TextBox 37"/>
+          <p:cNvSpPr txBox="1"/>
+          <p:nvPr/>
+        </p:nvSpPr>
+        <p:spPr>
+          <a:xfrm>
+            <a:off x="5212080" y="4206240"/>
+            <a:ext cx="1463040" cy="292608"/>
+          </a:xfrm>
+          <a:prstGeom prst="rect">
+            <a:avLst/>
+          </a:prstGeom>
+          <a:noFill/>
+        </p:spPr>
+        <p:txBody>
+          <a:bodyPr wrap="square">
+            <a:spAutoFit/>
+          </a:bodyPr>
+          <a:lstStyle/>
+          <a:p>
+            <a:pPr algn="r"/>
+            <a:r>
+              <a:rPr sz="1000" b="0" i="0">
+                <a:solidFill>
+                  <a:srgbClr val="C00000"/>
+                </a:solidFill>
+              </a:rPr>
+              <a:t>$753,000</a:t>
+            </a:r>
+          </a:p>
+        </p:txBody>
+      </p:sp>
+      <p:sp>
+        <p:nvSpPr>
+          <p:cNvPr id="39" name="Rectangle 38"/>
+          <p:cNvSpPr/>
+          <p:nvPr/>
+        </p:nvSpPr>
+        <p:spPr>
+          <a:xfrm>
+            <a:off x="274320" y="4572000"/>
+            <a:ext cx="6492240" cy="374904"/>
+          </a:xfrm>
+          <a:prstGeom prst="rect">
+            <a:avLst/>
+          </a:prstGeom>
+          <a:solidFill>
+            <a:srgbClr val="FFE0E0"/>
+          </a:solidFill>
+          <a:ln w="6350">
+            <a:solidFill>
+              <a:srgbClr val="CCCCCC"/>
+            </a:solidFill>
+          </a:ln>
+        </p:spPr>
+        <p:style>
+          <a:lnRef idx="1">
+            <a:schemeClr val="accent1"/>
+          </a:lnRef>
+          <a:fillRef idx="3">
+            <a:schemeClr val="accent1"/>
+          </a:fillRef>
+          <a:effectRef idx="2">
+            <a:schemeClr val="accent1"/>
+          </a:effectRef>
+          <a:fontRef idx="minor">
+            <a:schemeClr val="lt1"/>
+          </a:fontRef>
+        </p:style>
+        <p:txBody>
+          <a:bodyPr rtlCol="0" anchor="ctr"/>
+          <a:lstStyle/>
+          <a:p>
+            <a:pPr algn="ctr"/>
+          </a:p>
+        </p:txBody>
+      </p:sp>
+      <p:sp>
+        <p:nvSpPr>
+          <p:cNvPr id="40" name="TextBox 39"/>
+          <p:cNvSpPr txBox="1"/>
+          <p:nvPr/>
+        </p:nvSpPr>
+        <p:spPr>
+          <a:xfrm>
+            <a:off x="365760" y="4608576"/>
+            <a:ext cx="5029200" cy="292608"/>
+          </a:xfrm>
+          <a:prstGeom prst="rect">
+            <a:avLst/>
+          </a:prstGeom>
+          <a:noFill/>
+        </p:spPr>
+        <p:txBody>
+          <a:bodyPr wrap="square">
+            <a:spAutoFit/>
+          </a:bodyPr>
+          <a:lstStyle/>
+          <a:p>
+            <a:pPr algn="l"/>
+            <a:r>
+              <a:rPr sz="1000" b="0" i="0">
+                <a:solidFill>
+                  <a:srgbClr val="404040"/>
+                </a:solidFill>
+              </a:rPr>
+              <a:t>Hawkeye Phase 2 Construction (36 sites)</a:t>
+            </a:r>
+          </a:p>
+        </p:txBody>
+      </p:sp>
+      <p:sp>
+        <p:nvSpPr>
+          <p:cNvPr id="41" name="TextBox 40"/>
+          <p:cNvSpPr txBox="1"/>
+          <p:nvPr/>
+        </p:nvSpPr>
+        <p:spPr>
+          <a:xfrm>
+            <a:off x="5212080" y="4608576"/>
+            <a:ext cx="1463040" cy="292608"/>
+          </a:xfrm>
+          <a:prstGeom prst="rect">
+            <a:avLst/>
+          </a:prstGeom>
+          <a:noFill/>
+        </p:spPr>
+        <p:txBody>
+          <a:bodyPr wrap="square">
+            <a:spAutoFit/>
+          </a:bodyPr>
+          <a:lstStyle/>
+          <a:p>
+            <a:pPr algn="r"/>
+            <a:r>
+              <a:rPr sz="1000" b="0" i="0">
+                <a:solidFill>
+                  <a:srgbClr val="C00000"/>
+                </a:solidFill>
+              </a:rPr>
+              <a:t>$632,303</a:t>
+            </a:r>
+          </a:p>
+        </p:txBody>
+      </p:sp>
+      <p:sp>
+        <p:nvSpPr>
+          <p:cNvPr id="42" name="Rectangle 41"/>
+          <p:cNvSpPr/>
+          <p:nvPr/>
+        </p:nvSpPr>
+        <p:spPr>
+          <a:xfrm>
+            <a:off x="274320" y="4974336"/>
+            <a:ext cx="6492240" cy="374904"/>
+          </a:xfrm>
+          <a:prstGeom prst="rect">
+            <a:avLst/>
+          </a:prstGeom>
+          <a:solidFill>
+            <a:srgbClr val="FFF8D0"/>
+          </a:solidFill>
+          <a:ln w="6350">
+            <a:solidFill>
+              <a:srgbClr val="CCCCCC"/>
+            </a:solidFill>
+          </a:ln>
+        </p:spPr>
+        <p:style>
+          <a:lnRef idx="1">
+            <a:schemeClr val="accent1"/>
+          </a:lnRef>
+          <a:fillRef idx="3">
+            <a:schemeClr val="accent1"/>
+          </a:fillRef>
+          <a:effectRef idx="2">
+            <a:schemeClr val="accent1"/>
+          </a:effectRef>
+          <a:fontRef idx="minor">
+            <a:schemeClr val="lt1"/>
+          </a:fontRef>
+        </p:style>
+        <p:txBody>
+          <a:bodyPr rtlCol="0" anchor="ctr"/>
+          <a:lstStyle/>
+          <a:p>
+            <a:pPr algn="ctr"/>
+          </a:p>
+        </p:txBody>
+      </p:sp>
+      <p:sp>
+        <p:nvSpPr>
+          <p:cNvPr id="43" name="TextBox 42"/>
+          <p:cNvSpPr txBox="1"/>
+          <p:nvPr/>
+        </p:nvSpPr>
+        <p:spPr>
+          <a:xfrm>
+            <a:off x="365760" y="5010912"/>
+            <a:ext cx="5029200" cy="292608"/>
+          </a:xfrm>
+          <a:prstGeom prst="rect">
+            <a:avLst/>
+          </a:prstGeom>
+          <a:noFill/>
+        </p:spPr>
+        <p:txBody>
+          <a:bodyPr wrap="square">
+            <a:spAutoFit/>
+          </a:bodyPr>
+          <a:lstStyle/>
+          <a:p>
+            <a:pPr algn="l"/>
+            <a:r>
+              <a:rPr sz="1000" b="0" i="0">
+                <a:solidFill>
+                  <a:srgbClr val="404040"/>
+                </a:solidFill>
+              </a:rPr>
+              <a:t>Phase 1 Outstanding WDs (WD8-13)</a:t>
+            </a:r>
+          </a:p>
+        </p:txBody>
+      </p:sp>
+      <p:sp>
+        <p:nvSpPr>
+          <p:cNvPr id="44" name="TextBox 43"/>
+          <p:cNvSpPr txBox="1"/>
+          <p:nvPr/>
+        </p:nvSpPr>
+        <p:spPr>
+          <a:xfrm>
+            <a:off x="5212080" y="5010912"/>
+            <a:ext cx="1463040" cy="292608"/>
+          </a:xfrm>
+          <a:prstGeom prst="rect">
+            <a:avLst/>
+          </a:prstGeom>
+          <a:noFill/>
+        </p:spPr>
+        <p:txBody>
+          <a:bodyPr wrap="square">
+            <a:spAutoFit/>
+          </a:bodyPr>
+          <a:lstStyle/>
+          <a:p>
+            <a:pPr algn="r"/>
+            <a:r>
+              <a:rPr sz="1000" b="0" i="0">
+                <a:solidFill>
+                  <a:srgbClr val="404040"/>
+                </a:solidFill>
+              </a:rPr>
+              <a:t>$88,303</a:t>
+            </a:r>
+          </a:p>
+        </p:txBody>
+      </p:sp>
+      <p:sp>
+        <p:nvSpPr>
+          <p:cNvPr id="45" name="Rectangle 44"/>
+          <p:cNvSpPr/>
+          <p:nvPr/>
+        </p:nvSpPr>
+        <p:spPr>
+          <a:xfrm>
+            <a:off x="274320" y="5376672"/>
+            <a:ext cx="6492240" cy="374904"/>
+          </a:xfrm>
+          <a:prstGeom prst="rect">
+            <a:avLst/>
+          </a:prstGeom>
+          <a:solidFill>
+            <a:srgbClr val="FFFFFF"/>
+          </a:solidFill>
+          <a:ln w="6350">
+            <a:solidFill>
+              <a:srgbClr val="CCCCCC"/>
+            </a:solidFill>
+          </a:ln>
+        </p:spPr>
+        <p:style>
+          <a:lnRef idx="1">
+            <a:schemeClr val="accent1"/>
+          </a:lnRef>
+          <a:fillRef idx="3">
+            <a:schemeClr val="accent1"/>
+          </a:fillRef>
+          <a:effectRef idx="2">
+            <a:schemeClr val="accent1"/>
+          </a:effectRef>
+          <a:fontRef idx="minor">
+            <a:schemeClr val="lt1"/>
+          </a:fontRef>
+        </p:style>
+        <p:txBody>
+          <a:bodyPr rtlCol="0" anchor="ctr"/>
+          <a:lstStyle/>
+          <a:p>
+            <a:pPr algn="ctr"/>
+          </a:p>
+        </p:txBody>
+      </p:sp>
+      <p:sp>
+        <p:nvSpPr>
+          <p:cNvPr id="46" name="TextBox 45"/>
+          <p:cNvSpPr txBox="1"/>
+          <p:nvPr/>
+        </p:nvSpPr>
+        <p:spPr>
+          <a:xfrm>
+            <a:off x="365760" y="5413248"/>
+            <a:ext cx="5029200" cy="292608"/>
+          </a:xfrm>
+          <a:prstGeom prst="rect">
+            <a:avLst/>
+          </a:prstGeom>
+          <a:noFill/>
+        </p:spPr>
+        <p:txBody>
+          <a:bodyPr wrap="square">
+            <a:spAutoFit/>
+          </a:bodyPr>
+          <a:lstStyle/>
+          <a:p>
+            <a:pPr algn="l"/>
+            <a:r>
+              <a:rPr sz="1000" b="0" i="0">
+                <a:solidFill>
+                  <a:srgbClr val="404040"/>
+                </a:solidFill>
+              </a:rPr>
+              <a:t/>
+            </a:r>
+          </a:p>
+        </p:txBody>
+      </p:sp>
+      <p:sp>
+        <p:nvSpPr>
+          <p:cNvPr id="47" name="TextBox 46"/>
+          <p:cNvSpPr txBox="1"/>
+          <p:nvPr/>
+        </p:nvSpPr>
+        <p:spPr>
+          <a:xfrm>
+            <a:off x="5212080" y="5413248"/>
+            <a:ext cx="1463040" cy="292608"/>
+          </a:xfrm>
+          <a:prstGeom prst="rect">
+            <a:avLst/>
+          </a:prstGeom>
+          <a:noFill/>
+        </p:spPr>
+        <p:txBody>
+          <a:bodyPr wrap="square">
+            <a:spAutoFit/>
+          </a:bodyPr>
+          <a:lstStyle/>
+          <a:p>
+            <a:pPr algn="r"/>
+            <a:r>
+              <a:rPr sz="1000" b="0" i="0">
+                <a:solidFill>
+                  <a:srgbClr val="404040"/>
+                </a:solidFill>
+              </a:rPr>
+              <a:t/>
+            </a:r>
+          </a:p>
+        </p:txBody>
+      </p:sp>
+      <p:sp>
+        <p:nvSpPr>
+          <p:cNvPr id="48" name="Rectangle 47"/>
+          <p:cNvSpPr/>
+          <p:nvPr/>
+        </p:nvSpPr>
+        <p:spPr>
+          <a:xfrm>
+            <a:off x="274320" y="5779008"/>
+            <a:ext cx="6492240" cy="374904"/>
+          </a:xfrm>
+          <a:prstGeom prst="rect">
+            <a:avLst/>
+          </a:prstGeom>
+          <a:solidFill>
+            <a:srgbClr val="C00000"/>
+          </a:solidFill>
+          <a:ln w="6350">
+            <a:solidFill>
+              <a:srgbClr val="CCCCCC"/>
+            </a:solidFill>
+          </a:ln>
+        </p:spPr>
+        <p:style>
+          <a:lnRef idx="1">
+            <a:schemeClr val="accent1"/>
+          </a:lnRef>
+          <a:fillRef idx="3">
+            <a:schemeClr val="accent1"/>
+          </a:fillRef>
+          <a:effectRef idx="2">
+            <a:schemeClr val="accent1"/>
+          </a:effectRef>
+          <a:fontRef idx="minor">
+            <a:schemeClr val="lt1"/>
+          </a:fontRef>
+        </p:style>
+        <p:txBody>
+          <a:bodyPr rtlCol="0" anchor="ctr"/>
+          <a:lstStyle/>
+          <a:p>
+            <a:pPr algn="ctr"/>
+          </a:p>
+        </p:txBody>
+      </p:sp>
+      <p:sp>
+        <p:nvSpPr>
+          <p:cNvPr id="49" name="TextBox 48"/>
+          <p:cNvSpPr txBox="1"/>
+          <p:nvPr/>
+        </p:nvSpPr>
+        <p:spPr>
+          <a:xfrm>
+            <a:off x="365760" y="5815584"/>
+            <a:ext cx="5029200" cy="292608"/>
+          </a:xfrm>
+          <a:prstGeom prst="rect">
+            <a:avLst/>
+          </a:prstGeom>
+          <a:noFill/>
+        </p:spPr>
+        <p:txBody>
+          <a:bodyPr wrap="square">
+            <a:spAutoFit/>
+          </a:bodyPr>
+          <a:lstStyle/>
+          <a:p>
+            <a:pPr algn="l"/>
+            <a:r>
+              <a:rPr sz="1000" b="1" i="0">
+                <a:solidFill>
+                  <a:srgbClr val="FFFFFF"/>
+                </a:solidFill>
+              </a:rPr>
+              <a:t>TOTAL KNOWN ETC</a:t>
+            </a:r>
+          </a:p>
+        </p:txBody>
+      </p:sp>
+      <p:sp>
+        <p:nvSpPr>
+          <p:cNvPr id="50" name="TextBox 49"/>
+          <p:cNvSpPr txBox="1"/>
+          <p:nvPr/>
+        </p:nvSpPr>
+        <p:spPr>
+          <a:xfrm>
+            <a:off x="5212080" y="5815584"/>
+            <a:ext cx="1463040" cy="292608"/>
+          </a:xfrm>
+          <a:prstGeom prst="rect">
+            <a:avLst/>
+          </a:prstGeom>
+          <a:noFill/>
+        </p:spPr>
+        <p:txBody>
+          <a:bodyPr wrap="square">
+            <a:spAutoFit/>
+          </a:bodyPr>
+          <a:lstStyle/>
+          <a:p>
+            <a:pPr algn="r"/>
+            <a:r>
+              <a:rPr sz="1000" b="1" i="0">
+                <a:solidFill>
+                  <a:srgbClr val="FFFFFF"/>
+                </a:solidFill>
+              </a:rPr>
+              <a:t>$2,921,137</a:t>
+            </a:r>
+          </a:p>
+        </p:txBody>
+      </p:sp>
+      <p:sp>
+        <p:nvSpPr>
+          <p:cNvPr id="51" name="Rectangle 50"/>
+          <p:cNvSpPr/>
+          <p:nvPr/>
+        </p:nvSpPr>
+        <p:spPr>
+          <a:xfrm>
+            <a:off x="6949440" y="2999232"/>
+            <a:ext cx="4937760" cy="329184"/>
+          </a:xfrm>
+          <a:prstGeom prst="rect">
+            <a:avLst/>
+          </a:prstGeom>
+          <a:solidFill>
+            <a:srgbClr val="003387"/>
+          </a:solidFill>
+          <a:ln>
+            <a:noFill/>
+          </a:ln>
+        </p:spPr>
+        <p:style>
+          <a:lnRef idx="1">
+            <a:schemeClr val="accent1"/>
+          </a:lnRef>
+          <a:fillRef idx="3">
+            <a:schemeClr val="accent1"/>
+          </a:fillRef>
+          <a:effectRef idx="2">
+            <a:schemeClr val="accent1"/>
+          </a:effectRef>
+          <a:fontRef idx="minor">
+            <a:schemeClr val="lt1"/>
+          </a:fontRef>
+        </p:style>
+        <p:txBody>
+          <a:bodyPr rtlCol="0" anchor="ctr"/>
+          <a:lstStyle/>
+          <a:p>
+            <a:pPr algn="ctr"/>
+          </a:p>
+        </p:txBody>
+      </p:sp>
+      <p:sp>
+        <p:nvSpPr>
+          <p:cNvPr id="52" name="TextBox 51"/>
+          <p:cNvSpPr txBox="1"/>
+          <p:nvPr/>
+        </p:nvSpPr>
+        <p:spPr>
+          <a:xfrm>
+            <a:off x="7040880" y="3017520"/>
+            <a:ext cx="4754880" cy="274320"/>
+          </a:xfrm>
+          <a:prstGeom prst="rect">
+            <a:avLst/>
+          </a:prstGeom>
+          <a:noFill/>
+        </p:spPr>
+        <p:txBody>
+          <a:bodyPr wrap="square">
+            <a:spAutoFit/>
+          </a:bodyPr>
+          <a:lstStyle/>
+          <a:p>
+            <a:pPr algn="l"/>
+            <a:r>
+              <a:rPr sz="1100" b="1" i="0">
+                <a:solidFill>
+                  <a:srgbClr val="FFFFFF"/>
+                </a:solidFill>
+              </a:rPr>
+              <a:t>📅  HAWKEYE PH2 MILESTONE SCHEDULE</a:t>
+            </a:r>
+          </a:p>
+        </p:txBody>
+      </p:sp>
+      <p:sp>
+        <p:nvSpPr>
+          <p:cNvPr id="53" name="Rectangle 52"/>
+          <p:cNvSpPr/>
+          <p:nvPr/>
+        </p:nvSpPr>
+        <p:spPr>
+          <a:xfrm>
+            <a:off x="6949440" y="3364992"/>
+            <a:ext cx="4937760" cy="374904"/>
+          </a:xfrm>
+          <a:prstGeom prst="rect">
+            <a:avLst/>
+          </a:prstGeom>
+          <a:solidFill>
+            <a:srgbClr val="F2F2F2"/>
+          </a:solidFill>
+          <a:ln w="6350">
+            <a:solidFill>
+              <a:srgbClr val="CCCCCC"/>
+            </a:solidFill>
+          </a:ln>
+        </p:spPr>
+        <p:style>
+          <a:lnRef idx="1">
+            <a:schemeClr val="accent1"/>
+          </a:lnRef>
+          <a:fillRef idx="3">
+            <a:schemeClr val="accent1"/>
+          </a:fillRef>
+          <a:effectRef idx="2">
+            <a:schemeClr val="accent1"/>
+          </a:effectRef>
+          <a:fontRef idx="minor">
+            <a:schemeClr val="lt1"/>
+          </a:fontRef>
+        </p:style>
+        <p:txBody>
+          <a:bodyPr rtlCol="0" anchor="ctr"/>
+          <a:lstStyle/>
+          <a:p>
+            <a:pPr algn="ctr"/>
+          </a:p>
+        </p:txBody>
+      </p:sp>
+      <p:sp>
+        <p:nvSpPr>
+          <p:cNvPr id="54" name="TextBox 53"/>
+          <p:cNvSpPr txBox="1"/>
+          <p:nvPr/>
+        </p:nvSpPr>
+        <p:spPr>
+          <a:xfrm>
+            <a:off x="7040880" y="3401568"/>
+            <a:ext cx="2377440" cy="292608"/>
+          </a:xfrm>
+          <a:prstGeom prst="rect">
+            <a:avLst/>
+          </a:prstGeom>
+          <a:noFill/>
+        </p:spPr>
+        <p:txBody>
+          <a:bodyPr wrap="square">
+            <a:spAutoFit/>
+          </a:bodyPr>
+          <a:lstStyle/>
+          <a:p>
+            <a:pPr algn="l"/>
+            <a:r>
+              <a:rPr sz="900" b="0" i="0">
+                <a:solidFill>
+                  <a:srgbClr val="404040"/>
+                </a:solidFill>
+              </a:rPr>
+              <a:t>WD #8–13 Outstanding WDs</a:t>
+            </a:r>
+          </a:p>
+        </p:txBody>
+      </p:sp>
+      <p:sp>
+        <p:nvSpPr>
+          <p:cNvPr id="55" name="TextBox 54"/>
+          <p:cNvSpPr txBox="1"/>
+          <p:nvPr/>
+        </p:nvSpPr>
+        <p:spPr>
+          <a:xfrm>
+            <a:off x="9235440" y="3401568"/>
+            <a:ext cx="1097280" cy="292608"/>
+          </a:xfrm>
+          <a:prstGeom prst="rect">
+            <a:avLst/>
+          </a:prstGeom>
+          <a:noFill/>
+        </p:spPr>
+        <p:txBody>
+          <a:bodyPr wrap="square">
+            <a:spAutoFit/>
+          </a:bodyPr>
+          <a:lstStyle/>
+          <a:p>
+            <a:pPr algn="ctr"/>
+            <a:r>
+              <a:rPr sz="900" b="0" i="0">
+                <a:solidFill>
+                  <a:srgbClr val="003387"/>
+                </a:solidFill>
+              </a:rPr>
+              <a:t>In Progress</a:t>
+            </a:r>
+          </a:p>
+        </p:txBody>
+      </p:sp>
+      <p:sp>
+        <p:nvSpPr>
+          <p:cNvPr id="56" name="TextBox 55"/>
+          <p:cNvSpPr txBox="1"/>
+          <p:nvPr/>
+        </p:nvSpPr>
+        <p:spPr>
+          <a:xfrm>
+            <a:off x="10241280" y="3401568"/>
+            <a:ext cx="1554480" cy="292608"/>
+          </a:xfrm>
+          <a:prstGeom prst="rect">
+            <a:avLst/>
+          </a:prstGeom>
+          <a:noFill/>
+        </p:spPr>
+        <p:txBody>
+          <a:bodyPr wrap="square">
+            <a:spAutoFit/>
+          </a:bodyPr>
+          <a:lstStyle/>
+          <a:p>
+            <a:pPr algn="r"/>
+            <a:r>
+              <a:rPr sz="900" b="0" i="0">
+                <a:solidFill>
+                  <a:srgbClr val="404040"/>
+                </a:solidFill>
+              </a:rPr>
+              <a:t>$88,303</a:t>
+            </a:r>
+          </a:p>
+        </p:txBody>
+      </p:sp>
+      <p:sp>
+        <p:nvSpPr>
+          <p:cNvPr id="57" name="Rectangle 56"/>
+          <p:cNvSpPr/>
+          <p:nvPr/>
+        </p:nvSpPr>
+        <p:spPr>
+          <a:xfrm>
+            <a:off x="6949440" y="3767328"/>
+            <a:ext cx="4937760" cy="374904"/>
+          </a:xfrm>
+          <a:prstGeom prst="rect">
+            <a:avLst/>
+          </a:prstGeom>
+          <a:solidFill>
+            <a:srgbClr val="FFFFFF"/>
+          </a:solidFill>
+          <a:ln w="6350">
+            <a:solidFill>
+              <a:srgbClr val="CCCCCC"/>
+            </a:solidFill>
+          </a:ln>
+        </p:spPr>
+        <p:style>
+          <a:lnRef idx="1">
+            <a:schemeClr val="accent1"/>
+          </a:lnRef>
+          <a:fillRef idx="3">
+            <a:schemeClr val="accent1"/>
+          </a:fillRef>
+          <a:effectRef idx="2">
+            <a:schemeClr val="accent1"/>
+          </a:effectRef>
+          <a:fontRef idx="minor">
+            <a:schemeClr val="lt1"/>
+          </a:fontRef>
+        </p:style>
+        <p:txBody>
+          <a:bodyPr rtlCol="0" anchor="ctr"/>
+          <a:lstStyle/>
+          <a:p>
+            <a:pPr algn="ctr"/>
+          </a:p>
+        </p:txBody>
+      </p:sp>
+      <p:sp>
+        <p:nvSpPr>
+          <p:cNvPr id="58" name="TextBox 57"/>
+          <p:cNvSpPr txBox="1"/>
+          <p:nvPr/>
+        </p:nvSpPr>
+        <p:spPr>
+          <a:xfrm>
+            <a:off x="7040880" y="3803904"/>
+            <a:ext cx="2377440" cy="292608"/>
+          </a:xfrm>
+          <a:prstGeom prst="rect">
+            <a:avLst/>
+          </a:prstGeom>
+          <a:noFill/>
+        </p:spPr>
+        <p:txBody>
+          <a:bodyPr wrap="square">
+            <a:spAutoFit/>
+          </a:bodyPr>
+          <a:lstStyle/>
+          <a:p>
+            <a:pPr algn="l"/>
+            <a:r>
+              <a:rPr sz="900" b="0" i="0">
+                <a:solidFill>
+                  <a:srgbClr val="404040"/>
+                </a:solidFill>
+              </a:rPr>
+              <a:t>M1 Services &amp; Deliverables</a:t>
+            </a:r>
+          </a:p>
+        </p:txBody>
+      </p:sp>
+      <p:sp>
+        <p:nvSpPr>
+          <p:cNvPr id="59" name="TextBox 58"/>
+          <p:cNvSpPr txBox="1"/>
+          <p:nvPr/>
+        </p:nvSpPr>
+        <p:spPr>
+          <a:xfrm>
+            <a:off x="9235440" y="3803904"/>
+            <a:ext cx="1097280" cy="292608"/>
+          </a:xfrm>
+          <a:prstGeom prst="rect">
+            <a:avLst/>
+          </a:prstGeom>
+          <a:noFill/>
+        </p:spPr>
+        <p:txBody>
+          <a:bodyPr wrap="square">
+            <a:spAutoFit/>
+          </a:bodyPr>
+          <a:lstStyle/>
+          <a:p>
+            <a:pPr algn="ctr"/>
+            <a:r>
+              <a:rPr sz="900" b="0" i="0">
+                <a:solidFill>
+                  <a:srgbClr val="003387"/>
+                </a:solidFill>
+              </a:rPr>
+              <a:t>3/30/2026</a:t>
+            </a:r>
+          </a:p>
+        </p:txBody>
+      </p:sp>
+      <p:sp>
+        <p:nvSpPr>
+          <p:cNvPr id="60" name="TextBox 59"/>
+          <p:cNvSpPr txBox="1"/>
+          <p:nvPr/>
+        </p:nvSpPr>
+        <p:spPr>
+          <a:xfrm>
+            <a:off x="10241280" y="3803904"/>
+            <a:ext cx="1554480" cy="292608"/>
+          </a:xfrm>
+          <a:prstGeom prst="rect">
+            <a:avLst/>
+          </a:prstGeom>
+          <a:noFill/>
+        </p:spPr>
+        <p:txBody>
+          <a:bodyPr wrap="square">
+            <a:spAutoFit/>
+          </a:bodyPr>
+          <a:lstStyle/>
+          <a:p>
+            <a:pPr algn="r"/>
+            <a:r>
+              <a:rPr sz="900" b="0" i="0">
+                <a:solidFill>
+                  <a:srgbClr val="404040"/>
+                </a:solidFill>
+              </a:rPr>
+              <a:t>$99,000</a:t>
+            </a:r>
+          </a:p>
+        </p:txBody>
+      </p:sp>
+      <p:sp>
+        <p:nvSpPr>
+          <p:cNvPr id="61" name="Rectangle 60"/>
+          <p:cNvSpPr/>
+          <p:nvPr/>
+        </p:nvSpPr>
+        <p:spPr>
+          <a:xfrm>
+            <a:off x="6949440" y="4169664"/>
+            <a:ext cx="4937760" cy="374904"/>
+          </a:xfrm>
+          <a:prstGeom prst="rect">
+            <a:avLst/>
+          </a:prstGeom>
+          <a:solidFill>
+            <a:srgbClr val="F2F2F2"/>
+          </a:solidFill>
+          <a:ln w="6350">
+            <a:solidFill>
+              <a:srgbClr val="CCCCCC"/>
+            </a:solidFill>
+          </a:ln>
+        </p:spPr>
+        <p:style>
+          <a:lnRef idx="1">
+            <a:schemeClr val="accent1"/>
+          </a:lnRef>
+          <a:fillRef idx="3">
+            <a:schemeClr val="accent1"/>
+          </a:fillRef>
+          <a:effectRef idx="2">
+            <a:schemeClr val="accent1"/>
+          </a:effectRef>
+          <a:fontRef idx="minor">
+            <a:schemeClr val="lt1"/>
+          </a:fontRef>
+        </p:style>
+        <p:txBody>
+          <a:bodyPr rtlCol="0" anchor="ctr"/>
+          <a:lstStyle/>
+          <a:p>
+            <a:pPr algn="ctr"/>
+          </a:p>
+        </p:txBody>
+      </p:sp>
+      <p:sp>
+        <p:nvSpPr>
+          <p:cNvPr id="62" name="TextBox 61"/>
+          <p:cNvSpPr txBox="1"/>
+          <p:nvPr/>
+        </p:nvSpPr>
+        <p:spPr>
+          <a:xfrm>
+            <a:off x="7040880" y="4206240"/>
+            <a:ext cx="2377440" cy="292608"/>
+          </a:xfrm>
+          <a:prstGeom prst="rect">
+            <a:avLst/>
+          </a:prstGeom>
+          <a:noFill/>
+        </p:spPr>
+        <p:txBody>
+          <a:bodyPr wrap="square">
+            <a:spAutoFit/>
+          </a:bodyPr>
+          <a:lstStyle/>
+          <a:p>
+            <a:pPr algn="l"/>
+            <a:r>
+              <a:rPr sz="900" b="0" i="0">
+                <a:solidFill>
+                  <a:srgbClr val="404040"/>
+                </a:solidFill>
+              </a:rPr>
+              <a:t>M2 Services &amp; Deliverables</a:t>
+            </a:r>
+          </a:p>
+        </p:txBody>
+      </p:sp>
+      <p:sp>
+        <p:nvSpPr>
+          <p:cNvPr id="63" name="TextBox 62"/>
+          <p:cNvSpPr txBox="1"/>
+          <p:nvPr/>
+        </p:nvSpPr>
+        <p:spPr>
+          <a:xfrm>
+            <a:off x="9235440" y="4206240"/>
+            <a:ext cx="1097280" cy="292608"/>
+          </a:xfrm>
+          <a:prstGeom prst="rect">
+            <a:avLst/>
+          </a:prstGeom>
+          <a:noFill/>
+        </p:spPr>
+        <p:txBody>
+          <a:bodyPr wrap="square">
+            <a:spAutoFit/>
+          </a:bodyPr>
+          <a:lstStyle/>
+          <a:p>
+            <a:pPr algn="ctr"/>
+            <a:r>
+              <a:rPr sz="900" b="0" i="0">
+                <a:solidFill>
+                  <a:srgbClr val="003387"/>
+                </a:solidFill>
+              </a:rPr>
+              <a:t>4/30/2026</a:t>
+            </a:r>
+          </a:p>
+        </p:txBody>
+      </p:sp>
+      <p:sp>
+        <p:nvSpPr>
+          <p:cNvPr id="64" name="TextBox 63"/>
+          <p:cNvSpPr txBox="1"/>
+          <p:nvPr/>
+        </p:nvSpPr>
+        <p:spPr>
+          <a:xfrm>
+            <a:off x="10241280" y="4206240"/>
+            <a:ext cx="1554480" cy="292608"/>
+          </a:xfrm>
+          <a:prstGeom prst="rect">
+            <a:avLst/>
+          </a:prstGeom>
+          <a:noFill/>
+        </p:spPr>
+        <p:txBody>
+          <a:bodyPr wrap="square">
+            <a:spAutoFit/>
+          </a:bodyPr>
+          <a:lstStyle/>
+          <a:p>
+            <a:pPr algn="r"/>
+            <a:r>
+              <a:rPr sz="900" b="0" i="0">
+                <a:solidFill>
+                  <a:srgbClr val="404040"/>
+                </a:solidFill>
+              </a:rPr>
+              <a:t>$89,000</a:t>
+            </a:r>
+          </a:p>
+        </p:txBody>
+      </p:sp>
+      <p:sp>
+        <p:nvSpPr>
+          <p:cNvPr id="65" name="Rectangle 64"/>
+          <p:cNvSpPr/>
+          <p:nvPr/>
+        </p:nvSpPr>
+        <p:spPr>
+          <a:xfrm>
+            <a:off x="6949440" y="4572000"/>
+            <a:ext cx="4937760" cy="374904"/>
+          </a:xfrm>
+          <a:prstGeom prst="rect">
+            <a:avLst/>
+          </a:prstGeom>
+          <a:solidFill>
+            <a:srgbClr val="FFFFFF"/>
+          </a:solidFill>
+          <a:ln w="6350">
+            <a:solidFill>
+              <a:srgbClr val="CCCCCC"/>
+            </a:solidFill>
+          </a:ln>
+        </p:spPr>
+        <p:style>
+          <a:lnRef idx="1">
+            <a:schemeClr val="accent1"/>
+          </a:lnRef>
+          <a:fillRef idx="3">
+            <a:schemeClr val="accent1"/>
+          </a:fillRef>
+          <a:effectRef idx="2">
+            <a:schemeClr val="accent1"/>
+          </a:effectRef>
+          <a:fontRef idx="minor">
+            <a:schemeClr val="lt1"/>
+          </a:fontRef>
+        </p:style>
+        <p:txBody>
+          <a:bodyPr rtlCol="0" anchor="ctr"/>
+          <a:lstStyle/>
+          <a:p>
+            <a:pPr algn="ctr"/>
+          </a:p>
+        </p:txBody>
+      </p:sp>
+      <p:sp>
+        <p:nvSpPr>
+          <p:cNvPr id="66" name="TextBox 65"/>
+          <p:cNvSpPr txBox="1"/>
+          <p:nvPr/>
+        </p:nvSpPr>
+        <p:spPr>
+          <a:xfrm>
+            <a:off x="7040880" y="4608576"/>
+            <a:ext cx="2377440" cy="292608"/>
+          </a:xfrm>
+          <a:prstGeom prst="rect">
+            <a:avLst/>
+          </a:prstGeom>
+          <a:noFill/>
+        </p:spPr>
+        <p:txBody>
+          <a:bodyPr wrap="square">
+            <a:spAutoFit/>
+          </a:bodyPr>
+          <a:lstStyle/>
+          <a:p>
+            <a:pPr algn="l"/>
+            <a:r>
+              <a:rPr sz="900" b="0" i="0">
+                <a:solidFill>
+                  <a:srgbClr val="404040"/>
+                </a:solidFill>
+              </a:rPr>
+              <a:t>M3 Services &amp; Deliverables</a:t>
+            </a:r>
+          </a:p>
+        </p:txBody>
+      </p:sp>
+      <p:sp>
+        <p:nvSpPr>
+          <p:cNvPr id="67" name="TextBox 66"/>
+          <p:cNvSpPr txBox="1"/>
+          <p:nvPr/>
+        </p:nvSpPr>
+        <p:spPr>
+          <a:xfrm>
+            <a:off x="9235440" y="4608576"/>
+            <a:ext cx="1097280" cy="292608"/>
+          </a:xfrm>
+          <a:prstGeom prst="rect">
+            <a:avLst/>
+          </a:prstGeom>
+          <a:noFill/>
+        </p:spPr>
+        <p:txBody>
+          <a:bodyPr wrap="square">
+            <a:spAutoFit/>
+          </a:bodyPr>
+          <a:lstStyle/>
+          <a:p>
+            <a:pPr algn="ctr"/>
+            <a:r>
+              <a:rPr sz="900" b="0" i="0">
+                <a:solidFill>
+                  <a:srgbClr val="003387"/>
+                </a:solidFill>
+              </a:rPr>
+              <a:t>5/30/2026</a:t>
+            </a:r>
+          </a:p>
+        </p:txBody>
+      </p:sp>
+      <p:sp>
+        <p:nvSpPr>
+          <p:cNvPr id="68" name="TextBox 67"/>
+          <p:cNvSpPr txBox="1"/>
+          <p:nvPr/>
+        </p:nvSpPr>
+        <p:spPr>
+          <a:xfrm>
+            <a:off x="10241280" y="4608576"/>
+            <a:ext cx="1554480" cy="292608"/>
+          </a:xfrm>
+          <a:prstGeom prst="rect">
+            <a:avLst/>
+          </a:prstGeom>
+          <a:noFill/>
+        </p:spPr>
+        <p:txBody>
+          <a:bodyPr wrap="square">
+            <a:spAutoFit/>
+          </a:bodyPr>
+          <a:lstStyle/>
+          <a:p>
+            <a:pPr algn="r"/>
+            <a:r>
+              <a:rPr sz="900" b="0" i="0">
+                <a:solidFill>
+                  <a:srgbClr val="404040"/>
+                </a:solidFill>
+              </a:rPr>
+              <a:t>$89,000</a:t>
+            </a:r>
+          </a:p>
+        </p:txBody>
+      </p:sp>
+      <p:sp>
+        <p:nvSpPr>
+          <p:cNvPr id="69" name="Rectangle 68"/>
+          <p:cNvSpPr/>
+          <p:nvPr/>
+        </p:nvSpPr>
+        <p:spPr>
+          <a:xfrm>
+            <a:off x="6949440" y="4974336"/>
+            <a:ext cx="4937760" cy="374904"/>
+          </a:xfrm>
+          <a:prstGeom prst="rect">
+            <a:avLst/>
+          </a:prstGeom>
+          <a:solidFill>
+            <a:srgbClr val="F2F2F2"/>
+          </a:solidFill>
+          <a:ln w="6350">
+            <a:solidFill>
+              <a:srgbClr val="CCCCCC"/>
+            </a:solidFill>
+          </a:ln>
+        </p:spPr>
+        <p:style>
+          <a:lnRef idx="1">
+            <a:schemeClr val="accent1"/>
+          </a:lnRef>
+          <a:fillRef idx="3">
+            <a:schemeClr val="accent1"/>
+          </a:fillRef>
+          <a:effectRef idx="2">
+            <a:schemeClr val="accent1"/>
+          </a:effectRef>
+          <a:fontRef idx="minor">
+            <a:schemeClr val="lt1"/>
+          </a:fontRef>
+        </p:style>
+        <p:txBody>
+          <a:bodyPr rtlCol="0" anchor="ctr"/>
+          <a:lstStyle/>
+          <a:p>
+            <a:pPr algn="ctr"/>
+          </a:p>
+        </p:txBody>
+      </p:sp>
+      <p:sp>
+        <p:nvSpPr>
+          <p:cNvPr id="70" name="TextBox 69"/>
+          <p:cNvSpPr txBox="1"/>
+          <p:nvPr/>
+        </p:nvSpPr>
+        <p:spPr>
+          <a:xfrm>
+            <a:off x="7040880" y="5010912"/>
+            <a:ext cx="2377440" cy="292608"/>
+          </a:xfrm>
+          <a:prstGeom prst="rect">
+            <a:avLst/>
+          </a:prstGeom>
+          <a:noFill/>
+        </p:spPr>
+        <p:txBody>
+          <a:bodyPr wrap="square">
+            <a:spAutoFit/>
+          </a:bodyPr>
+          <a:lstStyle/>
+          <a:p>
+            <a:pPr algn="l"/>
+            <a:r>
+              <a:rPr sz="900" b="0" i="0">
+                <a:solidFill>
+                  <a:srgbClr val="404040"/>
+                </a:solidFill>
+              </a:rPr>
+              <a:t>M3 Services &amp; Deliverables</a:t>
+            </a:r>
+          </a:p>
+        </p:txBody>
+      </p:sp>
+      <p:sp>
+        <p:nvSpPr>
+          <p:cNvPr id="71" name="TextBox 70"/>
+          <p:cNvSpPr txBox="1"/>
+          <p:nvPr/>
+        </p:nvSpPr>
+        <p:spPr>
+          <a:xfrm>
+            <a:off x="9235440" y="5010912"/>
+            <a:ext cx="1097280" cy="292608"/>
+          </a:xfrm>
+          <a:prstGeom prst="rect">
+            <a:avLst/>
+          </a:prstGeom>
+          <a:noFill/>
+        </p:spPr>
+        <p:txBody>
+          <a:bodyPr wrap="square">
+            <a:spAutoFit/>
+          </a:bodyPr>
+          <a:lstStyle/>
+          <a:p>
+            <a:pPr algn="ctr"/>
+            <a:r>
+              <a:rPr sz="900" b="0" i="0">
+                <a:solidFill>
+                  <a:srgbClr val="003387"/>
+                </a:solidFill>
+              </a:rPr>
+              <a:t>6/30/2026</a:t>
+            </a:r>
+          </a:p>
+        </p:txBody>
+      </p:sp>
+      <p:sp>
+        <p:nvSpPr>
+          <p:cNvPr id="72" name="TextBox 71"/>
+          <p:cNvSpPr txBox="1"/>
+          <p:nvPr/>
+        </p:nvSpPr>
+        <p:spPr>
+          <a:xfrm>
+            <a:off x="10241280" y="5010912"/>
+            <a:ext cx="1554480" cy="292608"/>
+          </a:xfrm>
+          <a:prstGeom prst="rect">
+            <a:avLst/>
+          </a:prstGeom>
+          <a:noFill/>
+        </p:spPr>
+        <p:txBody>
+          <a:bodyPr wrap="square">
+            <a:spAutoFit/>
+          </a:bodyPr>
+          <a:lstStyle/>
+          <a:p>
+            <a:pPr algn="r"/>
+            <a:r>
+              <a:rPr sz="900" b="0" i="0">
+                <a:solidFill>
+                  <a:srgbClr val="404040"/>
+                </a:solidFill>
+              </a:rPr>
+              <a:t>$89,000</a:t>
+            </a:r>
+          </a:p>
+        </p:txBody>
+      </p:sp>
+      <p:sp>
+        <p:nvSpPr>
+          <p:cNvPr id="73" name="Rectangle 72"/>
+          <p:cNvSpPr/>
+          <p:nvPr/>
+        </p:nvSpPr>
+        <p:spPr>
+          <a:xfrm>
+            <a:off x="6949440" y="5376672"/>
+            <a:ext cx="4937760" cy="374904"/>
+          </a:xfrm>
+          <a:prstGeom prst="rect">
+            <a:avLst/>
+          </a:prstGeom>
+          <a:solidFill>
+            <a:srgbClr val="FFFFFF"/>
+          </a:solidFill>
+          <a:ln w="6350">
+            <a:solidFill>
+              <a:srgbClr val="CCCCCC"/>
+            </a:solidFill>
+          </a:ln>
+        </p:spPr>
+        <p:style>
+          <a:lnRef idx="1">
+            <a:schemeClr val="accent1"/>
+          </a:lnRef>
+          <a:fillRef idx="3">
+            <a:schemeClr val="accent1"/>
+          </a:fillRef>
+          <a:effectRef idx="2">
+            <a:schemeClr val="accent1"/>
+          </a:effectRef>
+          <a:fontRef idx="minor">
+            <a:schemeClr val="lt1"/>
+          </a:fontRef>
+        </p:style>
+        <p:txBody>
+          <a:bodyPr rtlCol="0" anchor="ctr"/>
+          <a:lstStyle/>
+          <a:p>
+            <a:pPr algn="ctr"/>
+          </a:p>
+        </p:txBody>
+      </p:sp>
+      <p:sp>
+        <p:nvSpPr>
+          <p:cNvPr id="74" name="TextBox 73"/>
+          <p:cNvSpPr txBox="1"/>
+          <p:nvPr/>
+        </p:nvSpPr>
+        <p:spPr>
+          <a:xfrm>
+            <a:off x="7040880" y="5413248"/>
+            <a:ext cx="2377440" cy="292608"/>
+          </a:xfrm>
+          <a:prstGeom prst="rect">
+            <a:avLst/>
+          </a:prstGeom>
+          <a:noFill/>
+        </p:spPr>
+        <p:txBody>
+          <a:bodyPr wrap="square">
+            <a:spAutoFit/>
+          </a:bodyPr>
+          <a:lstStyle/>
+          <a:p>
+            <a:pPr algn="l"/>
+            <a:r>
+              <a:rPr sz="900" b="0" i="0">
+                <a:solidFill>
+                  <a:srgbClr val="404040"/>
+                </a:solidFill>
+              </a:rPr>
+              <a:t>M4 Services &amp; Deliverables</a:t>
+            </a:r>
+          </a:p>
+        </p:txBody>
+      </p:sp>
+      <p:sp>
+        <p:nvSpPr>
+          <p:cNvPr id="75" name="TextBox 74"/>
+          <p:cNvSpPr txBox="1"/>
+          <p:nvPr/>
+        </p:nvSpPr>
+        <p:spPr>
+          <a:xfrm>
+            <a:off x="9235440" y="5413248"/>
+            <a:ext cx="1097280" cy="292608"/>
+          </a:xfrm>
+          <a:prstGeom prst="rect">
+            <a:avLst/>
+          </a:prstGeom>
+          <a:noFill/>
+        </p:spPr>
+        <p:txBody>
+          <a:bodyPr wrap="square">
+            <a:spAutoFit/>
+          </a:bodyPr>
+          <a:lstStyle/>
+          <a:p>
+            <a:pPr algn="ctr"/>
+            <a:r>
+              <a:rPr sz="900" b="0" i="0">
+                <a:solidFill>
+                  <a:srgbClr val="003387"/>
+                </a:solidFill>
+              </a:rPr>
+              <a:t>8/30/2026</a:t>
+            </a:r>
+          </a:p>
+        </p:txBody>
+      </p:sp>
+      <p:sp>
+        <p:nvSpPr>
+          <p:cNvPr id="76" name="TextBox 75"/>
+          <p:cNvSpPr txBox="1"/>
+          <p:nvPr/>
+        </p:nvSpPr>
+        <p:spPr>
+          <a:xfrm>
+            <a:off x="10241280" y="5413248"/>
+            <a:ext cx="1554480" cy="292608"/>
+          </a:xfrm>
+          <a:prstGeom prst="rect">
+            <a:avLst/>
+          </a:prstGeom>
+          <a:noFill/>
+        </p:spPr>
+        <p:txBody>
+          <a:bodyPr wrap="square">
+            <a:spAutoFit/>
+          </a:bodyPr>
+          <a:lstStyle/>
+          <a:p>
+            <a:pPr algn="r"/>
+            <a:r>
+              <a:rPr sz="900" b="0" i="0">
+                <a:solidFill>
+                  <a:srgbClr val="404040"/>
+                </a:solidFill>
+              </a:rPr>
+              <a:t>$89,000</a:t>
+            </a:r>
+          </a:p>
+        </p:txBody>
+      </p:sp>
+      <p:sp>
+        <p:nvSpPr>
+          <p:cNvPr id="77" name="Rectangle 76"/>
+          <p:cNvSpPr/>
+          <p:nvPr/>
+        </p:nvSpPr>
+        <p:spPr>
+          <a:xfrm>
+            <a:off x="6949440" y="5779008"/>
+            <a:ext cx="4937760" cy="374904"/>
+          </a:xfrm>
+          <a:prstGeom prst="rect">
+            <a:avLst/>
+          </a:prstGeom>
+          <a:solidFill>
+            <a:srgbClr val="F2F2F2"/>
+          </a:solidFill>
+          <a:ln w="6350">
+            <a:solidFill>
+              <a:srgbClr val="CCCCCC"/>
+            </a:solidFill>
+          </a:ln>
+        </p:spPr>
+        <p:style>
+          <a:lnRef idx="1">
+            <a:schemeClr val="accent1"/>
+          </a:lnRef>
+          <a:fillRef idx="3">
+            <a:schemeClr val="accent1"/>
+          </a:fillRef>
+          <a:effectRef idx="2">
+            <a:schemeClr val="accent1"/>
+          </a:effectRef>
+          <a:fontRef idx="minor">
+            <a:schemeClr val="lt1"/>
+          </a:fontRef>
+        </p:style>
+        <p:txBody>
+          <a:bodyPr rtlCol="0" anchor="ctr"/>
+          <a:lstStyle/>
+          <a:p>
+            <a:pPr algn="ctr"/>
+          </a:p>
+        </p:txBody>
+      </p:sp>
+      <p:sp>
+        <p:nvSpPr>
+          <p:cNvPr id="78" name="TextBox 77"/>
+          <p:cNvSpPr txBox="1"/>
+          <p:nvPr/>
+        </p:nvSpPr>
+        <p:spPr>
+          <a:xfrm>
+            <a:off x="7040880" y="5815584"/>
+            <a:ext cx="2377440" cy="292608"/>
+          </a:xfrm>
+          <a:prstGeom prst="rect">
+            <a:avLst/>
+          </a:prstGeom>
+          <a:noFill/>
+        </p:spPr>
+        <p:txBody>
+          <a:bodyPr wrap="square">
+            <a:spAutoFit/>
+          </a:bodyPr>
+          <a:lstStyle/>
+          <a:p>
+            <a:pPr algn="l"/>
+            <a:r>
+              <a:rPr sz="900" b="0" i="0">
+                <a:solidFill>
+                  <a:srgbClr val="404040"/>
+                </a:solidFill>
+              </a:rPr>
+              <a:t>M5 Decommission Phase 2 Equip</a:t>
+            </a:r>
+          </a:p>
+        </p:txBody>
+      </p:sp>
+      <p:sp>
+        <p:nvSpPr>
+          <p:cNvPr id="79" name="TextBox 78"/>
+          <p:cNvSpPr txBox="1"/>
+          <p:nvPr/>
+        </p:nvSpPr>
+        <p:spPr>
+          <a:xfrm>
+            <a:off x="9235440" y="5815584"/>
+            <a:ext cx="1097280" cy="292608"/>
+          </a:xfrm>
+          <a:prstGeom prst="rect">
+            <a:avLst/>
+          </a:prstGeom>
+          <a:noFill/>
+        </p:spPr>
+        <p:txBody>
+          <a:bodyPr wrap="square">
+            <a:spAutoFit/>
+          </a:bodyPr>
+          <a:lstStyle/>
+          <a:p>
+            <a:pPr algn="ctr"/>
+            <a:r>
+              <a:rPr sz="900" b="0" i="0">
+                <a:solidFill>
+                  <a:srgbClr val="003387"/>
+                </a:solidFill>
+              </a:rPr>
+              <a:t>TBD</a:t>
+            </a:r>
+          </a:p>
+        </p:txBody>
+      </p:sp>
+      <p:sp>
+        <p:nvSpPr>
+          <p:cNvPr id="80" name="TextBox 79"/>
+          <p:cNvSpPr txBox="1"/>
+          <p:nvPr/>
+        </p:nvSpPr>
+        <p:spPr>
+          <a:xfrm>
+            <a:off x="10241280" y="5815584"/>
+            <a:ext cx="1554480" cy="292608"/>
+          </a:xfrm>
+          <a:prstGeom prst="rect">
+            <a:avLst/>
+          </a:prstGeom>
+          <a:noFill/>
+        </p:spPr>
+        <p:txBody>
+          <a:bodyPr wrap="square">
+            <a:spAutoFit/>
+          </a:bodyPr>
+          <a:lstStyle/>
+          <a:p>
+            <a:pPr algn="r"/>
+            <a:r>
+              <a:rPr sz="900" b="0" i="0">
+                <a:solidFill>
+                  <a:srgbClr val="404040"/>
+                </a:solidFill>
+              </a:rPr>
+              <a:t>$89,000</a:t>
+            </a:r>
+          </a:p>
+        </p:txBody>
+      </p:sp>
+      <p:sp>
+        <p:nvSpPr>
+          <p:cNvPr id="81" name="Rectangle 80"/>
+          <p:cNvSpPr/>
+          <p:nvPr/>
+        </p:nvSpPr>
+        <p:spPr>
+          <a:xfrm>
+            <a:off x="6949440" y="6181344"/>
+            <a:ext cx="4937760" cy="374904"/>
+          </a:xfrm>
+          <a:prstGeom prst="rect">
+            <a:avLst/>
+          </a:prstGeom>
+          <a:solidFill>
+            <a:srgbClr val="003387"/>
+          </a:solidFill>
+          <a:ln w="6350">
+            <a:solidFill>
+              <a:srgbClr val="CCCCCC"/>
+            </a:solidFill>
+          </a:ln>
+        </p:spPr>
+        <p:style>
+          <a:lnRef idx="1">
+            <a:schemeClr val="accent1"/>
+          </a:lnRef>
+          <a:fillRef idx="3">
+            <a:schemeClr val="accent1"/>
+          </a:fillRef>
+          <a:effectRef idx="2">
+            <a:schemeClr val="accent1"/>
+          </a:effectRef>
+          <a:fontRef idx="minor">
+            <a:schemeClr val="lt1"/>
+          </a:fontRef>
+        </p:style>
+        <p:txBody>
+          <a:bodyPr rtlCol="0" anchor="ctr"/>
+          <a:lstStyle/>
+          <a:p>
+            <a:pPr algn="ctr"/>
+          </a:p>
+        </p:txBody>
+      </p:sp>
+      <p:sp>
+        <p:nvSpPr>
+          <p:cNvPr id="82" name="TextBox 81"/>
+          <p:cNvSpPr txBox="1"/>
+          <p:nvPr/>
+        </p:nvSpPr>
+        <p:spPr>
+          <a:xfrm>
+            <a:off x="7040880" y="6217920"/>
+            <a:ext cx="2377440" cy="292608"/>
+          </a:xfrm>
+          <a:prstGeom prst="rect">
+            <a:avLst/>
+          </a:prstGeom>
+          <a:noFill/>
+        </p:spPr>
+        <p:txBody>
+          <a:bodyPr wrap="square">
+            <a:spAutoFit/>
+          </a:bodyPr>
+          <a:lstStyle/>
+          <a:p>
+            <a:pPr algn="l"/>
+            <a:r>
+              <a:rPr sz="900" b="1" i="0">
+                <a:solidFill>
+                  <a:srgbClr val="FFFFFF"/>
+                </a:solidFill>
+              </a:rPr>
+              <a:t>TOTAL</a:t>
+            </a:r>
+          </a:p>
+        </p:txBody>
+      </p:sp>
+      <p:sp>
+        <p:nvSpPr>
+          <p:cNvPr id="83" name="TextBox 82"/>
+          <p:cNvSpPr txBox="1"/>
+          <p:nvPr/>
+        </p:nvSpPr>
+        <p:spPr>
+          <a:xfrm>
+            <a:off x="9235440" y="6217920"/>
+            <a:ext cx="1097280" cy="292608"/>
+          </a:xfrm>
+          <a:prstGeom prst="rect">
+            <a:avLst/>
+          </a:prstGeom>
+          <a:noFill/>
+        </p:spPr>
+        <p:txBody>
+          <a:bodyPr wrap="square">
+            <a:spAutoFit/>
+          </a:bodyPr>
+          <a:lstStyle/>
+          <a:p>
+            <a:pPr algn="ctr"/>
+            <a:r>
+              <a:rPr sz="900" b="0" i="0">
+                <a:solidFill>
+                  <a:srgbClr val="FFFFFF"/>
+                </a:solidFill>
+              </a:rPr>
+              <a:t/>
+            </a:r>
+          </a:p>
+        </p:txBody>
+      </p:sp>
+      <p:sp>
+        <p:nvSpPr>
+          <p:cNvPr id="84" name="TextBox 83"/>
+          <p:cNvSpPr txBox="1"/>
+          <p:nvPr/>
+        </p:nvSpPr>
+        <p:spPr>
+          <a:xfrm>
+            <a:off x="10241280" y="6217920"/>
+            <a:ext cx="1554480" cy="292608"/>
+          </a:xfrm>
+          <a:prstGeom prst="rect">
+            <a:avLst/>
+          </a:prstGeom>
+          <a:noFill/>
+        </p:spPr>
+        <p:txBody>
+          <a:bodyPr wrap="square">
+            <a:spAutoFit/>
+          </a:bodyPr>
+          <a:lstStyle/>
+          <a:p>
+            <a:pPr algn="r"/>
+            <a:r>
+              <a:rPr sz="900" b="1" i="0">
+                <a:solidFill>
+                  <a:srgbClr val="FFFFFF"/>
+                </a:solidFill>
+              </a:rPr>
+              <a:t>$632,303</a:t>
+            </a:r>
+          </a:p>
+        </p:txBody>
+      </p:sp>
+      <p:sp>
+        <p:nvSpPr>
+          <p:cNvPr id="85" name="Rectangle 84"/>
+          <p:cNvSpPr/>
+          <p:nvPr/>
+        </p:nvSpPr>
+        <p:spPr>
+          <a:xfrm>
+            <a:off x="274320" y="6400800"/>
+            <a:ext cx="11612880" cy="164592"/>
+          </a:xfrm>
+          <a:prstGeom prst="rect">
+            <a:avLst/>
+          </a:prstGeom>
+          <a:solidFill>
+            <a:srgbClr val="FFF8D0"/>
+          </a:solidFill>
+          <a:ln w="12700">
+            <a:solidFill>
+              <a:srgbClr val="F7941D"/>
+            </a:solidFill>
+          </a:ln>
+        </p:spPr>
+        <p:style>
+          <a:lnRef idx="1">
+            <a:schemeClr val="accent1"/>
+          </a:lnRef>
+          <a:fillRef idx="3">
+            <a:schemeClr val="accent1"/>
+          </a:fillRef>
+          <a:effectRef idx="2">
+            <a:schemeClr val="accent1"/>
+          </a:effectRef>
+          <a:fontRef idx="minor">
+            <a:schemeClr val="lt1"/>
+          </a:fontRef>
+        </p:style>
+        <p:txBody>
+          <a:bodyPr rtlCol="0" anchor="ctr"/>
+          <a:lstStyle/>
+          <a:p>
+            <a:pPr algn="ctr"/>
+          </a:p>
+        </p:txBody>
+      </p:sp>
+      <p:sp>
+        <p:nvSpPr>
+          <p:cNvPr id="86" name="TextBox 85"/>
+          <p:cNvSpPr txBox="1"/>
+          <p:nvPr/>
+        </p:nvSpPr>
+        <p:spPr>
+          <a:xfrm>
+            <a:off x="365760" y="6400800"/>
+            <a:ext cx="11430000" cy="164592"/>
+          </a:xfrm>
+          <a:prstGeom prst="rect">
+            <a:avLst/>
+          </a:prstGeom>
+          <a:noFill/>
+        </p:spPr>
+        <p:txBody>
+          <a:bodyPr wrap="square">
+            <a:spAutoFit/>
+          </a:bodyPr>
+          <a:lstStyle/>
+          <a:p>
+            <a:pPr algn="l"/>
+            <a:r>
+              <a:rPr sz="800" b="1" i="0">
+                <a:solidFill>
+                  <a:srgbClr val="404040"/>
+                </a:solidFill>
+              </a:rPr>
+              <a:t>⚠  Note: 2026 ETC of $2.92M exceeds remaining budget of $1.75M by $1.17M. CIO approval required for budget augmentation. Phase 3 2026 exposure ($588K) pending confirmation.</a:t>
             </a:r>
           </a:p>
         </p:txBody>

--- a/incoming_files/cio_jmux_presentation.pptx
+++ b/incoming_files/cio_jmux_presentation.pptx
@@ -43457,7 +43457,7 @@
         <p:spPr>
           <a:xfrm>
             <a:off x="274320" y="548640"/>
-            <a:ext cx="9144000" cy="320040"/>
+            <a:ext cx="9144000" cy="292608"/>
           </a:xfrm>
           <a:prstGeom prst="rect">
             <a:avLst/>
@@ -43472,12 +43472,12 @@
           <a:p>
             <a:pPr algn="l"/>
             <a:r>
-              <a:rPr sz="1200" b="0" i="0">
+              <a:rPr sz="1100" b="0" i="0">
                 <a:solidFill>
                   <a:srgbClr val="F7941D"/>
                 </a:solidFill>
               </a:rPr>
-              <a:t>Active Risks | Mitigations in Place</a:t>
+              <a:t>RAG Status | Active Risks &amp; Issues | Mitigations in Place</a:t>
             </a:r>
           </a:p>
         </p:txBody>
@@ -43567,14 +43567,14 @@
         </p:nvSpPr>
         <p:spPr>
           <a:xfrm>
-            <a:off x="274320" y="1005840"/>
-            <a:ext cx="5486400" cy="365760"/>
-          </a:xfrm>
-          <a:prstGeom prst="rect">
-            <a:avLst/>
-          </a:prstGeom>
-          <a:solidFill>
-            <a:srgbClr val="C00000"/>
+            <a:off x="274320" y="987552"/>
+            <a:ext cx="256032" cy="256032"/>
+          </a:xfrm>
+          <a:prstGeom prst="rect">
+            <a:avLst/>
+          </a:prstGeom>
+          <a:solidFill>
+            <a:srgbClr val="FF0000"/>
           </a:solidFill>
           <a:ln>
             <a:noFill/>
@@ -43610,8 +43610,8 @@
         </p:nvSpPr>
         <p:spPr>
           <a:xfrm>
-            <a:off x="365760" y="1033271"/>
-            <a:ext cx="5303520" cy="292608"/>
+            <a:off x="594359" y="987552"/>
+            <a:ext cx="3474720" cy="256032"/>
           </a:xfrm>
           <a:prstGeom prst="rect">
             <a:avLst/>
@@ -43626,69 +43626,300 @@
           <a:p>
             <a:pPr algn="l"/>
             <a:r>
-              <a:rPr sz="1200" b="1" i="0">
+              <a:rPr sz="1000" b="1" i="0">
+                <a:solidFill>
+                  <a:srgbClr val="212121"/>
+                </a:solidFill>
+              </a:rPr>
+              <a:t>RED — High Impact</a:t>
+            </a:r>
+          </a:p>
+        </p:txBody>
+      </p:sp>
+      <p:sp>
+        <p:nvSpPr>
+          <p:cNvPr id="10" name="Rectangle 9"/>
+          <p:cNvSpPr/>
+          <p:nvPr/>
+        </p:nvSpPr>
+        <p:spPr>
+          <a:xfrm>
+            <a:off x="4206240" y="987552"/>
+            <a:ext cx="256032" cy="256032"/>
+          </a:xfrm>
+          <a:prstGeom prst="rect">
+            <a:avLst/>
+          </a:prstGeom>
+          <a:solidFill>
+            <a:srgbClr val="FFBF00"/>
+          </a:solidFill>
+          <a:ln>
+            <a:noFill/>
+          </a:ln>
+        </p:spPr>
+        <p:style>
+          <a:lnRef idx="1">
+            <a:schemeClr val="accent1"/>
+          </a:lnRef>
+          <a:fillRef idx="3">
+            <a:schemeClr val="accent1"/>
+          </a:fillRef>
+          <a:effectRef idx="2">
+            <a:schemeClr val="accent1"/>
+          </a:effectRef>
+          <a:fontRef idx="minor">
+            <a:schemeClr val="lt1"/>
+          </a:fontRef>
+        </p:style>
+        <p:txBody>
+          <a:bodyPr rtlCol="0" anchor="ctr"/>
+          <a:lstStyle/>
+          <a:p>
+            <a:pPr algn="ctr"/>
+          </a:p>
+        </p:txBody>
+      </p:sp>
+      <p:sp>
+        <p:nvSpPr>
+          <p:cNvPr id="11" name="TextBox 10"/>
+          <p:cNvSpPr txBox="1"/>
+          <p:nvPr/>
+        </p:nvSpPr>
+        <p:spPr>
+          <a:xfrm>
+            <a:off x="4526279" y="987552"/>
+            <a:ext cx="3474720" cy="256032"/>
+          </a:xfrm>
+          <a:prstGeom prst="rect">
+            <a:avLst/>
+          </a:prstGeom>
+          <a:noFill/>
+        </p:spPr>
+        <p:txBody>
+          <a:bodyPr wrap="square">
+            <a:spAutoFit/>
+          </a:bodyPr>
+          <a:lstStyle/>
+          <a:p>
+            <a:pPr algn="l"/>
+            <a:r>
+              <a:rPr sz="1000" b="1" i="0">
+                <a:solidFill>
+                  <a:srgbClr val="212121"/>
+                </a:solidFill>
+              </a:rPr>
+              <a:t>AMBER — Medium</a:t>
+            </a:r>
+          </a:p>
+        </p:txBody>
+      </p:sp>
+      <p:sp>
+        <p:nvSpPr>
+          <p:cNvPr id="12" name="Rectangle 11"/>
+          <p:cNvSpPr/>
+          <p:nvPr/>
+        </p:nvSpPr>
+        <p:spPr>
+          <a:xfrm>
+            <a:off x="8138160" y="987552"/>
+            <a:ext cx="256032" cy="256032"/>
+          </a:xfrm>
+          <a:prstGeom prst="rect">
+            <a:avLst/>
+          </a:prstGeom>
+          <a:solidFill>
+            <a:srgbClr val="009700"/>
+          </a:solidFill>
+          <a:ln>
+            <a:noFill/>
+          </a:ln>
+        </p:spPr>
+        <p:style>
+          <a:lnRef idx="1">
+            <a:schemeClr val="accent1"/>
+          </a:lnRef>
+          <a:fillRef idx="3">
+            <a:schemeClr val="accent1"/>
+          </a:fillRef>
+          <a:effectRef idx="2">
+            <a:schemeClr val="accent1"/>
+          </a:effectRef>
+          <a:fontRef idx="minor">
+            <a:schemeClr val="lt1"/>
+          </a:fontRef>
+        </p:style>
+        <p:txBody>
+          <a:bodyPr rtlCol="0" anchor="ctr"/>
+          <a:lstStyle/>
+          <a:p>
+            <a:pPr algn="ctr"/>
+          </a:p>
+        </p:txBody>
+      </p:sp>
+      <p:sp>
+        <p:nvSpPr>
+          <p:cNvPr id="13" name="TextBox 12"/>
+          <p:cNvSpPr txBox="1"/>
+          <p:nvPr/>
+        </p:nvSpPr>
+        <p:spPr>
+          <a:xfrm>
+            <a:off x="8458200" y="987552"/>
+            <a:ext cx="3474720" cy="256032"/>
+          </a:xfrm>
+          <a:prstGeom prst="rect">
+            <a:avLst/>
+          </a:prstGeom>
+          <a:noFill/>
+        </p:spPr>
+        <p:txBody>
+          <a:bodyPr wrap="square">
+            <a:spAutoFit/>
+          </a:bodyPr>
+          <a:lstStyle/>
+          <a:p>
+            <a:pPr algn="l"/>
+            <a:r>
+              <a:rPr sz="1000" b="1" i="0">
+                <a:solidFill>
+                  <a:srgbClr val="212121"/>
+                </a:solidFill>
+              </a:rPr>
+              <a:t>GREEN — Low / Resolved</a:t>
+            </a:r>
+          </a:p>
+        </p:txBody>
+      </p:sp>
+      <p:sp>
+        <p:nvSpPr>
+          <p:cNvPr id="14" name="Rectangle 13"/>
+          <p:cNvSpPr/>
+          <p:nvPr/>
+        </p:nvSpPr>
+        <p:spPr>
+          <a:xfrm>
+            <a:off x="274320" y="1298448"/>
+            <a:ext cx="5760720" cy="292608"/>
+          </a:xfrm>
+          <a:prstGeom prst="rect">
+            <a:avLst/>
+          </a:prstGeom>
+          <a:solidFill>
+            <a:srgbClr val="003387"/>
+          </a:solidFill>
+          <a:ln>
+            <a:noFill/>
+          </a:ln>
+        </p:spPr>
+        <p:style>
+          <a:lnRef idx="1">
+            <a:schemeClr val="accent1"/>
+          </a:lnRef>
+          <a:fillRef idx="3">
+            <a:schemeClr val="accent1"/>
+          </a:fillRef>
+          <a:effectRef idx="2">
+            <a:schemeClr val="accent1"/>
+          </a:effectRef>
+          <a:fontRef idx="minor">
+            <a:schemeClr val="lt1"/>
+          </a:fontRef>
+        </p:style>
+        <p:txBody>
+          <a:bodyPr rtlCol="0" anchor="ctr"/>
+          <a:lstStyle/>
+          <a:p>
+            <a:pPr algn="ctr"/>
+          </a:p>
+        </p:txBody>
+      </p:sp>
+      <p:sp>
+        <p:nvSpPr>
+          <p:cNvPr id="15" name="TextBox 14"/>
+          <p:cNvSpPr txBox="1"/>
+          <p:nvPr/>
+        </p:nvSpPr>
+        <p:spPr>
+          <a:xfrm>
+            <a:off x="365760" y="1316736"/>
+            <a:ext cx="5577840" cy="237744"/>
+          </a:xfrm>
+          <a:prstGeom prst="rect">
+            <a:avLst/>
+          </a:prstGeom>
+          <a:noFill/>
+        </p:spPr>
+        <p:txBody>
+          <a:bodyPr wrap="square">
+            <a:spAutoFit/>
+          </a:bodyPr>
+          <a:lstStyle/>
+          <a:p>
+            <a:pPr algn="l"/>
+            <a:r>
+              <a:rPr sz="1100" b="1" i="0">
                 <a:solidFill>
                   <a:srgbClr val="FFFFFF"/>
                 </a:solidFill>
               </a:rPr>
-              <a:t>⚠  ACTIVE RISKS</a:t>
+              <a:t>⚠  RISKS</a:t>
             </a:r>
           </a:p>
         </p:txBody>
       </p:sp>
       <p:sp>
         <p:nvSpPr>
-          <p:cNvPr id="10" name="Rectangle 9"/>
-          <p:cNvSpPr/>
-          <p:nvPr/>
-        </p:nvSpPr>
-        <p:spPr>
-          <a:xfrm>
-            <a:off x="5943600" y="1005840"/>
-            <a:ext cx="5943600" cy="365760"/>
-          </a:xfrm>
-          <a:prstGeom prst="rect">
-            <a:avLst/>
-          </a:prstGeom>
-          <a:solidFill>
-            <a:srgbClr val="F7941D"/>
-          </a:solidFill>
-          <a:ln>
-            <a:noFill/>
-          </a:ln>
-        </p:spPr>
-        <p:style>
-          <a:lnRef idx="1">
-            <a:schemeClr val="accent1"/>
-          </a:lnRef>
-          <a:fillRef idx="3">
-            <a:schemeClr val="accent1"/>
-          </a:fillRef>
-          <a:effectRef idx="2">
-            <a:schemeClr val="accent1"/>
-          </a:effectRef>
-          <a:fontRef idx="minor">
-            <a:schemeClr val="lt1"/>
-          </a:fontRef>
-        </p:style>
-        <p:txBody>
-          <a:bodyPr rtlCol="0" anchor="ctr"/>
-          <a:lstStyle/>
-          <a:p>
-            <a:pPr algn="ctr"/>
-          </a:p>
-        </p:txBody>
-      </p:sp>
-      <p:sp>
-        <p:nvSpPr>
-          <p:cNvPr id="11" name="TextBox 10"/>
+          <p:cNvPr id="16" name="Rectangle 15"/>
+          <p:cNvSpPr/>
+          <p:nvPr/>
+        </p:nvSpPr>
+        <p:spPr>
+          <a:xfrm>
+            <a:off x="6217920" y="1298448"/>
+            <a:ext cx="5669280" cy="292608"/>
+          </a:xfrm>
+          <a:prstGeom prst="rect">
+            <a:avLst/>
+          </a:prstGeom>
+          <a:solidFill>
+            <a:srgbClr val="003387"/>
+          </a:solidFill>
+          <a:ln>
+            <a:noFill/>
+          </a:ln>
+        </p:spPr>
+        <p:style>
+          <a:lnRef idx="1">
+            <a:schemeClr val="accent1"/>
+          </a:lnRef>
+          <a:fillRef idx="3">
+            <a:schemeClr val="accent1"/>
+          </a:fillRef>
+          <a:effectRef idx="2">
+            <a:schemeClr val="accent1"/>
+          </a:effectRef>
+          <a:fontRef idx="minor">
+            <a:schemeClr val="lt1"/>
+          </a:fontRef>
+        </p:style>
+        <p:txBody>
+          <a:bodyPr rtlCol="0" anchor="ctr"/>
+          <a:lstStyle/>
+          <a:p>
+            <a:pPr algn="ctr"/>
+          </a:p>
+        </p:txBody>
+      </p:sp>
+      <p:sp>
+        <p:nvSpPr>
+          <p:cNvPr id="17" name="TextBox 16"/>
           <p:cNvSpPr txBox="1"/>
           <p:nvPr/>
         </p:nvSpPr>
         <p:spPr>
           <a:xfrm>
-            <a:off x="6035040" y="1033271"/>
-            <a:ext cx="5760720" cy="292608"/>
+            <a:off x="6309360" y="1316736"/>
+            <a:ext cx="5486400" cy="237744"/>
           </a:xfrm>
           <a:prstGeom prst="rect">
             <a:avLst/>
@@ -43703,36 +43934,36 @@
           <a:p>
             <a:pPr algn="l"/>
             <a:r>
-              <a:rPr sz="1200" b="1" i="0">
+              <a:rPr sz="1100" b="1" i="0">
                 <a:solidFill>
                   <a:srgbClr val="FFFFFF"/>
                 </a:solidFill>
               </a:rPr>
-              <a:t>🔧  ACTIVE ISSUES / IN RESOLUTION</a:t>
+              <a:t>🔧  ISSUES</a:t>
             </a:r>
           </a:p>
         </p:txBody>
       </p:sp>
       <p:sp>
         <p:nvSpPr>
-          <p:cNvPr id="12" name="Rectangle 11"/>
-          <p:cNvSpPr/>
-          <p:nvPr/>
-        </p:nvSpPr>
-        <p:spPr>
-          <a:xfrm>
-            <a:off x="274320" y="1463040"/>
-            <a:ext cx="5486400" cy="1143000"/>
-          </a:xfrm>
-          <a:prstGeom prst="rect">
-            <a:avLst/>
-          </a:prstGeom>
-          <a:solidFill>
-            <a:srgbClr val="FFFFFF"/>
+          <p:cNvPr id="18" name="Rectangle 17"/>
+          <p:cNvSpPr/>
+          <p:nvPr/>
+        </p:nvSpPr>
+        <p:spPr>
+          <a:xfrm>
+            <a:off x="274320" y="1664208"/>
+            <a:ext cx="5760720" cy="1115568"/>
+          </a:xfrm>
+          <a:prstGeom prst="rect">
+            <a:avLst/>
+          </a:prstGeom>
+          <a:solidFill>
+            <a:srgbClr val="FFEBEB"/>
           </a:solidFill>
           <a:ln w="25400">
             <a:solidFill>
-              <a:srgbClr val="C00000"/>
+              <a:srgbClr val="FF0000"/>
             </a:solidFill>
           </a:ln>
         </p:spPr>
@@ -43760,57 +43991,57 @@
       </p:sp>
       <p:sp>
         <p:nvSpPr>
-          <p:cNvPr id="13" name="Rectangle 12"/>
-          <p:cNvSpPr/>
-          <p:nvPr/>
-        </p:nvSpPr>
-        <p:spPr>
-          <a:xfrm>
-            <a:off x="274320" y="1463040"/>
-            <a:ext cx="1005840" cy="347472"/>
-          </a:xfrm>
-          <a:prstGeom prst="rect">
-            <a:avLst/>
-          </a:prstGeom>
-          <a:solidFill>
-            <a:srgbClr val="C00000"/>
-          </a:solidFill>
-          <a:ln>
-            <a:noFill/>
-          </a:ln>
-        </p:spPr>
-        <p:style>
-          <a:lnRef idx="1">
-            <a:schemeClr val="accent1"/>
-          </a:lnRef>
-          <a:fillRef idx="3">
-            <a:schemeClr val="accent1"/>
-          </a:fillRef>
-          <a:effectRef idx="2">
-            <a:schemeClr val="accent1"/>
-          </a:effectRef>
-          <a:fontRef idx="minor">
-            <a:schemeClr val="lt1"/>
-          </a:fontRef>
-        </p:style>
-        <p:txBody>
-          <a:bodyPr rtlCol="0" anchor="ctr"/>
-          <a:lstStyle/>
-          <a:p>
-            <a:pPr algn="ctr"/>
-          </a:p>
-        </p:txBody>
-      </p:sp>
-      <p:sp>
-        <p:nvSpPr>
-          <p:cNvPr id="14" name="TextBox 13"/>
+          <p:cNvPr id="19" name="Rectangle 18"/>
+          <p:cNvSpPr/>
+          <p:nvPr/>
+        </p:nvSpPr>
+        <p:spPr>
+          <a:xfrm>
+            <a:off x="274320" y="1664208"/>
+            <a:ext cx="594360" cy="347472"/>
+          </a:xfrm>
+          <a:prstGeom prst="rect">
+            <a:avLst/>
+          </a:prstGeom>
+          <a:solidFill>
+            <a:srgbClr val="FF0000"/>
+          </a:solidFill>
+          <a:ln>
+            <a:noFill/>
+          </a:ln>
+        </p:spPr>
+        <p:style>
+          <a:lnRef idx="1">
+            <a:schemeClr val="accent1"/>
+          </a:lnRef>
+          <a:fillRef idx="3">
+            <a:schemeClr val="accent1"/>
+          </a:fillRef>
+          <a:effectRef idx="2">
+            <a:schemeClr val="accent1"/>
+          </a:effectRef>
+          <a:fontRef idx="minor">
+            <a:schemeClr val="lt1"/>
+          </a:fontRef>
+        </p:style>
+        <p:txBody>
+          <a:bodyPr rtlCol="0" anchor="ctr"/>
+          <a:lstStyle/>
+          <a:p>
+            <a:pPr algn="ctr"/>
+          </a:p>
+        </p:txBody>
+      </p:sp>
+      <p:sp>
+        <p:nvSpPr>
+          <p:cNvPr id="20" name="TextBox 19"/>
           <p:cNvSpPr txBox="1"/>
           <p:nvPr/>
         </p:nvSpPr>
         <p:spPr>
           <a:xfrm>
-            <a:off x="292608" y="1499616"/>
-            <a:ext cx="914400" cy="274320"/>
+            <a:off x="274320" y="1700784"/>
+            <a:ext cx="594360" cy="274320"/>
           </a:xfrm>
           <a:prstGeom prst="rect">
             <a:avLst/>
@@ -43825,26 +44056,26 @@
           <a:p>
             <a:pPr algn="ctr"/>
             <a:r>
-              <a:rPr sz="1000" b="1" i="0">
+              <a:rPr sz="900" b="1" i="0">
                 <a:solidFill>
                   <a:srgbClr val="FFFFFF"/>
                 </a:solidFill>
               </a:rPr>
-              <a:t>HIGH</a:t>
+              <a:t>RED</a:t>
             </a:r>
           </a:p>
         </p:txBody>
       </p:sp>
       <p:sp>
         <p:nvSpPr>
-          <p:cNvPr id="15" name="TextBox 14"/>
+          <p:cNvPr id="21" name="TextBox 20"/>
           <p:cNvSpPr txBox="1"/>
           <p:nvPr/>
         </p:nvSpPr>
         <p:spPr>
           <a:xfrm>
-            <a:off x="1325880" y="1499616"/>
-            <a:ext cx="4297680" cy="292608"/>
+            <a:off x="960120" y="1700784"/>
+            <a:ext cx="4937760" cy="292608"/>
           </a:xfrm>
           <a:prstGeom prst="rect">
             <a:avLst/>
@@ -43861,7 +44092,7 @@
             <a:r>
               <a:rPr sz="1100" b="1" i="0">
                 <a:solidFill>
-                  <a:srgbClr val="404040"/>
+                  <a:srgbClr val="212121"/>
                 </a:solidFill>
               </a:rPr>
               <a:t>Legacy Equipment Fragility</a:t>
@@ -43871,14 +44102,14 @@
       </p:sp>
       <p:sp>
         <p:nvSpPr>
-          <p:cNvPr id="16" name="TextBox 15"/>
+          <p:cNvPr id="22" name="TextBox 21"/>
           <p:cNvSpPr txBox="1"/>
           <p:nvPr/>
         </p:nvSpPr>
         <p:spPr>
           <a:xfrm>
-            <a:off x="365760" y="1847088"/>
-            <a:ext cx="5212080" cy="384048"/>
+            <a:off x="365760" y="2048256"/>
+            <a:ext cx="5486400" cy="347472"/>
           </a:xfrm>
           <a:prstGeom prst="rect">
             <a:avLst/>
@@ -43895,24 +44126,24 @@
             <a:r>
               <a:rPr sz="900" b="0" i="0">
                 <a:solidFill>
-                  <a:srgbClr val="404040"/>
+                  <a:srgbClr val="212121"/>
                 </a:solidFill>
               </a:rPr>
-              <a:t>JMUX equipment 25+ yrs old. Faulty connectors, brittle fiber panels. Potential for unplanned outage during cutover.</a:t>
+              <a:t>JMUX equipment 25+ yrs old. Faulty connectors, brittle fiber — potential for unplanned outage during Phase 2 cutovers.</a:t>
             </a:r>
           </a:p>
         </p:txBody>
       </p:sp>
       <p:sp>
         <p:nvSpPr>
-          <p:cNvPr id="17" name="TextBox 16"/>
+          <p:cNvPr id="23" name="TextBox 22"/>
           <p:cNvSpPr txBox="1"/>
           <p:nvPr/>
         </p:nvSpPr>
         <p:spPr>
           <a:xfrm>
-            <a:off x="365760" y="2212848"/>
-            <a:ext cx="5212080" cy="347472"/>
+            <a:off x="365760" y="2395728"/>
+            <a:ext cx="5486400" cy="329184"/>
           </a:xfrm>
           <a:prstGeom prst="rect">
             <a:avLst/>
@@ -43932,31 +44163,31 @@
                   <a:srgbClr val="003387"/>
                 </a:solidFill>
               </a:rPr>
-              <a:t>Mitigation: Careful cutover planning; dedicated B&amp;McD on-site support. Phase 1 complete — risk reduced going into Ph2.</a:t>
+              <a:t>↳ Mitigation: Careful cutover sequencing. B&amp;McD on-site technical support for all Phase 2 cutovers.</a:t>
             </a:r>
           </a:p>
         </p:txBody>
       </p:sp>
       <p:sp>
         <p:nvSpPr>
-          <p:cNvPr id="18" name="Rectangle 17"/>
-          <p:cNvSpPr/>
-          <p:nvPr/>
-        </p:nvSpPr>
-        <p:spPr>
-          <a:xfrm>
-            <a:off x="274320" y="2697480"/>
-            <a:ext cx="5486400" cy="1143000"/>
-          </a:xfrm>
-          <a:prstGeom prst="rect">
-            <a:avLst/>
-          </a:prstGeom>
-          <a:solidFill>
-            <a:srgbClr val="FFFFFF"/>
+          <p:cNvPr id="24" name="Rectangle 23"/>
+          <p:cNvSpPr/>
+          <p:nvPr/>
+        </p:nvSpPr>
+        <p:spPr>
+          <a:xfrm>
+            <a:off x="274320" y="2852928"/>
+            <a:ext cx="5760720" cy="1115568"/>
+          </a:xfrm>
+          <a:prstGeom prst="rect">
+            <a:avLst/>
+          </a:prstGeom>
+          <a:solidFill>
+            <a:srgbClr val="FFEBEB"/>
           </a:solidFill>
           <a:ln w="25400">
             <a:solidFill>
-              <a:srgbClr val="FFC000"/>
+              <a:srgbClr val="FF0000"/>
             </a:solidFill>
           </a:ln>
         </p:spPr>
@@ -43984,57 +44215,57 @@
       </p:sp>
       <p:sp>
         <p:nvSpPr>
-          <p:cNvPr id="19" name="Rectangle 18"/>
-          <p:cNvSpPr/>
-          <p:nvPr/>
-        </p:nvSpPr>
-        <p:spPr>
-          <a:xfrm>
-            <a:off x="274320" y="2697480"/>
-            <a:ext cx="1005840" cy="347472"/>
-          </a:xfrm>
-          <a:prstGeom prst="rect">
-            <a:avLst/>
-          </a:prstGeom>
-          <a:solidFill>
-            <a:srgbClr val="FFC000"/>
-          </a:solidFill>
-          <a:ln>
-            <a:noFill/>
-          </a:ln>
-        </p:spPr>
-        <p:style>
-          <a:lnRef idx="1">
-            <a:schemeClr val="accent1"/>
-          </a:lnRef>
-          <a:fillRef idx="3">
-            <a:schemeClr val="accent1"/>
-          </a:fillRef>
-          <a:effectRef idx="2">
-            <a:schemeClr val="accent1"/>
-          </a:effectRef>
-          <a:fontRef idx="minor">
-            <a:schemeClr val="lt1"/>
-          </a:fontRef>
-        </p:style>
-        <p:txBody>
-          <a:bodyPr rtlCol="0" anchor="ctr"/>
-          <a:lstStyle/>
-          <a:p>
-            <a:pPr algn="ctr"/>
-          </a:p>
-        </p:txBody>
-      </p:sp>
-      <p:sp>
-        <p:nvSpPr>
-          <p:cNvPr id="20" name="TextBox 19"/>
+          <p:cNvPr id="25" name="Rectangle 24"/>
+          <p:cNvSpPr/>
+          <p:nvPr/>
+        </p:nvSpPr>
+        <p:spPr>
+          <a:xfrm>
+            <a:off x="274320" y="2852928"/>
+            <a:ext cx="594360" cy="347472"/>
+          </a:xfrm>
+          <a:prstGeom prst="rect">
+            <a:avLst/>
+          </a:prstGeom>
+          <a:solidFill>
+            <a:srgbClr val="FF0000"/>
+          </a:solidFill>
+          <a:ln>
+            <a:noFill/>
+          </a:ln>
+        </p:spPr>
+        <p:style>
+          <a:lnRef idx="1">
+            <a:schemeClr val="accent1"/>
+          </a:lnRef>
+          <a:fillRef idx="3">
+            <a:schemeClr val="accent1"/>
+          </a:fillRef>
+          <a:effectRef idx="2">
+            <a:schemeClr val="accent1"/>
+          </a:effectRef>
+          <a:fontRef idx="minor">
+            <a:schemeClr val="lt1"/>
+          </a:fontRef>
+        </p:style>
+        <p:txBody>
+          <a:bodyPr rtlCol="0" anchor="ctr"/>
+          <a:lstStyle/>
+          <a:p>
+            <a:pPr algn="ctr"/>
+          </a:p>
+        </p:txBody>
+      </p:sp>
+      <p:sp>
+        <p:nvSpPr>
+          <p:cNvPr id="26" name="TextBox 25"/>
           <p:cNvSpPr txBox="1"/>
           <p:nvPr/>
         </p:nvSpPr>
         <p:spPr>
           <a:xfrm>
-            <a:off x="292608" y="2734056"/>
-            <a:ext cx="914400" cy="274320"/>
+            <a:off x="274320" y="2889504"/>
+            <a:ext cx="594360" cy="274320"/>
           </a:xfrm>
           <a:prstGeom prst="rect">
             <a:avLst/>
@@ -44049,26 +44280,26 @@
           <a:p>
             <a:pPr algn="ctr"/>
             <a:r>
-              <a:rPr sz="1000" b="1" i="0">
+              <a:rPr sz="900" b="1" i="0">
                 <a:solidFill>
                   <a:srgbClr val="FFFFFF"/>
                 </a:solidFill>
               </a:rPr>
-              <a:t>MEDIUM</a:t>
+              <a:t>RED</a:t>
             </a:r>
           </a:p>
         </p:txBody>
       </p:sp>
       <p:sp>
         <p:nvSpPr>
-          <p:cNvPr id="21" name="TextBox 20"/>
+          <p:cNvPr id="27" name="TextBox 26"/>
           <p:cNvSpPr txBox="1"/>
           <p:nvPr/>
         </p:nvSpPr>
         <p:spPr>
           <a:xfrm>
-            <a:off x="1325880" y="2734056"/>
-            <a:ext cx="4297680" cy="292608"/>
+            <a:off x="960120" y="2889504"/>
+            <a:ext cx="4937760" cy="292608"/>
           </a:xfrm>
           <a:prstGeom prst="rect">
             <a:avLst/>
@@ -44085,24 +44316,24 @@
             <a:r>
               <a:rPr sz="1100" b="1" i="0">
                 <a:solidFill>
-                  <a:srgbClr val="404040"/>
+                  <a:srgbClr val="212121"/>
                 </a:solidFill>
               </a:rPr>
-              <a:t>Substation Access Delays</a:t>
+              <a:t>2026 Budget Overrun</a:t>
             </a:r>
           </a:p>
         </p:txBody>
       </p:sp>
       <p:sp>
         <p:nvSpPr>
-          <p:cNvPr id="22" name="TextBox 21"/>
+          <p:cNvPr id="28" name="TextBox 27"/>
           <p:cNvSpPr txBox="1"/>
           <p:nvPr/>
         </p:nvSpPr>
         <p:spPr>
           <a:xfrm>
-            <a:off x="365760" y="3081528"/>
-            <a:ext cx="5212080" cy="384048"/>
+            <a:off x="365760" y="3236976"/>
+            <a:ext cx="5486400" cy="347472"/>
           </a:xfrm>
           <a:prstGeom prst="rect">
             <a:avLst/>
@@ -44119,24 +44350,24 @@
             <a:r>
               <a:rPr sz="900" b="0" i="0">
                 <a:solidFill>
-                  <a:srgbClr val="404040"/>
+                  <a:srgbClr val="212121"/>
                 </a:solidFill>
               </a:rPr>
-              <a:t>Weather, scheduling conflicts, or escort availability can delay field work.</a:t>
+              <a:t>Known 2026 ETC of $2.92M exceeds $2.6M budget by $1.17M (-45%). Hawkeye Phase 2 SOW ($632K) and Nokia PO ($753K) are primary drivers.</a:t>
             </a:r>
           </a:p>
         </p:txBody>
       </p:sp>
       <p:sp>
         <p:nvSpPr>
-          <p:cNvPr id="23" name="TextBox 22"/>
+          <p:cNvPr id="29" name="TextBox 28"/>
           <p:cNvSpPr txBox="1"/>
           <p:nvPr/>
         </p:nvSpPr>
         <p:spPr>
           <a:xfrm>
-            <a:off x="365760" y="3447288"/>
-            <a:ext cx="5212080" cy="347472"/>
+            <a:off x="365760" y="3584448"/>
+            <a:ext cx="5486400" cy="329184"/>
           </a:xfrm>
           <a:prstGeom prst="rect">
             <a:avLst/>
@@ -44156,31 +44387,31 @@
                   <a:srgbClr val="003387"/>
                 </a:solidFill>
               </a:rPr>
-              <a:t>Mitigation: Verify weekly before mobilizing. Adjust site plan if specific sites inaccessible.</a:t>
+              <a:t>↳ Mitigation: Budget augmentation request to CIO. Phase 3 spend timing may be deferred to 2027 to reduce 2026 exposure.</a:t>
             </a:r>
           </a:p>
         </p:txBody>
       </p:sp>
       <p:sp>
         <p:nvSpPr>
-          <p:cNvPr id="24" name="Rectangle 23"/>
-          <p:cNvSpPr/>
-          <p:nvPr/>
-        </p:nvSpPr>
-        <p:spPr>
-          <a:xfrm>
-            <a:off x="274320" y="3931920"/>
-            <a:ext cx="5486400" cy="1143000"/>
-          </a:xfrm>
-          <a:prstGeom prst="rect">
-            <a:avLst/>
-          </a:prstGeom>
-          <a:solidFill>
-            <a:srgbClr val="FFFFFF"/>
+          <p:cNvPr id="30" name="Rectangle 29"/>
+          <p:cNvSpPr/>
+          <p:nvPr/>
+        </p:nvSpPr>
+        <p:spPr>
+          <a:xfrm>
+            <a:off x="274320" y="4041648"/>
+            <a:ext cx="5760720" cy="1115568"/>
+          </a:xfrm>
+          <a:prstGeom prst="rect">
+            <a:avLst/>
+          </a:prstGeom>
+          <a:solidFill>
+            <a:srgbClr val="FFF8E1"/>
           </a:solidFill>
           <a:ln w="25400">
             <a:solidFill>
-              <a:srgbClr val="FFC000"/>
+              <a:srgbClr val="FFBF00"/>
             </a:solidFill>
           </a:ln>
         </p:spPr>
@@ -44208,57 +44439,57 @@
       </p:sp>
       <p:sp>
         <p:nvSpPr>
-          <p:cNvPr id="25" name="Rectangle 24"/>
-          <p:cNvSpPr/>
-          <p:nvPr/>
-        </p:nvSpPr>
-        <p:spPr>
-          <a:xfrm>
-            <a:off x="274320" y="3931920"/>
-            <a:ext cx="1005840" cy="347472"/>
-          </a:xfrm>
-          <a:prstGeom prst="rect">
-            <a:avLst/>
-          </a:prstGeom>
-          <a:solidFill>
-            <a:srgbClr val="FFC000"/>
-          </a:solidFill>
-          <a:ln>
-            <a:noFill/>
-          </a:ln>
-        </p:spPr>
-        <p:style>
-          <a:lnRef idx="1">
-            <a:schemeClr val="accent1"/>
-          </a:lnRef>
-          <a:fillRef idx="3">
-            <a:schemeClr val="accent1"/>
-          </a:fillRef>
-          <a:effectRef idx="2">
-            <a:schemeClr val="accent1"/>
-          </a:effectRef>
-          <a:fontRef idx="minor">
-            <a:schemeClr val="lt1"/>
-          </a:fontRef>
-        </p:style>
-        <p:txBody>
-          <a:bodyPr rtlCol="0" anchor="ctr"/>
-          <a:lstStyle/>
-          <a:p>
-            <a:pPr algn="ctr"/>
-          </a:p>
-        </p:txBody>
-      </p:sp>
-      <p:sp>
-        <p:nvSpPr>
-          <p:cNvPr id="26" name="TextBox 25"/>
+          <p:cNvPr id="31" name="Rectangle 30"/>
+          <p:cNvSpPr/>
+          <p:nvPr/>
+        </p:nvSpPr>
+        <p:spPr>
+          <a:xfrm>
+            <a:off x="274320" y="4041648"/>
+            <a:ext cx="594360" cy="347472"/>
+          </a:xfrm>
+          <a:prstGeom prst="rect">
+            <a:avLst/>
+          </a:prstGeom>
+          <a:solidFill>
+            <a:srgbClr val="FFBF00"/>
+          </a:solidFill>
+          <a:ln>
+            <a:noFill/>
+          </a:ln>
+        </p:spPr>
+        <p:style>
+          <a:lnRef idx="1">
+            <a:schemeClr val="accent1"/>
+          </a:lnRef>
+          <a:fillRef idx="3">
+            <a:schemeClr val="accent1"/>
+          </a:fillRef>
+          <a:effectRef idx="2">
+            <a:schemeClr val="accent1"/>
+          </a:effectRef>
+          <a:fontRef idx="minor">
+            <a:schemeClr val="lt1"/>
+          </a:fontRef>
+        </p:style>
+        <p:txBody>
+          <a:bodyPr rtlCol="0" anchor="ctr"/>
+          <a:lstStyle/>
+          <a:p>
+            <a:pPr algn="ctr"/>
+          </a:p>
+        </p:txBody>
+      </p:sp>
+      <p:sp>
+        <p:nvSpPr>
+          <p:cNvPr id="32" name="TextBox 31"/>
           <p:cNvSpPr txBox="1"/>
           <p:nvPr/>
         </p:nvSpPr>
         <p:spPr>
           <a:xfrm>
-            <a:off x="292608" y="3968496"/>
-            <a:ext cx="914400" cy="274320"/>
+            <a:off x="274320" y="4078224"/>
+            <a:ext cx="594360" cy="274320"/>
           </a:xfrm>
           <a:prstGeom prst="rect">
             <a:avLst/>
@@ -44273,26 +44504,26 @@
           <a:p>
             <a:pPr algn="ctr"/>
             <a:r>
-              <a:rPr sz="1000" b="1" i="0">
+              <a:rPr sz="900" b="1" i="0">
                 <a:solidFill>
                   <a:srgbClr val="FFFFFF"/>
                 </a:solidFill>
               </a:rPr>
-              <a:t>MEDIUM</a:t>
+              <a:t>AMBER</a:t>
             </a:r>
           </a:p>
         </p:txBody>
       </p:sp>
       <p:sp>
         <p:nvSpPr>
-          <p:cNvPr id="27" name="TextBox 26"/>
+          <p:cNvPr id="33" name="TextBox 32"/>
           <p:cNvSpPr txBox="1"/>
           <p:nvPr/>
         </p:nvSpPr>
         <p:spPr>
           <a:xfrm>
-            <a:off x="1325880" y="3968496"/>
-            <a:ext cx="4297680" cy="292608"/>
+            <a:off x="960120" y="4078224"/>
+            <a:ext cx="4937760" cy="292608"/>
           </a:xfrm>
           <a:prstGeom prst="rect">
             <a:avLst/>
@@ -44309,7 +44540,7 @@
             <a:r>
               <a:rPr sz="1100" b="1" i="0">
                 <a:solidFill>
-                  <a:srgbClr val="404040"/>
+                  <a:srgbClr val="212121"/>
                 </a:solidFill>
               </a:rPr>
               <a:t>Phase 2 Schedule Slippage</a:t>
@@ -44319,14 +44550,14 @@
       </p:sp>
       <p:sp>
         <p:nvSpPr>
-          <p:cNvPr id="28" name="TextBox 27"/>
+          <p:cNvPr id="34" name="TextBox 33"/>
           <p:cNvSpPr txBox="1"/>
           <p:nvPr/>
         </p:nvSpPr>
         <p:spPr>
           <a:xfrm>
-            <a:off x="365760" y="4315968"/>
-            <a:ext cx="5212080" cy="384048"/>
+            <a:off x="365760" y="4425696"/>
+            <a:ext cx="5486400" cy="347472"/>
           </a:xfrm>
           <a:prstGeom prst="rect">
             <a:avLst/>
@@ -44343,24 +44574,24 @@
             <a:r>
               <a:rPr sz="900" b="0" i="0">
                 <a:solidFill>
-                  <a:srgbClr val="404040"/>
+                  <a:srgbClr val="212121"/>
                 </a:solidFill>
               </a:rPr>
-              <a:t>IFR/IFC design cycle (4-wk IFR + 2-wk review + 2-wk IFC) leaves limited buffer.</a:t>
+              <a:t>IFR/IFC design cycle leaves limited buffer. SPI currently at 0.75 (down from 1.00 last month).</a:t>
             </a:r>
           </a:p>
         </p:txBody>
       </p:sp>
       <p:sp>
         <p:nvSpPr>
-          <p:cNvPr id="29" name="TextBox 28"/>
+          <p:cNvPr id="35" name="TextBox 34"/>
           <p:cNvSpPr txBox="1"/>
           <p:nvPr/>
         </p:nvSpPr>
         <p:spPr>
           <a:xfrm>
-            <a:off x="365760" y="4681728"/>
-            <a:ext cx="5212080" cy="347472"/>
+            <a:off x="365760" y="4773168"/>
+            <a:ext cx="5486400" cy="329184"/>
           </a:xfrm>
           <a:prstGeom prst="rect">
             <a:avLst/>
@@ -44380,31 +44611,31 @@
                   <a:srgbClr val="003387"/>
                 </a:solidFill>
               </a:rPr>
-              <a:t>Mitigation: Phase 2 surveys done early. B&amp;McD running concurrent site designs. Weekly status calls tracking.</a:t>
+              <a:t>↳ Mitigation: Phase 2 surveys completed early. B&amp;McD running concurrent site designs. Weekly tracking calls.</a:t>
             </a:r>
           </a:p>
         </p:txBody>
       </p:sp>
       <p:sp>
         <p:nvSpPr>
-          <p:cNvPr id="30" name="Rectangle 29"/>
-          <p:cNvSpPr/>
-          <p:nvPr/>
-        </p:nvSpPr>
-        <p:spPr>
-          <a:xfrm>
-            <a:off x="274320" y="5166360"/>
-            <a:ext cx="5486400" cy="1143000"/>
-          </a:xfrm>
-          <a:prstGeom prst="rect">
-            <a:avLst/>
-          </a:prstGeom>
-          <a:solidFill>
-            <a:srgbClr val="FFFFFF"/>
+          <p:cNvPr id="36" name="Rectangle 35"/>
+          <p:cNvSpPr/>
+          <p:nvPr/>
+        </p:nvSpPr>
+        <p:spPr>
+          <a:xfrm>
+            <a:off x="274320" y="5230368"/>
+            <a:ext cx="5760720" cy="1115568"/>
+          </a:xfrm>
+          <a:prstGeom prst="rect">
+            <a:avLst/>
+          </a:prstGeom>
+          <a:solidFill>
+            <a:srgbClr val="FFF8E1"/>
           </a:solidFill>
           <a:ln w="25400">
             <a:solidFill>
-              <a:srgbClr val="008000"/>
+              <a:srgbClr val="FFBF00"/>
             </a:solidFill>
           </a:ln>
         </p:spPr>
@@ -44432,57 +44663,57 @@
       </p:sp>
       <p:sp>
         <p:nvSpPr>
-          <p:cNvPr id="31" name="Rectangle 30"/>
-          <p:cNvSpPr/>
-          <p:nvPr/>
-        </p:nvSpPr>
-        <p:spPr>
-          <a:xfrm>
-            <a:off x="274320" y="5166360"/>
-            <a:ext cx="1005840" cy="347472"/>
-          </a:xfrm>
-          <a:prstGeom prst="rect">
-            <a:avLst/>
-          </a:prstGeom>
-          <a:solidFill>
-            <a:srgbClr val="008000"/>
-          </a:solidFill>
-          <a:ln>
-            <a:noFill/>
-          </a:ln>
-        </p:spPr>
-        <p:style>
-          <a:lnRef idx="1">
-            <a:schemeClr val="accent1"/>
-          </a:lnRef>
-          <a:fillRef idx="3">
-            <a:schemeClr val="accent1"/>
-          </a:fillRef>
-          <a:effectRef idx="2">
-            <a:schemeClr val="accent1"/>
-          </a:effectRef>
-          <a:fontRef idx="minor">
-            <a:schemeClr val="lt1"/>
-          </a:fontRef>
-        </p:style>
-        <p:txBody>
-          <a:bodyPr rtlCol="0" anchor="ctr"/>
-          <a:lstStyle/>
-          <a:p>
-            <a:pPr algn="ctr"/>
-          </a:p>
-        </p:txBody>
-      </p:sp>
-      <p:sp>
-        <p:nvSpPr>
-          <p:cNvPr id="32" name="TextBox 31"/>
+          <p:cNvPr id="37" name="Rectangle 36"/>
+          <p:cNvSpPr/>
+          <p:nvPr/>
+        </p:nvSpPr>
+        <p:spPr>
+          <a:xfrm>
+            <a:off x="274320" y="5230368"/>
+            <a:ext cx="594360" cy="347472"/>
+          </a:xfrm>
+          <a:prstGeom prst="rect">
+            <a:avLst/>
+          </a:prstGeom>
+          <a:solidFill>
+            <a:srgbClr val="FFBF00"/>
+          </a:solidFill>
+          <a:ln>
+            <a:noFill/>
+          </a:ln>
+        </p:spPr>
+        <p:style>
+          <a:lnRef idx="1">
+            <a:schemeClr val="accent1"/>
+          </a:lnRef>
+          <a:fillRef idx="3">
+            <a:schemeClr val="accent1"/>
+          </a:fillRef>
+          <a:effectRef idx="2">
+            <a:schemeClr val="accent1"/>
+          </a:effectRef>
+          <a:fontRef idx="minor">
+            <a:schemeClr val="lt1"/>
+          </a:fontRef>
+        </p:style>
+        <p:txBody>
+          <a:bodyPr rtlCol="0" anchor="ctr"/>
+          <a:lstStyle/>
+          <a:p>
+            <a:pPr algn="ctr"/>
+          </a:p>
+        </p:txBody>
+      </p:sp>
+      <p:sp>
+        <p:nvSpPr>
+          <p:cNvPr id="38" name="TextBox 37"/>
           <p:cNvSpPr txBox="1"/>
           <p:nvPr/>
         </p:nvSpPr>
         <p:spPr>
           <a:xfrm>
-            <a:off x="292608" y="5202936"/>
-            <a:ext cx="914400" cy="274320"/>
+            <a:off x="274320" y="5266944"/>
+            <a:ext cx="594360" cy="274320"/>
           </a:xfrm>
           <a:prstGeom prst="rect">
             <a:avLst/>
@@ -44497,26 +44728,26 @@
           <a:p>
             <a:pPr algn="ctr"/>
             <a:r>
-              <a:rPr sz="1000" b="1" i="0">
+              <a:rPr sz="900" b="1" i="0">
                 <a:solidFill>
                   <a:srgbClr val="FFFFFF"/>
                 </a:solidFill>
               </a:rPr>
-              <a:t>LOW</a:t>
+              <a:t>AMBER</a:t>
             </a:r>
           </a:p>
         </p:txBody>
       </p:sp>
       <p:sp>
         <p:nvSpPr>
-          <p:cNvPr id="33" name="TextBox 32"/>
+          <p:cNvPr id="39" name="TextBox 38"/>
           <p:cNvSpPr txBox="1"/>
           <p:nvPr/>
         </p:nvSpPr>
         <p:spPr>
           <a:xfrm>
-            <a:off x="1325880" y="5202936"/>
-            <a:ext cx="4297680" cy="292608"/>
+            <a:off x="960120" y="5266944"/>
+            <a:ext cx="4937760" cy="292608"/>
           </a:xfrm>
           <a:prstGeom prst="rect">
             <a:avLst/>
@@ -44533,24 +44764,24 @@
             <a:r>
               <a:rPr sz="1100" b="1" i="0">
                 <a:solidFill>
-                  <a:srgbClr val="404040"/>
+                  <a:srgbClr val="212121"/>
                 </a:solidFill>
               </a:rPr>
-              <a:t>Crown Castle Fiber Issue (Hicksville)</a:t>
+              <a:t>Substation Access / Weather Delays</a:t>
             </a:r>
           </a:p>
         </p:txBody>
       </p:sp>
       <p:sp>
         <p:nvSpPr>
-          <p:cNvPr id="34" name="TextBox 33"/>
+          <p:cNvPr id="40" name="TextBox 39"/>
           <p:cNvSpPr txBox="1"/>
           <p:nvPr/>
         </p:nvSpPr>
         <p:spPr>
           <a:xfrm>
-            <a:off x="365760" y="5550408"/>
-            <a:ext cx="5212080" cy="384048"/>
+            <a:off x="365760" y="5614416"/>
+            <a:ext cx="5486400" cy="347472"/>
           </a:xfrm>
           <a:prstGeom prst="rect">
             <a:avLst/>
@@ -44567,24 +44798,24 @@
             <a:r>
               <a:rPr sz="900" b="0" i="0">
                 <a:solidFill>
-                  <a:srgbClr val="404040"/>
+                  <a:srgbClr val="212121"/>
                 </a:solidFill>
               </a:rPr>
-              <a:t>Low dB levels on fiber — may be Crown Castle's network, not PSEG LI.</a:t>
+              <a:t>Escort availability, weather, or other site conflicts can delay field work and trigger Hawkeye cost impacts.</a:t>
             </a:r>
           </a:p>
         </p:txBody>
       </p:sp>
       <p:sp>
         <p:nvSpPr>
-          <p:cNvPr id="35" name="TextBox 34"/>
+          <p:cNvPr id="41" name="TextBox 40"/>
           <p:cNvSpPr txBox="1"/>
           <p:nvPr/>
         </p:nvSpPr>
         <p:spPr>
           <a:xfrm>
-            <a:off x="365760" y="5916168"/>
-            <a:ext cx="5212080" cy="347472"/>
+            <a:off x="365760" y="5961888"/>
+            <a:ext cx="5486400" cy="329184"/>
           </a:xfrm>
           <a:prstGeom prst="rect">
             <a:avLst/>
@@ -44604,31 +44835,31 @@
                   <a:srgbClr val="003387"/>
                 </a:solidFill>
               </a:rPr>
-              <a:t>Mitigation: OTDR testing planned 3/3. If Crown Castle issue confirmed, escalate to vendor.</a:t>
+              <a:t>↳ Mitigation: Verify availability weekly before mobilizing. Adjust site sequencing if specific sites are inaccessible.</a:t>
             </a:r>
           </a:p>
         </p:txBody>
       </p:sp>
       <p:sp>
         <p:nvSpPr>
-          <p:cNvPr id="36" name="Rectangle 35"/>
-          <p:cNvSpPr/>
-          <p:nvPr/>
-        </p:nvSpPr>
-        <p:spPr>
-          <a:xfrm>
-            <a:off x="5943600" y="1463040"/>
-            <a:ext cx="5943600" cy="1143000"/>
-          </a:xfrm>
-          <a:prstGeom prst="rect">
-            <a:avLst/>
-          </a:prstGeom>
-          <a:solidFill>
-            <a:srgbClr val="FFFFFF"/>
+          <p:cNvPr id="42" name="Rectangle 41"/>
+          <p:cNvSpPr/>
+          <p:nvPr/>
+        </p:nvSpPr>
+        <p:spPr>
+          <a:xfrm>
+            <a:off x="6217920" y="1664208"/>
+            <a:ext cx="5669280" cy="914400"/>
+          </a:xfrm>
+          <a:prstGeom prst="rect">
+            <a:avLst/>
+          </a:prstGeom>
+          <a:solidFill>
+            <a:srgbClr val="FFF8E1"/>
           </a:solidFill>
           <a:ln w="25400">
             <a:solidFill>
-              <a:srgbClr val="FFC000"/>
+              <a:srgbClr val="FFBF00"/>
             </a:solidFill>
           </a:ln>
         </p:spPr>
@@ -44656,57 +44887,57 @@
       </p:sp>
       <p:sp>
         <p:nvSpPr>
-          <p:cNvPr id="37" name="Rectangle 36"/>
-          <p:cNvSpPr/>
-          <p:nvPr/>
-        </p:nvSpPr>
-        <p:spPr>
-          <a:xfrm>
-            <a:off x="5943600" y="1463040"/>
-            <a:ext cx="1645920" cy="347472"/>
-          </a:xfrm>
-          <a:prstGeom prst="rect">
-            <a:avLst/>
-          </a:prstGeom>
-          <a:solidFill>
-            <a:srgbClr val="FFC000"/>
-          </a:solidFill>
-          <a:ln>
-            <a:noFill/>
-          </a:ln>
-        </p:spPr>
-        <p:style>
-          <a:lnRef idx="1">
-            <a:schemeClr val="accent1"/>
-          </a:lnRef>
-          <a:fillRef idx="3">
-            <a:schemeClr val="accent1"/>
-          </a:fillRef>
-          <a:effectRef idx="2">
-            <a:schemeClr val="accent1"/>
-          </a:effectRef>
-          <a:fontRef idx="minor">
-            <a:schemeClr val="lt1"/>
-          </a:fontRef>
-        </p:style>
-        <p:txBody>
-          <a:bodyPr rtlCol="0" anchor="ctr"/>
-          <a:lstStyle/>
-          <a:p>
-            <a:pPr algn="ctr"/>
-          </a:p>
-        </p:txBody>
-      </p:sp>
-      <p:sp>
-        <p:nvSpPr>
-          <p:cNvPr id="38" name="TextBox 37"/>
+          <p:cNvPr id="43" name="Rectangle 42"/>
+          <p:cNvSpPr/>
+          <p:nvPr/>
+        </p:nvSpPr>
+        <p:spPr>
+          <a:xfrm>
+            <a:off x="6217920" y="1664208"/>
+            <a:ext cx="822960" cy="320040"/>
+          </a:xfrm>
+          <a:prstGeom prst="rect">
+            <a:avLst/>
+          </a:prstGeom>
+          <a:solidFill>
+            <a:srgbClr val="FFBF00"/>
+          </a:solidFill>
+          <a:ln>
+            <a:noFill/>
+          </a:ln>
+        </p:spPr>
+        <p:style>
+          <a:lnRef idx="1">
+            <a:schemeClr val="accent1"/>
+          </a:lnRef>
+          <a:fillRef idx="3">
+            <a:schemeClr val="accent1"/>
+          </a:fillRef>
+          <a:effectRef idx="2">
+            <a:schemeClr val="accent1"/>
+          </a:effectRef>
+          <a:fontRef idx="minor">
+            <a:schemeClr val="lt1"/>
+          </a:fontRef>
+        </p:style>
+        <p:txBody>
+          <a:bodyPr rtlCol="0" anchor="ctr"/>
+          <a:lstStyle/>
+          <a:p>
+            <a:pPr algn="ctr"/>
+          </a:p>
+        </p:txBody>
+      </p:sp>
+      <p:sp>
+        <p:nvSpPr>
+          <p:cNvPr id="44" name="TextBox 43"/>
           <p:cNvSpPr txBox="1"/>
           <p:nvPr/>
         </p:nvSpPr>
         <p:spPr>
           <a:xfrm>
-            <a:off x="5961888" y="1499616"/>
-            <a:ext cx="1554480" cy="274320"/>
+            <a:off x="6217920" y="1700784"/>
+            <a:ext cx="822960" cy="237744"/>
           </a:xfrm>
           <a:prstGeom prst="rect">
             <a:avLst/>
@@ -44726,21 +44957,21 @@
                   <a:srgbClr val="FFFFFF"/>
                 </a:solidFill>
               </a:rPr>
-              <a:t>IN PROGRESS</a:t>
+              <a:t>AMBER</a:t>
             </a:r>
           </a:p>
         </p:txBody>
       </p:sp>
       <p:sp>
         <p:nvSpPr>
-          <p:cNvPr id="39" name="TextBox 38"/>
+          <p:cNvPr id="45" name="TextBox 44"/>
           <p:cNvSpPr txBox="1"/>
           <p:nvPr/>
         </p:nvSpPr>
         <p:spPr>
           <a:xfrm>
-            <a:off x="7680960" y="1499616"/>
-            <a:ext cx="4023360" cy="292608"/>
+            <a:off x="7132320" y="1700784"/>
+            <a:ext cx="4663440" cy="256032"/>
           </a:xfrm>
           <a:prstGeom prst="rect">
             <a:avLst/>
@@ -44757,24 +44988,24 @@
             <a:r>
               <a:rPr sz="1100" b="1" i="0">
                 <a:solidFill>
-                  <a:srgbClr val="404040"/>
+                  <a:srgbClr val="212121"/>
                 </a:solidFill>
               </a:rPr>
-              <a:t>Cat 6 Cabling — Hicksville NSP</a:t>
+              <a:t>Hicksville Cabling (NSP)</a:t>
             </a:r>
           </a:p>
         </p:txBody>
       </p:sp>
       <p:sp>
         <p:nvSpPr>
-          <p:cNvPr id="40" name="TextBox 39"/>
+          <p:cNvPr id="46" name="TextBox 45"/>
           <p:cNvSpPr txBox="1"/>
           <p:nvPr/>
         </p:nvSpPr>
         <p:spPr>
           <a:xfrm>
-            <a:off x="6035040" y="1901952"/>
-            <a:ext cx="5669280" cy="640080"/>
+            <a:off x="6309360" y="2011680"/>
+            <a:ext cx="5486400" cy="329184"/>
           </a:xfrm>
           <a:prstGeom prst="rect">
             <a:avLst/>
@@ -44789,36 +45020,70 @@
           <a:p>
             <a:pPr algn="l"/>
             <a:r>
-              <a:rPr sz="1000" b="0" i="0">
+              <a:rPr sz="900" b="0" i="0">
                 <a:solidFill>
-                  <a:srgbClr val="404040"/>
+                  <a:srgbClr val="212121"/>
                 </a:solidFill>
               </a:rPr>
-              <a:t>Cables ordered; Hawkeye scheduled to complete 3/3/2026.</a:t>
+              <a:t>Cat 6 cables ordered. Hawkeye completing cabling for Nokia NSP at Hicksville.</a:t>
             </a:r>
           </a:p>
         </p:txBody>
       </p:sp>
       <p:sp>
         <p:nvSpPr>
-          <p:cNvPr id="41" name="Rectangle 40"/>
-          <p:cNvSpPr/>
-          <p:nvPr/>
-        </p:nvSpPr>
-        <p:spPr>
-          <a:xfrm>
-            <a:off x="5943600" y="2697480"/>
-            <a:ext cx="5943600" cy="1143000"/>
-          </a:xfrm>
-          <a:prstGeom prst="rect">
-            <a:avLst/>
-          </a:prstGeom>
-          <a:solidFill>
-            <a:srgbClr val="FFFFFF"/>
+          <p:cNvPr id="47" name="TextBox 46"/>
+          <p:cNvSpPr txBox="1"/>
+          <p:nvPr/>
+        </p:nvSpPr>
+        <p:spPr>
+          <a:xfrm>
+            <a:off x="6309360" y="2331720"/>
+            <a:ext cx="5486400" cy="219456"/>
+          </a:xfrm>
+          <a:prstGeom prst="rect">
+            <a:avLst/>
+          </a:prstGeom>
+          <a:noFill/>
+        </p:spPr>
+        <p:txBody>
+          <a:bodyPr wrap="square">
+            <a:spAutoFit/>
+          </a:bodyPr>
+          <a:lstStyle/>
+          <a:p>
+            <a:pPr algn="l"/>
+            <a:r>
+              <a:rPr sz="900" b="1" i="1">
+                <a:solidFill>
+                  <a:srgbClr val="003387"/>
+                </a:solidFill>
+              </a:rPr>
+              <a:t>↳ Target: 3/3/2026</a:t>
+            </a:r>
+          </a:p>
+        </p:txBody>
+      </p:sp>
+      <p:sp>
+        <p:nvSpPr>
+          <p:cNvPr id="48" name="Rectangle 47"/>
+          <p:cNvSpPr/>
+          <p:nvPr/>
+        </p:nvSpPr>
+        <p:spPr>
+          <a:xfrm>
+            <a:off x="6217920" y="2651760"/>
+            <a:ext cx="5669280" cy="914400"/>
+          </a:xfrm>
+          <a:prstGeom prst="rect">
+            <a:avLst/>
+          </a:prstGeom>
+          <a:solidFill>
+            <a:srgbClr val="FFF8E1"/>
           </a:solidFill>
           <a:ln w="25400">
             <a:solidFill>
-              <a:srgbClr val="003387"/>
+              <a:srgbClr val="FFBF00"/>
             </a:solidFill>
           </a:ln>
         </p:spPr>
@@ -44846,57 +45111,57 @@
       </p:sp>
       <p:sp>
         <p:nvSpPr>
-          <p:cNvPr id="42" name="Rectangle 41"/>
-          <p:cNvSpPr/>
-          <p:nvPr/>
-        </p:nvSpPr>
-        <p:spPr>
-          <a:xfrm>
-            <a:off x="5943600" y="2697480"/>
-            <a:ext cx="1645920" cy="347472"/>
-          </a:xfrm>
-          <a:prstGeom prst="rect">
-            <a:avLst/>
-          </a:prstGeom>
-          <a:solidFill>
-            <a:srgbClr val="003387"/>
-          </a:solidFill>
-          <a:ln>
-            <a:noFill/>
-          </a:ln>
-        </p:spPr>
-        <p:style>
-          <a:lnRef idx="1">
-            <a:schemeClr val="accent1"/>
-          </a:lnRef>
-          <a:fillRef idx="3">
-            <a:schemeClr val="accent1"/>
-          </a:fillRef>
-          <a:effectRef idx="2">
-            <a:schemeClr val="accent1"/>
-          </a:effectRef>
-          <a:fontRef idx="minor">
-            <a:schemeClr val="lt1"/>
-          </a:fontRef>
-        </p:style>
-        <p:txBody>
-          <a:bodyPr rtlCol="0" anchor="ctr"/>
-          <a:lstStyle/>
-          <a:p>
-            <a:pPr algn="ctr"/>
-          </a:p>
-        </p:txBody>
-      </p:sp>
-      <p:sp>
-        <p:nvSpPr>
-          <p:cNvPr id="43" name="TextBox 42"/>
+          <p:cNvPr id="49" name="Rectangle 48"/>
+          <p:cNvSpPr/>
+          <p:nvPr/>
+        </p:nvSpPr>
+        <p:spPr>
+          <a:xfrm>
+            <a:off x="6217920" y="2651760"/>
+            <a:ext cx="822960" cy="320040"/>
+          </a:xfrm>
+          <a:prstGeom prst="rect">
+            <a:avLst/>
+          </a:prstGeom>
+          <a:solidFill>
+            <a:srgbClr val="FFBF00"/>
+          </a:solidFill>
+          <a:ln>
+            <a:noFill/>
+          </a:ln>
+        </p:spPr>
+        <p:style>
+          <a:lnRef idx="1">
+            <a:schemeClr val="accent1"/>
+          </a:lnRef>
+          <a:fillRef idx="3">
+            <a:schemeClr val="accent1"/>
+          </a:fillRef>
+          <a:effectRef idx="2">
+            <a:schemeClr val="accent1"/>
+          </a:effectRef>
+          <a:fontRef idx="minor">
+            <a:schemeClr val="lt1"/>
+          </a:fontRef>
+        </p:style>
+        <p:txBody>
+          <a:bodyPr rtlCol="0" anchor="ctr"/>
+          <a:lstStyle/>
+          <a:p>
+            <a:pPr algn="ctr"/>
+          </a:p>
+        </p:txBody>
+      </p:sp>
+      <p:sp>
+        <p:nvSpPr>
+          <p:cNvPr id="50" name="TextBox 49"/>
           <p:cNvSpPr txBox="1"/>
           <p:nvPr/>
         </p:nvSpPr>
         <p:spPr>
           <a:xfrm>
-            <a:off x="5961888" y="2734056"/>
-            <a:ext cx="1554480" cy="274320"/>
+            <a:off x="6217920" y="2688336"/>
+            <a:ext cx="822960" cy="237744"/>
           </a:xfrm>
           <a:prstGeom prst="rect">
             <a:avLst/>
@@ -44916,21 +45181,21 @@
                   <a:srgbClr val="FFFFFF"/>
                 </a:solidFill>
               </a:rPr>
-              <a:t>SCHEDULED</a:t>
+              <a:t>AMBER</a:t>
             </a:r>
           </a:p>
         </p:txBody>
       </p:sp>
       <p:sp>
         <p:nvSpPr>
-          <p:cNvPr id="44" name="TextBox 43"/>
+          <p:cNvPr id="51" name="TextBox 50"/>
           <p:cNvSpPr txBox="1"/>
           <p:nvPr/>
         </p:nvSpPr>
         <p:spPr>
           <a:xfrm>
-            <a:off x="7680960" y="2734056"/>
-            <a:ext cx="4023360" cy="292608"/>
+            <a:off x="7132320" y="2688336"/>
+            <a:ext cx="4663440" cy="256032"/>
           </a:xfrm>
           <a:prstGeom prst="rect">
             <a:avLst/>
@@ -44947,24 +45212,24 @@
             <a:r>
               <a:rPr sz="1100" b="1" i="0">
                 <a:solidFill>
-                  <a:srgbClr val="404040"/>
+                  <a:srgbClr val="212121"/>
                 </a:solidFill>
               </a:rPr>
-              <a:t>OTDR Testing — Hicksville</a:t>
+              <a:t>OTDR Testing — Hicksville Fiber</a:t>
             </a:r>
           </a:p>
         </p:txBody>
       </p:sp>
       <p:sp>
         <p:nvSpPr>
-          <p:cNvPr id="45" name="TextBox 44"/>
+          <p:cNvPr id="52" name="TextBox 51"/>
           <p:cNvSpPr txBox="1"/>
           <p:nvPr/>
         </p:nvSpPr>
         <p:spPr>
           <a:xfrm>
-            <a:off x="6035040" y="3136392"/>
-            <a:ext cx="5669280" cy="640080"/>
+            <a:off x="6309360" y="2999232"/>
+            <a:ext cx="5486400" cy="329184"/>
           </a:xfrm>
           <a:prstGeom prst="rect">
             <a:avLst/>
@@ -44979,36 +45244,70 @@
           <a:p>
             <a:pPr algn="l"/>
             <a:r>
-              <a:rPr sz="1000" b="0" i="0">
+              <a:rPr sz="900" b="0" i="0">
                 <a:solidFill>
-                  <a:srgbClr val="404040"/>
+                  <a:srgbClr val="212121"/>
                 </a:solidFill>
               </a:rPr>
-              <a:t>Low dB levels. OTDR test set confirmed for 1550 &amp; 1310nm. Site visit 3/3–3/4/2026.</a:t>
+              <a:t>Low dB levels on fiber at Hicksville. Crown Castle may be the root cause. OTDR testing planned.</a:t>
             </a:r>
           </a:p>
         </p:txBody>
       </p:sp>
       <p:sp>
         <p:nvSpPr>
-          <p:cNvPr id="46" name="Rectangle 45"/>
-          <p:cNvSpPr/>
-          <p:nvPr/>
-        </p:nvSpPr>
-        <p:spPr>
-          <a:xfrm>
-            <a:off x="5943600" y="3931920"/>
-            <a:ext cx="5943600" cy="1143000"/>
-          </a:xfrm>
-          <a:prstGeom prst="rect">
-            <a:avLst/>
-          </a:prstGeom>
-          <a:solidFill>
-            <a:srgbClr val="FFFFFF"/>
+          <p:cNvPr id="53" name="TextBox 52"/>
+          <p:cNvSpPr txBox="1"/>
+          <p:nvPr/>
+        </p:nvSpPr>
+        <p:spPr>
+          <a:xfrm>
+            <a:off x="6309360" y="3319272"/>
+            <a:ext cx="5486400" cy="219456"/>
+          </a:xfrm>
+          <a:prstGeom prst="rect">
+            <a:avLst/>
+          </a:prstGeom>
+          <a:noFill/>
+        </p:spPr>
+        <p:txBody>
+          <a:bodyPr wrap="square">
+            <a:spAutoFit/>
+          </a:bodyPr>
+          <a:lstStyle/>
+          <a:p>
+            <a:pPr algn="l"/>
+            <a:r>
+              <a:rPr sz="900" b="1" i="1">
+                <a:solidFill>
+                  <a:srgbClr val="003387"/>
+                </a:solidFill>
+              </a:rPr>
+              <a:t>↳ Target: 3/3–3/4/2026</a:t>
+            </a:r>
+          </a:p>
+        </p:txBody>
+      </p:sp>
+      <p:sp>
+        <p:nvSpPr>
+          <p:cNvPr id="54" name="Rectangle 53"/>
+          <p:cNvSpPr/>
+          <p:nvPr/>
+        </p:nvSpPr>
+        <p:spPr>
+          <a:xfrm>
+            <a:off x="6217920" y="3639312"/>
+            <a:ext cx="5669280" cy="914400"/>
+          </a:xfrm>
+          <a:prstGeom prst="rect">
+            <a:avLst/>
+          </a:prstGeom>
+          <a:solidFill>
+            <a:srgbClr val="FFF8E1"/>
           </a:solidFill>
           <a:ln w="25400">
             <a:solidFill>
-              <a:srgbClr val="FFC000"/>
+              <a:srgbClr val="FFBF00"/>
             </a:solidFill>
           </a:ln>
         </p:spPr>
@@ -45036,57 +45335,57 @@
       </p:sp>
       <p:sp>
         <p:nvSpPr>
-          <p:cNvPr id="47" name="Rectangle 46"/>
-          <p:cNvSpPr/>
-          <p:nvPr/>
-        </p:nvSpPr>
-        <p:spPr>
-          <a:xfrm>
-            <a:off x="5943600" y="3931920"/>
-            <a:ext cx="1645920" cy="347472"/>
-          </a:xfrm>
-          <a:prstGeom prst="rect">
-            <a:avLst/>
-          </a:prstGeom>
-          <a:solidFill>
-            <a:srgbClr val="FFC000"/>
-          </a:solidFill>
-          <a:ln>
-            <a:noFill/>
-          </a:ln>
-        </p:spPr>
-        <p:style>
-          <a:lnRef idx="1">
-            <a:schemeClr val="accent1"/>
-          </a:lnRef>
-          <a:fillRef idx="3">
-            <a:schemeClr val="accent1"/>
-          </a:fillRef>
-          <a:effectRef idx="2">
-            <a:schemeClr val="accent1"/>
-          </a:effectRef>
-          <a:fontRef idx="minor">
-            <a:schemeClr val="lt1"/>
-          </a:fontRef>
-        </p:style>
-        <p:txBody>
-          <a:bodyPr rtlCol="0" anchor="ctr"/>
-          <a:lstStyle/>
-          <a:p>
-            <a:pPr algn="ctr"/>
-          </a:p>
-        </p:txBody>
-      </p:sp>
-      <p:sp>
-        <p:nvSpPr>
-          <p:cNvPr id="48" name="TextBox 47"/>
+          <p:cNvPr id="55" name="Rectangle 54"/>
+          <p:cNvSpPr/>
+          <p:nvPr/>
+        </p:nvSpPr>
+        <p:spPr>
+          <a:xfrm>
+            <a:off x="6217920" y="3639312"/>
+            <a:ext cx="822960" cy="320040"/>
+          </a:xfrm>
+          <a:prstGeom prst="rect">
+            <a:avLst/>
+          </a:prstGeom>
+          <a:solidFill>
+            <a:srgbClr val="FFBF00"/>
+          </a:solidFill>
+          <a:ln>
+            <a:noFill/>
+          </a:ln>
+        </p:spPr>
+        <p:style>
+          <a:lnRef idx="1">
+            <a:schemeClr val="accent1"/>
+          </a:lnRef>
+          <a:fillRef idx="3">
+            <a:schemeClr val="accent1"/>
+          </a:fillRef>
+          <a:effectRef idx="2">
+            <a:schemeClr val="accent1"/>
+          </a:effectRef>
+          <a:fontRef idx="minor">
+            <a:schemeClr val="lt1"/>
+          </a:fontRef>
+        </p:style>
+        <p:txBody>
+          <a:bodyPr rtlCol="0" anchor="ctr"/>
+          <a:lstStyle/>
+          <a:p>
+            <a:pPr algn="ctr"/>
+          </a:p>
+        </p:txBody>
+      </p:sp>
+      <p:sp>
+        <p:nvSpPr>
+          <p:cNvPr id="56" name="TextBox 55"/>
           <p:cNvSpPr txBox="1"/>
           <p:nvPr/>
         </p:nvSpPr>
         <p:spPr>
           <a:xfrm>
-            <a:off x="5961888" y="3968496"/>
-            <a:ext cx="1554480" cy="274320"/>
+            <a:off x="6217920" y="3675888"/>
+            <a:ext cx="822960" cy="237744"/>
           </a:xfrm>
           <a:prstGeom prst="rect">
             <a:avLst/>
@@ -45106,21 +45405,21 @@
                   <a:srgbClr val="FFFFFF"/>
                 </a:solidFill>
               </a:rPr>
-              <a:t>IN PROGRESS</a:t>
+              <a:t>AMBER</a:t>
             </a:r>
           </a:p>
         </p:txBody>
       </p:sp>
       <p:sp>
         <p:nvSpPr>
-          <p:cNvPr id="49" name="TextBox 48"/>
+          <p:cNvPr id="57" name="TextBox 56"/>
           <p:cNvSpPr txBox="1"/>
           <p:nvPr/>
         </p:nvSpPr>
         <p:spPr>
           <a:xfrm>
-            <a:off x="7680960" y="3968496"/>
-            <a:ext cx="4023360" cy="292608"/>
+            <a:off x="7132320" y="3675888"/>
+            <a:ext cx="4663440" cy="256032"/>
           </a:xfrm>
           <a:prstGeom prst="rect">
             <a:avLst/>
@@ -45137,24 +45436,24 @@
             <a:r>
               <a:rPr sz="1100" b="1" i="0">
                 <a:solidFill>
-                  <a:srgbClr val="404040"/>
+                  <a:srgbClr val="212121"/>
                 </a:solidFill>
               </a:rPr>
-              <a:t>Remote Access — Phase 2 Nodes</a:t>
+              <a:t>Remote Access to Phase 2 Nodes</a:t>
             </a:r>
           </a:p>
         </p:txBody>
       </p:sp>
       <p:sp>
         <p:nvSpPr>
-          <p:cNvPr id="50" name="TextBox 49"/>
+          <p:cNvPr id="58" name="TextBox 57"/>
           <p:cNvSpPr txBox="1"/>
           <p:nvPr/>
         </p:nvSpPr>
         <p:spPr>
           <a:xfrm>
-            <a:off x="6035040" y="4370832"/>
-            <a:ext cx="5669280" cy="640080"/>
+            <a:off x="6309360" y="3986784"/>
+            <a:ext cx="5486400" cy="329184"/>
           </a:xfrm>
           <a:prstGeom prst="rect">
             <a:avLst/>
@@ -45169,36 +45468,70 @@
           <a:p>
             <a:pPr algn="l"/>
             <a:r>
-              <a:rPr sz="1000" b="0" i="0">
+              <a:rPr sz="900" b="0" i="0">
                 <a:solidFill>
-                  <a:srgbClr val="404040"/>
+                  <a:srgbClr val="212121"/>
                 </a:solidFill>
               </a:rPr>
-              <a:t>NSP at Hicksville &amp; Melville. Remote access needed before router configuration can begin.</a:t>
+              <a:t>Remote connectivity to NSP nodes at Hicksville &amp; Melville required before router config can begin.</a:t>
             </a:r>
           </a:p>
         </p:txBody>
       </p:sp>
       <p:sp>
         <p:nvSpPr>
-          <p:cNvPr id="51" name="Rectangle 50"/>
-          <p:cNvSpPr/>
-          <p:nvPr/>
-        </p:nvSpPr>
-        <p:spPr>
-          <a:xfrm>
-            <a:off x="5943600" y="5166360"/>
-            <a:ext cx="5943600" cy="1143000"/>
-          </a:xfrm>
-          <a:prstGeom prst="rect">
-            <a:avLst/>
-          </a:prstGeom>
-          <a:solidFill>
-            <a:srgbClr val="FFFFFF"/>
+          <p:cNvPr id="59" name="TextBox 58"/>
+          <p:cNvSpPr txBox="1"/>
+          <p:nvPr/>
+        </p:nvSpPr>
+        <p:spPr>
+          <a:xfrm>
+            <a:off x="6309360" y="4306824"/>
+            <a:ext cx="5486400" cy="219456"/>
+          </a:xfrm>
+          <a:prstGeom prst="rect">
+            <a:avLst/>
+          </a:prstGeom>
+          <a:noFill/>
+        </p:spPr>
+        <p:txBody>
+          <a:bodyPr wrap="square">
+            <a:spAutoFit/>
+          </a:bodyPr>
+          <a:lstStyle/>
+          <a:p>
+            <a:pPr algn="l"/>
+            <a:r>
+              <a:rPr sz="900" b="1" i="1">
+                <a:solidFill>
+                  <a:srgbClr val="003387"/>
+                </a:solidFill>
+              </a:rPr>
+              <a:t>↳ Target: In Progress</a:t>
+            </a:r>
+          </a:p>
+        </p:txBody>
+      </p:sp>
+      <p:sp>
+        <p:nvSpPr>
+          <p:cNvPr id="60" name="Rectangle 59"/>
+          <p:cNvSpPr/>
+          <p:nvPr/>
+        </p:nvSpPr>
+        <p:spPr>
+          <a:xfrm>
+            <a:off x="6217920" y="4626864"/>
+            <a:ext cx="5669280" cy="914400"/>
+          </a:xfrm>
+          <a:prstGeom prst="rect">
+            <a:avLst/>
+          </a:prstGeom>
+          <a:solidFill>
+            <a:srgbClr val="E8F5E9"/>
           </a:solidFill>
           <a:ln w="25400">
             <a:solidFill>
-              <a:srgbClr val="008000"/>
+              <a:srgbClr val="009700"/>
             </a:solidFill>
           </a:ln>
         </p:spPr>
@@ -45226,57 +45559,57 @@
       </p:sp>
       <p:sp>
         <p:nvSpPr>
-          <p:cNvPr id="52" name="Rectangle 51"/>
-          <p:cNvSpPr/>
-          <p:nvPr/>
-        </p:nvSpPr>
-        <p:spPr>
-          <a:xfrm>
-            <a:off x="5943600" y="5166360"/>
-            <a:ext cx="1645920" cy="347472"/>
-          </a:xfrm>
-          <a:prstGeom prst="rect">
-            <a:avLst/>
-          </a:prstGeom>
-          <a:solidFill>
-            <a:srgbClr val="008000"/>
-          </a:solidFill>
-          <a:ln>
-            <a:noFill/>
-          </a:ln>
-        </p:spPr>
-        <p:style>
-          <a:lnRef idx="1">
-            <a:schemeClr val="accent1"/>
-          </a:lnRef>
-          <a:fillRef idx="3">
-            <a:schemeClr val="accent1"/>
-          </a:fillRef>
-          <a:effectRef idx="2">
-            <a:schemeClr val="accent1"/>
-          </a:effectRef>
-          <a:fontRef idx="minor">
-            <a:schemeClr val="lt1"/>
-          </a:fontRef>
-        </p:style>
-        <p:txBody>
-          <a:bodyPr rtlCol="0" anchor="ctr"/>
-          <a:lstStyle/>
-          <a:p>
-            <a:pPr algn="ctr"/>
-          </a:p>
-        </p:txBody>
-      </p:sp>
-      <p:sp>
-        <p:nvSpPr>
-          <p:cNvPr id="53" name="TextBox 52"/>
+          <p:cNvPr id="61" name="Rectangle 60"/>
+          <p:cNvSpPr/>
+          <p:nvPr/>
+        </p:nvSpPr>
+        <p:spPr>
+          <a:xfrm>
+            <a:off x="6217920" y="4626864"/>
+            <a:ext cx="822960" cy="320040"/>
+          </a:xfrm>
+          <a:prstGeom prst="rect">
+            <a:avLst/>
+          </a:prstGeom>
+          <a:solidFill>
+            <a:srgbClr val="009700"/>
+          </a:solidFill>
+          <a:ln>
+            <a:noFill/>
+          </a:ln>
+        </p:spPr>
+        <p:style>
+          <a:lnRef idx="1">
+            <a:schemeClr val="accent1"/>
+          </a:lnRef>
+          <a:fillRef idx="3">
+            <a:schemeClr val="accent1"/>
+          </a:fillRef>
+          <a:effectRef idx="2">
+            <a:schemeClr val="accent1"/>
+          </a:effectRef>
+          <a:fontRef idx="minor">
+            <a:schemeClr val="lt1"/>
+          </a:fontRef>
+        </p:style>
+        <p:txBody>
+          <a:bodyPr rtlCol="0" anchor="ctr"/>
+          <a:lstStyle/>
+          <a:p>
+            <a:pPr algn="ctr"/>
+          </a:p>
+        </p:txBody>
+      </p:sp>
+      <p:sp>
+        <p:nvSpPr>
+          <p:cNvPr id="62" name="TextBox 61"/>
           <p:cNvSpPr txBox="1"/>
           <p:nvPr/>
         </p:nvSpPr>
         <p:spPr>
           <a:xfrm>
-            <a:off x="5961888" y="5202936"/>
-            <a:ext cx="1554480" cy="274320"/>
+            <a:off x="6217920" y="4663440"/>
+            <a:ext cx="822960" cy="237744"/>
           </a:xfrm>
           <a:prstGeom prst="rect">
             <a:avLst/>
@@ -45296,21 +45629,21 @@
                   <a:srgbClr val="FFFFFF"/>
                 </a:solidFill>
               </a:rPr>
-              <a:t>COMPLETE</a:t>
+              <a:t>GREEN</a:t>
             </a:r>
           </a:p>
         </p:txBody>
       </p:sp>
       <p:sp>
         <p:nvSpPr>
-          <p:cNvPr id="54" name="TextBox 53"/>
+          <p:cNvPr id="63" name="TextBox 62"/>
           <p:cNvSpPr txBox="1"/>
           <p:nvPr/>
         </p:nvSpPr>
         <p:spPr>
           <a:xfrm>
-            <a:off x="7680960" y="5202936"/>
-            <a:ext cx="4023360" cy="292608"/>
+            <a:off x="7132320" y="4663440"/>
+            <a:ext cx="4663440" cy="256032"/>
           </a:xfrm>
           <a:prstGeom prst="rect">
             <a:avLst/>
@@ -45327,24 +45660,24 @@
             <a:r>
               <a:rPr sz="1100" b="1" i="0">
                 <a:solidFill>
-                  <a:srgbClr val="404040"/>
+                  <a:srgbClr val="212121"/>
                 </a:solidFill>
               </a:rPr>
-              <a:t>Phase 2 SSP / Security Reviews</a:t>
+              <a:t>Phase 1 SSP / Security Reviews</a:t>
             </a:r>
           </a:p>
         </p:txBody>
       </p:sp>
       <p:sp>
         <p:nvSpPr>
-          <p:cNvPr id="55" name="TextBox 54"/>
+          <p:cNvPr id="64" name="TextBox 63"/>
           <p:cNvSpPr txBox="1"/>
           <p:nvPr/>
         </p:nvSpPr>
         <p:spPr>
           <a:xfrm>
-            <a:off x="6035040" y="5605272"/>
-            <a:ext cx="5669280" cy="640080"/>
+            <a:off x="6309360" y="4974336"/>
+            <a:ext cx="5486400" cy="329184"/>
           </a:xfrm>
           <a:prstGeom prst="rect">
             <a:avLst/>
@@ -45359,12 +45692,270 @@
           <a:p>
             <a:pPr algn="l"/>
             <a:r>
-              <a:rPr sz="1000" b="0" i="0">
+              <a:rPr sz="900" b="0" i="0">
                 <a:solidFill>
-                  <a:srgbClr val="404040"/>
+                  <a:srgbClr val="212121"/>
                 </a:solidFill>
               </a:rPr>
-              <a:t>Architecture review, security assessment, compliance readiness all approved 2/10/2026.</a:t>
+              <a:t>Architecture review, security assessment, and compliance readiness all approved by SSP team.</a:t>
+            </a:r>
+          </a:p>
+        </p:txBody>
+      </p:sp>
+      <p:sp>
+        <p:nvSpPr>
+          <p:cNvPr id="65" name="TextBox 64"/>
+          <p:cNvSpPr txBox="1"/>
+          <p:nvPr/>
+        </p:nvSpPr>
+        <p:spPr>
+          <a:xfrm>
+            <a:off x="6309360" y="5294376"/>
+            <a:ext cx="5486400" cy="219456"/>
+          </a:xfrm>
+          <a:prstGeom prst="rect">
+            <a:avLst/>
+          </a:prstGeom>
+          <a:noFill/>
+        </p:spPr>
+        <p:txBody>
+          <a:bodyPr wrap="square">
+            <a:spAutoFit/>
+          </a:bodyPr>
+          <a:lstStyle/>
+          <a:p>
+            <a:pPr algn="l"/>
+            <a:r>
+              <a:rPr sz="900" b="1" i="1">
+                <a:solidFill>
+                  <a:srgbClr val="009700"/>
+                </a:solidFill>
+              </a:rPr>
+              <a:t>↳ Target: Completed 2/10/2026</a:t>
+            </a:r>
+          </a:p>
+        </p:txBody>
+      </p:sp>
+      <p:sp>
+        <p:nvSpPr>
+          <p:cNvPr id="66" name="Rectangle 65"/>
+          <p:cNvSpPr/>
+          <p:nvPr/>
+        </p:nvSpPr>
+        <p:spPr>
+          <a:xfrm>
+            <a:off x="6217920" y="5614416"/>
+            <a:ext cx="5669280" cy="914400"/>
+          </a:xfrm>
+          <a:prstGeom prst="rect">
+            <a:avLst/>
+          </a:prstGeom>
+          <a:solidFill>
+            <a:srgbClr val="E8F5E9"/>
+          </a:solidFill>
+          <a:ln w="25400">
+            <a:solidFill>
+              <a:srgbClr val="009700"/>
+            </a:solidFill>
+          </a:ln>
+        </p:spPr>
+        <p:style>
+          <a:lnRef idx="1">
+            <a:schemeClr val="accent1"/>
+          </a:lnRef>
+          <a:fillRef idx="3">
+            <a:schemeClr val="accent1"/>
+          </a:fillRef>
+          <a:effectRef idx="2">
+            <a:schemeClr val="accent1"/>
+          </a:effectRef>
+          <a:fontRef idx="minor">
+            <a:schemeClr val="lt1"/>
+          </a:fontRef>
+        </p:style>
+        <p:txBody>
+          <a:bodyPr rtlCol="0" anchor="ctr"/>
+          <a:lstStyle/>
+          <a:p>
+            <a:pPr algn="ctr"/>
+          </a:p>
+        </p:txBody>
+      </p:sp>
+      <p:sp>
+        <p:nvSpPr>
+          <p:cNvPr id="67" name="Rectangle 66"/>
+          <p:cNvSpPr/>
+          <p:nvPr/>
+        </p:nvSpPr>
+        <p:spPr>
+          <a:xfrm>
+            <a:off x="6217920" y="5614416"/>
+            <a:ext cx="822960" cy="320040"/>
+          </a:xfrm>
+          <a:prstGeom prst="rect">
+            <a:avLst/>
+          </a:prstGeom>
+          <a:solidFill>
+            <a:srgbClr val="009700"/>
+          </a:solidFill>
+          <a:ln>
+            <a:noFill/>
+          </a:ln>
+        </p:spPr>
+        <p:style>
+          <a:lnRef idx="1">
+            <a:schemeClr val="accent1"/>
+          </a:lnRef>
+          <a:fillRef idx="3">
+            <a:schemeClr val="accent1"/>
+          </a:fillRef>
+          <a:effectRef idx="2">
+            <a:schemeClr val="accent1"/>
+          </a:effectRef>
+          <a:fontRef idx="minor">
+            <a:schemeClr val="lt1"/>
+          </a:fontRef>
+        </p:style>
+        <p:txBody>
+          <a:bodyPr rtlCol="0" anchor="ctr"/>
+          <a:lstStyle/>
+          <a:p>
+            <a:pPr algn="ctr"/>
+          </a:p>
+        </p:txBody>
+      </p:sp>
+      <p:sp>
+        <p:nvSpPr>
+          <p:cNvPr id="68" name="TextBox 67"/>
+          <p:cNvSpPr txBox="1"/>
+          <p:nvPr/>
+        </p:nvSpPr>
+        <p:spPr>
+          <a:xfrm>
+            <a:off x="6217920" y="5650992"/>
+            <a:ext cx="822960" cy="237744"/>
+          </a:xfrm>
+          <a:prstGeom prst="rect">
+            <a:avLst/>
+          </a:prstGeom>
+          <a:noFill/>
+        </p:spPr>
+        <p:txBody>
+          <a:bodyPr wrap="square">
+            <a:spAutoFit/>
+          </a:bodyPr>
+          <a:lstStyle/>
+          <a:p>
+            <a:pPr algn="ctr"/>
+            <a:r>
+              <a:rPr sz="900" b="1" i="0">
+                <a:solidFill>
+                  <a:srgbClr val="FFFFFF"/>
+                </a:solidFill>
+              </a:rPr>
+              <a:t>GREEN</a:t>
+            </a:r>
+          </a:p>
+        </p:txBody>
+      </p:sp>
+      <p:sp>
+        <p:nvSpPr>
+          <p:cNvPr id="69" name="TextBox 68"/>
+          <p:cNvSpPr txBox="1"/>
+          <p:nvPr/>
+        </p:nvSpPr>
+        <p:spPr>
+          <a:xfrm>
+            <a:off x="7132320" y="5650992"/>
+            <a:ext cx="4663440" cy="256032"/>
+          </a:xfrm>
+          <a:prstGeom prst="rect">
+            <a:avLst/>
+          </a:prstGeom>
+          <a:noFill/>
+        </p:spPr>
+        <p:txBody>
+          <a:bodyPr wrap="square">
+            <a:spAutoFit/>
+          </a:bodyPr>
+          <a:lstStyle/>
+          <a:p>
+            <a:pPr algn="l"/>
+            <a:r>
+              <a:rPr sz="1100" b="1" i="0">
+                <a:solidFill>
+                  <a:srgbClr val="212121"/>
+                </a:solidFill>
+              </a:rPr>
+              <a:t>CMDB Inventory Update</a:t>
+            </a:r>
+          </a:p>
+        </p:txBody>
+      </p:sp>
+      <p:sp>
+        <p:nvSpPr>
+          <p:cNvPr id="70" name="TextBox 69"/>
+          <p:cNvSpPr txBox="1"/>
+          <p:nvPr/>
+        </p:nvSpPr>
+        <p:spPr>
+          <a:xfrm>
+            <a:off x="6309360" y="5961888"/>
+            <a:ext cx="5486400" cy="329184"/>
+          </a:xfrm>
+          <a:prstGeom prst="rect">
+            <a:avLst/>
+          </a:prstGeom>
+          <a:noFill/>
+        </p:spPr>
+        <p:txBody>
+          <a:bodyPr wrap="square">
+            <a:spAutoFit/>
+          </a:bodyPr>
+          <a:lstStyle/>
+          <a:p>
+            <a:pPr algn="l"/>
+            <a:r>
+              <a:rPr sz="900" b="0" i="0">
+                <a:solidFill>
+                  <a:srgbClr val="212121"/>
+                </a:solidFill>
+              </a:rPr>
+              <a:t>CMDB inventory spreadsheet completed and confirmed in database.</a:t>
+            </a:r>
+          </a:p>
+        </p:txBody>
+      </p:sp>
+      <p:sp>
+        <p:nvSpPr>
+          <p:cNvPr id="71" name="TextBox 70"/>
+          <p:cNvSpPr txBox="1"/>
+          <p:nvPr/>
+        </p:nvSpPr>
+        <p:spPr>
+          <a:xfrm>
+            <a:off x="6309360" y="6281928"/>
+            <a:ext cx="5486400" cy="219456"/>
+          </a:xfrm>
+          <a:prstGeom prst="rect">
+            <a:avLst/>
+          </a:prstGeom>
+          <a:noFill/>
+        </p:spPr>
+        <p:txBody>
+          <a:bodyPr wrap="square">
+            <a:spAutoFit/>
+          </a:bodyPr>
+          <a:lstStyle/>
+          <a:p>
+            <a:pPr algn="l"/>
+            <a:r>
+              <a:rPr sz="900" b="1" i="1">
+                <a:solidFill>
+                  <a:srgbClr val="009700"/>
+                </a:solidFill>
+              </a:rPr>
+              <a:t>↳ Target: Completed 2/24/2026</a:t>
             </a:r>
           </a:p>
         </p:txBody>

--- a/incoming_files/cio_jmux_presentation.pptx
+++ b/incoming_files/cio_jmux_presentation.pptx
@@ -16,6 +16,7 @@
     <p:sldId id="264" r:id="rId15"/>
     <p:sldId id="265" r:id="rId16"/>
     <p:sldId id="266" r:id="rId17"/>
+    <p:sldId id="267" r:id="rId18"/>
   </p:sldIdLst>
   <p:sldSz cx="12191695" cy="6858000" type="screen4x3"/>
   <p:notesSz cx="6858000" cy="9144000"/>
@@ -9979,6 +9980,4365 @@
                 </a:solidFill>
               </a:rPr>
               <a:t>⚠  Note: 2026 ETC of $2.92M exceeds remaining budget of $1.75M by $1.17M. CIO approval required for budget augmentation. Phase 3 2026 exposure ($588K) pending confirmation.</a:t>
+            </a:r>
+          </a:p>
+        </p:txBody>
+      </p:sp>
+    </p:spTree>
+  </p:cSld>
+  <p:clrMapOvr>
+    <a:masterClrMapping/>
+  </p:clrMapOvr>
+</p:sld>
+</file>
+
+<file path=ppt/slides/slide12.xml><?xml version="1.0" encoding="utf-8"?>
+<p:sld xmlns:a="http://schemas.openxmlformats.org/drawingml/2006/main" xmlns:p="http://schemas.openxmlformats.org/presentationml/2006/main" xmlns:r="http://schemas.openxmlformats.org/officeDocument/2006/relationships">
+  <p:cSld>
+    <p:spTree>
+      <p:nvGrpSpPr>
+        <p:cNvPr id="1" name=""/>
+        <p:cNvGrpSpPr/>
+        <p:nvPr/>
+      </p:nvGrpSpPr>
+      <p:grpSpPr/>
+      <p:sp>
+        <p:nvSpPr>
+          <p:cNvPr id="2" name="Rectangle 1"/>
+          <p:cNvSpPr/>
+          <p:nvPr/>
+        </p:nvSpPr>
+        <p:spPr>
+          <a:xfrm>
+            <a:off x="0" y="0"/>
+            <a:ext cx="12191695" cy="914400"/>
+          </a:xfrm>
+          <a:prstGeom prst="rect">
+            <a:avLst/>
+          </a:prstGeom>
+          <a:solidFill>
+            <a:srgbClr val="003387"/>
+          </a:solidFill>
+          <a:ln>
+            <a:noFill/>
+          </a:ln>
+        </p:spPr>
+        <p:style>
+          <a:lnRef idx="1">
+            <a:schemeClr val="accent1"/>
+          </a:lnRef>
+          <a:fillRef idx="3">
+            <a:schemeClr val="accent1"/>
+          </a:fillRef>
+          <a:effectRef idx="2">
+            <a:schemeClr val="accent1"/>
+          </a:effectRef>
+          <a:fontRef idx="minor">
+            <a:schemeClr val="lt1"/>
+          </a:fontRef>
+        </p:style>
+        <p:txBody>
+          <a:bodyPr rtlCol="0" anchor="ctr"/>
+          <a:lstStyle/>
+          <a:p>
+            <a:pPr algn="ctr"/>
+          </a:p>
+        </p:txBody>
+      </p:sp>
+      <p:sp>
+        <p:nvSpPr>
+          <p:cNvPr id="3" name="Rectangle 2"/>
+          <p:cNvSpPr/>
+          <p:nvPr/>
+        </p:nvSpPr>
+        <p:spPr>
+          <a:xfrm>
+            <a:off x="0" y="777240"/>
+            <a:ext cx="12191695" cy="109728"/>
+          </a:xfrm>
+          <a:prstGeom prst="rect">
+            <a:avLst/>
+          </a:prstGeom>
+          <a:solidFill>
+            <a:srgbClr val="F7941D"/>
+          </a:solidFill>
+          <a:ln>
+            <a:noFill/>
+          </a:ln>
+        </p:spPr>
+        <p:style>
+          <a:lnRef idx="1">
+            <a:schemeClr val="accent1"/>
+          </a:lnRef>
+          <a:fillRef idx="3">
+            <a:schemeClr val="accent1"/>
+          </a:fillRef>
+          <a:effectRef idx="2">
+            <a:schemeClr val="accent1"/>
+          </a:effectRef>
+          <a:fontRef idx="minor">
+            <a:schemeClr val="lt1"/>
+          </a:fontRef>
+        </p:style>
+        <p:txBody>
+          <a:bodyPr rtlCol="0" anchor="ctr"/>
+          <a:lstStyle/>
+          <a:p>
+            <a:pPr algn="ctr"/>
+          </a:p>
+        </p:txBody>
+      </p:sp>
+      <p:sp>
+        <p:nvSpPr>
+          <p:cNvPr id="4" name="TextBox 3"/>
+          <p:cNvSpPr txBox="1"/>
+          <p:nvPr/>
+        </p:nvSpPr>
+        <p:spPr>
+          <a:xfrm>
+            <a:off x="274320" y="109728"/>
+            <a:ext cx="9144000" cy="594360"/>
+          </a:xfrm>
+          <a:prstGeom prst="rect">
+            <a:avLst/>
+          </a:prstGeom>
+          <a:noFill/>
+        </p:spPr>
+        <p:txBody>
+          <a:bodyPr wrap="none">
+            <a:spAutoFit/>
+          </a:bodyPr>
+          <a:lstStyle/>
+          <a:p>
+            <a:pPr algn="l"/>
+            <a:r>
+              <a:rPr sz="2400" b="1">
+                <a:solidFill>
+                  <a:srgbClr val="FFFFFF"/>
+                </a:solidFill>
+              </a:rPr>
+              <a:t>Phase 2 &amp; 3 Master Schedule</a:t>
+            </a:r>
+          </a:p>
+        </p:txBody>
+      </p:sp>
+      <p:sp>
+        <p:nvSpPr>
+          <p:cNvPr id="5" name="TextBox 4"/>
+          <p:cNvSpPr txBox="1"/>
+          <p:nvPr/>
+        </p:nvSpPr>
+        <p:spPr>
+          <a:xfrm>
+            <a:off x="274320" y="548640"/>
+            <a:ext cx="10972800" cy="292608"/>
+          </a:xfrm>
+          <a:prstGeom prst="rect">
+            <a:avLst/>
+          </a:prstGeom>
+          <a:noFill/>
+        </p:spPr>
+        <p:txBody>
+          <a:bodyPr wrap="none">
+            <a:spAutoFit/>
+          </a:bodyPr>
+          <a:lstStyle/>
+          <a:p>
+            <a:pPr algn="l"/>
+            <a:r>
+              <a:rPr sz="1000" b="0">
+                <a:solidFill>
+                  <a:srgbClr val="F7941D"/>
+                </a:solidFill>
+              </a:rPr>
+              <a:t>Burns &amp; McDonnell | Live MPP Data | As of March 12, 2026</a:t>
+            </a:r>
+          </a:p>
+        </p:txBody>
+      </p:sp>
+      <p:sp>
+        <p:nvSpPr>
+          <p:cNvPr id="6" name="Rectangle 5"/>
+          <p:cNvSpPr/>
+          <p:nvPr/>
+        </p:nvSpPr>
+        <p:spPr>
+          <a:xfrm>
+            <a:off x="0" y="6583680"/>
+            <a:ext cx="12191695" cy="274320"/>
+          </a:xfrm>
+          <a:prstGeom prst="rect">
+            <a:avLst/>
+          </a:prstGeom>
+          <a:solidFill>
+            <a:srgbClr val="003387"/>
+          </a:solidFill>
+          <a:ln>
+            <a:noFill/>
+          </a:ln>
+        </p:spPr>
+        <p:style>
+          <a:lnRef idx="1">
+            <a:schemeClr val="accent1"/>
+          </a:lnRef>
+          <a:fillRef idx="3">
+            <a:schemeClr val="accent1"/>
+          </a:fillRef>
+          <a:effectRef idx="2">
+            <a:schemeClr val="accent1"/>
+          </a:effectRef>
+          <a:fontRef idx="minor">
+            <a:schemeClr val="lt1"/>
+          </a:fontRef>
+        </p:style>
+        <p:txBody>
+          <a:bodyPr rtlCol="0" anchor="ctr"/>
+          <a:lstStyle/>
+          <a:p>
+            <a:pPr algn="ctr"/>
+          </a:p>
+        </p:txBody>
+      </p:sp>
+      <p:sp>
+        <p:nvSpPr>
+          <p:cNvPr id="7" name="TextBox 6"/>
+          <p:cNvSpPr txBox="1"/>
+          <p:nvPr/>
+        </p:nvSpPr>
+        <p:spPr>
+          <a:xfrm>
+            <a:off x="274320" y="6601968"/>
+            <a:ext cx="10972800" cy="228600"/>
+          </a:xfrm>
+          <a:prstGeom prst="rect">
+            <a:avLst/>
+          </a:prstGeom>
+          <a:noFill/>
+        </p:spPr>
+        <p:txBody>
+          <a:bodyPr wrap="none">
+            <a:spAutoFit/>
+          </a:bodyPr>
+          <a:lstStyle/>
+          <a:p>
+            <a:pPr algn="l"/>
+            <a:r>
+              <a:rPr sz="800" b="0">
+                <a:solidFill>
+                  <a:srgbClr val="FFFFFF"/>
+                </a:solidFill>
+              </a:rPr>
+              <a:t>PSEG Long Island | JMUX Replacement Program | Confidential | March 2026</a:t>
+            </a:r>
+          </a:p>
+        </p:txBody>
+      </p:sp>
+      <p:sp>
+        <p:nvSpPr>
+          <p:cNvPr id="8" name="Rectangle 7"/>
+          <p:cNvSpPr/>
+          <p:nvPr/>
+        </p:nvSpPr>
+        <p:spPr>
+          <a:xfrm>
+            <a:off x="3337560" y="1005840"/>
+            <a:ext cx="8641080" cy="237744"/>
+          </a:xfrm>
+          <a:prstGeom prst="rect">
+            <a:avLst/>
+          </a:prstGeom>
+          <a:solidFill>
+            <a:srgbClr val="003387"/>
+          </a:solidFill>
+          <a:ln>
+            <a:noFill/>
+          </a:ln>
+        </p:spPr>
+        <p:style>
+          <a:lnRef idx="1">
+            <a:schemeClr val="accent1"/>
+          </a:lnRef>
+          <a:fillRef idx="3">
+            <a:schemeClr val="accent1"/>
+          </a:fillRef>
+          <a:effectRef idx="2">
+            <a:schemeClr val="accent1"/>
+          </a:effectRef>
+          <a:fontRef idx="minor">
+            <a:schemeClr val="lt1"/>
+          </a:fontRef>
+        </p:style>
+        <p:txBody>
+          <a:bodyPr rtlCol="0" anchor="ctr"/>
+          <a:lstStyle/>
+          <a:p>
+            <a:pPr algn="ctr"/>
+          </a:p>
+        </p:txBody>
+      </p:sp>
+      <p:sp>
+        <p:nvSpPr>
+          <p:cNvPr id="9" name="TextBox 8"/>
+          <p:cNvSpPr txBox="1"/>
+          <p:nvPr/>
+        </p:nvSpPr>
+        <p:spPr>
+          <a:xfrm>
+            <a:off x="3355848" y="1024128"/>
+            <a:ext cx="580643" cy="182880"/>
+          </a:xfrm>
+          <a:prstGeom prst="rect">
+            <a:avLst/>
+          </a:prstGeom>
+          <a:noFill/>
+        </p:spPr>
+        <p:txBody>
+          <a:bodyPr wrap="none">
+            <a:spAutoFit/>
+          </a:bodyPr>
+          <a:lstStyle/>
+          <a:p>
+            <a:pPr algn="ctr"/>
+            <a:r>
+              <a:rPr sz="700" b="1">
+                <a:solidFill>
+                  <a:srgbClr val="FFFFFF"/>
+                </a:solidFill>
+              </a:rPr>
+              <a:t>Jan 26</a:t>
+            </a:r>
+          </a:p>
+        </p:txBody>
+      </p:sp>
+      <p:sp>
+        <p:nvSpPr>
+          <p:cNvPr id="10" name="TextBox 9"/>
+          <p:cNvSpPr txBox="1"/>
+          <p:nvPr/>
+        </p:nvSpPr>
+        <p:spPr>
+          <a:xfrm>
+            <a:off x="3973068" y="1024128"/>
+            <a:ext cx="580643" cy="182880"/>
+          </a:xfrm>
+          <a:prstGeom prst="rect">
+            <a:avLst/>
+          </a:prstGeom>
+          <a:noFill/>
+        </p:spPr>
+        <p:txBody>
+          <a:bodyPr wrap="none">
+            <a:spAutoFit/>
+          </a:bodyPr>
+          <a:lstStyle/>
+          <a:p>
+            <a:pPr algn="ctr"/>
+            <a:r>
+              <a:rPr sz="700" b="1">
+                <a:solidFill>
+                  <a:srgbClr val="FFFFFF"/>
+                </a:solidFill>
+              </a:rPr>
+              <a:t>Feb</a:t>
+            </a:r>
+          </a:p>
+        </p:txBody>
+      </p:sp>
+      <p:sp>
+        <p:nvSpPr>
+          <p:cNvPr id="11" name="Rectangle 10"/>
+          <p:cNvSpPr/>
+          <p:nvPr/>
+        </p:nvSpPr>
+        <p:spPr>
+          <a:xfrm>
+            <a:off x="3954780" y="1005840"/>
+            <a:ext cx="7315" cy="237744"/>
+          </a:xfrm>
+          <a:prstGeom prst="rect">
+            <a:avLst/>
+          </a:prstGeom>
+          <a:solidFill>
+            <a:srgbClr val="4466AA"/>
+          </a:solidFill>
+          <a:ln>
+            <a:noFill/>
+          </a:ln>
+        </p:spPr>
+        <p:style>
+          <a:lnRef idx="1">
+            <a:schemeClr val="accent1"/>
+          </a:lnRef>
+          <a:fillRef idx="3">
+            <a:schemeClr val="accent1"/>
+          </a:fillRef>
+          <a:effectRef idx="2">
+            <a:schemeClr val="accent1"/>
+          </a:effectRef>
+          <a:fontRef idx="minor">
+            <a:schemeClr val="lt1"/>
+          </a:fontRef>
+        </p:style>
+        <p:txBody>
+          <a:bodyPr rtlCol="0" anchor="ctr"/>
+          <a:lstStyle/>
+          <a:p>
+            <a:pPr algn="ctr"/>
+          </a:p>
+        </p:txBody>
+      </p:sp>
+      <p:sp>
+        <p:nvSpPr>
+          <p:cNvPr id="12" name="TextBox 11"/>
+          <p:cNvSpPr txBox="1"/>
+          <p:nvPr/>
+        </p:nvSpPr>
+        <p:spPr>
+          <a:xfrm>
+            <a:off x="4590288" y="1024128"/>
+            <a:ext cx="580643" cy="182880"/>
+          </a:xfrm>
+          <a:prstGeom prst="rect">
+            <a:avLst/>
+          </a:prstGeom>
+          <a:noFill/>
+        </p:spPr>
+        <p:txBody>
+          <a:bodyPr wrap="none">
+            <a:spAutoFit/>
+          </a:bodyPr>
+          <a:lstStyle/>
+          <a:p>
+            <a:pPr algn="ctr"/>
+            <a:r>
+              <a:rPr sz="700" b="1">
+                <a:solidFill>
+                  <a:srgbClr val="FFFFFF"/>
+                </a:solidFill>
+              </a:rPr>
+              <a:t>Mar</a:t>
+            </a:r>
+          </a:p>
+        </p:txBody>
+      </p:sp>
+      <p:sp>
+        <p:nvSpPr>
+          <p:cNvPr id="13" name="Rectangle 12"/>
+          <p:cNvSpPr/>
+          <p:nvPr/>
+        </p:nvSpPr>
+        <p:spPr>
+          <a:xfrm>
+            <a:off x="4572000" y="1005840"/>
+            <a:ext cx="7315" cy="237744"/>
+          </a:xfrm>
+          <a:prstGeom prst="rect">
+            <a:avLst/>
+          </a:prstGeom>
+          <a:solidFill>
+            <a:srgbClr val="4466AA"/>
+          </a:solidFill>
+          <a:ln>
+            <a:noFill/>
+          </a:ln>
+        </p:spPr>
+        <p:style>
+          <a:lnRef idx="1">
+            <a:schemeClr val="accent1"/>
+          </a:lnRef>
+          <a:fillRef idx="3">
+            <a:schemeClr val="accent1"/>
+          </a:fillRef>
+          <a:effectRef idx="2">
+            <a:schemeClr val="accent1"/>
+          </a:effectRef>
+          <a:fontRef idx="minor">
+            <a:schemeClr val="lt1"/>
+          </a:fontRef>
+        </p:style>
+        <p:txBody>
+          <a:bodyPr rtlCol="0" anchor="ctr"/>
+          <a:lstStyle/>
+          <a:p>
+            <a:pPr algn="ctr"/>
+          </a:p>
+        </p:txBody>
+      </p:sp>
+      <p:sp>
+        <p:nvSpPr>
+          <p:cNvPr id="14" name="TextBox 13"/>
+          <p:cNvSpPr txBox="1"/>
+          <p:nvPr/>
+        </p:nvSpPr>
+        <p:spPr>
+          <a:xfrm>
+            <a:off x="5207507" y="1024128"/>
+            <a:ext cx="580643" cy="182880"/>
+          </a:xfrm>
+          <a:prstGeom prst="rect">
+            <a:avLst/>
+          </a:prstGeom>
+          <a:noFill/>
+        </p:spPr>
+        <p:txBody>
+          <a:bodyPr wrap="none">
+            <a:spAutoFit/>
+          </a:bodyPr>
+          <a:lstStyle/>
+          <a:p>
+            <a:pPr algn="ctr"/>
+            <a:r>
+              <a:rPr sz="700" b="1">
+                <a:solidFill>
+                  <a:srgbClr val="FFFFFF"/>
+                </a:solidFill>
+              </a:rPr>
+              <a:t>Apr</a:t>
+            </a:r>
+          </a:p>
+        </p:txBody>
+      </p:sp>
+      <p:sp>
+        <p:nvSpPr>
+          <p:cNvPr id="15" name="Rectangle 14"/>
+          <p:cNvSpPr/>
+          <p:nvPr/>
+        </p:nvSpPr>
+        <p:spPr>
+          <a:xfrm>
+            <a:off x="5189220" y="1005840"/>
+            <a:ext cx="7315" cy="237744"/>
+          </a:xfrm>
+          <a:prstGeom prst="rect">
+            <a:avLst/>
+          </a:prstGeom>
+          <a:solidFill>
+            <a:srgbClr val="4466AA"/>
+          </a:solidFill>
+          <a:ln>
+            <a:noFill/>
+          </a:ln>
+        </p:spPr>
+        <p:style>
+          <a:lnRef idx="1">
+            <a:schemeClr val="accent1"/>
+          </a:lnRef>
+          <a:fillRef idx="3">
+            <a:schemeClr val="accent1"/>
+          </a:fillRef>
+          <a:effectRef idx="2">
+            <a:schemeClr val="accent1"/>
+          </a:effectRef>
+          <a:fontRef idx="minor">
+            <a:schemeClr val="lt1"/>
+          </a:fontRef>
+        </p:style>
+        <p:txBody>
+          <a:bodyPr rtlCol="0" anchor="ctr"/>
+          <a:lstStyle/>
+          <a:p>
+            <a:pPr algn="ctr"/>
+          </a:p>
+        </p:txBody>
+      </p:sp>
+      <p:sp>
+        <p:nvSpPr>
+          <p:cNvPr id="16" name="TextBox 15"/>
+          <p:cNvSpPr txBox="1"/>
+          <p:nvPr/>
+        </p:nvSpPr>
+        <p:spPr>
+          <a:xfrm>
+            <a:off x="5824727" y="1024128"/>
+            <a:ext cx="580643" cy="182880"/>
+          </a:xfrm>
+          <a:prstGeom prst="rect">
+            <a:avLst/>
+          </a:prstGeom>
+          <a:noFill/>
+        </p:spPr>
+        <p:txBody>
+          <a:bodyPr wrap="none">
+            <a:spAutoFit/>
+          </a:bodyPr>
+          <a:lstStyle/>
+          <a:p>
+            <a:pPr algn="ctr"/>
+            <a:r>
+              <a:rPr sz="700" b="1">
+                <a:solidFill>
+                  <a:srgbClr val="FFFFFF"/>
+                </a:solidFill>
+              </a:rPr>
+              <a:t>May</a:t>
+            </a:r>
+          </a:p>
+        </p:txBody>
+      </p:sp>
+      <p:sp>
+        <p:nvSpPr>
+          <p:cNvPr id="17" name="Rectangle 16"/>
+          <p:cNvSpPr/>
+          <p:nvPr/>
+        </p:nvSpPr>
+        <p:spPr>
+          <a:xfrm>
+            <a:off x="5806440" y="1005840"/>
+            <a:ext cx="7315" cy="237744"/>
+          </a:xfrm>
+          <a:prstGeom prst="rect">
+            <a:avLst/>
+          </a:prstGeom>
+          <a:solidFill>
+            <a:srgbClr val="4466AA"/>
+          </a:solidFill>
+          <a:ln>
+            <a:noFill/>
+          </a:ln>
+        </p:spPr>
+        <p:style>
+          <a:lnRef idx="1">
+            <a:schemeClr val="accent1"/>
+          </a:lnRef>
+          <a:fillRef idx="3">
+            <a:schemeClr val="accent1"/>
+          </a:fillRef>
+          <a:effectRef idx="2">
+            <a:schemeClr val="accent1"/>
+          </a:effectRef>
+          <a:fontRef idx="minor">
+            <a:schemeClr val="lt1"/>
+          </a:fontRef>
+        </p:style>
+        <p:txBody>
+          <a:bodyPr rtlCol="0" anchor="ctr"/>
+          <a:lstStyle/>
+          <a:p>
+            <a:pPr algn="ctr"/>
+          </a:p>
+        </p:txBody>
+      </p:sp>
+      <p:sp>
+        <p:nvSpPr>
+          <p:cNvPr id="18" name="TextBox 17"/>
+          <p:cNvSpPr txBox="1"/>
+          <p:nvPr/>
+        </p:nvSpPr>
+        <p:spPr>
+          <a:xfrm>
+            <a:off x="6441948" y="1024128"/>
+            <a:ext cx="580643" cy="182880"/>
+          </a:xfrm>
+          <a:prstGeom prst="rect">
+            <a:avLst/>
+          </a:prstGeom>
+          <a:noFill/>
+        </p:spPr>
+        <p:txBody>
+          <a:bodyPr wrap="none">
+            <a:spAutoFit/>
+          </a:bodyPr>
+          <a:lstStyle/>
+          <a:p>
+            <a:pPr algn="ctr"/>
+            <a:r>
+              <a:rPr sz="700" b="1">
+                <a:solidFill>
+                  <a:srgbClr val="FFFFFF"/>
+                </a:solidFill>
+              </a:rPr>
+              <a:t>Jun</a:t>
+            </a:r>
+          </a:p>
+        </p:txBody>
+      </p:sp>
+      <p:sp>
+        <p:nvSpPr>
+          <p:cNvPr id="19" name="Rectangle 18"/>
+          <p:cNvSpPr/>
+          <p:nvPr/>
+        </p:nvSpPr>
+        <p:spPr>
+          <a:xfrm>
+            <a:off x="6423660" y="1005840"/>
+            <a:ext cx="7315" cy="237744"/>
+          </a:xfrm>
+          <a:prstGeom prst="rect">
+            <a:avLst/>
+          </a:prstGeom>
+          <a:solidFill>
+            <a:srgbClr val="4466AA"/>
+          </a:solidFill>
+          <a:ln>
+            <a:noFill/>
+          </a:ln>
+        </p:spPr>
+        <p:style>
+          <a:lnRef idx="1">
+            <a:schemeClr val="accent1"/>
+          </a:lnRef>
+          <a:fillRef idx="3">
+            <a:schemeClr val="accent1"/>
+          </a:fillRef>
+          <a:effectRef idx="2">
+            <a:schemeClr val="accent1"/>
+          </a:effectRef>
+          <a:fontRef idx="minor">
+            <a:schemeClr val="lt1"/>
+          </a:fontRef>
+        </p:style>
+        <p:txBody>
+          <a:bodyPr rtlCol="0" anchor="ctr"/>
+          <a:lstStyle/>
+          <a:p>
+            <a:pPr algn="ctr"/>
+          </a:p>
+        </p:txBody>
+      </p:sp>
+      <p:sp>
+        <p:nvSpPr>
+          <p:cNvPr id="20" name="TextBox 19"/>
+          <p:cNvSpPr txBox="1"/>
+          <p:nvPr/>
+        </p:nvSpPr>
+        <p:spPr>
+          <a:xfrm>
+            <a:off x="7059167" y="1024128"/>
+            <a:ext cx="580643" cy="182880"/>
+          </a:xfrm>
+          <a:prstGeom prst="rect">
+            <a:avLst/>
+          </a:prstGeom>
+          <a:noFill/>
+        </p:spPr>
+        <p:txBody>
+          <a:bodyPr wrap="none">
+            <a:spAutoFit/>
+          </a:bodyPr>
+          <a:lstStyle/>
+          <a:p>
+            <a:pPr algn="ctr"/>
+            <a:r>
+              <a:rPr sz="700" b="1">
+                <a:solidFill>
+                  <a:srgbClr val="FFFFFF"/>
+                </a:solidFill>
+              </a:rPr>
+              <a:t>Jul</a:t>
+            </a:r>
+          </a:p>
+        </p:txBody>
+      </p:sp>
+      <p:sp>
+        <p:nvSpPr>
+          <p:cNvPr id="21" name="Rectangle 20"/>
+          <p:cNvSpPr/>
+          <p:nvPr/>
+        </p:nvSpPr>
+        <p:spPr>
+          <a:xfrm>
+            <a:off x="7040879" y="1005840"/>
+            <a:ext cx="7315" cy="237744"/>
+          </a:xfrm>
+          <a:prstGeom prst="rect">
+            <a:avLst/>
+          </a:prstGeom>
+          <a:solidFill>
+            <a:srgbClr val="4466AA"/>
+          </a:solidFill>
+          <a:ln>
+            <a:noFill/>
+          </a:ln>
+        </p:spPr>
+        <p:style>
+          <a:lnRef idx="1">
+            <a:schemeClr val="accent1"/>
+          </a:lnRef>
+          <a:fillRef idx="3">
+            <a:schemeClr val="accent1"/>
+          </a:fillRef>
+          <a:effectRef idx="2">
+            <a:schemeClr val="accent1"/>
+          </a:effectRef>
+          <a:fontRef idx="minor">
+            <a:schemeClr val="lt1"/>
+          </a:fontRef>
+        </p:style>
+        <p:txBody>
+          <a:bodyPr rtlCol="0" anchor="ctr"/>
+          <a:lstStyle/>
+          <a:p>
+            <a:pPr algn="ctr"/>
+          </a:p>
+        </p:txBody>
+      </p:sp>
+      <p:sp>
+        <p:nvSpPr>
+          <p:cNvPr id="22" name="TextBox 21"/>
+          <p:cNvSpPr txBox="1"/>
+          <p:nvPr/>
+        </p:nvSpPr>
+        <p:spPr>
+          <a:xfrm>
+            <a:off x="7676388" y="1024128"/>
+            <a:ext cx="580643" cy="182880"/>
+          </a:xfrm>
+          <a:prstGeom prst="rect">
+            <a:avLst/>
+          </a:prstGeom>
+          <a:noFill/>
+        </p:spPr>
+        <p:txBody>
+          <a:bodyPr wrap="none">
+            <a:spAutoFit/>
+          </a:bodyPr>
+          <a:lstStyle/>
+          <a:p>
+            <a:pPr algn="ctr"/>
+            <a:r>
+              <a:rPr sz="700" b="1">
+                <a:solidFill>
+                  <a:srgbClr val="FFFFFF"/>
+                </a:solidFill>
+              </a:rPr>
+              <a:t>Aug</a:t>
+            </a:r>
+          </a:p>
+        </p:txBody>
+      </p:sp>
+      <p:sp>
+        <p:nvSpPr>
+          <p:cNvPr id="23" name="Rectangle 22"/>
+          <p:cNvSpPr/>
+          <p:nvPr/>
+        </p:nvSpPr>
+        <p:spPr>
+          <a:xfrm>
+            <a:off x="7658100" y="1005840"/>
+            <a:ext cx="7315" cy="237744"/>
+          </a:xfrm>
+          <a:prstGeom prst="rect">
+            <a:avLst/>
+          </a:prstGeom>
+          <a:solidFill>
+            <a:srgbClr val="4466AA"/>
+          </a:solidFill>
+          <a:ln>
+            <a:noFill/>
+          </a:ln>
+        </p:spPr>
+        <p:style>
+          <a:lnRef idx="1">
+            <a:schemeClr val="accent1"/>
+          </a:lnRef>
+          <a:fillRef idx="3">
+            <a:schemeClr val="accent1"/>
+          </a:fillRef>
+          <a:effectRef idx="2">
+            <a:schemeClr val="accent1"/>
+          </a:effectRef>
+          <a:fontRef idx="minor">
+            <a:schemeClr val="lt1"/>
+          </a:fontRef>
+        </p:style>
+        <p:txBody>
+          <a:bodyPr rtlCol="0" anchor="ctr"/>
+          <a:lstStyle/>
+          <a:p>
+            <a:pPr algn="ctr"/>
+          </a:p>
+        </p:txBody>
+      </p:sp>
+      <p:sp>
+        <p:nvSpPr>
+          <p:cNvPr id="24" name="TextBox 23"/>
+          <p:cNvSpPr txBox="1"/>
+          <p:nvPr/>
+        </p:nvSpPr>
+        <p:spPr>
+          <a:xfrm>
+            <a:off x="8293607" y="1024128"/>
+            <a:ext cx="580643" cy="182880"/>
+          </a:xfrm>
+          <a:prstGeom prst="rect">
+            <a:avLst/>
+          </a:prstGeom>
+          <a:noFill/>
+        </p:spPr>
+        <p:txBody>
+          <a:bodyPr wrap="none">
+            <a:spAutoFit/>
+          </a:bodyPr>
+          <a:lstStyle/>
+          <a:p>
+            <a:pPr algn="ctr"/>
+            <a:r>
+              <a:rPr sz="700" b="1">
+                <a:solidFill>
+                  <a:srgbClr val="FFFFFF"/>
+                </a:solidFill>
+              </a:rPr>
+              <a:t>Sep</a:t>
+            </a:r>
+          </a:p>
+        </p:txBody>
+      </p:sp>
+      <p:sp>
+        <p:nvSpPr>
+          <p:cNvPr id="25" name="Rectangle 24"/>
+          <p:cNvSpPr/>
+          <p:nvPr/>
+        </p:nvSpPr>
+        <p:spPr>
+          <a:xfrm>
+            <a:off x="8275319" y="1005840"/>
+            <a:ext cx="7315" cy="237744"/>
+          </a:xfrm>
+          <a:prstGeom prst="rect">
+            <a:avLst/>
+          </a:prstGeom>
+          <a:solidFill>
+            <a:srgbClr val="4466AA"/>
+          </a:solidFill>
+          <a:ln>
+            <a:noFill/>
+          </a:ln>
+        </p:spPr>
+        <p:style>
+          <a:lnRef idx="1">
+            <a:schemeClr val="accent1"/>
+          </a:lnRef>
+          <a:fillRef idx="3">
+            <a:schemeClr val="accent1"/>
+          </a:fillRef>
+          <a:effectRef idx="2">
+            <a:schemeClr val="accent1"/>
+          </a:effectRef>
+          <a:fontRef idx="minor">
+            <a:schemeClr val="lt1"/>
+          </a:fontRef>
+        </p:style>
+        <p:txBody>
+          <a:bodyPr rtlCol="0" anchor="ctr"/>
+          <a:lstStyle/>
+          <a:p>
+            <a:pPr algn="ctr"/>
+          </a:p>
+        </p:txBody>
+      </p:sp>
+      <p:sp>
+        <p:nvSpPr>
+          <p:cNvPr id="26" name="TextBox 25"/>
+          <p:cNvSpPr txBox="1"/>
+          <p:nvPr/>
+        </p:nvSpPr>
+        <p:spPr>
+          <a:xfrm>
+            <a:off x="8910828" y="1024128"/>
+            <a:ext cx="580643" cy="182880"/>
+          </a:xfrm>
+          <a:prstGeom prst="rect">
+            <a:avLst/>
+          </a:prstGeom>
+          <a:noFill/>
+        </p:spPr>
+        <p:txBody>
+          <a:bodyPr wrap="none">
+            <a:spAutoFit/>
+          </a:bodyPr>
+          <a:lstStyle/>
+          <a:p>
+            <a:pPr algn="ctr"/>
+            <a:r>
+              <a:rPr sz="700" b="1">
+                <a:solidFill>
+                  <a:srgbClr val="FFFFFF"/>
+                </a:solidFill>
+              </a:rPr>
+              <a:t>Oct</a:t>
+            </a:r>
+          </a:p>
+        </p:txBody>
+      </p:sp>
+      <p:sp>
+        <p:nvSpPr>
+          <p:cNvPr id="27" name="Rectangle 26"/>
+          <p:cNvSpPr/>
+          <p:nvPr/>
+        </p:nvSpPr>
+        <p:spPr>
+          <a:xfrm>
+            <a:off x="8892540" y="1005840"/>
+            <a:ext cx="7315" cy="237744"/>
+          </a:xfrm>
+          <a:prstGeom prst="rect">
+            <a:avLst/>
+          </a:prstGeom>
+          <a:solidFill>
+            <a:srgbClr val="4466AA"/>
+          </a:solidFill>
+          <a:ln>
+            <a:noFill/>
+          </a:ln>
+        </p:spPr>
+        <p:style>
+          <a:lnRef idx="1">
+            <a:schemeClr val="accent1"/>
+          </a:lnRef>
+          <a:fillRef idx="3">
+            <a:schemeClr val="accent1"/>
+          </a:fillRef>
+          <a:effectRef idx="2">
+            <a:schemeClr val="accent1"/>
+          </a:effectRef>
+          <a:fontRef idx="minor">
+            <a:schemeClr val="lt1"/>
+          </a:fontRef>
+        </p:style>
+        <p:txBody>
+          <a:bodyPr rtlCol="0" anchor="ctr"/>
+          <a:lstStyle/>
+          <a:p>
+            <a:pPr algn="ctr"/>
+          </a:p>
+        </p:txBody>
+      </p:sp>
+      <p:sp>
+        <p:nvSpPr>
+          <p:cNvPr id="28" name="TextBox 27"/>
+          <p:cNvSpPr txBox="1"/>
+          <p:nvPr/>
+        </p:nvSpPr>
+        <p:spPr>
+          <a:xfrm>
+            <a:off x="9528048" y="1024128"/>
+            <a:ext cx="580643" cy="182880"/>
+          </a:xfrm>
+          <a:prstGeom prst="rect">
+            <a:avLst/>
+          </a:prstGeom>
+          <a:noFill/>
+        </p:spPr>
+        <p:txBody>
+          <a:bodyPr wrap="none">
+            <a:spAutoFit/>
+          </a:bodyPr>
+          <a:lstStyle/>
+          <a:p>
+            <a:pPr algn="ctr"/>
+            <a:r>
+              <a:rPr sz="700" b="1">
+                <a:solidFill>
+                  <a:srgbClr val="FFFFFF"/>
+                </a:solidFill>
+              </a:rPr>
+              <a:t>Nov</a:t>
+            </a:r>
+          </a:p>
+        </p:txBody>
+      </p:sp>
+      <p:sp>
+        <p:nvSpPr>
+          <p:cNvPr id="29" name="Rectangle 28"/>
+          <p:cNvSpPr/>
+          <p:nvPr/>
+        </p:nvSpPr>
+        <p:spPr>
+          <a:xfrm>
+            <a:off x="9509760" y="1005840"/>
+            <a:ext cx="7315" cy="237744"/>
+          </a:xfrm>
+          <a:prstGeom prst="rect">
+            <a:avLst/>
+          </a:prstGeom>
+          <a:solidFill>
+            <a:srgbClr val="4466AA"/>
+          </a:solidFill>
+          <a:ln>
+            <a:noFill/>
+          </a:ln>
+        </p:spPr>
+        <p:style>
+          <a:lnRef idx="1">
+            <a:schemeClr val="accent1"/>
+          </a:lnRef>
+          <a:fillRef idx="3">
+            <a:schemeClr val="accent1"/>
+          </a:fillRef>
+          <a:effectRef idx="2">
+            <a:schemeClr val="accent1"/>
+          </a:effectRef>
+          <a:fontRef idx="minor">
+            <a:schemeClr val="lt1"/>
+          </a:fontRef>
+        </p:style>
+        <p:txBody>
+          <a:bodyPr rtlCol="0" anchor="ctr"/>
+          <a:lstStyle/>
+          <a:p>
+            <a:pPr algn="ctr"/>
+          </a:p>
+        </p:txBody>
+      </p:sp>
+      <p:sp>
+        <p:nvSpPr>
+          <p:cNvPr id="30" name="TextBox 29"/>
+          <p:cNvSpPr txBox="1"/>
+          <p:nvPr/>
+        </p:nvSpPr>
+        <p:spPr>
+          <a:xfrm>
+            <a:off x="10145267" y="1024128"/>
+            <a:ext cx="580643" cy="182880"/>
+          </a:xfrm>
+          <a:prstGeom prst="rect">
+            <a:avLst/>
+          </a:prstGeom>
+          <a:noFill/>
+        </p:spPr>
+        <p:txBody>
+          <a:bodyPr wrap="none">
+            <a:spAutoFit/>
+          </a:bodyPr>
+          <a:lstStyle/>
+          <a:p>
+            <a:pPr algn="ctr"/>
+            <a:r>
+              <a:rPr sz="700" b="1">
+                <a:solidFill>
+                  <a:srgbClr val="FFFFFF"/>
+                </a:solidFill>
+              </a:rPr>
+              <a:t>Dec</a:t>
+            </a:r>
+          </a:p>
+        </p:txBody>
+      </p:sp>
+      <p:sp>
+        <p:nvSpPr>
+          <p:cNvPr id="31" name="Rectangle 30"/>
+          <p:cNvSpPr/>
+          <p:nvPr/>
+        </p:nvSpPr>
+        <p:spPr>
+          <a:xfrm>
+            <a:off x="10126980" y="1005840"/>
+            <a:ext cx="7315" cy="237744"/>
+          </a:xfrm>
+          <a:prstGeom prst="rect">
+            <a:avLst/>
+          </a:prstGeom>
+          <a:solidFill>
+            <a:srgbClr val="4466AA"/>
+          </a:solidFill>
+          <a:ln>
+            <a:noFill/>
+          </a:ln>
+        </p:spPr>
+        <p:style>
+          <a:lnRef idx="1">
+            <a:schemeClr val="accent1"/>
+          </a:lnRef>
+          <a:fillRef idx="3">
+            <a:schemeClr val="accent1"/>
+          </a:fillRef>
+          <a:effectRef idx="2">
+            <a:schemeClr val="accent1"/>
+          </a:effectRef>
+          <a:fontRef idx="minor">
+            <a:schemeClr val="lt1"/>
+          </a:fontRef>
+        </p:style>
+        <p:txBody>
+          <a:bodyPr rtlCol="0" anchor="ctr"/>
+          <a:lstStyle/>
+          <a:p>
+            <a:pPr algn="ctr"/>
+          </a:p>
+        </p:txBody>
+      </p:sp>
+      <p:sp>
+        <p:nvSpPr>
+          <p:cNvPr id="32" name="TextBox 31"/>
+          <p:cNvSpPr txBox="1"/>
+          <p:nvPr/>
+        </p:nvSpPr>
+        <p:spPr>
+          <a:xfrm>
+            <a:off x="10762488" y="1024128"/>
+            <a:ext cx="580643" cy="182880"/>
+          </a:xfrm>
+          <a:prstGeom prst="rect">
+            <a:avLst/>
+          </a:prstGeom>
+          <a:noFill/>
+        </p:spPr>
+        <p:txBody>
+          <a:bodyPr wrap="none">
+            <a:spAutoFit/>
+          </a:bodyPr>
+          <a:lstStyle/>
+          <a:p>
+            <a:pPr algn="ctr"/>
+            <a:r>
+              <a:rPr sz="700" b="1">
+                <a:solidFill>
+                  <a:srgbClr val="FFFFFF"/>
+                </a:solidFill>
+              </a:rPr>
+              <a:t>Jan 27</a:t>
+            </a:r>
+          </a:p>
+        </p:txBody>
+      </p:sp>
+      <p:sp>
+        <p:nvSpPr>
+          <p:cNvPr id="33" name="Rectangle 32"/>
+          <p:cNvSpPr/>
+          <p:nvPr/>
+        </p:nvSpPr>
+        <p:spPr>
+          <a:xfrm>
+            <a:off x="10744200" y="1005840"/>
+            <a:ext cx="7315" cy="237744"/>
+          </a:xfrm>
+          <a:prstGeom prst="rect">
+            <a:avLst/>
+          </a:prstGeom>
+          <a:solidFill>
+            <a:srgbClr val="4466AA"/>
+          </a:solidFill>
+          <a:ln>
+            <a:noFill/>
+          </a:ln>
+        </p:spPr>
+        <p:style>
+          <a:lnRef idx="1">
+            <a:schemeClr val="accent1"/>
+          </a:lnRef>
+          <a:fillRef idx="3">
+            <a:schemeClr val="accent1"/>
+          </a:fillRef>
+          <a:effectRef idx="2">
+            <a:schemeClr val="accent1"/>
+          </a:effectRef>
+          <a:fontRef idx="minor">
+            <a:schemeClr val="lt1"/>
+          </a:fontRef>
+        </p:style>
+        <p:txBody>
+          <a:bodyPr rtlCol="0" anchor="ctr"/>
+          <a:lstStyle/>
+          <a:p>
+            <a:pPr algn="ctr"/>
+          </a:p>
+        </p:txBody>
+      </p:sp>
+      <p:sp>
+        <p:nvSpPr>
+          <p:cNvPr id="34" name="TextBox 33"/>
+          <p:cNvSpPr txBox="1"/>
+          <p:nvPr/>
+        </p:nvSpPr>
+        <p:spPr>
+          <a:xfrm>
+            <a:off x="11379708" y="1024128"/>
+            <a:ext cx="580643" cy="182880"/>
+          </a:xfrm>
+          <a:prstGeom prst="rect">
+            <a:avLst/>
+          </a:prstGeom>
+          <a:noFill/>
+        </p:spPr>
+        <p:txBody>
+          <a:bodyPr wrap="none">
+            <a:spAutoFit/>
+          </a:bodyPr>
+          <a:lstStyle/>
+          <a:p>
+            <a:pPr algn="ctr"/>
+            <a:r>
+              <a:rPr sz="700" b="1">
+                <a:solidFill>
+                  <a:srgbClr val="FFFFFF"/>
+                </a:solidFill>
+              </a:rPr>
+              <a:t>Feb</a:t>
+            </a:r>
+          </a:p>
+        </p:txBody>
+      </p:sp>
+      <p:sp>
+        <p:nvSpPr>
+          <p:cNvPr id="35" name="Rectangle 34"/>
+          <p:cNvSpPr/>
+          <p:nvPr/>
+        </p:nvSpPr>
+        <p:spPr>
+          <a:xfrm>
+            <a:off x="11361420" y="1005840"/>
+            <a:ext cx="7315" cy="237744"/>
+          </a:xfrm>
+          <a:prstGeom prst="rect">
+            <a:avLst/>
+          </a:prstGeom>
+          <a:solidFill>
+            <a:srgbClr val="4466AA"/>
+          </a:solidFill>
+          <a:ln>
+            <a:noFill/>
+          </a:ln>
+        </p:spPr>
+        <p:style>
+          <a:lnRef idx="1">
+            <a:schemeClr val="accent1"/>
+          </a:lnRef>
+          <a:fillRef idx="3">
+            <a:schemeClr val="accent1"/>
+          </a:fillRef>
+          <a:effectRef idx="2">
+            <a:schemeClr val="accent1"/>
+          </a:effectRef>
+          <a:fontRef idx="minor">
+            <a:schemeClr val="lt1"/>
+          </a:fontRef>
+        </p:style>
+        <p:txBody>
+          <a:bodyPr rtlCol="0" anchor="ctr"/>
+          <a:lstStyle/>
+          <a:p>
+            <a:pPr algn="ctr"/>
+          </a:p>
+        </p:txBody>
+      </p:sp>
+      <p:sp>
+        <p:nvSpPr>
+          <p:cNvPr id="36" name="Rectangle 35"/>
+          <p:cNvSpPr/>
+          <p:nvPr/>
+        </p:nvSpPr>
+        <p:spPr>
+          <a:xfrm>
+            <a:off x="4764153" y="1005840"/>
+            <a:ext cx="20116" cy="5440680"/>
+          </a:xfrm>
+          <a:prstGeom prst="rect">
+            <a:avLst/>
+          </a:prstGeom>
+          <a:solidFill>
+            <a:srgbClr val="F7941D"/>
+          </a:solidFill>
+          <a:ln>
+            <a:noFill/>
+          </a:ln>
+        </p:spPr>
+        <p:style>
+          <a:lnRef idx="1">
+            <a:schemeClr val="accent1"/>
+          </a:lnRef>
+          <a:fillRef idx="3">
+            <a:schemeClr val="accent1"/>
+          </a:fillRef>
+          <a:effectRef idx="2">
+            <a:schemeClr val="accent1"/>
+          </a:effectRef>
+          <a:fontRef idx="minor">
+            <a:schemeClr val="lt1"/>
+          </a:fontRef>
+        </p:style>
+        <p:txBody>
+          <a:bodyPr rtlCol="0" anchor="ctr"/>
+          <a:lstStyle/>
+          <a:p>
+            <a:pPr algn="ctr"/>
+          </a:p>
+        </p:txBody>
+      </p:sp>
+      <p:sp>
+        <p:nvSpPr>
+          <p:cNvPr id="37" name="TextBox 36"/>
+          <p:cNvSpPr txBox="1"/>
+          <p:nvPr/>
+        </p:nvSpPr>
+        <p:spPr>
+          <a:xfrm>
+            <a:off x="4599561" y="941832"/>
+            <a:ext cx="594360" cy="164592"/>
+          </a:xfrm>
+          <a:prstGeom prst="rect">
+            <a:avLst/>
+          </a:prstGeom>
+          <a:noFill/>
+        </p:spPr>
+        <p:txBody>
+          <a:bodyPr wrap="none">
+            <a:spAutoFit/>
+          </a:bodyPr>
+          <a:lstStyle/>
+          <a:p>
+            <a:pPr algn="l"/>
+            <a:r>
+              <a:rPr sz="700" b="1">
+                <a:solidFill>
+                  <a:srgbClr val="F7941D"/>
+                </a:solidFill>
+              </a:rPr>
+              <a:t>▼TODAY</a:t>
+            </a:r>
+          </a:p>
+        </p:txBody>
+      </p:sp>
+      <p:sp>
+        <p:nvSpPr>
+          <p:cNvPr id="38" name="Rectangle 37"/>
+          <p:cNvSpPr/>
+          <p:nvPr/>
+        </p:nvSpPr>
+        <p:spPr>
+          <a:xfrm>
+            <a:off x="91440" y="1572768"/>
+            <a:ext cx="11978640" cy="226771"/>
+          </a:xfrm>
+          <a:prstGeom prst="rect">
+            <a:avLst/>
+          </a:prstGeom>
+          <a:solidFill>
+            <a:srgbClr val="E3ECFF"/>
+          </a:solidFill>
+          <a:ln>
+            <a:noFill/>
+          </a:ln>
+        </p:spPr>
+        <p:style>
+          <a:lnRef idx="1">
+            <a:schemeClr val="accent1"/>
+          </a:lnRef>
+          <a:fillRef idx="3">
+            <a:schemeClr val="accent1"/>
+          </a:fillRef>
+          <a:effectRef idx="2">
+            <a:schemeClr val="accent1"/>
+          </a:effectRef>
+          <a:fontRef idx="minor">
+            <a:schemeClr val="lt1"/>
+          </a:fontRef>
+        </p:style>
+        <p:txBody>
+          <a:bodyPr rtlCol="0" anchor="ctr"/>
+          <a:lstStyle/>
+          <a:p>
+            <a:pPr algn="ctr"/>
+          </a:p>
+        </p:txBody>
+      </p:sp>
+      <p:sp>
+        <p:nvSpPr>
+          <p:cNvPr id="39" name="TextBox 38"/>
+          <p:cNvSpPr txBox="1"/>
+          <p:nvPr/>
+        </p:nvSpPr>
+        <p:spPr>
+          <a:xfrm>
+            <a:off x="137160" y="1604772"/>
+            <a:ext cx="3154679" cy="203911"/>
+          </a:xfrm>
+          <a:prstGeom prst="rect">
+            <a:avLst/>
+          </a:prstGeom>
+          <a:noFill/>
+        </p:spPr>
+        <p:txBody>
+          <a:bodyPr wrap="none">
+            <a:spAutoFit/>
+          </a:bodyPr>
+          <a:lstStyle/>
+          <a:p>
+            <a:pPr algn="l"/>
+            <a:r>
+              <a:rPr sz="750" b="1">
+                <a:solidFill>
+                  <a:srgbClr val="003387"/>
+                </a:solidFill>
+              </a:rPr>
+              <a:t>PHASE 2 — Engineering &amp; Construction</a:t>
+            </a:r>
+          </a:p>
+        </p:txBody>
+      </p:sp>
+      <p:sp>
+        <p:nvSpPr>
+          <p:cNvPr id="40" name="Rectangle 39"/>
+          <p:cNvSpPr/>
+          <p:nvPr/>
+        </p:nvSpPr>
+        <p:spPr>
+          <a:xfrm>
+            <a:off x="280574" y="1623060"/>
+            <a:ext cx="11168188" cy="149047"/>
+          </a:xfrm>
+          <a:prstGeom prst="rect">
+            <a:avLst/>
+          </a:prstGeom>
+          <a:solidFill>
+            <a:srgbClr val="6497EB"/>
+          </a:solidFill>
+          <a:ln>
+            <a:noFill/>
+          </a:ln>
+        </p:spPr>
+        <p:style>
+          <a:lnRef idx="1">
+            <a:schemeClr val="accent1"/>
+          </a:lnRef>
+          <a:fillRef idx="3">
+            <a:schemeClr val="accent1"/>
+          </a:fillRef>
+          <a:effectRef idx="2">
+            <a:schemeClr val="accent1"/>
+          </a:effectRef>
+          <a:fontRef idx="minor">
+            <a:schemeClr val="lt1"/>
+          </a:fontRef>
+        </p:style>
+        <p:txBody>
+          <a:bodyPr rtlCol="0" anchor="ctr"/>
+          <a:lstStyle/>
+          <a:p>
+            <a:pPr algn="ctr"/>
+          </a:p>
+        </p:txBody>
+      </p:sp>
+      <p:sp>
+        <p:nvSpPr>
+          <p:cNvPr id="41" name="Rectangle 40"/>
+          <p:cNvSpPr/>
+          <p:nvPr/>
+        </p:nvSpPr>
+        <p:spPr>
+          <a:xfrm>
+            <a:off x="280574" y="1623060"/>
+            <a:ext cx="1005136" cy="149047"/>
+          </a:xfrm>
+          <a:prstGeom prst="rect">
+            <a:avLst/>
+          </a:prstGeom>
+          <a:solidFill>
+            <a:srgbClr val="003387"/>
+          </a:solidFill>
+          <a:ln>
+            <a:noFill/>
+          </a:ln>
+        </p:spPr>
+        <p:style>
+          <a:lnRef idx="1">
+            <a:schemeClr val="accent1"/>
+          </a:lnRef>
+          <a:fillRef idx="3">
+            <a:schemeClr val="accent1"/>
+          </a:fillRef>
+          <a:effectRef idx="2">
+            <a:schemeClr val="accent1"/>
+          </a:effectRef>
+          <a:fontRef idx="minor">
+            <a:schemeClr val="lt1"/>
+          </a:fontRef>
+        </p:style>
+        <p:txBody>
+          <a:bodyPr rtlCol="0" anchor="ctr"/>
+          <a:lstStyle/>
+          <a:p>
+            <a:pPr algn="ctr"/>
+          </a:p>
+        </p:txBody>
+      </p:sp>
+      <p:sp>
+        <p:nvSpPr>
+          <p:cNvPr id="42" name="TextBox 41"/>
+          <p:cNvSpPr txBox="1"/>
+          <p:nvPr/>
+        </p:nvSpPr>
+        <p:spPr>
+          <a:xfrm>
+            <a:off x="308006" y="1623060"/>
+            <a:ext cx="1005136" cy="149047"/>
+          </a:xfrm>
+          <a:prstGeom prst="rect">
+            <a:avLst/>
+          </a:prstGeom>
+          <a:noFill/>
+        </p:spPr>
+        <p:txBody>
+          <a:bodyPr wrap="none">
+            <a:spAutoFit/>
+          </a:bodyPr>
+          <a:lstStyle/>
+          <a:p>
+            <a:pPr algn="l"/>
+            <a:r>
+              <a:rPr sz="700" b="1">
+                <a:solidFill>
+                  <a:srgbClr val="FFFFFF"/>
+                </a:solidFill>
+              </a:rPr>
+              <a:t>9%</a:t>
+            </a:r>
+          </a:p>
+        </p:txBody>
+      </p:sp>
+      <p:sp>
+        <p:nvSpPr>
+          <p:cNvPr id="43" name="Rectangle 42"/>
+          <p:cNvSpPr/>
+          <p:nvPr/>
+        </p:nvSpPr>
+        <p:spPr>
+          <a:xfrm>
+            <a:off x="91440" y="1813255"/>
+            <a:ext cx="11978640" cy="226771"/>
+          </a:xfrm>
+          <a:prstGeom prst="rect">
+            <a:avLst/>
+          </a:prstGeom>
+          <a:solidFill>
+            <a:srgbClr val="FFFFFF"/>
+          </a:solidFill>
+          <a:ln>
+            <a:noFill/>
+          </a:ln>
+        </p:spPr>
+        <p:style>
+          <a:lnRef idx="1">
+            <a:schemeClr val="accent1"/>
+          </a:lnRef>
+          <a:fillRef idx="3">
+            <a:schemeClr val="accent1"/>
+          </a:fillRef>
+          <a:effectRef idx="2">
+            <a:schemeClr val="accent1"/>
+          </a:effectRef>
+          <a:fontRef idx="minor">
+            <a:schemeClr val="lt1"/>
+          </a:fontRef>
+        </p:style>
+        <p:txBody>
+          <a:bodyPr rtlCol="0" anchor="ctr"/>
+          <a:lstStyle/>
+          <a:p>
+            <a:pPr algn="ctr"/>
+          </a:p>
+        </p:txBody>
+      </p:sp>
+      <p:sp>
+        <p:nvSpPr>
+          <p:cNvPr id="44" name="TextBox 43"/>
+          <p:cNvSpPr txBox="1"/>
+          <p:nvPr/>
+        </p:nvSpPr>
+        <p:spPr>
+          <a:xfrm>
+            <a:off x="137160" y="1845259"/>
+            <a:ext cx="3154679" cy="203911"/>
+          </a:xfrm>
+          <a:prstGeom prst="rect">
+            <a:avLst/>
+          </a:prstGeom>
+          <a:noFill/>
+        </p:spPr>
+        <p:txBody>
+          <a:bodyPr wrap="none">
+            <a:spAutoFit/>
+          </a:bodyPr>
+          <a:lstStyle/>
+          <a:p>
+            <a:pPr algn="l"/>
+            <a:r>
+              <a:rPr sz="750" b="0">
+                <a:solidFill>
+                  <a:srgbClr val="212121"/>
+                </a:solidFill>
+              </a:rPr>
+              <a:t>  PO Received</a:t>
+            </a:r>
+          </a:p>
+        </p:txBody>
+      </p:sp>
+      <p:sp>
+        <p:nvSpPr>
+          <p:cNvPr id="45" name="Rectangle 44"/>
+          <p:cNvSpPr/>
+          <p:nvPr/>
+        </p:nvSpPr>
+        <p:spPr>
+          <a:xfrm>
+            <a:off x="280574" y="1863547"/>
+            <a:ext cx="36576" cy="149047"/>
+          </a:xfrm>
+          <a:prstGeom prst="rect">
+            <a:avLst/>
+          </a:prstGeom>
+          <a:solidFill>
+            <a:srgbClr val="64FB64"/>
+          </a:solidFill>
+          <a:ln>
+            <a:noFill/>
+          </a:ln>
+        </p:spPr>
+        <p:style>
+          <a:lnRef idx="1">
+            <a:schemeClr val="accent1"/>
+          </a:lnRef>
+          <a:fillRef idx="3">
+            <a:schemeClr val="accent1"/>
+          </a:fillRef>
+          <a:effectRef idx="2">
+            <a:schemeClr val="accent1"/>
+          </a:effectRef>
+          <a:fontRef idx="minor">
+            <a:schemeClr val="lt1"/>
+          </a:fontRef>
+        </p:style>
+        <p:txBody>
+          <a:bodyPr rtlCol="0" anchor="ctr"/>
+          <a:lstStyle/>
+          <a:p>
+            <a:pPr algn="ctr"/>
+          </a:p>
+        </p:txBody>
+      </p:sp>
+      <p:sp>
+        <p:nvSpPr>
+          <p:cNvPr id="46" name="Rectangle 45"/>
+          <p:cNvSpPr/>
+          <p:nvPr/>
+        </p:nvSpPr>
+        <p:spPr>
+          <a:xfrm>
+            <a:off x="280574" y="1863547"/>
+            <a:ext cx="36576" cy="149047"/>
+          </a:xfrm>
+          <a:prstGeom prst="rect">
+            <a:avLst/>
+          </a:prstGeom>
+          <a:solidFill>
+            <a:srgbClr val="009700"/>
+          </a:solidFill>
+          <a:ln>
+            <a:noFill/>
+          </a:ln>
+        </p:spPr>
+        <p:style>
+          <a:lnRef idx="1">
+            <a:schemeClr val="accent1"/>
+          </a:lnRef>
+          <a:fillRef idx="3">
+            <a:schemeClr val="accent1"/>
+          </a:fillRef>
+          <a:effectRef idx="2">
+            <a:schemeClr val="accent1"/>
+          </a:effectRef>
+          <a:fontRef idx="minor">
+            <a:schemeClr val="lt1"/>
+          </a:fontRef>
+        </p:style>
+        <p:txBody>
+          <a:bodyPr rtlCol="0" anchor="ctr"/>
+          <a:lstStyle/>
+          <a:p>
+            <a:pPr algn="ctr"/>
+          </a:p>
+        </p:txBody>
+      </p:sp>
+      <p:sp>
+        <p:nvSpPr>
+          <p:cNvPr id="47" name="TextBox 46"/>
+          <p:cNvSpPr txBox="1"/>
+          <p:nvPr/>
+        </p:nvSpPr>
+        <p:spPr>
+          <a:xfrm>
+            <a:off x="308006" y="1863547"/>
+            <a:ext cx="36576" cy="149047"/>
+          </a:xfrm>
+          <a:prstGeom prst="rect">
+            <a:avLst/>
+          </a:prstGeom>
+          <a:noFill/>
+        </p:spPr>
+        <p:txBody>
+          <a:bodyPr wrap="none">
+            <a:spAutoFit/>
+          </a:bodyPr>
+          <a:lstStyle/>
+          <a:p>
+            <a:pPr algn="l"/>
+            <a:r>
+              <a:rPr sz="700" b="1">
+                <a:solidFill>
+                  <a:srgbClr val="FFFFFF"/>
+                </a:solidFill>
+              </a:rPr>
+              <a:t>100%</a:t>
+            </a:r>
+          </a:p>
+        </p:txBody>
+      </p:sp>
+      <p:sp>
+        <p:nvSpPr>
+          <p:cNvPr id="48" name="Rectangle 47"/>
+          <p:cNvSpPr/>
+          <p:nvPr/>
+        </p:nvSpPr>
+        <p:spPr>
+          <a:xfrm>
+            <a:off x="91440" y="2053742"/>
+            <a:ext cx="11978640" cy="226771"/>
+          </a:xfrm>
+          <a:prstGeom prst="rect">
+            <a:avLst/>
+          </a:prstGeom>
+          <a:solidFill>
+            <a:srgbClr val="F2F2F2"/>
+          </a:solidFill>
+          <a:ln>
+            <a:noFill/>
+          </a:ln>
+        </p:spPr>
+        <p:style>
+          <a:lnRef idx="1">
+            <a:schemeClr val="accent1"/>
+          </a:lnRef>
+          <a:fillRef idx="3">
+            <a:schemeClr val="accent1"/>
+          </a:fillRef>
+          <a:effectRef idx="2">
+            <a:schemeClr val="accent1"/>
+          </a:effectRef>
+          <a:fontRef idx="minor">
+            <a:schemeClr val="lt1"/>
+          </a:fontRef>
+        </p:style>
+        <p:txBody>
+          <a:bodyPr rtlCol="0" anchor="ctr"/>
+          <a:lstStyle/>
+          <a:p>
+            <a:pPr algn="ctr"/>
+          </a:p>
+        </p:txBody>
+      </p:sp>
+      <p:sp>
+        <p:nvSpPr>
+          <p:cNvPr id="49" name="TextBox 48"/>
+          <p:cNvSpPr txBox="1"/>
+          <p:nvPr/>
+        </p:nvSpPr>
+        <p:spPr>
+          <a:xfrm>
+            <a:off x="137160" y="2085746"/>
+            <a:ext cx="3154679" cy="203911"/>
+          </a:xfrm>
+          <a:prstGeom prst="rect">
+            <a:avLst/>
+          </a:prstGeom>
+          <a:noFill/>
+        </p:spPr>
+        <p:txBody>
+          <a:bodyPr wrap="none">
+            <a:spAutoFit/>
+          </a:bodyPr>
+          <a:lstStyle/>
+          <a:p>
+            <a:pPr algn="l"/>
+            <a:r>
+              <a:rPr sz="750" b="0">
+                <a:solidFill>
+                  <a:srgbClr val="212121"/>
+                </a:solidFill>
+              </a:rPr>
+              <a:t>  Construction Support Coordinator</a:t>
+            </a:r>
+          </a:p>
+        </p:txBody>
+      </p:sp>
+      <p:sp>
+        <p:nvSpPr>
+          <p:cNvPr id="50" name="Rectangle 49"/>
+          <p:cNvSpPr/>
+          <p:nvPr/>
+        </p:nvSpPr>
+        <p:spPr>
+          <a:xfrm>
+            <a:off x="1421848" y="2104034"/>
+            <a:ext cx="3770282" cy="149047"/>
+          </a:xfrm>
+          <a:prstGeom prst="rect">
+            <a:avLst/>
+          </a:prstGeom>
+          <a:solidFill>
+            <a:srgbClr val="FFFF64"/>
+          </a:solidFill>
+          <a:ln>
+            <a:noFill/>
+          </a:ln>
+        </p:spPr>
+        <p:style>
+          <a:lnRef idx="1">
+            <a:schemeClr val="accent1"/>
+          </a:lnRef>
+          <a:fillRef idx="3">
+            <a:schemeClr val="accent1"/>
+          </a:fillRef>
+          <a:effectRef idx="2">
+            <a:schemeClr val="accent1"/>
+          </a:effectRef>
+          <a:fontRef idx="minor">
+            <a:schemeClr val="lt1"/>
+          </a:fontRef>
+        </p:style>
+        <p:txBody>
+          <a:bodyPr rtlCol="0" anchor="ctr"/>
+          <a:lstStyle/>
+          <a:p>
+            <a:pPr algn="ctr"/>
+          </a:p>
+        </p:txBody>
+      </p:sp>
+      <p:sp>
+        <p:nvSpPr>
+          <p:cNvPr id="51" name="Rectangle 50"/>
+          <p:cNvSpPr/>
+          <p:nvPr/>
+        </p:nvSpPr>
+        <p:spPr>
+          <a:xfrm>
+            <a:off x="1421848" y="2104034"/>
+            <a:ext cx="2827711" cy="149047"/>
+          </a:xfrm>
+          <a:prstGeom prst="rect">
+            <a:avLst/>
+          </a:prstGeom>
+          <a:solidFill>
+            <a:srgbClr val="FFBF00"/>
+          </a:solidFill>
+          <a:ln>
+            <a:noFill/>
+          </a:ln>
+        </p:spPr>
+        <p:style>
+          <a:lnRef idx="1">
+            <a:schemeClr val="accent1"/>
+          </a:lnRef>
+          <a:fillRef idx="3">
+            <a:schemeClr val="accent1"/>
+          </a:fillRef>
+          <a:effectRef idx="2">
+            <a:schemeClr val="accent1"/>
+          </a:effectRef>
+          <a:fontRef idx="minor">
+            <a:schemeClr val="lt1"/>
+          </a:fontRef>
+        </p:style>
+        <p:txBody>
+          <a:bodyPr rtlCol="0" anchor="ctr"/>
+          <a:lstStyle/>
+          <a:p>
+            <a:pPr algn="ctr"/>
+          </a:p>
+        </p:txBody>
+      </p:sp>
+      <p:sp>
+        <p:nvSpPr>
+          <p:cNvPr id="52" name="TextBox 51"/>
+          <p:cNvSpPr txBox="1"/>
+          <p:nvPr/>
+        </p:nvSpPr>
+        <p:spPr>
+          <a:xfrm>
+            <a:off x="1449280" y="2104034"/>
+            <a:ext cx="2827711" cy="149047"/>
+          </a:xfrm>
+          <a:prstGeom prst="rect">
+            <a:avLst/>
+          </a:prstGeom>
+          <a:noFill/>
+        </p:spPr>
+        <p:txBody>
+          <a:bodyPr wrap="none">
+            <a:spAutoFit/>
+          </a:bodyPr>
+          <a:lstStyle/>
+          <a:p>
+            <a:pPr algn="l"/>
+            <a:r>
+              <a:rPr sz="700" b="1">
+                <a:solidFill>
+                  <a:srgbClr val="FFFFFF"/>
+                </a:solidFill>
+              </a:rPr>
+              <a:t>75%</a:t>
+            </a:r>
+          </a:p>
+        </p:txBody>
+      </p:sp>
+      <p:sp>
+        <p:nvSpPr>
+          <p:cNvPr id="53" name="Rectangle 52"/>
+          <p:cNvSpPr/>
+          <p:nvPr/>
+        </p:nvSpPr>
+        <p:spPr>
+          <a:xfrm>
+            <a:off x="91440" y="2294229"/>
+            <a:ext cx="11978640" cy="226771"/>
+          </a:xfrm>
+          <a:prstGeom prst="rect">
+            <a:avLst/>
+          </a:prstGeom>
+          <a:solidFill>
+            <a:srgbClr val="FFFFFF"/>
+          </a:solidFill>
+          <a:ln>
+            <a:noFill/>
+          </a:ln>
+        </p:spPr>
+        <p:style>
+          <a:lnRef idx="1">
+            <a:schemeClr val="accent1"/>
+          </a:lnRef>
+          <a:fillRef idx="3">
+            <a:schemeClr val="accent1"/>
+          </a:fillRef>
+          <a:effectRef idx="2">
+            <a:schemeClr val="accent1"/>
+          </a:effectRef>
+          <a:fontRef idx="minor">
+            <a:schemeClr val="lt1"/>
+          </a:fontRef>
+        </p:style>
+        <p:txBody>
+          <a:bodyPr rtlCol="0" anchor="ctr"/>
+          <a:lstStyle/>
+          <a:p>
+            <a:pPr algn="ctr"/>
+          </a:p>
+        </p:txBody>
+      </p:sp>
+      <p:sp>
+        <p:nvSpPr>
+          <p:cNvPr id="54" name="TextBox 53"/>
+          <p:cNvSpPr txBox="1"/>
+          <p:nvPr/>
+        </p:nvSpPr>
+        <p:spPr>
+          <a:xfrm>
+            <a:off x="137160" y="2326233"/>
+            <a:ext cx="3154679" cy="203911"/>
+          </a:xfrm>
+          <a:prstGeom prst="rect">
+            <a:avLst/>
+          </a:prstGeom>
+          <a:noFill/>
+        </p:spPr>
+        <p:txBody>
+          <a:bodyPr wrap="none">
+            <a:spAutoFit/>
+          </a:bodyPr>
+          <a:lstStyle/>
+          <a:p>
+            <a:pPr algn="l"/>
+            <a:r>
+              <a:rPr sz="750" b="0">
+                <a:solidFill>
+                  <a:srgbClr val="212121"/>
+                </a:solidFill>
+              </a:rPr>
+              <a:t>  Site Surveys (Ph2 — 36 sites)</a:t>
+            </a:r>
+          </a:p>
+        </p:txBody>
+      </p:sp>
+      <p:sp>
+        <p:nvSpPr>
+          <p:cNvPr id="55" name="Rectangle 54"/>
+          <p:cNvSpPr/>
+          <p:nvPr/>
+        </p:nvSpPr>
+        <p:spPr>
+          <a:xfrm>
+            <a:off x="1707167" y="2344521"/>
+            <a:ext cx="1222794" cy="149047"/>
+          </a:xfrm>
+          <a:prstGeom prst="rect">
+            <a:avLst/>
+          </a:prstGeom>
+          <a:solidFill>
+            <a:srgbClr val="64FB64"/>
+          </a:solidFill>
+          <a:ln>
+            <a:noFill/>
+          </a:ln>
+        </p:spPr>
+        <p:style>
+          <a:lnRef idx="1">
+            <a:schemeClr val="accent1"/>
+          </a:lnRef>
+          <a:fillRef idx="3">
+            <a:schemeClr val="accent1"/>
+          </a:fillRef>
+          <a:effectRef idx="2">
+            <a:schemeClr val="accent1"/>
+          </a:effectRef>
+          <a:fontRef idx="minor">
+            <a:schemeClr val="lt1"/>
+          </a:fontRef>
+        </p:style>
+        <p:txBody>
+          <a:bodyPr rtlCol="0" anchor="ctr"/>
+          <a:lstStyle/>
+          <a:p>
+            <a:pPr algn="ctr"/>
+          </a:p>
+        </p:txBody>
+      </p:sp>
+      <p:sp>
+        <p:nvSpPr>
+          <p:cNvPr id="56" name="Rectangle 55"/>
+          <p:cNvSpPr/>
+          <p:nvPr/>
+        </p:nvSpPr>
+        <p:spPr>
+          <a:xfrm>
+            <a:off x="1707167" y="2344521"/>
+            <a:ext cx="1222794" cy="149047"/>
+          </a:xfrm>
+          <a:prstGeom prst="rect">
+            <a:avLst/>
+          </a:prstGeom>
+          <a:solidFill>
+            <a:srgbClr val="009700"/>
+          </a:solidFill>
+          <a:ln>
+            <a:noFill/>
+          </a:ln>
+        </p:spPr>
+        <p:style>
+          <a:lnRef idx="1">
+            <a:schemeClr val="accent1"/>
+          </a:lnRef>
+          <a:fillRef idx="3">
+            <a:schemeClr val="accent1"/>
+          </a:fillRef>
+          <a:effectRef idx="2">
+            <a:schemeClr val="accent1"/>
+          </a:effectRef>
+          <a:fontRef idx="minor">
+            <a:schemeClr val="lt1"/>
+          </a:fontRef>
+        </p:style>
+        <p:txBody>
+          <a:bodyPr rtlCol="0" anchor="ctr"/>
+          <a:lstStyle/>
+          <a:p>
+            <a:pPr algn="ctr"/>
+          </a:p>
+        </p:txBody>
+      </p:sp>
+      <p:sp>
+        <p:nvSpPr>
+          <p:cNvPr id="57" name="TextBox 56"/>
+          <p:cNvSpPr txBox="1"/>
+          <p:nvPr/>
+        </p:nvSpPr>
+        <p:spPr>
+          <a:xfrm>
+            <a:off x="1734599" y="2344521"/>
+            <a:ext cx="1222794" cy="149047"/>
+          </a:xfrm>
+          <a:prstGeom prst="rect">
+            <a:avLst/>
+          </a:prstGeom>
+          <a:noFill/>
+        </p:spPr>
+        <p:txBody>
+          <a:bodyPr wrap="none">
+            <a:spAutoFit/>
+          </a:bodyPr>
+          <a:lstStyle/>
+          <a:p>
+            <a:pPr algn="l"/>
+            <a:r>
+              <a:rPr sz="700" b="1">
+                <a:solidFill>
+                  <a:srgbClr val="FFFFFF"/>
+                </a:solidFill>
+              </a:rPr>
+              <a:t>100%</a:t>
+            </a:r>
+          </a:p>
+        </p:txBody>
+      </p:sp>
+      <p:sp>
+        <p:nvSpPr>
+          <p:cNvPr id="58" name="Rectangle 57"/>
+          <p:cNvSpPr/>
+          <p:nvPr/>
+        </p:nvSpPr>
+        <p:spPr>
+          <a:xfrm>
+            <a:off x="91440" y="2534716"/>
+            <a:ext cx="11978640" cy="226771"/>
+          </a:xfrm>
+          <a:prstGeom prst="rect">
+            <a:avLst/>
+          </a:prstGeom>
+          <a:solidFill>
+            <a:srgbClr val="F2F2F2"/>
+          </a:solidFill>
+          <a:ln>
+            <a:noFill/>
+          </a:ln>
+        </p:spPr>
+        <p:style>
+          <a:lnRef idx="1">
+            <a:schemeClr val="accent1"/>
+          </a:lnRef>
+          <a:fillRef idx="3">
+            <a:schemeClr val="accent1"/>
+          </a:fillRef>
+          <a:effectRef idx="2">
+            <a:schemeClr val="accent1"/>
+          </a:effectRef>
+          <a:fontRef idx="minor">
+            <a:schemeClr val="lt1"/>
+          </a:fontRef>
+        </p:style>
+        <p:txBody>
+          <a:bodyPr rtlCol="0" anchor="ctr"/>
+          <a:lstStyle/>
+          <a:p>
+            <a:pPr algn="ctr"/>
+          </a:p>
+        </p:txBody>
+      </p:sp>
+      <p:sp>
+        <p:nvSpPr>
+          <p:cNvPr id="59" name="TextBox 58"/>
+          <p:cNvSpPr txBox="1"/>
+          <p:nvPr/>
+        </p:nvSpPr>
+        <p:spPr>
+          <a:xfrm>
+            <a:off x="137160" y="2566720"/>
+            <a:ext cx="3154679" cy="203911"/>
+          </a:xfrm>
+          <a:prstGeom prst="rect">
+            <a:avLst/>
+          </a:prstGeom>
+          <a:noFill/>
+        </p:spPr>
+        <p:txBody>
+          <a:bodyPr wrap="none">
+            <a:spAutoFit/>
+          </a:bodyPr>
+          <a:lstStyle/>
+          <a:p>
+            <a:pPr algn="l"/>
+            <a:r>
+              <a:rPr sz="750" b="0">
+                <a:solidFill>
+                  <a:srgbClr val="212121"/>
+                </a:solidFill>
+              </a:rPr>
+              <a:t>  MPLS Node Design (all 36 sites)</a:t>
+            </a:r>
+          </a:p>
+        </p:txBody>
+      </p:sp>
+      <p:sp>
+        <p:nvSpPr>
+          <p:cNvPr id="60" name="Rectangle 59"/>
+          <p:cNvSpPr/>
+          <p:nvPr/>
+        </p:nvSpPr>
+        <p:spPr>
+          <a:xfrm>
+            <a:off x="3847057" y="2585008"/>
+            <a:ext cx="3749902" cy="149047"/>
+          </a:xfrm>
+          <a:prstGeom prst="rect">
+            <a:avLst/>
+          </a:prstGeom>
+          <a:solidFill>
+            <a:srgbClr val="FFFF64"/>
+          </a:solidFill>
+          <a:ln>
+            <a:noFill/>
+          </a:ln>
+        </p:spPr>
+        <p:style>
+          <a:lnRef idx="1">
+            <a:schemeClr val="accent1"/>
+          </a:lnRef>
+          <a:fillRef idx="3">
+            <a:schemeClr val="accent1"/>
+          </a:fillRef>
+          <a:effectRef idx="2">
+            <a:schemeClr val="accent1"/>
+          </a:effectRef>
+          <a:fontRef idx="minor">
+            <a:schemeClr val="lt1"/>
+          </a:fontRef>
+        </p:style>
+        <p:txBody>
+          <a:bodyPr rtlCol="0" anchor="ctr"/>
+          <a:lstStyle/>
+          <a:p>
+            <a:pPr algn="ctr"/>
+          </a:p>
+        </p:txBody>
+      </p:sp>
+      <p:sp>
+        <p:nvSpPr>
+          <p:cNvPr id="61" name="Rectangle 60"/>
+          <p:cNvSpPr/>
+          <p:nvPr/>
+        </p:nvSpPr>
+        <p:spPr>
+          <a:xfrm>
+            <a:off x="3847057" y="2585008"/>
+            <a:ext cx="149996" cy="149047"/>
+          </a:xfrm>
+          <a:prstGeom prst="rect">
+            <a:avLst/>
+          </a:prstGeom>
+          <a:solidFill>
+            <a:srgbClr val="FFBF00"/>
+          </a:solidFill>
+          <a:ln>
+            <a:noFill/>
+          </a:ln>
+        </p:spPr>
+        <p:style>
+          <a:lnRef idx="1">
+            <a:schemeClr val="accent1"/>
+          </a:lnRef>
+          <a:fillRef idx="3">
+            <a:schemeClr val="accent1"/>
+          </a:fillRef>
+          <a:effectRef idx="2">
+            <a:schemeClr val="accent1"/>
+          </a:effectRef>
+          <a:fontRef idx="minor">
+            <a:schemeClr val="lt1"/>
+          </a:fontRef>
+        </p:style>
+        <p:txBody>
+          <a:bodyPr rtlCol="0" anchor="ctr"/>
+          <a:lstStyle/>
+          <a:p>
+            <a:pPr algn="ctr"/>
+          </a:p>
+        </p:txBody>
+      </p:sp>
+      <p:sp>
+        <p:nvSpPr>
+          <p:cNvPr id="62" name="TextBox 61"/>
+          <p:cNvSpPr txBox="1"/>
+          <p:nvPr/>
+        </p:nvSpPr>
+        <p:spPr>
+          <a:xfrm>
+            <a:off x="3874489" y="2585008"/>
+            <a:ext cx="149996" cy="149047"/>
+          </a:xfrm>
+          <a:prstGeom prst="rect">
+            <a:avLst/>
+          </a:prstGeom>
+          <a:noFill/>
+        </p:spPr>
+        <p:txBody>
+          <a:bodyPr wrap="none">
+            <a:spAutoFit/>
+          </a:bodyPr>
+          <a:lstStyle/>
+          <a:p>
+            <a:pPr algn="l"/>
+            <a:r>
+              <a:rPr sz="700" b="1">
+                <a:solidFill>
+                  <a:srgbClr val="FFFFFF"/>
+                </a:solidFill>
+              </a:rPr>
+              <a:t>4%</a:t>
+            </a:r>
+          </a:p>
+        </p:txBody>
+      </p:sp>
+      <p:sp>
+        <p:nvSpPr>
+          <p:cNvPr id="63" name="Rectangle 62"/>
+          <p:cNvSpPr/>
+          <p:nvPr/>
+        </p:nvSpPr>
+        <p:spPr>
+          <a:xfrm>
+            <a:off x="91440" y="2775204"/>
+            <a:ext cx="11978640" cy="226771"/>
+          </a:xfrm>
+          <a:prstGeom prst="rect">
+            <a:avLst/>
+          </a:prstGeom>
+          <a:solidFill>
+            <a:srgbClr val="FFFFFF"/>
+          </a:solidFill>
+          <a:ln>
+            <a:noFill/>
+          </a:ln>
+        </p:spPr>
+        <p:style>
+          <a:lnRef idx="1">
+            <a:schemeClr val="accent1"/>
+          </a:lnRef>
+          <a:fillRef idx="3">
+            <a:schemeClr val="accent1"/>
+          </a:fillRef>
+          <a:effectRef idx="2">
+            <a:schemeClr val="accent1"/>
+          </a:effectRef>
+          <a:fontRef idx="minor">
+            <a:schemeClr val="lt1"/>
+          </a:fontRef>
+        </p:style>
+        <p:txBody>
+          <a:bodyPr rtlCol="0" anchor="ctr"/>
+          <a:lstStyle/>
+          <a:p>
+            <a:pPr algn="ctr"/>
+          </a:p>
+        </p:txBody>
+      </p:sp>
+      <p:sp>
+        <p:nvSpPr>
+          <p:cNvPr id="64" name="TextBox 63"/>
+          <p:cNvSpPr txBox="1"/>
+          <p:nvPr/>
+        </p:nvSpPr>
+        <p:spPr>
+          <a:xfrm>
+            <a:off x="137160" y="2807208"/>
+            <a:ext cx="3154679" cy="203911"/>
+          </a:xfrm>
+          <a:prstGeom prst="rect">
+            <a:avLst/>
+          </a:prstGeom>
+          <a:noFill/>
+        </p:spPr>
+        <p:txBody>
+          <a:bodyPr wrap="none">
+            <a:spAutoFit/>
+          </a:bodyPr>
+          <a:lstStyle/>
+          <a:p>
+            <a:pPr algn="l"/>
+            <a:r>
+              <a:rPr sz="750" b="0">
+                <a:solidFill>
+                  <a:srgbClr val="212121"/>
+                </a:solidFill>
+              </a:rPr>
+              <a:t>    Wave 1: Far Rockaway/Valley Stm/Cedarhurst</a:t>
+            </a:r>
+          </a:p>
+        </p:txBody>
+      </p:sp>
+      <p:sp>
+        <p:nvSpPr>
+          <p:cNvPr id="65" name="Rectangle 64"/>
+          <p:cNvSpPr/>
+          <p:nvPr/>
+        </p:nvSpPr>
+        <p:spPr>
+          <a:xfrm>
+            <a:off x="3867437" y="2825496"/>
+            <a:ext cx="1120894" cy="149047"/>
+          </a:xfrm>
+          <a:prstGeom prst="rect">
+            <a:avLst/>
+          </a:prstGeom>
+          <a:solidFill>
+            <a:srgbClr val="FFFF64"/>
+          </a:solidFill>
+          <a:ln>
+            <a:noFill/>
+          </a:ln>
+        </p:spPr>
+        <p:style>
+          <a:lnRef idx="1">
+            <a:schemeClr val="accent1"/>
+          </a:lnRef>
+          <a:fillRef idx="3">
+            <a:schemeClr val="accent1"/>
+          </a:fillRef>
+          <a:effectRef idx="2">
+            <a:schemeClr val="accent1"/>
+          </a:effectRef>
+          <a:fontRef idx="minor">
+            <a:schemeClr val="lt1"/>
+          </a:fontRef>
+        </p:style>
+        <p:txBody>
+          <a:bodyPr rtlCol="0" anchor="ctr"/>
+          <a:lstStyle/>
+          <a:p>
+            <a:pPr algn="ctr"/>
+          </a:p>
+        </p:txBody>
+      </p:sp>
+      <p:sp>
+        <p:nvSpPr>
+          <p:cNvPr id="66" name="Rectangle 65"/>
+          <p:cNvSpPr/>
+          <p:nvPr/>
+        </p:nvSpPr>
+        <p:spPr>
+          <a:xfrm>
+            <a:off x="3867437" y="2825496"/>
+            <a:ext cx="560447" cy="149047"/>
+          </a:xfrm>
+          <a:prstGeom prst="rect">
+            <a:avLst/>
+          </a:prstGeom>
+          <a:solidFill>
+            <a:srgbClr val="FFBF00"/>
+          </a:solidFill>
+          <a:ln>
+            <a:noFill/>
+          </a:ln>
+        </p:spPr>
+        <p:style>
+          <a:lnRef idx="1">
+            <a:schemeClr val="accent1"/>
+          </a:lnRef>
+          <a:fillRef idx="3">
+            <a:schemeClr val="accent1"/>
+          </a:fillRef>
+          <a:effectRef idx="2">
+            <a:schemeClr val="accent1"/>
+          </a:effectRef>
+          <a:fontRef idx="minor">
+            <a:schemeClr val="lt1"/>
+          </a:fontRef>
+        </p:style>
+        <p:txBody>
+          <a:bodyPr rtlCol="0" anchor="ctr"/>
+          <a:lstStyle/>
+          <a:p>
+            <a:pPr algn="ctr"/>
+          </a:p>
+        </p:txBody>
+      </p:sp>
+      <p:sp>
+        <p:nvSpPr>
+          <p:cNvPr id="67" name="TextBox 66"/>
+          <p:cNvSpPr txBox="1"/>
+          <p:nvPr/>
+        </p:nvSpPr>
+        <p:spPr>
+          <a:xfrm>
+            <a:off x="3894869" y="2825496"/>
+            <a:ext cx="560447" cy="149047"/>
+          </a:xfrm>
+          <a:prstGeom prst="rect">
+            <a:avLst/>
+          </a:prstGeom>
+          <a:noFill/>
+        </p:spPr>
+        <p:txBody>
+          <a:bodyPr wrap="none">
+            <a:spAutoFit/>
+          </a:bodyPr>
+          <a:lstStyle/>
+          <a:p>
+            <a:pPr algn="l"/>
+            <a:r>
+              <a:rPr sz="700" b="1">
+                <a:solidFill>
+                  <a:srgbClr val="FFFFFF"/>
+                </a:solidFill>
+              </a:rPr>
+              <a:t>50%</a:t>
+            </a:r>
+          </a:p>
+        </p:txBody>
+      </p:sp>
+      <p:sp>
+        <p:nvSpPr>
+          <p:cNvPr id="68" name="Rectangle 67"/>
+          <p:cNvSpPr/>
+          <p:nvPr/>
+        </p:nvSpPr>
+        <p:spPr>
+          <a:xfrm>
+            <a:off x="91440" y="3015691"/>
+            <a:ext cx="11978640" cy="226771"/>
+          </a:xfrm>
+          <a:prstGeom prst="rect">
+            <a:avLst/>
+          </a:prstGeom>
+          <a:solidFill>
+            <a:srgbClr val="F2F2F2"/>
+          </a:solidFill>
+          <a:ln>
+            <a:noFill/>
+          </a:ln>
+        </p:spPr>
+        <p:style>
+          <a:lnRef idx="1">
+            <a:schemeClr val="accent1"/>
+          </a:lnRef>
+          <a:fillRef idx="3">
+            <a:schemeClr val="accent1"/>
+          </a:fillRef>
+          <a:effectRef idx="2">
+            <a:schemeClr val="accent1"/>
+          </a:effectRef>
+          <a:fontRef idx="minor">
+            <a:schemeClr val="lt1"/>
+          </a:fontRef>
+        </p:style>
+        <p:txBody>
+          <a:bodyPr rtlCol="0" anchor="ctr"/>
+          <a:lstStyle/>
+          <a:p>
+            <a:pPr algn="ctr"/>
+          </a:p>
+        </p:txBody>
+      </p:sp>
+      <p:sp>
+        <p:nvSpPr>
+          <p:cNvPr id="69" name="TextBox 68"/>
+          <p:cNvSpPr txBox="1"/>
+          <p:nvPr/>
+        </p:nvSpPr>
+        <p:spPr>
+          <a:xfrm>
+            <a:off x="137160" y="3047695"/>
+            <a:ext cx="3154679" cy="203911"/>
+          </a:xfrm>
+          <a:prstGeom prst="rect">
+            <a:avLst/>
+          </a:prstGeom>
+          <a:noFill/>
+        </p:spPr>
+        <p:txBody>
+          <a:bodyPr wrap="none">
+            <a:spAutoFit/>
+          </a:bodyPr>
+          <a:lstStyle/>
+          <a:p>
+            <a:pPr algn="l"/>
+            <a:r>
+              <a:rPr sz="750" b="0">
+                <a:solidFill>
+                  <a:srgbClr val="212121"/>
+                </a:solidFill>
+              </a:rPr>
+              <a:t>    Wave 2: Hewlett / Green Acres / Barrett</a:t>
+            </a:r>
+          </a:p>
+        </p:txBody>
+      </p:sp>
+      <p:sp>
+        <p:nvSpPr>
+          <p:cNvPr id="70" name="Rectangle 69"/>
+          <p:cNvSpPr/>
+          <p:nvPr/>
+        </p:nvSpPr>
+        <p:spPr>
+          <a:xfrm>
+            <a:off x="4295415" y="3065983"/>
+            <a:ext cx="1406213" cy="149047"/>
+          </a:xfrm>
+          <a:prstGeom prst="rect">
+            <a:avLst/>
+          </a:prstGeom>
+          <a:solidFill>
+            <a:srgbClr val="6497EB"/>
+          </a:solidFill>
+          <a:ln>
+            <a:noFill/>
+          </a:ln>
+        </p:spPr>
+        <p:style>
+          <a:lnRef idx="1">
+            <a:schemeClr val="accent1"/>
+          </a:lnRef>
+          <a:fillRef idx="3">
+            <a:schemeClr val="accent1"/>
+          </a:fillRef>
+          <a:effectRef idx="2">
+            <a:schemeClr val="accent1"/>
+          </a:effectRef>
+          <a:fontRef idx="minor">
+            <a:schemeClr val="lt1"/>
+          </a:fontRef>
+        </p:style>
+        <p:txBody>
+          <a:bodyPr rtlCol="0" anchor="ctr"/>
+          <a:lstStyle/>
+          <a:p>
+            <a:pPr algn="ctr"/>
+          </a:p>
+        </p:txBody>
+      </p:sp>
+      <p:sp>
+        <p:nvSpPr>
+          <p:cNvPr id="71" name="Rectangle 70"/>
+          <p:cNvSpPr/>
+          <p:nvPr/>
+        </p:nvSpPr>
+        <p:spPr>
+          <a:xfrm>
+            <a:off x="91440" y="3256178"/>
+            <a:ext cx="11978640" cy="226771"/>
+          </a:xfrm>
+          <a:prstGeom prst="rect">
+            <a:avLst/>
+          </a:prstGeom>
+          <a:solidFill>
+            <a:srgbClr val="FFFFFF"/>
+          </a:solidFill>
+          <a:ln>
+            <a:noFill/>
+          </a:ln>
+        </p:spPr>
+        <p:style>
+          <a:lnRef idx="1">
+            <a:schemeClr val="accent1"/>
+          </a:lnRef>
+          <a:fillRef idx="3">
+            <a:schemeClr val="accent1"/>
+          </a:fillRef>
+          <a:effectRef idx="2">
+            <a:schemeClr val="accent1"/>
+          </a:effectRef>
+          <a:fontRef idx="minor">
+            <a:schemeClr val="lt1"/>
+          </a:fontRef>
+        </p:style>
+        <p:txBody>
+          <a:bodyPr rtlCol="0" anchor="ctr"/>
+          <a:lstStyle/>
+          <a:p>
+            <a:pPr algn="ctr"/>
+          </a:p>
+        </p:txBody>
+      </p:sp>
+      <p:sp>
+        <p:nvSpPr>
+          <p:cNvPr id="72" name="TextBox 71"/>
+          <p:cNvSpPr txBox="1"/>
+          <p:nvPr/>
+        </p:nvSpPr>
+        <p:spPr>
+          <a:xfrm>
+            <a:off x="137160" y="3288182"/>
+            <a:ext cx="3154679" cy="203911"/>
+          </a:xfrm>
+          <a:prstGeom prst="rect">
+            <a:avLst/>
+          </a:prstGeom>
+          <a:noFill/>
+        </p:spPr>
+        <p:txBody>
+          <a:bodyPr wrap="none">
+            <a:spAutoFit/>
+          </a:bodyPr>
+          <a:lstStyle/>
+          <a:p>
+            <a:pPr algn="l"/>
+            <a:r>
+              <a:rPr sz="750" b="0">
+                <a:solidFill>
+                  <a:srgbClr val="212121"/>
+                </a:solidFill>
+              </a:rPr>
+              <a:t>    Wave 3: Whiteside/Baldwin/Hauppauge</a:t>
+            </a:r>
+          </a:p>
+        </p:txBody>
+      </p:sp>
+      <p:sp>
+        <p:nvSpPr>
+          <p:cNvPr id="73" name="Rectangle 72"/>
+          <p:cNvSpPr/>
+          <p:nvPr/>
+        </p:nvSpPr>
+        <p:spPr>
+          <a:xfrm>
+            <a:off x="5151371" y="3306470"/>
+            <a:ext cx="1569252" cy="149047"/>
+          </a:xfrm>
+          <a:prstGeom prst="rect">
+            <a:avLst/>
+          </a:prstGeom>
+          <a:solidFill>
+            <a:srgbClr val="6497EB"/>
+          </a:solidFill>
+          <a:ln>
+            <a:noFill/>
+          </a:ln>
+        </p:spPr>
+        <p:style>
+          <a:lnRef idx="1">
+            <a:schemeClr val="accent1"/>
+          </a:lnRef>
+          <a:fillRef idx="3">
+            <a:schemeClr val="accent1"/>
+          </a:fillRef>
+          <a:effectRef idx="2">
+            <a:schemeClr val="accent1"/>
+          </a:effectRef>
+          <a:fontRef idx="minor">
+            <a:schemeClr val="lt1"/>
+          </a:fontRef>
+        </p:style>
+        <p:txBody>
+          <a:bodyPr rtlCol="0" anchor="ctr"/>
+          <a:lstStyle/>
+          <a:p>
+            <a:pPr algn="ctr"/>
+          </a:p>
+        </p:txBody>
+      </p:sp>
+      <p:sp>
+        <p:nvSpPr>
+          <p:cNvPr id="74" name="Rectangle 73"/>
+          <p:cNvSpPr/>
+          <p:nvPr/>
+        </p:nvSpPr>
+        <p:spPr>
+          <a:xfrm>
+            <a:off x="91440" y="3496665"/>
+            <a:ext cx="11978640" cy="226771"/>
+          </a:xfrm>
+          <a:prstGeom prst="rect">
+            <a:avLst/>
+          </a:prstGeom>
+          <a:solidFill>
+            <a:srgbClr val="F2F2F2"/>
+          </a:solidFill>
+          <a:ln>
+            <a:noFill/>
+          </a:ln>
+        </p:spPr>
+        <p:style>
+          <a:lnRef idx="1">
+            <a:schemeClr val="accent1"/>
+          </a:lnRef>
+          <a:fillRef idx="3">
+            <a:schemeClr val="accent1"/>
+          </a:fillRef>
+          <a:effectRef idx="2">
+            <a:schemeClr val="accent1"/>
+          </a:effectRef>
+          <a:fontRef idx="minor">
+            <a:schemeClr val="lt1"/>
+          </a:fontRef>
+        </p:style>
+        <p:txBody>
+          <a:bodyPr rtlCol="0" anchor="ctr"/>
+          <a:lstStyle/>
+          <a:p>
+            <a:pPr algn="ctr"/>
+          </a:p>
+        </p:txBody>
+      </p:sp>
+      <p:sp>
+        <p:nvSpPr>
+          <p:cNvPr id="75" name="TextBox 74"/>
+          <p:cNvSpPr txBox="1"/>
+          <p:nvPr/>
+        </p:nvSpPr>
+        <p:spPr>
+          <a:xfrm>
+            <a:off x="137160" y="3528669"/>
+            <a:ext cx="3154679" cy="203911"/>
+          </a:xfrm>
+          <a:prstGeom prst="rect">
+            <a:avLst/>
+          </a:prstGeom>
+          <a:noFill/>
+        </p:spPr>
+        <p:txBody>
+          <a:bodyPr wrap="none">
+            <a:spAutoFit/>
+          </a:bodyPr>
+          <a:lstStyle/>
+          <a:p>
+            <a:pPr algn="l"/>
+            <a:r>
+              <a:rPr sz="750" b="0">
+                <a:solidFill>
+                  <a:srgbClr val="212121"/>
+                </a:solidFill>
+              </a:rPr>
+              <a:t>    Wave 4: Babylon/Sterling/MacArthur/Sayvill</a:t>
+            </a:r>
+          </a:p>
+        </p:txBody>
+      </p:sp>
+      <p:sp>
+        <p:nvSpPr>
+          <p:cNvPr id="76" name="Rectangle 75"/>
+          <p:cNvSpPr/>
+          <p:nvPr/>
+        </p:nvSpPr>
+        <p:spPr>
+          <a:xfrm>
+            <a:off x="5864668" y="3546957"/>
+            <a:ext cx="1304313" cy="149047"/>
+          </a:xfrm>
+          <a:prstGeom prst="rect">
+            <a:avLst/>
+          </a:prstGeom>
+          <a:solidFill>
+            <a:srgbClr val="6497EB"/>
+          </a:solidFill>
+          <a:ln>
+            <a:noFill/>
+          </a:ln>
+        </p:spPr>
+        <p:style>
+          <a:lnRef idx="1">
+            <a:schemeClr val="accent1"/>
+          </a:lnRef>
+          <a:fillRef idx="3">
+            <a:schemeClr val="accent1"/>
+          </a:fillRef>
+          <a:effectRef idx="2">
+            <a:schemeClr val="accent1"/>
+          </a:effectRef>
+          <a:fontRef idx="minor">
+            <a:schemeClr val="lt1"/>
+          </a:fontRef>
+        </p:style>
+        <p:txBody>
+          <a:bodyPr rtlCol="0" anchor="ctr"/>
+          <a:lstStyle/>
+          <a:p>
+            <a:pPr algn="ctr"/>
+          </a:p>
+        </p:txBody>
+      </p:sp>
+      <p:sp>
+        <p:nvSpPr>
+          <p:cNvPr id="77" name="Rectangle 76"/>
+          <p:cNvSpPr/>
+          <p:nvPr/>
+        </p:nvSpPr>
+        <p:spPr>
+          <a:xfrm>
+            <a:off x="91440" y="3737152"/>
+            <a:ext cx="11978640" cy="226771"/>
+          </a:xfrm>
+          <a:prstGeom prst="rect">
+            <a:avLst/>
+          </a:prstGeom>
+          <a:solidFill>
+            <a:srgbClr val="FFFFFF"/>
+          </a:solidFill>
+          <a:ln>
+            <a:noFill/>
+          </a:ln>
+        </p:spPr>
+        <p:style>
+          <a:lnRef idx="1">
+            <a:schemeClr val="accent1"/>
+          </a:lnRef>
+          <a:fillRef idx="3">
+            <a:schemeClr val="accent1"/>
+          </a:fillRef>
+          <a:effectRef idx="2">
+            <a:schemeClr val="accent1"/>
+          </a:effectRef>
+          <a:fontRef idx="minor">
+            <a:schemeClr val="lt1"/>
+          </a:fontRef>
+        </p:style>
+        <p:txBody>
+          <a:bodyPr rtlCol="0" anchor="ctr"/>
+          <a:lstStyle/>
+          <a:p>
+            <a:pPr algn="ctr"/>
+          </a:p>
+        </p:txBody>
+      </p:sp>
+      <p:sp>
+        <p:nvSpPr>
+          <p:cNvPr id="78" name="TextBox 77"/>
+          <p:cNvSpPr txBox="1"/>
+          <p:nvPr/>
+        </p:nvSpPr>
+        <p:spPr>
+          <a:xfrm>
+            <a:off x="137160" y="3769156"/>
+            <a:ext cx="3154679" cy="203911"/>
+          </a:xfrm>
+          <a:prstGeom prst="rect">
+            <a:avLst/>
+          </a:prstGeom>
+          <a:noFill/>
+        </p:spPr>
+        <p:txBody>
+          <a:bodyPr wrap="none">
+            <a:spAutoFit/>
+          </a:bodyPr>
+          <a:lstStyle/>
+          <a:p>
+            <a:pPr algn="l"/>
+            <a:r>
+              <a:rPr sz="750" b="0">
+                <a:solidFill>
+                  <a:srgbClr val="212121"/>
+                </a:solidFill>
+              </a:rPr>
+              <a:t>    Wave 5: Bayport/S.Farmingdale/Patchogue</a:t>
+            </a:r>
+          </a:p>
+        </p:txBody>
+      </p:sp>
+      <p:sp>
+        <p:nvSpPr>
+          <p:cNvPr id="79" name="Rectangle 78"/>
+          <p:cNvSpPr/>
+          <p:nvPr/>
+        </p:nvSpPr>
+        <p:spPr>
+          <a:xfrm>
+            <a:off x="6149986" y="3787444"/>
+            <a:ext cx="1446973" cy="149047"/>
+          </a:xfrm>
+          <a:prstGeom prst="rect">
+            <a:avLst/>
+          </a:prstGeom>
+          <a:solidFill>
+            <a:srgbClr val="6497EB"/>
+          </a:solidFill>
+          <a:ln>
+            <a:noFill/>
+          </a:ln>
+        </p:spPr>
+        <p:style>
+          <a:lnRef idx="1">
+            <a:schemeClr val="accent1"/>
+          </a:lnRef>
+          <a:fillRef idx="3">
+            <a:schemeClr val="accent1"/>
+          </a:fillRef>
+          <a:effectRef idx="2">
+            <a:schemeClr val="accent1"/>
+          </a:effectRef>
+          <a:fontRef idx="minor">
+            <a:schemeClr val="lt1"/>
+          </a:fontRef>
+        </p:style>
+        <p:txBody>
+          <a:bodyPr rtlCol="0" anchor="ctr"/>
+          <a:lstStyle/>
+          <a:p>
+            <a:pPr algn="ctr"/>
+          </a:p>
+        </p:txBody>
+      </p:sp>
+      <p:sp>
+        <p:nvSpPr>
+          <p:cNvPr id="80" name="Rectangle 79"/>
+          <p:cNvSpPr/>
+          <p:nvPr/>
+        </p:nvSpPr>
+        <p:spPr>
+          <a:xfrm>
+            <a:off x="91440" y="3977639"/>
+            <a:ext cx="11978640" cy="226771"/>
+          </a:xfrm>
+          <a:prstGeom prst="rect">
+            <a:avLst/>
+          </a:prstGeom>
+          <a:solidFill>
+            <a:srgbClr val="F2F2F2"/>
+          </a:solidFill>
+          <a:ln>
+            <a:noFill/>
+          </a:ln>
+        </p:spPr>
+        <p:style>
+          <a:lnRef idx="1">
+            <a:schemeClr val="accent1"/>
+          </a:lnRef>
+          <a:fillRef idx="3">
+            <a:schemeClr val="accent1"/>
+          </a:fillRef>
+          <a:effectRef idx="2">
+            <a:schemeClr val="accent1"/>
+          </a:effectRef>
+          <a:fontRef idx="minor">
+            <a:schemeClr val="lt1"/>
+          </a:fontRef>
+        </p:style>
+        <p:txBody>
+          <a:bodyPr rtlCol="0" anchor="ctr"/>
+          <a:lstStyle/>
+          <a:p>
+            <a:pPr algn="ctr"/>
+          </a:p>
+        </p:txBody>
+      </p:sp>
+      <p:sp>
+        <p:nvSpPr>
+          <p:cNvPr id="81" name="TextBox 80"/>
+          <p:cNvSpPr txBox="1"/>
+          <p:nvPr/>
+        </p:nvSpPr>
+        <p:spPr>
+          <a:xfrm>
+            <a:off x="137160" y="4009644"/>
+            <a:ext cx="3154679" cy="203911"/>
+          </a:xfrm>
+          <a:prstGeom prst="rect">
+            <a:avLst/>
+          </a:prstGeom>
+          <a:noFill/>
+        </p:spPr>
+        <p:txBody>
+          <a:bodyPr wrap="none">
+            <a:spAutoFit/>
+          </a:bodyPr>
+          <a:lstStyle/>
+          <a:p>
+            <a:pPr algn="l"/>
+            <a:r>
+              <a:rPr sz="750" b="0">
+                <a:solidFill>
+                  <a:srgbClr val="212121"/>
+                </a:solidFill>
+              </a:rPr>
+              <a:t>    DO Offices / Hicksville / Ruland / ACC</a:t>
+            </a:r>
+          </a:p>
+        </p:txBody>
+      </p:sp>
+      <p:sp>
+        <p:nvSpPr>
+          <p:cNvPr id="82" name="Rectangle 81"/>
+          <p:cNvSpPr/>
+          <p:nvPr/>
+        </p:nvSpPr>
+        <p:spPr>
+          <a:xfrm>
+            <a:off x="6149986" y="4027931"/>
+            <a:ext cx="1446973" cy="149047"/>
+          </a:xfrm>
+          <a:prstGeom prst="rect">
+            <a:avLst/>
+          </a:prstGeom>
+          <a:solidFill>
+            <a:srgbClr val="6497EB"/>
+          </a:solidFill>
+          <a:ln>
+            <a:noFill/>
+          </a:ln>
+        </p:spPr>
+        <p:style>
+          <a:lnRef idx="1">
+            <a:schemeClr val="accent1"/>
+          </a:lnRef>
+          <a:fillRef idx="3">
+            <a:schemeClr val="accent1"/>
+          </a:fillRef>
+          <a:effectRef idx="2">
+            <a:schemeClr val="accent1"/>
+          </a:effectRef>
+          <a:fontRef idx="minor">
+            <a:schemeClr val="lt1"/>
+          </a:fontRef>
+        </p:style>
+        <p:txBody>
+          <a:bodyPr rtlCol="0" anchor="ctr"/>
+          <a:lstStyle/>
+          <a:p>
+            <a:pPr algn="ctr"/>
+          </a:p>
+        </p:txBody>
+      </p:sp>
+      <p:sp>
+        <p:nvSpPr>
+          <p:cNvPr id="83" name="Rectangle 82"/>
+          <p:cNvSpPr/>
+          <p:nvPr/>
+        </p:nvSpPr>
+        <p:spPr>
+          <a:xfrm>
+            <a:off x="91440" y="4218127"/>
+            <a:ext cx="11978640" cy="226771"/>
+          </a:xfrm>
+          <a:prstGeom prst="rect">
+            <a:avLst/>
+          </a:prstGeom>
+          <a:solidFill>
+            <a:srgbClr val="FFFFFF"/>
+          </a:solidFill>
+          <a:ln>
+            <a:noFill/>
+          </a:ln>
+        </p:spPr>
+        <p:style>
+          <a:lnRef idx="1">
+            <a:schemeClr val="accent1"/>
+          </a:lnRef>
+          <a:fillRef idx="3">
+            <a:schemeClr val="accent1"/>
+          </a:fillRef>
+          <a:effectRef idx="2">
+            <a:schemeClr val="accent1"/>
+          </a:effectRef>
+          <a:fontRef idx="minor">
+            <a:schemeClr val="lt1"/>
+          </a:fontRef>
+        </p:style>
+        <p:txBody>
+          <a:bodyPr rtlCol="0" anchor="ctr"/>
+          <a:lstStyle/>
+          <a:p>
+            <a:pPr algn="ctr"/>
+          </a:p>
+        </p:txBody>
+      </p:sp>
+      <p:sp>
+        <p:nvSpPr>
+          <p:cNvPr id="84" name="TextBox 83"/>
+          <p:cNvSpPr txBox="1"/>
+          <p:nvPr/>
+        </p:nvSpPr>
+        <p:spPr>
+          <a:xfrm>
+            <a:off x="137160" y="4250131"/>
+            <a:ext cx="3154679" cy="203911"/>
+          </a:xfrm>
+          <a:prstGeom prst="rect">
+            <a:avLst/>
+          </a:prstGeom>
+          <a:noFill/>
+        </p:spPr>
+        <p:txBody>
+          <a:bodyPr wrap="none">
+            <a:spAutoFit/>
+          </a:bodyPr>
+          <a:lstStyle/>
+          <a:p>
+            <a:pPr algn="l"/>
+            <a:r>
+              <a:rPr sz="750" b="0">
+                <a:solidFill>
+                  <a:srgbClr val="212121"/>
+                </a:solidFill>
+              </a:rPr>
+              <a:t>  Staging &amp; Testing</a:t>
+            </a:r>
+          </a:p>
+        </p:txBody>
+      </p:sp>
+      <p:sp>
+        <p:nvSpPr>
+          <p:cNvPr id="85" name="Rectangle 84"/>
+          <p:cNvSpPr/>
+          <p:nvPr/>
+        </p:nvSpPr>
+        <p:spPr>
+          <a:xfrm>
+            <a:off x="7617340" y="4268419"/>
+            <a:ext cx="264938" cy="149047"/>
+          </a:xfrm>
+          <a:prstGeom prst="rect">
+            <a:avLst/>
+          </a:prstGeom>
+          <a:solidFill>
+            <a:srgbClr val="FFFF64"/>
+          </a:solidFill>
+          <a:ln>
+            <a:noFill/>
+          </a:ln>
+        </p:spPr>
+        <p:style>
+          <a:lnRef idx="1">
+            <a:schemeClr val="accent1"/>
+          </a:lnRef>
+          <a:fillRef idx="3">
+            <a:schemeClr val="accent1"/>
+          </a:fillRef>
+          <a:effectRef idx="2">
+            <a:schemeClr val="accent1"/>
+          </a:effectRef>
+          <a:fontRef idx="minor">
+            <a:schemeClr val="lt1"/>
+          </a:fontRef>
+        </p:style>
+        <p:txBody>
+          <a:bodyPr rtlCol="0" anchor="ctr"/>
+          <a:lstStyle/>
+          <a:p>
+            <a:pPr algn="ctr"/>
+          </a:p>
+        </p:txBody>
+      </p:sp>
+      <p:sp>
+        <p:nvSpPr>
+          <p:cNvPr id="86" name="Rectangle 85"/>
+          <p:cNvSpPr/>
+          <p:nvPr/>
+        </p:nvSpPr>
+        <p:spPr>
+          <a:xfrm>
+            <a:off x="91440" y="4458614"/>
+            <a:ext cx="11978640" cy="226771"/>
+          </a:xfrm>
+          <a:prstGeom prst="rect">
+            <a:avLst/>
+          </a:prstGeom>
+          <a:solidFill>
+            <a:srgbClr val="F2F2F2"/>
+          </a:solidFill>
+          <a:ln>
+            <a:noFill/>
+          </a:ln>
+        </p:spPr>
+        <p:style>
+          <a:lnRef idx="1">
+            <a:schemeClr val="accent1"/>
+          </a:lnRef>
+          <a:fillRef idx="3">
+            <a:schemeClr val="accent1"/>
+          </a:fillRef>
+          <a:effectRef idx="2">
+            <a:schemeClr val="accent1"/>
+          </a:effectRef>
+          <a:fontRef idx="minor">
+            <a:schemeClr val="lt1"/>
+          </a:fontRef>
+        </p:style>
+        <p:txBody>
+          <a:bodyPr rtlCol="0" anchor="ctr"/>
+          <a:lstStyle/>
+          <a:p>
+            <a:pPr algn="ctr"/>
+          </a:p>
+        </p:txBody>
+      </p:sp>
+      <p:sp>
+        <p:nvSpPr>
+          <p:cNvPr id="87" name="TextBox 86"/>
+          <p:cNvSpPr txBox="1"/>
+          <p:nvPr/>
+        </p:nvSpPr>
+        <p:spPr>
+          <a:xfrm>
+            <a:off x="137160" y="4490618"/>
+            <a:ext cx="3154679" cy="203911"/>
+          </a:xfrm>
+          <a:prstGeom prst="rect">
+            <a:avLst/>
+          </a:prstGeom>
+          <a:noFill/>
+        </p:spPr>
+        <p:txBody>
+          <a:bodyPr wrap="none">
+            <a:spAutoFit/>
+          </a:bodyPr>
+          <a:lstStyle/>
+          <a:p>
+            <a:pPr algn="l"/>
+            <a:r>
+              <a:rPr sz="750" b="0">
+                <a:solidFill>
+                  <a:srgbClr val="212121"/>
+                </a:solidFill>
+              </a:rPr>
+              <a:t>  Construction &amp; Installation (Hawkeye)</a:t>
+            </a:r>
+          </a:p>
+        </p:txBody>
+      </p:sp>
+      <p:sp>
+        <p:nvSpPr>
+          <p:cNvPr id="88" name="Rectangle 87"/>
+          <p:cNvSpPr/>
+          <p:nvPr/>
+        </p:nvSpPr>
+        <p:spPr>
+          <a:xfrm>
+            <a:off x="7902658" y="4508906"/>
+            <a:ext cx="957855" cy="149047"/>
+          </a:xfrm>
+          <a:prstGeom prst="rect">
+            <a:avLst/>
+          </a:prstGeom>
+          <a:solidFill>
+            <a:srgbClr val="FF6464"/>
+          </a:solidFill>
+          <a:ln>
+            <a:noFill/>
+          </a:ln>
+        </p:spPr>
+        <p:style>
+          <a:lnRef idx="1">
+            <a:schemeClr val="accent1"/>
+          </a:lnRef>
+          <a:fillRef idx="3">
+            <a:schemeClr val="accent1"/>
+          </a:fillRef>
+          <a:effectRef idx="2">
+            <a:schemeClr val="accent1"/>
+          </a:effectRef>
+          <a:fontRef idx="minor">
+            <a:schemeClr val="lt1"/>
+          </a:fontRef>
+        </p:style>
+        <p:txBody>
+          <a:bodyPr rtlCol="0" anchor="ctr"/>
+          <a:lstStyle/>
+          <a:p>
+            <a:pPr algn="ctr"/>
+          </a:p>
+        </p:txBody>
+      </p:sp>
+      <p:sp>
+        <p:nvSpPr>
+          <p:cNvPr id="89" name="Rectangle 88"/>
+          <p:cNvSpPr/>
+          <p:nvPr/>
+        </p:nvSpPr>
+        <p:spPr>
+          <a:xfrm>
+            <a:off x="91440" y="4699101"/>
+            <a:ext cx="11978640" cy="226771"/>
+          </a:xfrm>
+          <a:prstGeom prst="rect">
+            <a:avLst/>
+          </a:prstGeom>
+          <a:solidFill>
+            <a:srgbClr val="FFFFFF"/>
+          </a:solidFill>
+          <a:ln>
+            <a:noFill/>
+          </a:ln>
+        </p:spPr>
+        <p:style>
+          <a:lnRef idx="1">
+            <a:schemeClr val="accent1"/>
+          </a:lnRef>
+          <a:fillRef idx="3">
+            <a:schemeClr val="accent1"/>
+          </a:fillRef>
+          <a:effectRef idx="2">
+            <a:schemeClr val="accent1"/>
+          </a:effectRef>
+          <a:fontRef idx="minor">
+            <a:schemeClr val="lt1"/>
+          </a:fontRef>
+        </p:style>
+        <p:txBody>
+          <a:bodyPr rtlCol="0" anchor="ctr"/>
+          <a:lstStyle/>
+          <a:p>
+            <a:pPr algn="ctr"/>
+          </a:p>
+        </p:txBody>
+      </p:sp>
+      <p:sp>
+        <p:nvSpPr>
+          <p:cNvPr id="90" name="TextBox 89"/>
+          <p:cNvSpPr txBox="1"/>
+          <p:nvPr/>
+        </p:nvSpPr>
+        <p:spPr>
+          <a:xfrm>
+            <a:off x="137160" y="4731105"/>
+            <a:ext cx="3154679" cy="203911"/>
+          </a:xfrm>
+          <a:prstGeom prst="rect">
+            <a:avLst/>
+          </a:prstGeom>
+          <a:noFill/>
+        </p:spPr>
+        <p:txBody>
+          <a:bodyPr wrap="none">
+            <a:spAutoFit/>
+          </a:bodyPr>
+          <a:lstStyle/>
+          <a:p>
+            <a:pPr algn="l"/>
+            <a:r>
+              <a:rPr sz="750" b="0">
+                <a:solidFill>
+                  <a:srgbClr val="212121"/>
+                </a:solidFill>
+              </a:rPr>
+              <a:t>  Site Acceptance Testing</a:t>
+            </a:r>
+          </a:p>
+        </p:txBody>
+      </p:sp>
+      <p:sp>
+        <p:nvSpPr>
+          <p:cNvPr id="91" name="Rectangle 90"/>
+          <p:cNvSpPr/>
+          <p:nvPr/>
+        </p:nvSpPr>
+        <p:spPr>
+          <a:xfrm>
+            <a:off x="8880894" y="4749393"/>
+            <a:ext cx="40759" cy="149047"/>
+          </a:xfrm>
+          <a:prstGeom prst="rect">
+            <a:avLst/>
+          </a:prstGeom>
+          <a:solidFill>
+            <a:srgbClr val="FFFF64"/>
+          </a:solidFill>
+          <a:ln>
+            <a:noFill/>
+          </a:ln>
+        </p:spPr>
+        <p:style>
+          <a:lnRef idx="1">
+            <a:schemeClr val="accent1"/>
+          </a:lnRef>
+          <a:fillRef idx="3">
+            <a:schemeClr val="accent1"/>
+          </a:fillRef>
+          <a:effectRef idx="2">
+            <a:schemeClr val="accent1"/>
+          </a:effectRef>
+          <a:fontRef idx="minor">
+            <a:schemeClr val="lt1"/>
+          </a:fontRef>
+        </p:style>
+        <p:txBody>
+          <a:bodyPr rtlCol="0" anchor="ctr"/>
+          <a:lstStyle/>
+          <a:p>
+            <a:pPr algn="ctr"/>
+          </a:p>
+        </p:txBody>
+      </p:sp>
+      <p:sp>
+        <p:nvSpPr>
+          <p:cNvPr id="92" name="Rectangle 91"/>
+          <p:cNvSpPr/>
+          <p:nvPr/>
+        </p:nvSpPr>
+        <p:spPr>
+          <a:xfrm>
+            <a:off x="91440" y="4939588"/>
+            <a:ext cx="11978640" cy="226771"/>
+          </a:xfrm>
+          <a:prstGeom prst="rect">
+            <a:avLst/>
+          </a:prstGeom>
+          <a:solidFill>
+            <a:srgbClr val="F2F2F2"/>
+          </a:solidFill>
+          <a:ln>
+            <a:noFill/>
+          </a:ln>
+        </p:spPr>
+        <p:style>
+          <a:lnRef idx="1">
+            <a:schemeClr val="accent1"/>
+          </a:lnRef>
+          <a:fillRef idx="3">
+            <a:schemeClr val="accent1"/>
+          </a:fillRef>
+          <a:effectRef idx="2">
+            <a:schemeClr val="accent1"/>
+          </a:effectRef>
+          <a:fontRef idx="minor">
+            <a:schemeClr val="lt1"/>
+          </a:fontRef>
+        </p:style>
+        <p:txBody>
+          <a:bodyPr rtlCol="0" anchor="ctr"/>
+          <a:lstStyle/>
+          <a:p>
+            <a:pPr algn="ctr"/>
+          </a:p>
+        </p:txBody>
+      </p:sp>
+      <p:sp>
+        <p:nvSpPr>
+          <p:cNvPr id="93" name="TextBox 92"/>
+          <p:cNvSpPr txBox="1"/>
+          <p:nvPr/>
+        </p:nvSpPr>
+        <p:spPr>
+          <a:xfrm>
+            <a:off x="137160" y="4971592"/>
+            <a:ext cx="3154679" cy="203911"/>
+          </a:xfrm>
+          <a:prstGeom prst="rect">
+            <a:avLst/>
+          </a:prstGeom>
+          <a:noFill/>
+        </p:spPr>
+        <p:txBody>
+          <a:bodyPr wrap="none">
+            <a:spAutoFit/>
+          </a:bodyPr>
+          <a:lstStyle/>
+          <a:p>
+            <a:pPr algn="l"/>
+            <a:r>
+              <a:rPr sz="750" b="0">
+                <a:solidFill>
+                  <a:srgbClr val="212121"/>
+                </a:solidFill>
+              </a:rPr>
+              <a:t>  Cutover (Phase 2)</a:t>
+            </a:r>
+          </a:p>
+        </p:txBody>
+      </p:sp>
+      <p:sp>
+        <p:nvSpPr>
+          <p:cNvPr id="94" name="Rectangle 93"/>
+          <p:cNvSpPr/>
+          <p:nvPr/>
+        </p:nvSpPr>
+        <p:spPr>
+          <a:xfrm>
+            <a:off x="8982793" y="4989880"/>
+            <a:ext cx="2465968" cy="149047"/>
+          </a:xfrm>
+          <a:prstGeom prst="rect">
+            <a:avLst/>
+          </a:prstGeom>
+          <a:solidFill>
+            <a:srgbClr val="FF6464"/>
+          </a:solidFill>
+          <a:ln>
+            <a:noFill/>
+          </a:ln>
+        </p:spPr>
+        <p:style>
+          <a:lnRef idx="1">
+            <a:schemeClr val="accent1"/>
+          </a:lnRef>
+          <a:fillRef idx="3">
+            <a:schemeClr val="accent1"/>
+          </a:fillRef>
+          <a:effectRef idx="2">
+            <a:schemeClr val="accent1"/>
+          </a:effectRef>
+          <a:fontRef idx="minor">
+            <a:schemeClr val="lt1"/>
+          </a:fontRef>
+        </p:style>
+        <p:txBody>
+          <a:bodyPr rtlCol="0" anchor="ctr"/>
+          <a:lstStyle/>
+          <a:p>
+            <a:pPr algn="ctr"/>
+          </a:p>
+        </p:txBody>
+      </p:sp>
+      <p:sp>
+        <p:nvSpPr>
+          <p:cNvPr id="95" name="Rectangle 94"/>
+          <p:cNvSpPr/>
+          <p:nvPr/>
+        </p:nvSpPr>
+        <p:spPr>
+          <a:xfrm>
+            <a:off x="91440" y="5180076"/>
+            <a:ext cx="11978640" cy="226771"/>
+          </a:xfrm>
+          <a:prstGeom prst="rect">
+            <a:avLst/>
+          </a:prstGeom>
+          <a:solidFill>
+            <a:srgbClr val="E3ECFF"/>
+          </a:solidFill>
+          <a:ln>
+            <a:noFill/>
+          </a:ln>
+        </p:spPr>
+        <p:style>
+          <a:lnRef idx="1">
+            <a:schemeClr val="accent1"/>
+          </a:lnRef>
+          <a:fillRef idx="3">
+            <a:schemeClr val="accent1"/>
+          </a:fillRef>
+          <a:effectRef idx="2">
+            <a:schemeClr val="accent1"/>
+          </a:effectRef>
+          <a:fontRef idx="minor">
+            <a:schemeClr val="lt1"/>
+          </a:fontRef>
+        </p:style>
+        <p:txBody>
+          <a:bodyPr rtlCol="0" anchor="ctr"/>
+          <a:lstStyle/>
+          <a:p>
+            <a:pPr algn="ctr"/>
+          </a:p>
+        </p:txBody>
+      </p:sp>
+      <p:sp>
+        <p:nvSpPr>
+          <p:cNvPr id="96" name="TextBox 95"/>
+          <p:cNvSpPr txBox="1"/>
+          <p:nvPr/>
+        </p:nvSpPr>
+        <p:spPr>
+          <a:xfrm>
+            <a:off x="137160" y="5212080"/>
+            <a:ext cx="3154679" cy="203911"/>
+          </a:xfrm>
+          <a:prstGeom prst="rect">
+            <a:avLst/>
+          </a:prstGeom>
+          <a:noFill/>
+        </p:spPr>
+        <p:txBody>
+          <a:bodyPr wrap="none">
+            <a:spAutoFit/>
+          </a:bodyPr>
+          <a:lstStyle/>
+          <a:p>
+            <a:pPr algn="l"/>
+            <a:r>
+              <a:rPr sz="750" b="1">
+                <a:solidFill>
+                  <a:srgbClr val="003387"/>
+                </a:solidFill>
+              </a:rPr>
+              <a:t>PHASE 3 — Engineering Design</a:t>
+            </a:r>
+          </a:p>
+        </p:txBody>
+      </p:sp>
+      <p:sp>
+        <p:nvSpPr>
+          <p:cNvPr id="97" name="Rectangle 96"/>
+          <p:cNvSpPr/>
+          <p:nvPr/>
+        </p:nvSpPr>
+        <p:spPr>
+          <a:xfrm>
+            <a:off x="6414925" y="5230368"/>
+            <a:ext cx="3892561" cy="149047"/>
+          </a:xfrm>
+          <a:prstGeom prst="rect">
+            <a:avLst/>
+          </a:prstGeom>
+          <a:solidFill>
+            <a:srgbClr val="6497EB"/>
+          </a:solidFill>
+          <a:ln>
+            <a:noFill/>
+          </a:ln>
+        </p:spPr>
+        <p:style>
+          <a:lnRef idx="1">
+            <a:schemeClr val="accent1"/>
+          </a:lnRef>
+          <a:fillRef idx="3">
+            <a:schemeClr val="accent1"/>
+          </a:fillRef>
+          <a:effectRef idx="2">
+            <a:schemeClr val="accent1"/>
+          </a:effectRef>
+          <a:fontRef idx="minor">
+            <a:schemeClr val="lt1"/>
+          </a:fontRef>
+        </p:style>
+        <p:txBody>
+          <a:bodyPr rtlCol="0" anchor="ctr"/>
+          <a:lstStyle/>
+          <a:p>
+            <a:pPr algn="ctr"/>
+          </a:p>
+        </p:txBody>
+      </p:sp>
+      <p:sp>
+        <p:nvSpPr>
+          <p:cNvPr id="98" name="Rectangle 97"/>
+          <p:cNvSpPr/>
+          <p:nvPr/>
+        </p:nvSpPr>
+        <p:spPr>
+          <a:xfrm>
+            <a:off x="91440" y="5420563"/>
+            <a:ext cx="11978640" cy="226771"/>
+          </a:xfrm>
+          <a:prstGeom prst="rect">
+            <a:avLst/>
+          </a:prstGeom>
+          <a:solidFill>
+            <a:srgbClr val="F2F2F2"/>
+          </a:solidFill>
+          <a:ln>
+            <a:noFill/>
+          </a:ln>
+        </p:spPr>
+        <p:style>
+          <a:lnRef idx="1">
+            <a:schemeClr val="accent1"/>
+          </a:lnRef>
+          <a:fillRef idx="3">
+            <a:schemeClr val="accent1"/>
+          </a:fillRef>
+          <a:effectRef idx="2">
+            <a:schemeClr val="accent1"/>
+          </a:effectRef>
+          <a:fontRef idx="minor">
+            <a:schemeClr val="lt1"/>
+          </a:fontRef>
+        </p:style>
+        <p:txBody>
+          <a:bodyPr rtlCol="0" anchor="ctr"/>
+          <a:lstStyle/>
+          <a:p>
+            <a:pPr algn="ctr"/>
+          </a:p>
+        </p:txBody>
+      </p:sp>
+      <p:sp>
+        <p:nvSpPr>
+          <p:cNvPr id="99" name="TextBox 98"/>
+          <p:cNvSpPr txBox="1"/>
+          <p:nvPr/>
+        </p:nvSpPr>
+        <p:spPr>
+          <a:xfrm>
+            <a:off x="137160" y="5452567"/>
+            <a:ext cx="3154679" cy="203911"/>
+          </a:xfrm>
+          <a:prstGeom prst="rect">
+            <a:avLst/>
+          </a:prstGeom>
+          <a:noFill/>
+        </p:spPr>
+        <p:txBody>
+          <a:bodyPr wrap="none">
+            <a:spAutoFit/>
+          </a:bodyPr>
+          <a:lstStyle/>
+          <a:p>
+            <a:pPr algn="l"/>
+            <a:r>
+              <a:rPr sz="750" b="0">
+                <a:solidFill>
+                  <a:srgbClr val="212121"/>
+                </a:solidFill>
+              </a:rPr>
+              <a:t>  PO Received</a:t>
+            </a:r>
+          </a:p>
+        </p:txBody>
+      </p:sp>
+      <p:sp>
+        <p:nvSpPr>
+          <p:cNvPr id="100" name="Rectangle 99"/>
+          <p:cNvSpPr/>
+          <p:nvPr/>
+        </p:nvSpPr>
+        <p:spPr>
+          <a:xfrm>
+            <a:off x="6414925" y="5470855"/>
+            <a:ext cx="36576" cy="149047"/>
+          </a:xfrm>
+          <a:prstGeom prst="rect">
+            <a:avLst/>
+          </a:prstGeom>
+          <a:solidFill>
+            <a:srgbClr val="64FB64"/>
+          </a:solidFill>
+          <a:ln>
+            <a:noFill/>
+          </a:ln>
+        </p:spPr>
+        <p:style>
+          <a:lnRef idx="1">
+            <a:schemeClr val="accent1"/>
+          </a:lnRef>
+          <a:fillRef idx="3">
+            <a:schemeClr val="accent1"/>
+          </a:fillRef>
+          <a:effectRef idx="2">
+            <a:schemeClr val="accent1"/>
+          </a:effectRef>
+          <a:fontRef idx="minor">
+            <a:schemeClr val="lt1"/>
+          </a:fontRef>
+        </p:style>
+        <p:txBody>
+          <a:bodyPr rtlCol="0" anchor="ctr"/>
+          <a:lstStyle/>
+          <a:p>
+            <a:pPr algn="ctr"/>
+          </a:p>
+        </p:txBody>
+      </p:sp>
+      <p:sp>
+        <p:nvSpPr>
+          <p:cNvPr id="101" name="Rectangle 100"/>
+          <p:cNvSpPr/>
+          <p:nvPr/>
+        </p:nvSpPr>
+        <p:spPr>
+          <a:xfrm>
+            <a:off x="91440" y="5661050"/>
+            <a:ext cx="11978640" cy="226771"/>
+          </a:xfrm>
+          <a:prstGeom prst="rect">
+            <a:avLst/>
+          </a:prstGeom>
+          <a:solidFill>
+            <a:srgbClr val="FFFFFF"/>
+          </a:solidFill>
+          <a:ln>
+            <a:noFill/>
+          </a:ln>
+        </p:spPr>
+        <p:style>
+          <a:lnRef idx="1">
+            <a:schemeClr val="accent1"/>
+          </a:lnRef>
+          <a:fillRef idx="3">
+            <a:schemeClr val="accent1"/>
+          </a:fillRef>
+          <a:effectRef idx="2">
+            <a:schemeClr val="accent1"/>
+          </a:effectRef>
+          <a:fontRef idx="minor">
+            <a:schemeClr val="lt1"/>
+          </a:fontRef>
+        </p:style>
+        <p:txBody>
+          <a:bodyPr rtlCol="0" anchor="ctr"/>
+          <a:lstStyle/>
+          <a:p>
+            <a:pPr algn="ctr"/>
+          </a:p>
+        </p:txBody>
+      </p:sp>
+      <p:sp>
+        <p:nvSpPr>
+          <p:cNvPr id="102" name="TextBox 101"/>
+          <p:cNvSpPr txBox="1"/>
+          <p:nvPr/>
+        </p:nvSpPr>
+        <p:spPr>
+          <a:xfrm>
+            <a:off x="137160" y="5693054"/>
+            <a:ext cx="3154679" cy="203911"/>
+          </a:xfrm>
+          <a:prstGeom prst="rect">
+            <a:avLst/>
+          </a:prstGeom>
+          <a:noFill/>
+        </p:spPr>
+        <p:txBody>
+          <a:bodyPr wrap="none">
+            <a:spAutoFit/>
+          </a:bodyPr>
+          <a:lstStyle/>
+          <a:p>
+            <a:pPr algn="l"/>
+            <a:r>
+              <a:rPr sz="750" b="0">
+                <a:solidFill>
+                  <a:srgbClr val="212121"/>
+                </a:solidFill>
+              </a:rPr>
+              <a:t>  Site Surveys (Phase 3 — 35 sites)</a:t>
+            </a:r>
+          </a:p>
+        </p:txBody>
+      </p:sp>
+      <p:sp>
+        <p:nvSpPr>
+          <p:cNvPr id="103" name="Rectangle 102"/>
+          <p:cNvSpPr/>
+          <p:nvPr/>
+        </p:nvSpPr>
+        <p:spPr>
+          <a:xfrm>
+            <a:off x="6435305" y="5711342"/>
+            <a:ext cx="1569252" cy="149047"/>
+          </a:xfrm>
+          <a:prstGeom prst="rect">
+            <a:avLst/>
+          </a:prstGeom>
+          <a:solidFill>
+            <a:srgbClr val="FFF881"/>
+          </a:solidFill>
+          <a:ln>
+            <a:noFill/>
+          </a:ln>
+        </p:spPr>
+        <p:style>
+          <a:lnRef idx="1">
+            <a:schemeClr val="accent1"/>
+          </a:lnRef>
+          <a:fillRef idx="3">
+            <a:schemeClr val="accent1"/>
+          </a:fillRef>
+          <a:effectRef idx="2">
+            <a:schemeClr val="accent1"/>
+          </a:effectRef>
+          <a:fontRef idx="minor">
+            <a:schemeClr val="lt1"/>
+          </a:fontRef>
+        </p:style>
+        <p:txBody>
+          <a:bodyPr rtlCol="0" anchor="ctr"/>
+          <a:lstStyle/>
+          <a:p>
+            <a:pPr algn="ctr"/>
+          </a:p>
+        </p:txBody>
+      </p:sp>
+      <p:sp>
+        <p:nvSpPr>
+          <p:cNvPr id="104" name="Rectangle 103"/>
+          <p:cNvSpPr/>
+          <p:nvPr/>
+        </p:nvSpPr>
+        <p:spPr>
+          <a:xfrm>
+            <a:off x="91440" y="5901537"/>
+            <a:ext cx="11978640" cy="226771"/>
+          </a:xfrm>
+          <a:prstGeom prst="rect">
+            <a:avLst/>
+          </a:prstGeom>
+          <a:solidFill>
+            <a:srgbClr val="F2F2F2"/>
+          </a:solidFill>
+          <a:ln>
+            <a:noFill/>
+          </a:ln>
+        </p:spPr>
+        <p:style>
+          <a:lnRef idx="1">
+            <a:schemeClr val="accent1"/>
+          </a:lnRef>
+          <a:fillRef idx="3">
+            <a:schemeClr val="accent1"/>
+          </a:fillRef>
+          <a:effectRef idx="2">
+            <a:schemeClr val="accent1"/>
+          </a:effectRef>
+          <a:fontRef idx="minor">
+            <a:schemeClr val="lt1"/>
+          </a:fontRef>
+        </p:style>
+        <p:txBody>
+          <a:bodyPr rtlCol="0" anchor="ctr"/>
+          <a:lstStyle/>
+          <a:p>
+            <a:pPr algn="ctr"/>
+          </a:p>
+        </p:txBody>
+      </p:sp>
+      <p:sp>
+        <p:nvSpPr>
+          <p:cNvPr id="105" name="TextBox 104"/>
+          <p:cNvSpPr txBox="1"/>
+          <p:nvPr/>
+        </p:nvSpPr>
+        <p:spPr>
+          <a:xfrm>
+            <a:off x="137160" y="5933541"/>
+            <a:ext cx="3154679" cy="203911"/>
+          </a:xfrm>
+          <a:prstGeom prst="rect">
+            <a:avLst/>
+          </a:prstGeom>
+          <a:noFill/>
+        </p:spPr>
+        <p:txBody>
+          <a:bodyPr wrap="none">
+            <a:spAutoFit/>
+          </a:bodyPr>
+          <a:lstStyle/>
+          <a:p>
+            <a:pPr algn="l"/>
+            <a:r>
+              <a:rPr sz="750" b="0">
+                <a:solidFill>
+                  <a:srgbClr val="212121"/>
+                </a:solidFill>
+              </a:rPr>
+              <a:t>  MPLS Node Design (Phase 3)</a:t>
+            </a:r>
+          </a:p>
+        </p:txBody>
+      </p:sp>
+      <p:sp>
+        <p:nvSpPr>
+          <p:cNvPr id="106" name="Rectangle 105"/>
+          <p:cNvSpPr/>
+          <p:nvPr/>
+        </p:nvSpPr>
+        <p:spPr>
+          <a:xfrm>
+            <a:off x="6577965" y="5951829"/>
+            <a:ext cx="3729522" cy="149047"/>
+          </a:xfrm>
+          <a:prstGeom prst="rect">
+            <a:avLst/>
+          </a:prstGeom>
+          <a:solidFill>
+            <a:srgbClr val="6497EB"/>
+          </a:solidFill>
+          <a:ln>
+            <a:noFill/>
+          </a:ln>
+        </p:spPr>
+        <p:style>
+          <a:lnRef idx="1">
+            <a:schemeClr val="accent1"/>
+          </a:lnRef>
+          <a:fillRef idx="3">
+            <a:schemeClr val="accent1"/>
+          </a:fillRef>
+          <a:effectRef idx="2">
+            <a:schemeClr val="accent1"/>
+          </a:effectRef>
+          <a:fontRef idx="minor">
+            <a:schemeClr val="lt1"/>
+          </a:fontRef>
+        </p:style>
+        <p:txBody>
+          <a:bodyPr rtlCol="0" anchor="ctr"/>
+          <a:lstStyle/>
+          <a:p>
+            <a:pPr algn="ctr"/>
+          </a:p>
+        </p:txBody>
+      </p:sp>
+      <p:sp>
+        <p:nvSpPr>
+          <p:cNvPr id="107" name="Rectangle 106"/>
+          <p:cNvSpPr/>
+          <p:nvPr/>
+        </p:nvSpPr>
+        <p:spPr>
+          <a:xfrm>
+            <a:off x="91440" y="6196888"/>
+            <a:ext cx="11978640" cy="201168"/>
+          </a:xfrm>
+          <a:prstGeom prst="rect">
+            <a:avLst/>
+          </a:prstGeom>
+          <a:solidFill>
+            <a:srgbClr val="F2F2F2"/>
+          </a:solidFill>
+          <a:ln>
+            <a:noFill/>
+          </a:ln>
+        </p:spPr>
+        <p:style>
+          <a:lnRef idx="1">
+            <a:schemeClr val="accent1"/>
+          </a:lnRef>
+          <a:fillRef idx="3">
+            <a:schemeClr val="accent1"/>
+          </a:fillRef>
+          <a:effectRef idx="2">
+            <a:schemeClr val="accent1"/>
+          </a:effectRef>
+          <a:fontRef idx="minor">
+            <a:schemeClr val="lt1"/>
+          </a:fontRef>
+        </p:style>
+        <p:txBody>
+          <a:bodyPr rtlCol="0" anchor="ctr"/>
+          <a:lstStyle/>
+          <a:p>
+            <a:pPr algn="ctr"/>
+          </a:p>
+        </p:txBody>
+      </p:sp>
+      <p:sp>
+        <p:nvSpPr>
+          <p:cNvPr id="108" name="TextBox 107"/>
+          <p:cNvSpPr txBox="1"/>
+          <p:nvPr/>
+        </p:nvSpPr>
+        <p:spPr>
+          <a:xfrm>
+            <a:off x="228600" y="6233464"/>
+            <a:ext cx="2286000" cy="164592"/>
+          </a:xfrm>
+          <a:prstGeom prst="rect">
+            <a:avLst/>
+          </a:prstGeom>
+          <a:noFill/>
+        </p:spPr>
+        <p:txBody>
+          <a:bodyPr wrap="none">
+            <a:spAutoFit/>
+          </a:bodyPr>
+          <a:lstStyle/>
+          <a:p>
+            <a:pPr algn="l"/>
+            <a:r>
+              <a:rPr sz="800" b="1">
+                <a:solidFill>
+                  <a:srgbClr val="009700"/>
+                </a:solidFill>
+              </a:rPr>
+              <a:t>■ Complete</a:t>
+            </a:r>
+          </a:p>
+        </p:txBody>
+      </p:sp>
+      <p:sp>
+        <p:nvSpPr>
+          <p:cNvPr id="109" name="TextBox 108"/>
+          <p:cNvSpPr txBox="1"/>
+          <p:nvPr/>
+        </p:nvSpPr>
+        <p:spPr>
+          <a:xfrm>
+            <a:off x="2606040" y="6233464"/>
+            <a:ext cx="2286000" cy="164592"/>
+          </a:xfrm>
+          <a:prstGeom prst="rect">
+            <a:avLst/>
+          </a:prstGeom>
+          <a:noFill/>
+        </p:spPr>
+        <p:txBody>
+          <a:bodyPr wrap="none">
+            <a:spAutoFit/>
+          </a:bodyPr>
+          <a:lstStyle/>
+          <a:p>
+            <a:pPr algn="l"/>
+            <a:r>
+              <a:rPr sz="800" b="1">
+                <a:solidFill>
+                  <a:srgbClr val="FFBF00"/>
+                </a:solidFill>
+              </a:rPr>
+              <a:t>■ In Progress</a:t>
+            </a:r>
+          </a:p>
+        </p:txBody>
+      </p:sp>
+      <p:sp>
+        <p:nvSpPr>
+          <p:cNvPr id="110" name="TextBox 109"/>
+          <p:cNvSpPr txBox="1"/>
+          <p:nvPr/>
+        </p:nvSpPr>
+        <p:spPr>
+          <a:xfrm>
+            <a:off x="4983480" y="6233464"/>
+            <a:ext cx="2286000" cy="164592"/>
+          </a:xfrm>
+          <a:prstGeom prst="rect">
+            <a:avLst/>
+          </a:prstGeom>
+          <a:noFill/>
+        </p:spPr>
+        <p:txBody>
+          <a:bodyPr wrap="none">
+            <a:spAutoFit/>
+          </a:bodyPr>
+          <a:lstStyle/>
+          <a:p>
+            <a:pPr algn="l"/>
+            <a:r>
+              <a:rPr sz="800" b="1">
+                <a:solidFill>
+                  <a:srgbClr val="003387"/>
+                </a:solidFill>
+              </a:rPr>
+              <a:t>■ Planned</a:t>
+            </a:r>
+          </a:p>
+        </p:txBody>
+      </p:sp>
+      <p:sp>
+        <p:nvSpPr>
+          <p:cNvPr id="111" name="TextBox 110"/>
+          <p:cNvSpPr txBox="1"/>
+          <p:nvPr/>
+        </p:nvSpPr>
+        <p:spPr>
+          <a:xfrm>
+            <a:off x="7360920" y="6233464"/>
+            <a:ext cx="2286000" cy="164592"/>
+          </a:xfrm>
+          <a:prstGeom prst="rect">
+            <a:avLst/>
+          </a:prstGeom>
+          <a:noFill/>
+        </p:spPr>
+        <p:txBody>
+          <a:bodyPr wrap="none">
+            <a:spAutoFit/>
+          </a:bodyPr>
+          <a:lstStyle/>
+          <a:p>
+            <a:pPr algn="l"/>
+            <a:r>
+              <a:rPr sz="800" b="1">
+                <a:solidFill>
+                  <a:srgbClr val="C00000"/>
+                </a:solidFill>
+              </a:rPr>
+              <a:t>■ Construction/Cutover</a:t>
+            </a:r>
+          </a:p>
+        </p:txBody>
+      </p:sp>
+      <p:sp>
+        <p:nvSpPr>
+          <p:cNvPr id="112" name="TextBox 111"/>
+          <p:cNvSpPr txBox="1"/>
+          <p:nvPr/>
+        </p:nvSpPr>
+        <p:spPr>
+          <a:xfrm>
+            <a:off x="9738360" y="6233464"/>
+            <a:ext cx="2286000" cy="164592"/>
+          </a:xfrm>
+          <a:prstGeom prst="rect">
+            <a:avLst/>
+          </a:prstGeom>
+          <a:noFill/>
+        </p:spPr>
+        <p:txBody>
+          <a:bodyPr wrap="none">
+            <a:spAutoFit/>
+          </a:bodyPr>
+          <a:lstStyle/>
+          <a:p>
+            <a:pPr algn="l"/>
+            <a:r>
+              <a:rPr sz="800" b="1">
+                <a:solidFill>
+                  <a:srgbClr val="F7941D"/>
+                </a:solidFill>
+              </a:rPr>
+              <a:t>▼ Today 3/12/26</a:t>
             </a:r>
           </a:p>
         </p:txBody>

--- a/incoming_files/cio_jmux_presentation.pptx
+++ b/incoming_files/cio_jmux_presentation.pptx
@@ -17,6 +17,7 @@
     <p:sldId id="265" r:id="rId16"/>
     <p:sldId id="266" r:id="rId17"/>
     <p:sldId id="267" r:id="rId18"/>
+    <p:sldId id="268" r:id="rId19"/>
   </p:sldIdLst>
   <p:sldSz cx="12191695" cy="6858000" type="screen4x3"/>
   <p:notesSz cx="6858000" cy="9144000"/>
@@ -14339,6 +14340,2613 @@
                 </a:solidFill>
               </a:rPr>
               <a:t>▼ Today 3/12/26</a:t>
+            </a:r>
+          </a:p>
+        </p:txBody>
+      </p:sp>
+    </p:spTree>
+  </p:cSld>
+  <p:clrMapOvr>
+    <a:masterClrMapping/>
+  </p:clrMapOvr>
+</p:sld>
+</file>
+
+<file path=ppt/slides/slide13.xml><?xml version="1.0" encoding="utf-8"?>
+<p:sld xmlns:a="http://schemas.openxmlformats.org/drawingml/2006/main" xmlns:p="http://schemas.openxmlformats.org/presentationml/2006/main" xmlns:r="http://schemas.openxmlformats.org/officeDocument/2006/relationships">
+  <p:cSld>
+    <p:spTree>
+      <p:nvGrpSpPr>
+        <p:cNvPr id="1" name=""/>
+        <p:cNvGrpSpPr/>
+        <p:nvPr/>
+      </p:nvGrpSpPr>
+      <p:grpSpPr/>
+      <p:sp>
+        <p:nvSpPr>
+          <p:cNvPr id="2" name="Rectangle 1"/>
+          <p:cNvSpPr/>
+          <p:nvPr/>
+        </p:nvSpPr>
+        <p:spPr>
+          <a:xfrm>
+            <a:off x="0" y="0"/>
+            <a:ext cx="12191695" cy="914400"/>
+          </a:xfrm>
+          <a:prstGeom prst="rect">
+            <a:avLst/>
+          </a:prstGeom>
+          <a:solidFill>
+            <a:srgbClr val="003387"/>
+          </a:solidFill>
+          <a:ln>
+            <a:noFill/>
+          </a:ln>
+        </p:spPr>
+        <p:style>
+          <a:lnRef idx="1">
+            <a:schemeClr val="accent1"/>
+          </a:lnRef>
+          <a:fillRef idx="3">
+            <a:schemeClr val="accent1"/>
+          </a:fillRef>
+          <a:effectRef idx="2">
+            <a:schemeClr val="accent1"/>
+          </a:effectRef>
+          <a:fontRef idx="minor">
+            <a:schemeClr val="lt1"/>
+          </a:fontRef>
+        </p:style>
+        <p:txBody>
+          <a:bodyPr rtlCol="0" anchor="ctr"/>
+          <a:lstStyle/>
+          <a:p>
+            <a:pPr algn="ctr"/>
+          </a:p>
+        </p:txBody>
+      </p:sp>
+      <p:sp>
+        <p:nvSpPr>
+          <p:cNvPr id="3" name="Rectangle 2"/>
+          <p:cNvSpPr/>
+          <p:nvPr/>
+        </p:nvSpPr>
+        <p:spPr>
+          <a:xfrm>
+            <a:off x="0" y="777240"/>
+            <a:ext cx="12191695" cy="109728"/>
+          </a:xfrm>
+          <a:prstGeom prst="rect">
+            <a:avLst/>
+          </a:prstGeom>
+          <a:solidFill>
+            <a:srgbClr val="F7941D"/>
+          </a:solidFill>
+          <a:ln>
+            <a:noFill/>
+          </a:ln>
+        </p:spPr>
+        <p:style>
+          <a:lnRef idx="1">
+            <a:schemeClr val="accent1"/>
+          </a:lnRef>
+          <a:fillRef idx="3">
+            <a:schemeClr val="accent1"/>
+          </a:fillRef>
+          <a:effectRef idx="2">
+            <a:schemeClr val="accent1"/>
+          </a:effectRef>
+          <a:fontRef idx="minor">
+            <a:schemeClr val="lt1"/>
+          </a:fontRef>
+        </p:style>
+        <p:txBody>
+          <a:bodyPr rtlCol="0" anchor="ctr"/>
+          <a:lstStyle/>
+          <a:p>
+            <a:pPr algn="ctr"/>
+          </a:p>
+        </p:txBody>
+      </p:sp>
+      <p:sp>
+        <p:nvSpPr>
+          <p:cNvPr id="4" name="TextBox 3"/>
+          <p:cNvSpPr txBox="1"/>
+          <p:nvPr/>
+        </p:nvSpPr>
+        <p:spPr>
+          <a:xfrm>
+            <a:off x="274320" y="109728"/>
+            <a:ext cx="9144000" cy="594360"/>
+          </a:xfrm>
+          <a:prstGeom prst="rect">
+            <a:avLst/>
+          </a:prstGeom>
+          <a:noFill/>
+        </p:spPr>
+        <p:txBody>
+          <a:bodyPr wrap="square">
+            <a:spAutoFit/>
+          </a:bodyPr>
+          <a:lstStyle/>
+          <a:p>
+            <a:pPr algn="l"/>
+            <a:r>
+              <a:rPr sz="2400" b="1" i="0">
+                <a:solidFill>
+                  <a:srgbClr val="FFFFFF"/>
+                </a:solidFill>
+              </a:rPr>
+              <a:t>Vendor Summary</a:t>
+            </a:r>
+          </a:p>
+        </p:txBody>
+      </p:sp>
+      <p:sp>
+        <p:nvSpPr>
+          <p:cNvPr id="5" name="TextBox 4"/>
+          <p:cNvSpPr txBox="1"/>
+          <p:nvPr/>
+        </p:nvSpPr>
+        <p:spPr>
+          <a:xfrm>
+            <a:off x="274320" y="548640"/>
+            <a:ext cx="10972800" cy="292608"/>
+          </a:xfrm>
+          <a:prstGeom prst="rect">
+            <a:avLst/>
+          </a:prstGeom>
+          <a:noFill/>
+        </p:spPr>
+        <p:txBody>
+          <a:bodyPr wrap="square">
+            <a:spAutoFit/>
+          </a:bodyPr>
+          <a:lstStyle/>
+          <a:p>
+            <a:pPr algn="l"/>
+            <a:r>
+              <a:rPr sz="1000" b="0" i="0">
+                <a:solidFill>
+                  <a:srgbClr val="F7941D"/>
+                </a:solidFill>
+              </a:rPr>
+              <a:t>3 Active Vendors | Roles, Contracts &amp; Status as of March 12, 2026</a:t>
+            </a:r>
+          </a:p>
+        </p:txBody>
+      </p:sp>
+      <p:sp>
+        <p:nvSpPr>
+          <p:cNvPr id="6" name="Rectangle 5"/>
+          <p:cNvSpPr/>
+          <p:nvPr/>
+        </p:nvSpPr>
+        <p:spPr>
+          <a:xfrm>
+            <a:off x="0" y="6583680"/>
+            <a:ext cx="12191695" cy="274320"/>
+          </a:xfrm>
+          <a:prstGeom prst="rect">
+            <a:avLst/>
+          </a:prstGeom>
+          <a:solidFill>
+            <a:srgbClr val="003387"/>
+          </a:solidFill>
+          <a:ln>
+            <a:noFill/>
+          </a:ln>
+        </p:spPr>
+        <p:style>
+          <a:lnRef idx="1">
+            <a:schemeClr val="accent1"/>
+          </a:lnRef>
+          <a:fillRef idx="3">
+            <a:schemeClr val="accent1"/>
+          </a:fillRef>
+          <a:effectRef idx="2">
+            <a:schemeClr val="accent1"/>
+          </a:effectRef>
+          <a:fontRef idx="minor">
+            <a:schemeClr val="lt1"/>
+          </a:fontRef>
+        </p:style>
+        <p:txBody>
+          <a:bodyPr rtlCol="0" anchor="ctr"/>
+          <a:lstStyle/>
+          <a:p>
+            <a:pPr algn="ctr"/>
+          </a:p>
+        </p:txBody>
+      </p:sp>
+      <p:sp>
+        <p:nvSpPr>
+          <p:cNvPr id="7" name="TextBox 6"/>
+          <p:cNvSpPr txBox="1"/>
+          <p:nvPr/>
+        </p:nvSpPr>
+        <p:spPr>
+          <a:xfrm>
+            <a:off x="274320" y="6601968"/>
+            <a:ext cx="10972800" cy="228600"/>
+          </a:xfrm>
+          <a:prstGeom prst="rect">
+            <a:avLst/>
+          </a:prstGeom>
+          <a:noFill/>
+        </p:spPr>
+        <p:txBody>
+          <a:bodyPr wrap="square">
+            <a:spAutoFit/>
+          </a:bodyPr>
+          <a:lstStyle/>
+          <a:p>
+            <a:pPr algn="l"/>
+            <a:r>
+              <a:rPr sz="800" b="0" i="0">
+                <a:solidFill>
+                  <a:srgbClr val="FFFFFF"/>
+                </a:solidFill>
+              </a:rPr>
+              <a:t>PSEG Long Island | JMUX Replacement Program | Confidential | March 2026</a:t>
+            </a:r>
+          </a:p>
+        </p:txBody>
+      </p:sp>
+      <p:sp>
+        <p:nvSpPr>
+          <p:cNvPr id="8" name="Rectangle 7"/>
+          <p:cNvSpPr/>
+          <p:nvPr/>
+        </p:nvSpPr>
+        <p:spPr>
+          <a:xfrm>
+            <a:off x="164592" y="1005840"/>
+            <a:ext cx="3794760" cy="5486400"/>
+          </a:xfrm>
+          <a:prstGeom prst="rect">
+            <a:avLst/>
+          </a:prstGeom>
+          <a:solidFill>
+            <a:srgbClr val="D6E4F7"/>
+          </a:solidFill>
+          <a:ln w="25400">
+            <a:solidFill>
+              <a:srgbClr val="003387"/>
+            </a:solidFill>
+          </a:ln>
+        </p:spPr>
+        <p:style>
+          <a:lnRef idx="1">
+            <a:schemeClr val="accent1"/>
+          </a:lnRef>
+          <a:fillRef idx="3">
+            <a:schemeClr val="accent1"/>
+          </a:fillRef>
+          <a:effectRef idx="2">
+            <a:schemeClr val="accent1"/>
+          </a:effectRef>
+          <a:fontRef idx="minor">
+            <a:schemeClr val="lt1"/>
+          </a:fontRef>
+        </p:style>
+        <p:txBody>
+          <a:bodyPr rtlCol="0" anchor="ctr"/>
+          <a:lstStyle/>
+          <a:p>
+            <a:pPr algn="ctr"/>
+          </a:p>
+        </p:txBody>
+      </p:sp>
+      <p:sp>
+        <p:nvSpPr>
+          <p:cNvPr id="9" name="Rectangle 8"/>
+          <p:cNvSpPr/>
+          <p:nvPr/>
+        </p:nvSpPr>
+        <p:spPr>
+          <a:xfrm>
+            <a:off x="164592" y="1005840"/>
+            <a:ext cx="3794760" cy="502920"/>
+          </a:xfrm>
+          <a:prstGeom prst="rect">
+            <a:avLst/>
+          </a:prstGeom>
+          <a:solidFill>
+            <a:srgbClr val="003387"/>
+          </a:solidFill>
+          <a:ln>
+            <a:noFill/>
+          </a:ln>
+        </p:spPr>
+        <p:style>
+          <a:lnRef idx="1">
+            <a:schemeClr val="accent1"/>
+          </a:lnRef>
+          <a:fillRef idx="3">
+            <a:schemeClr val="accent1"/>
+          </a:fillRef>
+          <a:effectRef idx="2">
+            <a:schemeClr val="accent1"/>
+          </a:effectRef>
+          <a:fontRef idx="minor">
+            <a:schemeClr val="lt1"/>
+          </a:fontRef>
+        </p:style>
+        <p:txBody>
+          <a:bodyPr rtlCol="0" anchor="ctr"/>
+          <a:lstStyle/>
+          <a:p>
+            <a:pPr algn="ctr"/>
+          </a:p>
+        </p:txBody>
+      </p:sp>
+      <p:sp>
+        <p:nvSpPr>
+          <p:cNvPr id="10" name="TextBox 9"/>
+          <p:cNvSpPr txBox="1"/>
+          <p:nvPr/>
+        </p:nvSpPr>
+        <p:spPr>
+          <a:xfrm>
+            <a:off x="256032" y="1042416"/>
+            <a:ext cx="3611880" cy="256032"/>
+          </a:xfrm>
+          <a:prstGeom prst="rect">
+            <a:avLst/>
+          </a:prstGeom>
+          <a:noFill/>
+        </p:spPr>
+        <p:txBody>
+          <a:bodyPr wrap="square">
+            <a:spAutoFit/>
+          </a:bodyPr>
+          <a:lstStyle/>
+          <a:p>
+            <a:pPr algn="l"/>
+            <a:r>
+              <a:rPr sz="1100" b="1" i="0">
+                <a:solidFill>
+                  <a:srgbClr val="FFFFFF"/>
+                </a:solidFill>
+              </a:rPr>
+              <a:t>Burns &amp; McDonnell EGS, P.C.</a:t>
+            </a:r>
+          </a:p>
+        </p:txBody>
+      </p:sp>
+      <p:sp>
+        <p:nvSpPr>
+          <p:cNvPr id="11" name="TextBox 10"/>
+          <p:cNvSpPr txBox="1"/>
+          <p:nvPr/>
+        </p:nvSpPr>
+        <p:spPr>
+          <a:xfrm>
+            <a:off x="256032" y="1280160"/>
+            <a:ext cx="3611880" cy="201168"/>
+          </a:xfrm>
+          <a:prstGeom prst="rect">
+            <a:avLst/>
+          </a:prstGeom>
+          <a:noFill/>
+        </p:spPr>
+        <p:txBody>
+          <a:bodyPr wrap="square">
+            <a:spAutoFit/>
+          </a:bodyPr>
+          <a:lstStyle/>
+          <a:p>
+            <a:pPr algn="l"/>
+            <a:r>
+              <a:rPr sz="900" b="0" i="1">
+                <a:solidFill>
+                  <a:srgbClr val="FFFFFF"/>
+                </a:solidFill>
+              </a:rPr>
+              <a:t>Network Engineering &amp; Design</a:t>
+            </a:r>
+          </a:p>
+        </p:txBody>
+      </p:sp>
+      <p:sp>
+        <p:nvSpPr>
+          <p:cNvPr id="12" name="Rectangle 11"/>
+          <p:cNvSpPr/>
+          <p:nvPr/>
+        </p:nvSpPr>
+        <p:spPr>
+          <a:xfrm>
+            <a:off x="2770632" y="1572768"/>
+            <a:ext cx="1097280" cy="237744"/>
+          </a:xfrm>
+          <a:prstGeom prst="rect">
+            <a:avLst/>
+          </a:prstGeom>
+          <a:solidFill>
+            <a:srgbClr val="FFBF00"/>
+          </a:solidFill>
+          <a:ln>
+            <a:noFill/>
+          </a:ln>
+        </p:spPr>
+        <p:style>
+          <a:lnRef idx="1">
+            <a:schemeClr val="accent1"/>
+          </a:lnRef>
+          <a:fillRef idx="3">
+            <a:schemeClr val="accent1"/>
+          </a:fillRef>
+          <a:effectRef idx="2">
+            <a:schemeClr val="accent1"/>
+          </a:effectRef>
+          <a:fontRef idx="minor">
+            <a:schemeClr val="lt1"/>
+          </a:fontRef>
+        </p:style>
+        <p:txBody>
+          <a:bodyPr rtlCol="0" anchor="ctr"/>
+          <a:lstStyle/>
+          <a:p>
+            <a:pPr algn="ctr"/>
+          </a:p>
+        </p:txBody>
+      </p:sp>
+      <p:sp>
+        <p:nvSpPr>
+          <p:cNvPr id="13" name="TextBox 12"/>
+          <p:cNvSpPr txBox="1"/>
+          <p:nvPr/>
+        </p:nvSpPr>
+        <p:spPr>
+          <a:xfrm>
+            <a:off x="2770632" y="1591056"/>
+            <a:ext cx="1097280" cy="201168"/>
+          </a:xfrm>
+          <a:prstGeom prst="rect">
+            <a:avLst/>
+          </a:prstGeom>
+          <a:noFill/>
+        </p:spPr>
+        <p:txBody>
+          <a:bodyPr wrap="square">
+            <a:spAutoFit/>
+          </a:bodyPr>
+          <a:lstStyle/>
+          <a:p>
+            <a:pPr algn="ctr"/>
+            <a:r>
+              <a:rPr sz="900" b="1" i="0">
+                <a:solidFill>
+                  <a:srgbClr val="FFFFFF"/>
+                </a:solidFill>
+              </a:rPr>
+              <a:t>AMBER</a:t>
+            </a:r>
+          </a:p>
+        </p:txBody>
+      </p:sp>
+      <p:sp>
+        <p:nvSpPr>
+          <p:cNvPr id="14" name="TextBox 13"/>
+          <p:cNvSpPr txBox="1"/>
+          <p:nvPr/>
+        </p:nvSpPr>
+        <p:spPr>
+          <a:xfrm>
+            <a:off x="256032" y="1572768"/>
+            <a:ext cx="2514600" cy="182880"/>
+          </a:xfrm>
+          <a:prstGeom prst="rect">
+            <a:avLst/>
+          </a:prstGeom>
+          <a:noFill/>
+        </p:spPr>
+        <p:txBody>
+          <a:bodyPr wrap="square">
+            <a:spAutoFit/>
+          </a:bodyPr>
+          <a:lstStyle/>
+          <a:p>
+            <a:pPr algn="l"/>
+            <a:r>
+              <a:rPr sz="800" b="0" i="0">
+                <a:solidFill>
+                  <a:srgbClr val="212121"/>
+                </a:solidFill>
+              </a:rPr>
+              <a:t>Contract: RITM336401 | MA00007834</a:t>
+            </a:r>
+          </a:p>
+        </p:txBody>
+      </p:sp>
+      <p:sp>
+        <p:nvSpPr>
+          <p:cNvPr id="15" name="TextBox 14"/>
+          <p:cNvSpPr txBox="1"/>
+          <p:nvPr/>
+        </p:nvSpPr>
+        <p:spPr>
+          <a:xfrm>
+            <a:off x="256032" y="1755648"/>
+            <a:ext cx="3611880" cy="182880"/>
+          </a:xfrm>
+          <a:prstGeom prst="rect">
+            <a:avLst/>
+          </a:prstGeom>
+          <a:noFill/>
+        </p:spPr>
+        <p:txBody>
+          <a:bodyPr wrap="square">
+            <a:spAutoFit/>
+          </a:bodyPr>
+          <a:lstStyle/>
+          <a:p>
+            <a:pPr algn="l"/>
+            <a:r>
+              <a:rPr sz="800" b="1" i="0">
+                <a:solidFill>
+                  <a:srgbClr val="003387"/>
+                </a:solidFill>
+              </a:rPr>
+              <a:t>Value: $1,370,040  |  Start: July 28, 2025</a:t>
+            </a:r>
+          </a:p>
+        </p:txBody>
+      </p:sp>
+      <p:sp>
+        <p:nvSpPr>
+          <p:cNvPr id="16" name="TextBox 15"/>
+          <p:cNvSpPr txBox="1"/>
+          <p:nvPr/>
+        </p:nvSpPr>
+        <p:spPr>
+          <a:xfrm>
+            <a:off x="256032" y="1920240"/>
+            <a:ext cx="3611880" cy="182880"/>
+          </a:xfrm>
+          <a:prstGeom prst="rect">
+            <a:avLst/>
+          </a:prstGeom>
+          <a:noFill/>
+        </p:spPr>
+        <p:txBody>
+          <a:bodyPr wrap="square">
+            <a:spAutoFit/>
+          </a:bodyPr>
+          <a:lstStyle/>
+          <a:p>
+            <a:pPr algn="l"/>
+            <a:r>
+              <a:rPr sz="800" b="0" i="0">
+                <a:solidFill>
+                  <a:srgbClr val="212121"/>
+                </a:solidFill>
+              </a:rPr>
+              <a:t>Target Completion: September 2026</a:t>
+            </a:r>
+          </a:p>
+        </p:txBody>
+      </p:sp>
+      <p:sp>
+        <p:nvSpPr>
+          <p:cNvPr id="17" name="Rectangle 16"/>
+          <p:cNvSpPr/>
+          <p:nvPr/>
+        </p:nvSpPr>
+        <p:spPr>
+          <a:xfrm>
+            <a:off x="256032" y="2121408"/>
+            <a:ext cx="3611880" cy="13716"/>
+          </a:xfrm>
+          <a:prstGeom prst="rect">
+            <a:avLst/>
+          </a:prstGeom>
+          <a:solidFill>
+            <a:srgbClr val="003387"/>
+          </a:solidFill>
+          <a:ln>
+            <a:noFill/>
+          </a:ln>
+        </p:spPr>
+        <p:style>
+          <a:lnRef idx="1">
+            <a:schemeClr val="accent1"/>
+          </a:lnRef>
+          <a:fillRef idx="3">
+            <a:schemeClr val="accent1"/>
+          </a:fillRef>
+          <a:effectRef idx="2">
+            <a:schemeClr val="accent1"/>
+          </a:effectRef>
+          <a:fontRef idx="minor">
+            <a:schemeClr val="lt1"/>
+          </a:fontRef>
+        </p:style>
+        <p:txBody>
+          <a:bodyPr rtlCol="0" anchor="ctr"/>
+          <a:lstStyle/>
+          <a:p>
+            <a:pPr algn="ctr"/>
+          </a:p>
+        </p:txBody>
+      </p:sp>
+      <p:sp>
+        <p:nvSpPr>
+          <p:cNvPr id="18" name="TextBox 17"/>
+          <p:cNvSpPr txBox="1"/>
+          <p:nvPr/>
+        </p:nvSpPr>
+        <p:spPr>
+          <a:xfrm>
+            <a:off x="256032" y="2157984"/>
+            <a:ext cx="3611880" cy="2560320"/>
+          </a:xfrm>
+          <a:prstGeom prst="rect">
+            <a:avLst/>
+          </a:prstGeom>
+          <a:noFill/>
+        </p:spPr>
+        <p:txBody>
+          <a:bodyPr wrap="square">
+            <a:spAutoFit/>
+          </a:bodyPr>
+          <a:lstStyle/>
+          <a:p>
+            <a:pPr>
+              <a:spcAft>
+                <a:spcPts val="100"/>
+              </a:spcAft>
+            </a:pPr>
+            <a:r>
+              <a:rPr sz="819" b="1">
+                <a:solidFill>
+                  <a:srgbClr val="212121"/>
+                </a:solidFill>
+              </a:rPr>
+              <a:t>Scope of Work:</a:t>
+            </a:r>
+          </a:p>
+          <a:p>
+            <a:pPr>
+              <a:spcAft>
+                <a:spcPts val="100"/>
+              </a:spcAft>
+            </a:pPr>
+            <a:r>
+              <a:rPr sz="819" b="0">
+                <a:solidFill>
+                  <a:srgbClr val="212121"/>
+                </a:solidFill>
+              </a:rPr>
+              <a:t>• MPLS network node design — 36 sites (IFR → IFC → As-Built)</a:t>
+            </a:r>
+          </a:p>
+          <a:p>
+            <a:pPr>
+              <a:spcAft>
+                <a:spcPts val="100"/>
+              </a:spcAft>
+            </a:pPr>
+            <a:r>
+              <a:rPr sz="819" b="0">
+                <a:solidFill>
+                  <a:srgbClr val="212121"/>
+                </a:solidFill>
+              </a:rPr>
+              <a:t>• Phase 1 Staging Support (complete)</a:t>
+            </a:r>
+          </a:p>
+          <a:p>
+            <a:pPr>
+              <a:spcAft>
+                <a:spcPts val="100"/>
+              </a:spcAft>
+            </a:pPr>
+            <a:r>
+              <a:rPr sz="819" b="0">
+                <a:solidFill>
+                  <a:srgbClr val="212121"/>
+                </a:solidFill>
+              </a:rPr>
+              <a:t>• Phase 1 Construction Support Coordinator (Aug 2025–Jan 2026)</a:t>
+            </a:r>
+          </a:p>
+          <a:p>
+            <a:pPr>
+              <a:spcAft>
+                <a:spcPts val="100"/>
+              </a:spcAft>
+            </a:pPr>
+            <a:r>
+              <a:rPr sz="819" b="0">
+                <a:solidFill>
+                  <a:srgbClr val="212121"/>
+                </a:solidFill>
+              </a:rPr>
+              <a:t>• Phase 2 Substation Site Surveys (36 sites, complete 2/27/26)</a:t>
+            </a:r>
+          </a:p>
+          <a:p>
+            <a:pPr>
+              <a:spcAft>
+                <a:spcPts val="100"/>
+              </a:spcAft>
+            </a:pPr>
+            <a:r>
+              <a:rPr sz="819" b="0">
+                <a:solidFill>
+                  <a:srgbClr val="212121"/>
+                </a:solidFill>
+              </a:rPr>
+              <a:t>• Weekly status calls &amp; schedule management</a:t>
+            </a:r>
+          </a:p>
+          <a:p>
+            <a:pPr>
+              <a:spcAft>
+                <a:spcPts val="100"/>
+              </a:spcAft>
+            </a:pPr>
+            <a:r>
+              <a:rPr sz="819" b="0">
+                <a:solidFill>
+                  <a:srgbClr val="212121"/>
+                </a:solidFill>
+              </a:rPr>
+              <a:t/>
+            </a:r>
+          </a:p>
+          <a:p>
+            <a:pPr>
+              <a:spcAft>
+                <a:spcPts val="100"/>
+              </a:spcAft>
+            </a:pPr>
+            <a:r>
+              <a:rPr sz="819" b="1">
+                <a:solidFill>
+                  <a:srgbClr val="212121"/>
+                </a:solidFill>
+              </a:rPr>
+              <a:t>Milestone Payments:</a:t>
+            </a:r>
+          </a:p>
+          <a:p>
+            <a:pPr>
+              <a:spcAft>
+                <a:spcPts val="100"/>
+              </a:spcAft>
+            </a:pPr>
+            <a:r>
+              <a:rPr sz="819" b="0">
+                <a:solidFill>
+                  <a:srgbClr val="212121"/>
+                </a:solidFill>
+              </a:rPr>
+              <a:t>  M1 Staging Support:  $57,300  ✓ Complete</a:t>
+            </a:r>
+          </a:p>
+          <a:p>
+            <a:pPr>
+              <a:spcAft>
+                <a:spcPts val="100"/>
+              </a:spcAft>
+            </a:pPr>
+            <a:r>
+              <a:rPr sz="819" b="0">
+                <a:solidFill>
+                  <a:srgbClr val="212121"/>
+                </a:solidFill>
+              </a:rPr>
+              <a:t>  M2 Construction Coord:  $368,100  (monthly, in progress)</a:t>
+            </a:r>
+          </a:p>
+          <a:p>
+            <a:pPr>
+              <a:spcAft>
+                <a:spcPts val="100"/>
+              </a:spcAft>
+            </a:pPr>
+            <a:r>
+              <a:rPr sz="819" b="0">
+                <a:solidFill>
+                  <a:srgbClr val="212121"/>
+                </a:solidFill>
+              </a:rPr>
+              <a:t>  M3 Site Surveys:  $86,040  ✓ Complete</a:t>
+            </a:r>
+          </a:p>
+          <a:p>
+            <a:pPr>
+              <a:spcAft>
+                <a:spcPts val="100"/>
+              </a:spcAft>
+            </a:pPr>
+            <a:r>
+              <a:rPr sz="819" b="0">
+                <a:solidFill>
+                  <a:srgbClr val="212121"/>
+                </a:solidFill>
+              </a:rPr>
+              <a:t>  M4 MPLS Node Design:  $858,600  (in progress, 4%)</a:t>
+            </a:r>
+          </a:p>
+        </p:txBody>
+      </p:sp>
+      <p:sp>
+        <p:nvSpPr>
+          <p:cNvPr id="19" name="Rectangle 18"/>
+          <p:cNvSpPr/>
+          <p:nvPr/>
+        </p:nvSpPr>
+        <p:spPr>
+          <a:xfrm>
+            <a:off x="256032" y="5047488"/>
+            <a:ext cx="3611880" cy="13716"/>
+          </a:xfrm>
+          <a:prstGeom prst="rect">
+            <a:avLst/>
+          </a:prstGeom>
+          <a:solidFill>
+            <a:srgbClr val="003387"/>
+          </a:solidFill>
+          <a:ln>
+            <a:noFill/>
+          </a:ln>
+        </p:spPr>
+        <p:style>
+          <a:lnRef idx="1">
+            <a:schemeClr val="accent1"/>
+          </a:lnRef>
+          <a:fillRef idx="3">
+            <a:schemeClr val="accent1"/>
+          </a:fillRef>
+          <a:effectRef idx="2">
+            <a:schemeClr val="accent1"/>
+          </a:effectRef>
+          <a:fontRef idx="minor">
+            <a:schemeClr val="lt1"/>
+          </a:fontRef>
+        </p:style>
+        <p:txBody>
+          <a:bodyPr rtlCol="0" anchor="ctr"/>
+          <a:lstStyle/>
+          <a:p>
+            <a:pPr algn="ctr"/>
+          </a:p>
+        </p:txBody>
+      </p:sp>
+      <p:sp>
+        <p:nvSpPr>
+          <p:cNvPr id="20" name="TextBox 19"/>
+          <p:cNvSpPr txBox="1"/>
+          <p:nvPr/>
+        </p:nvSpPr>
+        <p:spPr>
+          <a:xfrm>
+            <a:off x="256032" y="5084064"/>
+            <a:ext cx="3611880" cy="164592"/>
+          </a:xfrm>
+          <a:prstGeom prst="rect">
+            <a:avLst/>
+          </a:prstGeom>
+          <a:noFill/>
+        </p:spPr>
+        <p:txBody>
+          <a:bodyPr wrap="square">
+            <a:spAutoFit/>
+          </a:bodyPr>
+          <a:lstStyle/>
+          <a:p>
+            <a:pPr algn="l"/>
+            <a:r>
+              <a:rPr sz="800" b="1" i="0">
+                <a:solidFill>
+                  <a:srgbClr val="003387"/>
+                </a:solidFill>
+              </a:rPr>
+              <a:t>Key Contact:</a:t>
+            </a:r>
+          </a:p>
+        </p:txBody>
+      </p:sp>
+      <p:sp>
+        <p:nvSpPr>
+          <p:cNvPr id="21" name="TextBox 20"/>
+          <p:cNvSpPr txBox="1"/>
+          <p:nvPr/>
+        </p:nvSpPr>
+        <p:spPr>
+          <a:xfrm>
+            <a:off x="256032" y="5248656"/>
+            <a:ext cx="3611880" cy="292608"/>
+          </a:xfrm>
+          <a:prstGeom prst="rect">
+            <a:avLst/>
+          </a:prstGeom>
+          <a:noFill/>
+        </p:spPr>
+        <p:txBody>
+          <a:bodyPr wrap="square">
+            <a:spAutoFit/>
+          </a:bodyPr>
+          <a:lstStyle/>
+          <a:p>
+            <a:pPr algn="l"/>
+            <a:r>
+              <a:rPr sz="750" b="0" i="0">
+                <a:solidFill>
+                  <a:srgbClr val="212121"/>
+                </a:solidFill>
+              </a:rPr>
+              <a:t>Alex Lenox (PM) | alenox@burnsmcd.com | (636) 248-0351</a:t>
+            </a:r>
+          </a:p>
+        </p:txBody>
+      </p:sp>
+      <p:sp>
+        <p:nvSpPr>
+          <p:cNvPr id="22" name="Rectangle 21"/>
+          <p:cNvSpPr/>
+          <p:nvPr/>
+        </p:nvSpPr>
+        <p:spPr>
+          <a:xfrm>
+            <a:off x="256032" y="5687568"/>
+            <a:ext cx="3611880" cy="548640"/>
+          </a:xfrm>
+          <a:prstGeom prst="rect">
+            <a:avLst/>
+          </a:prstGeom>
+          <a:solidFill>
+            <a:srgbClr val="FFFFFF"/>
+          </a:solidFill>
+          <a:ln w="19050">
+            <a:solidFill>
+              <a:srgbClr val="FFBF00"/>
+            </a:solidFill>
+          </a:ln>
+        </p:spPr>
+        <p:style>
+          <a:lnRef idx="1">
+            <a:schemeClr val="accent1"/>
+          </a:lnRef>
+          <a:fillRef idx="3">
+            <a:schemeClr val="accent1"/>
+          </a:fillRef>
+          <a:effectRef idx="2">
+            <a:schemeClr val="accent1"/>
+          </a:effectRef>
+          <a:fontRef idx="minor">
+            <a:schemeClr val="lt1"/>
+          </a:fontRef>
+        </p:style>
+        <p:txBody>
+          <a:bodyPr rtlCol="0" anchor="ctr"/>
+          <a:lstStyle/>
+          <a:p>
+            <a:pPr algn="ctr"/>
+          </a:p>
+        </p:txBody>
+      </p:sp>
+      <p:sp>
+        <p:nvSpPr>
+          <p:cNvPr id="23" name="TextBox 22"/>
+          <p:cNvSpPr txBox="1"/>
+          <p:nvPr/>
+        </p:nvSpPr>
+        <p:spPr>
+          <a:xfrm>
+            <a:off x="329184" y="5760720"/>
+            <a:ext cx="3474720" cy="402336"/>
+          </a:xfrm>
+          <a:prstGeom prst="rect">
+            <a:avLst/>
+          </a:prstGeom>
+          <a:noFill/>
+        </p:spPr>
+        <p:txBody>
+          <a:bodyPr wrap="square">
+            <a:spAutoFit/>
+          </a:bodyPr>
+          <a:lstStyle/>
+          <a:p>
+            <a:pPr algn="l"/>
+            <a:r>
+              <a:rPr sz="800" b="1" i="0">
+                <a:solidFill>
+                  <a:srgbClr val="FFBF00"/>
+                </a:solidFill>
+              </a:rPr>
+              <a:t>Status: Design 4% complete. SPI 0.75.</a:t>
+            </a:r>
+          </a:p>
+        </p:txBody>
+      </p:sp>
+      <p:sp>
+        <p:nvSpPr>
+          <p:cNvPr id="24" name="Rectangle 23"/>
+          <p:cNvSpPr/>
+          <p:nvPr/>
+        </p:nvSpPr>
+        <p:spPr>
+          <a:xfrm>
+            <a:off x="4123944" y="1005840"/>
+            <a:ext cx="3794760" cy="5486400"/>
+          </a:xfrm>
+          <a:prstGeom prst="rect">
+            <a:avLst/>
+          </a:prstGeom>
+          <a:solidFill>
+            <a:srgbClr val="FFF3CC"/>
+          </a:solidFill>
+          <a:ln w="25400">
+            <a:solidFill>
+              <a:srgbClr val="FFBF00"/>
+            </a:solidFill>
+          </a:ln>
+        </p:spPr>
+        <p:style>
+          <a:lnRef idx="1">
+            <a:schemeClr val="accent1"/>
+          </a:lnRef>
+          <a:fillRef idx="3">
+            <a:schemeClr val="accent1"/>
+          </a:fillRef>
+          <a:effectRef idx="2">
+            <a:schemeClr val="accent1"/>
+          </a:effectRef>
+          <a:fontRef idx="minor">
+            <a:schemeClr val="lt1"/>
+          </a:fontRef>
+        </p:style>
+        <p:txBody>
+          <a:bodyPr rtlCol="0" anchor="ctr"/>
+          <a:lstStyle/>
+          <a:p>
+            <a:pPr algn="ctr"/>
+          </a:p>
+        </p:txBody>
+      </p:sp>
+      <p:sp>
+        <p:nvSpPr>
+          <p:cNvPr id="25" name="Rectangle 24"/>
+          <p:cNvSpPr/>
+          <p:nvPr/>
+        </p:nvSpPr>
+        <p:spPr>
+          <a:xfrm>
+            <a:off x="4123944" y="1005840"/>
+            <a:ext cx="3794760" cy="502920"/>
+          </a:xfrm>
+          <a:prstGeom prst="rect">
+            <a:avLst/>
+          </a:prstGeom>
+          <a:solidFill>
+            <a:srgbClr val="FFBF00"/>
+          </a:solidFill>
+          <a:ln>
+            <a:noFill/>
+          </a:ln>
+        </p:spPr>
+        <p:style>
+          <a:lnRef idx="1">
+            <a:schemeClr val="accent1"/>
+          </a:lnRef>
+          <a:fillRef idx="3">
+            <a:schemeClr val="accent1"/>
+          </a:fillRef>
+          <a:effectRef idx="2">
+            <a:schemeClr val="accent1"/>
+          </a:effectRef>
+          <a:fontRef idx="minor">
+            <a:schemeClr val="lt1"/>
+          </a:fontRef>
+        </p:style>
+        <p:txBody>
+          <a:bodyPr rtlCol="0" anchor="ctr"/>
+          <a:lstStyle/>
+          <a:p>
+            <a:pPr algn="ctr"/>
+          </a:p>
+        </p:txBody>
+      </p:sp>
+      <p:sp>
+        <p:nvSpPr>
+          <p:cNvPr id="26" name="TextBox 25"/>
+          <p:cNvSpPr txBox="1"/>
+          <p:nvPr/>
+        </p:nvSpPr>
+        <p:spPr>
+          <a:xfrm>
+            <a:off x="4215383" y="1042416"/>
+            <a:ext cx="3611880" cy="256032"/>
+          </a:xfrm>
+          <a:prstGeom prst="rect">
+            <a:avLst/>
+          </a:prstGeom>
+          <a:noFill/>
+        </p:spPr>
+        <p:txBody>
+          <a:bodyPr wrap="square">
+            <a:spAutoFit/>
+          </a:bodyPr>
+          <a:lstStyle/>
+          <a:p>
+            <a:pPr algn="l"/>
+            <a:r>
+              <a:rPr sz="1100" b="1" i="0">
+                <a:solidFill>
+                  <a:srgbClr val="FFFFFF"/>
+                </a:solidFill>
+              </a:rPr>
+              <a:t>Elecnor Hawkeye LLC</a:t>
+            </a:r>
+          </a:p>
+        </p:txBody>
+      </p:sp>
+      <p:sp>
+        <p:nvSpPr>
+          <p:cNvPr id="27" name="TextBox 26"/>
+          <p:cNvSpPr txBox="1"/>
+          <p:nvPr/>
+        </p:nvSpPr>
+        <p:spPr>
+          <a:xfrm>
+            <a:off x="4215383" y="1280160"/>
+            <a:ext cx="3611880" cy="201168"/>
+          </a:xfrm>
+          <a:prstGeom prst="rect">
+            <a:avLst/>
+          </a:prstGeom>
+          <a:noFill/>
+        </p:spPr>
+        <p:txBody>
+          <a:bodyPr wrap="square">
+            <a:spAutoFit/>
+          </a:bodyPr>
+          <a:lstStyle/>
+          <a:p>
+            <a:pPr algn="l"/>
+            <a:r>
+              <a:rPr sz="900" b="0" i="1">
+                <a:solidFill>
+                  <a:srgbClr val="FFFFFF"/>
+                </a:solidFill>
+              </a:rPr>
+              <a:t>Construction &amp; Installation</a:t>
+            </a:r>
+          </a:p>
+        </p:txBody>
+      </p:sp>
+      <p:sp>
+        <p:nvSpPr>
+          <p:cNvPr id="28" name="Rectangle 27"/>
+          <p:cNvSpPr/>
+          <p:nvPr/>
+        </p:nvSpPr>
+        <p:spPr>
+          <a:xfrm>
+            <a:off x="6729984" y="1572768"/>
+            <a:ext cx="1097280" cy="237744"/>
+          </a:xfrm>
+          <a:prstGeom prst="rect">
+            <a:avLst/>
+          </a:prstGeom>
+          <a:solidFill>
+            <a:srgbClr val="FFBF00"/>
+          </a:solidFill>
+          <a:ln>
+            <a:noFill/>
+          </a:ln>
+        </p:spPr>
+        <p:style>
+          <a:lnRef idx="1">
+            <a:schemeClr val="accent1"/>
+          </a:lnRef>
+          <a:fillRef idx="3">
+            <a:schemeClr val="accent1"/>
+          </a:fillRef>
+          <a:effectRef idx="2">
+            <a:schemeClr val="accent1"/>
+          </a:effectRef>
+          <a:fontRef idx="minor">
+            <a:schemeClr val="lt1"/>
+          </a:fontRef>
+        </p:style>
+        <p:txBody>
+          <a:bodyPr rtlCol="0" anchor="ctr"/>
+          <a:lstStyle/>
+          <a:p>
+            <a:pPr algn="ctr"/>
+          </a:p>
+        </p:txBody>
+      </p:sp>
+      <p:sp>
+        <p:nvSpPr>
+          <p:cNvPr id="29" name="TextBox 28"/>
+          <p:cNvSpPr txBox="1"/>
+          <p:nvPr/>
+        </p:nvSpPr>
+        <p:spPr>
+          <a:xfrm>
+            <a:off x="6729984" y="1591056"/>
+            <a:ext cx="1097280" cy="201168"/>
+          </a:xfrm>
+          <a:prstGeom prst="rect">
+            <a:avLst/>
+          </a:prstGeom>
+          <a:noFill/>
+        </p:spPr>
+        <p:txBody>
+          <a:bodyPr wrap="square">
+            <a:spAutoFit/>
+          </a:bodyPr>
+          <a:lstStyle/>
+          <a:p>
+            <a:pPr algn="ctr"/>
+            <a:r>
+              <a:rPr sz="900" b="1" i="0">
+                <a:solidFill>
+                  <a:srgbClr val="FFFFFF"/>
+                </a:solidFill>
+              </a:rPr>
+              <a:t>AMBER</a:t>
+            </a:r>
+          </a:p>
+        </p:txBody>
+      </p:sp>
+      <p:sp>
+        <p:nvSpPr>
+          <p:cNvPr id="30" name="TextBox 29"/>
+          <p:cNvSpPr txBox="1"/>
+          <p:nvPr/>
+        </p:nvSpPr>
+        <p:spPr>
+          <a:xfrm>
+            <a:off x="4215383" y="1572768"/>
+            <a:ext cx="2514600" cy="182880"/>
+          </a:xfrm>
+          <a:prstGeom prst="rect">
+            <a:avLst/>
+          </a:prstGeom>
+          <a:noFill/>
+        </p:spPr>
+        <p:txBody>
+          <a:bodyPr wrap="square">
+            <a:spAutoFit/>
+          </a:bodyPr>
+          <a:lstStyle/>
+          <a:p>
+            <a:pPr algn="l"/>
+            <a:r>
+              <a:rPr sz="800" b="0" i="0">
+                <a:solidFill>
+                  <a:srgbClr val="212121"/>
+                </a:solidFill>
+              </a:rPr>
+              <a:t>Contract: Phase 2 SOW — Dated March 9, 2026</a:t>
+            </a:r>
+          </a:p>
+        </p:txBody>
+      </p:sp>
+      <p:sp>
+        <p:nvSpPr>
+          <p:cNvPr id="31" name="TextBox 30"/>
+          <p:cNvSpPr txBox="1"/>
+          <p:nvPr/>
+        </p:nvSpPr>
+        <p:spPr>
+          <a:xfrm>
+            <a:off x="4215383" y="1755648"/>
+            <a:ext cx="3611880" cy="182880"/>
+          </a:xfrm>
+          <a:prstGeom prst="rect">
+            <a:avLst/>
+          </a:prstGeom>
+          <a:noFill/>
+        </p:spPr>
+        <p:txBody>
+          <a:bodyPr wrap="square">
+            <a:spAutoFit/>
+          </a:bodyPr>
+          <a:lstStyle/>
+          <a:p>
+            <a:pPr algn="l"/>
+            <a:r>
+              <a:rPr sz="800" b="1" i="0">
+                <a:solidFill>
+                  <a:srgbClr val="FFBF00"/>
+                </a:solidFill>
+              </a:rPr>
+              <a:t>Value: $632,303  |  Start: March 9, 2026</a:t>
+            </a:r>
+          </a:p>
+        </p:txBody>
+      </p:sp>
+      <p:sp>
+        <p:nvSpPr>
+          <p:cNvPr id="32" name="TextBox 31"/>
+          <p:cNvSpPr txBox="1"/>
+          <p:nvPr/>
+        </p:nvSpPr>
+        <p:spPr>
+          <a:xfrm>
+            <a:off x="4215383" y="1920240"/>
+            <a:ext cx="3611880" cy="182880"/>
+          </a:xfrm>
+          <a:prstGeom prst="rect">
+            <a:avLst/>
+          </a:prstGeom>
+          <a:noFill/>
+        </p:spPr>
+        <p:txBody>
+          <a:bodyPr wrap="square">
+            <a:spAutoFit/>
+          </a:bodyPr>
+          <a:lstStyle/>
+          <a:p>
+            <a:pPr algn="l"/>
+            <a:r>
+              <a:rPr sz="800" b="0" i="0">
+                <a:solidFill>
+                  <a:srgbClr val="212121"/>
+                </a:solidFill>
+              </a:rPr>
+              <a:t>Target Completion: Late 2026 (post IFC)</a:t>
+            </a:r>
+          </a:p>
+        </p:txBody>
+      </p:sp>
+      <p:sp>
+        <p:nvSpPr>
+          <p:cNvPr id="33" name="Rectangle 32"/>
+          <p:cNvSpPr/>
+          <p:nvPr/>
+        </p:nvSpPr>
+        <p:spPr>
+          <a:xfrm>
+            <a:off x="4215383" y="2121408"/>
+            <a:ext cx="3611880" cy="13716"/>
+          </a:xfrm>
+          <a:prstGeom prst="rect">
+            <a:avLst/>
+          </a:prstGeom>
+          <a:solidFill>
+            <a:srgbClr val="FFBF00"/>
+          </a:solidFill>
+          <a:ln>
+            <a:noFill/>
+          </a:ln>
+        </p:spPr>
+        <p:style>
+          <a:lnRef idx="1">
+            <a:schemeClr val="accent1"/>
+          </a:lnRef>
+          <a:fillRef idx="3">
+            <a:schemeClr val="accent1"/>
+          </a:fillRef>
+          <a:effectRef idx="2">
+            <a:schemeClr val="accent1"/>
+          </a:effectRef>
+          <a:fontRef idx="minor">
+            <a:schemeClr val="lt1"/>
+          </a:fontRef>
+        </p:style>
+        <p:txBody>
+          <a:bodyPr rtlCol="0" anchor="ctr"/>
+          <a:lstStyle/>
+          <a:p>
+            <a:pPr algn="ctr"/>
+          </a:p>
+        </p:txBody>
+      </p:sp>
+      <p:sp>
+        <p:nvSpPr>
+          <p:cNvPr id="34" name="TextBox 33"/>
+          <p:cNvSpPr txBox="1"/>
+          <p:nvPr/>
+        </p:nvSpPr>
+        <p:spPr>
+          <a:xfrm>
+            <a:off x="4215383" y="2157984"/>
+            <a:ext cx="3611880" cy="2560320"/>
+          </a:xfrm>
+          <a:prstGeom prst="rect">
+            <a:avLst/>
+          </a:prstGeom>
+          <a:noFill/>
+        </p:spPr>
+        <p:txBody>
+          <a:bodyPr wrap="square">
+            <a:spAutoFit/>
+          </a:bodyPr>
+          <a:lstStyle/>
+          <a:p>
+            <a:pPr>
+              <a:spcAft>
+                <a:spcPts val="100"/>
+              </a:spcAft>
+            </a:pPr>
+            <a:r>
+              <a:rPr sz="819" b="1">
+                <a:solidFill>
+                  <a:srgbClr val="212121"/>
+                </a:solidFill>
+              </a:rPr>
+              <a:t>Scope of Work:</a:t>
+            </a:r>
+          </a:p>
+          <a:p>
+            <a:pPr>
+              <a:spcAft>
+                <a:spcPts val="100"/>
+              </a:spcAft>
+            </a:pPr>
+            <a:r>
+              <a:rPr sz="819" b="0">
+                <a:solidFill>
+                  <a:srgbClr val="212121"/>
+                </a:solidFill>
+              </a:rPr>
+              <a:t>• Pre-site visit, installation, demo equipment &amp; staging (36 sites)</a:t>
+            </a:r>
+          </a:p>
+          <a:p>
+            <a:pPr>
+              <a:spcAft>
+                <a:spcPts val="100"/>
+              </a:spcAft>
+            </a:pPr>
+            <a:r>
+              <a:rPr sz="819" b="0">
+                <a:solidFill>
+                  <a:srgbClr val="212121"/>
+                </a:solidFill>
+              </a:rPr>
+              <a:t>• WD #8: Fiber testing Elwood/Northport + 7 patch panels  $8,229</a:t>
+            </a:r>
+          </a:p>
+          <a:p>
+            <a:pPr>
+              <a:spcAft>
+                <a:spcPts val="100"/>
+              </a:spcAft>
+            </a:pPr>
+            <a:r>
+              <a:rPr sz="819" b="0">
+                <a:solidFill>
+                  <a:srgbClr val="212121"/>
+                </a:solidFill>
+              </a:rPr>
+              <a:t>• WD #10: Oakwood/Northport patch panel install  $15,089</a:t>
+            </a:r>
+          </a:p>
+          <a:p>
+            <a:pPr>
+              <a:spcAft>
+                <a:spcPts val="100"/>
+              </a:spcAft>
+            </a:pPr>
+            <a:r>
+              <a:rPr sz="819" b="0">
+                <a:solidFill>
+                  <a:srgbClr val="212121"/>
+                </a:solidFill>
+              </a:rPr>
+              <a:t>• WD #11: Fiber &amp; CAT5E supply/install Hicksville  $60,070</a:t>
+            </a:r>
+          </a:p>
+          <a:p>
+            <a:pPr>
+              <a:spcAft>
+                <a:spcPts val="100"/>
+              </a:spcAft>
+            </a:pPr>
+            <a:r>
+              <a:rPr sz="819" b="0">
+                <a:solidFill>
+                  <a:srgbClr val="212121"/>
+                </a:solidFill>
+              </a:rPr>
+              <a:t>• WD #12: Fiber enclosures Hicksville  $2,515</a:t>
+            </a:r>
+          </a:p>
+          <a:p>
+            <a:pPr>
+              <a:spcAft>
+                <a:spcPts val="100"/>
+              </a:spcAft>
+            </a:pPr>
+            <a:r>
+              <a:rPr sz="819" b="0">
+                <a:solidFill>
+                  <a:srgbClr val="212121"/>
+                </a:solidFill>
+              </a:rPr>
+              <a:t>• WD #13: Fiber testing Syosset/Hicksville  $2,400</a:t>
+            </a:r>
+          </a:p>
+          <a:p>
+            <a:pPr>
+              <a:spcAft>
+                <a:spcPts val="100"/>
+              </a:spcAft>
+            </a:pPr>
+            <a:r>
+              <a:rPr sz="819" b="0">
+                <a:solidFill>
+                  <a:srgbClr val="212121"/>
+                </a:solidFill>
+              </a:rPr>
+              <a:t/>
+            </a:r>
+          </a:p>
+          <a:p>
+            <a:pPr>
+              <a:spcAft>
+                <a:spcPts val="100"/>
+              </a:spcAft>
+            </a:pPr>
+            <a:r>
+              <a:rPr sz="819" b="1">
+                <a:solidFill>
+                  <a:srgbClr val="212121"/>
+                </a:solidFill>
+              </a:rPr>
+              <a:t>Milestone Payments:</a:t>
+            </a:r>
+          </a:p>
+          <a:p>
+            <a:pPr>
+              <a:spcAft>
+                <a:spcPts val="100"/>
+              </a:spcAft>
+            </a:pPr>
+            <a:r>
+              <a:rPr sz="819" b="0">
+                <a:solidFill>
+                  <a:srgbClr val="212121"/>
+                </a:solidFill>
+              </a:rPr>
+              <a:t>  M1:  $99,000  due 3/30/2026  ← IMMINENT</a:t>
+            </a:r>
+          </a:p>
+          <a:p>
+            <a:pPr>
+              <a:spcAft>
+                <a:spcPts val="100"/>
+              </a:spcAft>
+            </a:pPr>
+            <a:r>
+              <a:rPr sz="819" b="0">
+                <a:solidFill>
+                  <a:srgbClr val="212121"/>
+                </a:solidFill>
+              </a:rPr>
+              <a:t>  M2:  $89,000  due 4/30/2026</a:t>
+            </a:r>
+          </a:p>
+          <a:p>
+            <a:pPr>
+              <a:spcAft>
+                <a:spcPts val="100"/>
+              </a:spcAft>
+            </a:pPr>
+            <a:r>
+              <a:rPr sz="819" b="0">
+                <a:solidFill>
+                  <a:srgbClr val="212121"/>
+                </a:solidFill>
+              </a:rPr>
+              <a:t>  M3:  $89,000  due 5/30/2026 &amp; 6/30/2026</a:t>
+            </a:r>
+          </a:p>
+          <a:p>
+            <a:pPr>
+              <a:spcAft>
+                <a:spcPts val="100"/>
+              </a:spcAft>
+            </a:pPr>
+            <a:r>
+              <a:rPr sz="819" b="0">
+                <a:solidFill>
+                  <a:srgbClr val="212121"/>
+                </a:solidFill>
+              </a:rPr>
+              <a:t>  M4:  $89,000  due 8/30/2026  |  M5 Decommission:  $89,000</a:t>
+            </a:r>
+          </a:p>
+        </p:txBody>
+      </p:sp>
+      <p:sp>
+        <p:nvSpPr>
+          <p:cNvPr id="35" name="Rectangle 34"/>
+          <p:cNvSpPr/>
+          <p:nvPr/>
+        </p:nvSpPr>
+        <p:spPr>
+          <a:xfrm>
+            <a:off x="4215383" y="5047488"/>
+            <a:ext cx="3611880" cy="13716"/>
+          </a:xfrm>
+          <a:prstGeom prst="rect">
+            <a:avLst/>
+          </a:prstGeom>
+          <a:solidFill>
+            <a:srgbClr val="FFBF00"/>
+          </a:solidFill>
+          <a:ln>
+            <a:noFill/>
+          </a:ln>
+        </p:spPr>
+        <p:style>
+          <a:lnRef idx="1">
+            <a:schemeClr val="accent1"/>
+          </a:lnRef>
+          <a:fillRef idx="3">
+            <a:schemeClr val="accent1"/>
+          </a:fillRef>
+          <a:effectRef idx="2">
+            <a:schemeClr val="accent1"/>
+          </a:effectRef>
+          <a:fontRef idx="minor">
+            <a:schemeClr val="lt1"/>
+          </a:fontRef>
+        </p:style>
+        <p:txBody>
+          <a:bodyPr rtlCol="0" anchor="ctr"/>
+          <a:lstStyle/>
+          <a:p>
+            <a:pPr algn="ctr"/>
+          </a:p>
+        </p:txBody>
+      </p:sp>
+      <p:sp>
+        <p:nvSpPr>
+          <p:cNvPr id="36" name="TextBox 35"/>
+          <p:cNvSpPr txBox="1"/>
+          <p:nvPr/>
+        </p:nvSpPr>
+        <p:spPr>
+          <a:xfrm>
+            <a:off x="4215383" y="5084064"/>
+            <a:ext cx="3611880" cy="164592"/>
+          </a:xfrm>
+          <a:prstGeom prst="rect">
+            <a:avLst/>
+          </a:prstGeom>
+          <a:noFill/>
+        </p:spPr>
+        <p:txBody>
+          <a:bodyPr wrap="square">
+            <a:spAutoFit/>
+          </a:bodyPr>
+          <a:lstStyle/>
+          <a:p>
+            <a:pPr algn="l"/>
+            <a:r>
+              <a:rPr sz="800" b="1" i="0">
+                <a:solidFill>
+                  <a:srgbClr val="FFBF00"/>
+                </a:solidFill>
+              </a:rPr>
+              <a:t>Key Contact:</a:t>
+            </a:r>
+          </a:p>
+        </p:txBody>
+      </p:sp>
+      <p:sp>
+        <p:nvSpPr>
+          <p:cNvPr id="37" name="TextBox 36"/>
+          <p:cNvSpPr txBox="1"/>
+          <p:nvPr/>
+        </p:nvSpPr>
+        <p:spPr>
+          <a:xfrm>
+            <a:off x="4215383" y="5248656"/>
+            <a:ext cx="3611880" cy="292608"/>
+          </a:xfrm>
+          <a:prstGeom prst="rect">
+            <a:avLst/>
+          </a:prstGeom>
+          <a:noFill/>
+        </p:spPr>
+        <p:txBody>
+          <a:bodyPr wrap="square">
+            <a:spAutoFit/>
+          </a:bodyPr>
+          <a:lstStyle/>
+          <a:p>
+            <a:pPr algn="l"/>
+            <a:r>
+              <a:rPr sz="750" b="0" i="0">
+                <a:solidFill>
+                  <a:srgbClr val="212121"/>
+                </a:solidFill>
+              </a:rPr>
+              <a:t>Robert M. Kenney (Electrical Supervisor) | (631) 291-2166</a:t>
+            </a:r>
+          </a:p>
+        </p:txBody>
+      </p:sp>
+      <p:sp>
+        <p:nvSpPr>
+          <p:cNvPr id="38" name="Rectangle 37"/>
+          <p:cNvSpPr/>
+          <p:nvPr/>
+        </p:nvSpPr>
+        <p:spPr>
+          <a:xfrm>
+            <a:off x="4215383" y="5687568"/>
+            <a:ext cx="3611880" cy="548640"/>
+          </a:xfrm>
+          <a:prstGeom prst="rect">
+            <a:avLst/>
+          </a:prstGeom>
+          <a:solidFill>
+            <a:srgbClr val="FFFFFF"/>
+          </a:solidFill>
+          <a:ln w="19050">
+            <a:solidFill>
+              <a:srgbClr val="FFBF00"/>
+            </a:solidFill>
+          </a:ln>
+        </p:spPr>
+        <p:style>
+          <a:lnRef idx="1">
+            <a:schemeClr val="accent1"/>
+          </a:lnRef>
+          <a:fillRef idx="3">
+            <a:schemeClr val="accent1"/>
+          </a:fillRef>
+          <a:effectRef idx="2">
+            <a:schemeClr val="accent1"/>
+          </a:effectRef>
+          <a:fontRef idx="minor">
+            <a:schemeClr val="lt1"/>
+          </a:fontRef>
+        </p:style>
+        <p:txBody>
+          <a:bodyPr rtlCol="0" anchor="ctr"/>
+          <a:lstStyle/>
+          <a:p>
+            <a:pPr algn="ctr"/>
+          </a:p>
+        </p:txBody>
+      </p:sp>
+      <p:sp>
+        <p:nvSpPr>
+          <p:cNvPr id="39" name="TextBox 38"/>
+          <p:cNvSpPr txBox="1"/>
+          <p:nvPr/>
+        </p:nvSpPr>
+        <p:spPr>
+          <a:xfrm>
+            <a:off x="4288536" y="5760720"/>
+            <a:ext cx="3474720" cy="402336"/>
+          </a:xfrm>
+          <a:prstGeom prst="rect">
+            <a:avLst/>
+          </a:prstGeom>
+          <a:noFill/>
+        </p:spPr>
+        <p:txBody>
+          <a:bodyPr wrap="square">
+            <a:spAutoFit/>
+          </a:bodyPr>
+          <a:lstStyle/>
+          <a:p>
+            <a:pPr algn="l"/>
+            <a:r>
+              <a:rPr sz="800" b="1" i="0">
+                <a:solidFill>
+                  <a:srgbClr val="FFBF00"/>
+                </a:solidFill>
+              </a:rPr>
+              <a:t>Status: WDs in progress. M1 due 3/30.</a:t>
+            </a:r>
+          </a:p>
+        </p:txBody>
+      </p:sp>
+      <p:sp>
+        <p:nvSpPr>
+          <p:cNvPr id="40" name="Rectangle 39"/>
+          <p:cNvSpPr/>
+          <p:nvPr/>
+        </p:nvSpPr>
+        <p:spPr>
+          <a:xfrm>
+            <a:off x="8083296" y="1005840"/>
+            <a:ext cx="3794760" cy="5486400"/>
+          </a:xfrm>
+          <a:prstGeom prst="rect">
+            <a:avLst/>
+          </a:prstGeom>
+          <a:solidFill>
+            <a:srgbClr val="E8F5E9"/>
+          </a:solidFill>
+          <a:ln w="25400">
+            <a:solidFill>
+              <a:srgbClr val="009700"/>
+            </a:solidFill>
+          </a:ln>
+        </p:spPr>
+        <p:style>
+          <a:lnRef idx="1">
+            <a:schemeClr val="accent1"/>
+          </a:lnRef>
+          <a:fillRef idx="3">
+            <a:schemeClr val="accent1"/>
+          </a:fillRef>
+          <a:effectRef idx="2">
+            <a:schemeClr val="accent1"/>
+          </a:effectRef>
+          <a:fontRef idx="minor">
+            <a:schemeClr val="lt1"/>
+          </a:fontRef>
+        </p:style>
+        <p:txBody>
+          <a:bodyPr rtlCol="0" anchor="ctr"/>
+          <a:lstStyle/>
+          <a:p>
+            <a:pPr algn="ctr"/>
+          </a:p>
+        </p:txBody>
+      </p:sp>
+      <p:sp>
+        <p:nvSpPr>
+          <p:cNvPr id="41" name="Rectangle 40"/>
+          <p:cNvSpPr/>
+          <p:nvPr/>
+        </p:nvSpPr>
+        <p:spPr>
+          <a:xfrm>
+            <a:off x="8083296" y="1005840"/>
+            <a:ext cx="3794760" cy="502920"/>
+          </a:xfrm>
+          <a:prstGeom prst="rect">
+            <a:avLst/>
+          </a:prstGeom>
+          <a:solidFill>
+            <a:srgbClr val="009700"/>
+          </a:solidFill>
+          <a:ln>
+            <a:noFill/>
+          </a:ln>
+        </p:spPr>
+        <p:style>
+          <a:lnRef idx="1">
+            <a:schemeClr val="accent1"/>
+          </a:lnRef>
+          <a:fillRef idx="3">
+            <a:schemeClr val="accent1"/>
+          </a:fillRef>
+          <a:effectRef idx="2">
+            <a:schemeClr val="accent1"/>
+          </a:effectRef>
+          <a:fontRef idx="minor">
+            <a:schemeClr val="lt1"/>
+          </a:fontRef>
+        </p:style>
+        <p:txBody>
+          <a:bodyPr rtlCol="0" anchor="ctr"/>
+          <a:lstStyle/>
+          <a:p>
+            <a:pPr algn="ctr"/>
+          </a:p>
+        </p:txBody>
+      </p:sp>
+      <p:sp>
+        <p:nvSpPr>
+          <p:cNvPr id="42" name="TextBox 41"/>
+          <p:cNvSpPr txBox="1"/>
+          <p:nvPr/>
+        </p:nvSpPr>
+        <p:spPr>
+          <a:xfrm>
+            <a:off x="8174736" y="1042416"/>
+            <a:ext cx="3611880" cy="256032"/>
+          </a:xfrm>
+          <a:prstGeom prst="rect">
+            <a:avLst/>
+          </a:prstGeom>
+          <a:noFill/>
+        </p:spPr>
+        <p:txBody>
+          <a:bodyPr wrap="square">
+            <a:spAutoFit/>
+          </a:bodyPr>
+          <a:lstStyle/>
+          <a:p>
+            <a:pPr algn="l"/>
+            <a:r>
+              <a:rPr sz="1100" b="1" i="0">
+                <a:solidFill>
+                  <a:srgbClr val="FFFFFF"/>
+                </a:solidFill>
+              </a:rPr>
+              <a:t>Nokia</a:t>
+            </a:r>
+          </a:p>
+        </p:txBody>
+      </p:sp>
+      <p:sp>
+        <p:nvSpPr>
+          <p:cNvPr id="43" name="TextBox 42"/>
+          <p:cNvSpPr txBox="1"/>
+          <p:nvPr/>
+        </p:nvSpPr>
+        <p:spPr>
+          <a:xfrm>
+            <a:off x="8174736" y="1280160"/>
+            <a:ext cx="3611880" cy="201168"/>
+          </a:xfrm>
+          <a:prstGeom prst="rect">
+            <a:avLst/>
+          </a:prstGeom>
+          <a:noFill/>
+        </p:spPr>
+        <p:txBody>
+          <a:bodyPr wrap="square">
+            <a:spAutoFit/>
+          </a:bodyPr>
+          <a:lstStyle/>
+          <a:p>
+            <a:pPr algn="l"/>
+            <a:r>
+              <a:rPr sz="900" b="0" i="1">
+                <a:solidFill>
+                  <a:srgbClr val="FFFFFF"/>
+                </a:solidFill>
+              </a:rPr>
+              <a:t>Network Equipment Supply</a:t>
+            </a:r>
+          </a:p>
+        </p:txBody>
+      </p:sp>
+      <p:sp>
+        <p:nvSpPr>
+          <p:cNvPr id="44" name="Rectangle 43"/>
+          <p:cNvSpPr/>
+          <p:nvPr/>
+        </p:nvSpPr>
+        <p:spPr>
+          <a:xfrm>
+            <a:off x="10689336" y="1572768"/>
+            <a:ext cx="1097280" cy="237744"/>
+          </a:xfrm>
+          <a:prstGeom prst="rect">
+            <a:avLst/>
+          </a:prstGeom>
+          <a:solidFill>
+            <a:srgbClr val="FFBF00"/>
+          </a:solidFill>
+          <a:ln>
+            <a:noFill/>
+          </a:ln>
+        </p:spPr>
+        <p:style>
+          <a:lnRef idx="1">
+            <a:schemeClr val="accent1"/>
+          </a:lnRef>
+          <a:fillRef idx="3">
+            <a:schemeClr val="accent1"/>
+          </a:fillRef>
+          <a:effectRef idx="2">
+            <a:schemeClr val="accent1"/>
+          </a:effectRef>
+          <a:fontRef idx="minor">
+            <a:schemeClr val="lt1"/>
+          </a:fontRef>
+        </p:style>
+        <p:txBody>
+          <a:bodyPr rtlCol="0" anchor="ctr"/>
+          <a:lstStyle/>
+          <a:p>
+            <a:pPr algn="ctr"/>
+          </a:p>
+        </p:txBody>
+      </p:sp>
+      <p:sp>
+        <p:nvSpPr>
+          <p:cNvPr id="45" name="TextBox 44"/>
+          <p:cNvSpPr txBox="1"/>
+          <p:nvPr/>
+        </p:nvSpPr>
+        <p:spPr>
+          <a:xfrm>
+            <a:off x="10689336" y="1591056"/>
+            <a:ext cx="1097280" cy="201168"/>
+          </a:xfrm>
+          <a:prstGeom prst="rect">
+            <a:avLst/>
+          </a:prstGeom>
+          <a:noFill/>
+        </p:spPr>
+        <p:txBody>
+          <a:bodyPr wrap="square">
+            <a:spAutoFit/>
+          </a:bodyPr>
+          <a:lstStyle/>
+          <a:p>
+            <a:pPr algn="ctr"/>
+            <a:r>
+              <a:rPr sz="900" b="1" i="0">
+                <a:solidFill>
+                  <a:srgbClr val="FFFFFF"/>
+                </a:solidFill>
+              </a:rPr>
+              <a:t>AMBER</a:t>
+            </a:r>
+          </a:p>
+        </p:txBody>
+      </p:sp>
+      <p:sp>
+        <p:nvSpPr>
+          <p:cNvPr id="46" name="TextBox 45"/>
+          <p:cNvSpPr txBox="1"/>
+          <p:nvPr/>
+        </p:nvSpPr>
+        <p:spPr>
+          <a:xfrm>
+            <a:off x="8174736" y="1572768"/>
+            <a:ext cx="2514600" cy="182880"/>
+          </a:xfrm>
+          <a:prstGeom prst="rect">
+            <a:avLst/>
+          </a:prstGeom>
+          <a:noFill/>
+        </p:spPr>
+        <p:txBody>
+          <a:bodyPr wrap="square">
+            <a:spAutoFit/>
+          </a:bodyPr>
+          <a:lstStyle/>
+          <a:p>
+            <a:pPr algn="l"/>
+            <a:r>
+              <a:rPr sz="800" b="0" i="0">
+                <a:solidFill>
+                  <a:srgbClr val="212121"/>
+                </a:solidFill>
+              </a:rPr>
+              <a:t>Contract: PO 7000001857</a:t>
+            </a:r>
+          </a:p>
+        </p:txBody>
+      </p:sp>
+      <p:sp>
+        <p:nvSpPr>
+          <p:cNvPr id="47" name="TextBox 46"/>
+          <p:cNvSpPr txBox="1"/>
+          <p:nvPr/>
+        </p:nvSpPr>
+        <p:spPr>
+          <a:xfrm>
+            <a:off x="8174736" y="1755648"/>
+            <a:ext cx="3611880" cy="182880"/>
+          </a:xfrm>
+          <a:prstGeom prst="rect">
+            <a:avLst/>
+          </a:prstGeom>
+          <a:noFill/>
+        </p:spPr>
+        <p:txBody>
+          <a:bodyPr wrap="square">
+            <a:spAutoFit/>
+          </a:bodyPr>
+          <a:lstStyle/>
+          <a:p>
+            <a:pPr algn="l"/>
+            <a:r>
+              <a:rPr sz="800" b="1" i="0">
+                <a:solidFill>
+                  <a:srgbClr val="009700"/>
+                </a:solidFill>
+              </a:rPr>
+              <a:t>Value: $1,900,000+  |  Start: 2025</a:t>
+            </a:r>
+          </a:p>
+        </p:txBody>
+      </p:sp>
+      <p:sp>
+        <p:nvSpPr>
+          <p:cNvPr id="48" name="TextBox 47"/>
+          <p:cNvSpPr txBox="1"/>
+          <p:nvPr/>
+        </p:nvSpPr>
+        <p:spPr>
+          <a:xfrm>
+            <a:off x="8174736" y="1920240"/>
+            <a:ext cx="3611880" cy="182880"/>
+          </a:xfrm>
+          <a:prstGeom prst="rect">
+            <a:avLst/>
+          </a:prstGeom>
+          <a:noFill/>
+        </p:spPr>
+        <p:txBody>
+          <a:bodyPr wrap="square">
+            <a:spAutoFit/>
+          </a:bodyPr>
+          <a:lstStyle/>
+          <a:p>
+            <a:pPr algn="l"/>
+            <a:r>
+              <a:rPr sz="800" b="0" i="0">
+                <a:solidFill>
+                  <a:srgbClr val="212121"/>
+                </a:solidFill>
+              </a:rPr>
+              <a:t>Target Completion: Equipment Delivered Feb 2026</a:t>
+            </a:r>
+          </a:p>
+        </p:txBody>
+      </p:sp>
+      <p:sp>
+        <p:nvSpPr>
+          <p:cNvPr id="49" name="Rectangle 48"/>
+          <p:cNvSpPr/>
+          <p:nvPr/>
+        </p:nvSpPr>
+        <p:spPr>
+          <a:xfrm>
+            <a:off x="8174736" y="2121408"/>
+            <a:ext cx="3611880" cy="13716"/>
+          </a:xfrm>
+          <a:prstGeom prst="rect">
+            <a:avLst/>
+          </a:prstGeom>
+          <a:solidFill>
+            <a:srgbClr val="009700"/>
+          </a:solidFill>
+          <a:ln>
+            <a:noFill/>
+          </a:ln>
+        </p:spPr>
+        <p:style>
+          <a:lnRef idx="1">
+            <a:schemeClr val="accent1"/>
+          </a:lnRef>
+          <a:fillRef idx="3">
+            <a:schemeClr val="accent1"/>
+          </a:fillRef>
+          <a:effectRef idx="2">
+            <a:schemeClr val="accent1"/>
+          </a:effectRef>
+          <a:fontRef idx="minor">
+            <a:schemeClr val="lt1"/>
+          </a:fontRef>
+        </p:style>
+        <p:txBody>
+          <a:bodyPr rtlCol="0" anchor="ctr"/>
+          <a:lstStyle/>
+          <a:p>
+            <a:pPr algn="ctr"/>
+          </a:p>
+        </p:txBody>
+      </p:sp>
+      <p:sp>
+        <p:nvSpPr>
+          <p:cNvPr id="50" name="TextBox 49"/>
+          <p:cNvSpPr txBox="1"/>
+          <p:nvPr/>
+        </p:nvSpPr>
+        <p:spPr>
+          <a:xfrm>
+            <a:off x="8174736" y="2157984"/>
+            <a:ext cx="3611880" cy="2560320"/>
+          </a:xfrm>
+          <a:prstGeom prst="rect">
+            <a:avLst/>
+          </a:prstGeom>
+          <a:noFill/>
+        </p:spPr>
+        <p:txBody>
+          <a:bodyPr wrap="square">
+            <a:spAutoFit/>
+          </a:bodyPr>
+          <a:lstStyle/>
+          <a:p>
+            <a:pPr>
+              <a:spcAft>
+                <a:spcPts val="100"/>
+              </a:spcAft>
+            </a:pPr>
+            <a:r>
+              <a:rPr sz="819" b="1">
+                <a:solidFill>
+                  <a:srgbClr val="212121"/>
+                </a:solidFill>
+              </a:rPr>
+              <a:t>Scope of Work:</a:t>
+            </a:r>
+          </a:p>
+          <a:p>
+            <a:pPr>
+              <a:spcAft>
+                <a:spcPts val="100"/>
+              </a:spcAft>
+            </a:pPr>
+            <a:r>
+              <a:rPr sz="819" b="0">
+                <a:solidFill>
+                  <a:srgbClr val="212121"/>
+                </a:solidFill>
+              </a:rPr>
+              <a:t>• Supply Nokia 7705 SAR routers for all Phase 2 sites</a:t>
+            </a:r>
+          </a:p>
+          <a:p>
+            <a:pPr>
+              <a:spcAft>
+                <a:spcPts val="100"/>
+              </a:spcAft>
+            </a:pPr>
+            <a:r>
+              <a:rPr sz="819" b="0">
+                <a:solidFill>
+                  <a:srgbClr val="212121"/>
+                </a:solidFill>
+              </a:rPr>
+              <a:t>• Equipment staged and delivered February 2026  ✓</a:t>
+            </a:r>
+          </a:p>
+          <a:p>
+            <a:pPr>
+              <a:spcAft>
+                <a:spcPts val="100"/>
+              </a:spcAft>
+            </a:pPr>
+            <a:r>
+              <a:rPr sz="819" b="0">
+                <a:solidFill>
+                  <a:srgbClr val="212121"/>
+                </a:solidFill>
+              </a:rPr>
+              <a:t>• NSP (Network Services Platform) software &amp; licensing</a:t>
+            </a:r>
+          </a:p>
+          <a:p>
+            <a:pPr>
+              <a:spcAft>
+                <a:spcPts val="100"/>
+              </a:spcAft>
+            </a:pPr>
+            <a:r>
+              <a:rPr sz="819" b="0">
+                <a:solidFill>
+                  <a:srgbClr val="212121"/>
+                </a:solidFill>
+              </a:rPr>
+              <a:t>• Firmware synchronized on all CSM cards</a:t>
+            </a:r>
+          </a:p>
+          <a:p>
+            <a:pPr>
+              <a:spcAft>
+                <a:spcPts val="100"/>
+              </a:spcAft>
+            </a:pPr>
+            <a:r>
+              <a:rPr sz="819" b="0">
+                <a:solidFill>
+                  <a:srgbClr val="212121"/>
+                </a:solidFill>
+              </a:rPr>
+              <a:t/>
+            </a:r>
+          </a:p>
+          <a:p>
+            <a:pPr>
+              <a:spcAft>
+                <a:spcPts val="100"/>
+              </a:spcAft>
+            </a:pPr>
+            <a:r>
+              <a:rPr sz="819" b="1">
+                <a:solidFill>
+                  <a:srgbClr val="212121"/>
+                </a:solidFill>
+              </a:rPr>
+              <a:t>PO Details:</a:t>
+            </a:r>
+          </a:p>
+          <a:p>
+            <a:pPr>
+              <a:spcAft>
+                <a:spcPts val="100"/>
+              </a:spcAft>
+            </a:pPr>
+            <a:r>
+              <a:rPr sz="819" b="0">
+                <a:solidFill>
+                  <a:srgbClr val="212121"/>
+                </a:solidFill>
+              </a:rPr>
+              <a:t>  PO 7000001857:  $753,000  (added March 2026)</a:t>
+            </a:r>
+          </a:p>
+          <a:p>
+            <a:pPr>
+              <a:spcAft>
+                <a:spcPts val="100"/>
+              </a:spcAft>
+            </a:pPr>
+            <a:r>
+              <a:rPr sz="819" b="0">
+                <a:solidFill>
+                  <a:srgbClr val="212121"/>
+                </a:solidFill>
+              </a:rPr>
+              <a:t>  Previous PO total:  ~$1,147,000</a:t>
+            </a:r>
+          </a:p>
+          <a:p>
+            <a:pPr>
+              <a:spcAft>
+                <a:spcPts val="100"/>
+              </a:spcAft>
+            </a:pPr>
+            <a:r>
+              <a:rPr sz="819" b="0">
+                <a:solidFill>
+                  <a:srgbClr val="212121"/>
+                </a:solidFill>
+              </a:rPr>
+              <a:t>  Total Nokia exposure:  ~$1,900,000</a:t>
+            </a:r>
+          </a:p>
+          <a:p>
+            <a:pPr>
+              <a:spcAft>
+                <a:spcPts val="100"/>
+              </a:spcAft>
+            </a:pPr>
+            <a:r>
+              <a:rPr sz="819" b="0">
+                <a:solidFill>
+                  <a:srgbClr val="212121"/>
+                </a:solidFill>
+              </a:rPr>
+              <a:t/>
+            </a:r>
+          </a:p>
+          <a:p>
+            <a:pPr>
+              <a:spcAft>
+                <a:spcPts val="100"/>
+              </a:spcAft>
+            </a:pPr>
+            <a:r>
+              <a:rPr sz="819" b="1">
+                <a:solidFill>
+                  <a:srgbClr val="212121"/>
+                </a:solidFill>
+              </a:rPr>
+              <a:t>Current Issues:</a:t>
+            </a:r>
+          </a:p>
+          <a:p>
+            <a:pPr>
+              <a:spcAft>
+                <a:spcPts val="100"/>
+              </a:spcAft>
+            </a:pPr>
+            <a:r>
+              <a:rPr sz="819" b="0">
+                <a:solidFill>
+                  <a:srgbClr val="212121"/>
+                </a:solidFill>
+              </a:rPr>
+              <a:t>  NSP remote access to Hicksville &amp; Melville nodes pending</a:t>
+            </a:r>
+          </a:p>
+          <a:p>
+            <a:pPr>
+              <a:spcAft>
+                <a:spcPts val="100"/>
+              </a:spcAft>
+            </a:pPr>
+            <a:r>
+              <a:rPr sz="819" b="0">
+                <a:solidFill>
+                  <a:srgbClr val="212121"/>
+                </a:solidFill>
+              </a:rPr>
+              <a:t>  Cat 6 cabling for NSP at Hicksville in progress (Hawkeye)</a:t>
+            </a:r>
+          </a:p>
+        </p:txBody>
+      </p:sp>
+      <p:sp>
+        <p:nvSpPr>
+          <p:cNvPr id="51" name="Rectangle 50"/>
+          <p:cNvSpPr/>
+          <p:nvPr/>
+        </p:nvSpPr>
+        <p:spPr>
+          <a:xfrm>
+            <a:off x="8174736" y="5047488"/>
+            <a:ext cx="3611880" cy="13716"/>
+          </a:xfrm>
+          <a:prstGeom prst="rect">
+            <a:avLst/>
+          </a:prstGeom>
+          <a:solidFill>
+            <a:srgbClr val="009700"/>
+          </a:solidFill>
+          <a:ln>
+            <a:noFill/>
+          </a:ln>
+        </p:spPr>
+        <p:style>
+          <a:lnRef idx="1">
+            <a:schemeClr val="accent1"/>
+          </a:lnRef>
+          <a:fillRef idx="3">
+            <a:schemeClr val="accent1"/>
+          </a:fillRef>
+          <a:effectRef idx="2">
+            <a:schemeClr val="accent1"/>
+          </a:effectRef>
+          <a:fontRef idx="minor">
+            <a:schemeClr val="lt1"/>
+          </a:fontRef>
+        </p:style>
+        <p:txBody>
+          <a:bodyPr rtlCol="0" anchor="ctr"/>
+          <a:lstStyle/>
+          <a:p>
+            <a:pPr algn="ctr"/>
+          </a:p>
+        </p:txBody>
+      </p:sp>
+      <p:sp>
+        <p:nvSpPr>
+          <p:cNvPr id="52" name="TextBox 51"/>
+          <p:cNvSpPr txBox="1"/>
+          <p:nvPr/>
+        </p:nvSpPr>
+        <p:spPr>
+          <a:xfrm>
+            <a:off x="8174736" y="5084064"/>
+            <a:ext cx="3611880" cy="164592"/>
+          </a:xfrm>
+          <a:prstGeom prst="rect">
+            <a:avLst/>
+          </a:prstGeom>
+          <a:noFill/>
+        </p:spPr>
+        <p:txBody>
+          <a:bodyPr wrap="square">
+            <a:spAutoFit/>
+          </a:bodyPr>
+          <a:lstStyle/>
+          <a:p>
+            <a:pPr algn="l"/>
+            <a:r>
+              <a:rPr sz="800" b="1" i="0">
+                <a:solidFill>
+                  <a:srgbClr val="009700"/>
+                </a:solidFill>
+              </a:rPr>
+              <a:t>Key Contact:</a:t>
+            </a:r>
+          </a:p>
+        </p:txBody>
+      </p:sp>
+      <p:sp>
+        <p:nvSpPr>
+          <p:cNvPr id="53" name="TextBox 52"/>
+          <p:cNvSpPr txBox="1"/>
+          <p:nvPr/>
+        </p:nvSpPr>
+        <p:spPr>
+          <a:xfrm>
+            <a:off x="8174736" y="5248656"/>
+            <a:ext cx="3611880" cy="292608"/>
+          </a:xfrm>
+          <a:prstGeom prst="rect">
+            <a:avLst/>
+          </a:prstGeom>
+          <a:noFill/>
+        </p:spPr>
+        <p:txBody>
+          <a:bodyPr wrap="square">
+            <a:spAutoFit/>
+          </a:bodyPr>
+          <a:lstStyle/>
+          <a:p>
+            <a:pPr algn="l"/>
+            <a:r>
+              <a:rPr sz="750" b="0" i="0">
+                <a:solidFill>
+                  <a:srgbClr val="212121"/>
+                </a:solidFill>
+              </a:rPr>
+              <a:t>Nokia Account Team | PSEG Long Island</a:t>
+            </a:r>
+          </a:p>
+        </p:txBody>
+      </p:sp>
+      <p:sp>
+        <p:nvSpPr>
+          <p:cNvPr id="54" name="Rectangle 53"/>
+          <p:cNvSpPr/>
+          <p:nvPr/>
+        </p:nvSpPr>
+        <p:spPr>
+          <a:xfrm>
+            <a:off x="8174736" y="5687568"/>
+            <a:ext cx="3611880" cy="548640"/>
+          </a:xfrm>
+          <a:prstGeom prst="rect">
+            <a:avLst/>
+          </a:prstGeom>
+          <a:solidFill>
+            <a:srgbClr val="FFFFFF"/>
+          </a:solidFill>
+          <a:ln w="19050">
+            <a:solidFill>
+              <a:srgbClr val="FFBF00"/>
+            </a:solidFill>
+          </a:ln>
+        </p:spPr>
+        <p:style>
+          <a:lnRef idx="1">
+            <a:schemeClr val="accent1"/>
+          </a:lnRef>
+          <a:fillRef idx="3">
+            <a:schemeClr val="accent1"/>
+          </a:fillRef>
+          <a:effectRef idx="2">
+            <a:schemeClr val="accent1"/>
+          </a:effectRef>
+          <a:fontRef idx="minor">
+            <a:schemeClr val="lt1"/>
+          </a:fontRef>
+        </p:style>
+        <p:txBody>
+          <a:bodyPr rtlCol="0" anchor="ctr"/>
+          <a:lstStyle/>
+          <a:p>
+            <a:pPr algn="ctr"/>
+          </a:p>
+        </p:txBody>
+      </p:sp>
+      <p:sp>
+        <p:nvSpPr>
+          <p:cNvPr id="55" name="TextBox 54"/>
+          <p:cNvSpPr txBox="1"/>
+          <p:nvPr/>
+        </p:nvSpPr>
+        <p:spPr>
+          <a:xfrm>
+            <a:off x="8247888" y="5760720"/>
+            <a:ext cx="3474720" cy="402336"/>
+          </a:xfrm>
+          <a:prstGeom prst="rect">
+            <a:avLst/>
+          </a:prstGeom>
+          <a:noFill/>
+        </p:spPr>
+        <p:txBody>
+          <a:bodyPr wrap="square">
+            <a:spAutoFit/>
+          </a:bodyPr>
+          <a:lstStyle/>
+          <a:p>
+            <a:pPr algn="l"/>
+            <a:r>
+              <a:rPr sz="800" b="1" i="0">
+                <a:solidFill>
+                  <a:srgbClr val="FFBF00"/>
+                </a:solidFill>
+              </a:rPr>
+              <a:t>Status: Equipment delivered. NSP access pending.</a:t>
             </a:r>
           </a:p>
         </p:txBody>

--- a/incoming_files/cio_jmux_presentation.pptx
+++ b/incoming_files/cio_jmux_presentation.pptx
@@ -63658,7 +63658,7 @@
                   <a:srgbClr val="F7941D"/>
                 </a:solidFill>
               </a:rPr>
-              <a:t>RAG Status  |  PMBOK Standard  |  Active Risks &amp; Mitigations  |  March 12, 2026</a:t>
+              <a:t>RAG Status  |  PMBOK Standard  |  Updated March 12, 2026</a:t>
             </a:r>
           </a:p>
         </p:txBody>
@@ -63769,7 +63769,7 @@
                   <a:srgbClr val="C00000"/>
                 </a:solidFill>
               </a:rPr>
-              <a:t>■ RED — High</a:t>
+              <a:t>■ RED — High Impact</a:t>
             </a:r>
           </a:p>
         </p:txBody>
@@ -63803,7 +63803,7 @@
                   <a:srgbClr val="FFA500"/>
                 </a:solidFill>
               </a:rPr>
-              <a:t>■ AMBER — Medium</a:t>
+              <a:t>■ AMBER — In Progress / Medium</a:t>
             </a:r>
           </a:p>
         </p:txBody>
@@ -63837,7 +63837,7 @@
                   <a:srgbClr val="00965E"/>
                 </a:solidFill>
               </a:rPr>
-              <a:t>■ GREEN — Closed/Low</a:t>
+              <a:t>■ GREEN — Closed / Low</a:t>
             </a:r>
           </a:p>
         </p:txBody>
@@ -64104,7 +64104,7 @@
                   <a:srgbClr val="1A1A2E"/>
                 </a:solidFill>
               </a:rPr>
-              <a:t>ETC $2.92M exceeds $2.6M budget by $1.17M. Hawkeye Ph2 ($632K) and Nokia PO ($753K) are primary drivers.</a:t>
+              <a:t>ETC $2.92M exceeds $2.6M budget by $1.17M (-45%). Hawkeye Ph2 SOW ($632K, signed 3/9) and Nokia PO ($753K) are primary drivers.</a:t>
             </a:r>
           </a:p>
         </p:txBody>
@@ -64138,7 +64138,7 @@
                   <a:srgbClr val="001F5B"/>
                 </a:solidFill>
               </a:rPr>
-              <a:t>↳ Mitigation: CIO budget augmentation request in progress. Phase 3 timing may shift to 2027 to reduce 2026 exposure.</a:t>
+              <a:t>↳ Mitigation: Budget augmentation request to CIO in progress. Phase 3 timing may shift to 2027 to reduce 2026 exposure.</a:t>
             </a:r>
           </a:p>
         </p:txBody>
@@ -64328,7 +64328,7 @@
                   <a:srgbClr val="1A1A2E"/>
                 </a:solidFill>
               </a:rPr>
-              <a:t>JMUX equipment is 25+ years old. Brittle fiber &amp; faulty connectors risk unplanned outage during Phase 2 cutovers.</a:t>
+              <a:t>JMUX equipment is 25+ years old. Brittle fiber &amp; faulty connectors create unplanned outage risk during Phase 2 cutovers.</a:t>
             </a:r>
           </a:p>
         </p:txBody>
@@ -64362,7 +64362,7 @@
                   <a:srgbClr val="001F5B"/>
                 </a:solidFill>
               </a:rPr>
-              <a:t>↳ Mitigation: Careful cutover sequencing. B&amp;McD on-site technical support for all Phase 2 cutovers.</a:t>
+              <a:t>↳ Mitigation: Careful cutover sequencing. B&amp;McD Construction Coordinator on-site for all Phase 2 cutovers.</a:t>
             </a:r>
           </a:p>
         </p:txBody>
@@ -64552,7 +64552,7 @@
                   <a:srgbClr val="1A1A2E"/>
                 </a:solidFill>
               </a:rPr>
-              <a:t>SPI at 0.75 (down from 1.00). IFR/IFC design cycle leaves limited buffer. Design only 4% complete.</a:t>
+              <a:t>SPI at 0.75 (down from 1.00 last month). MPLS Node Design 4% complete. IFR/IFC cycle has limited buffer.</a:t>
             </a:r>
           </a:p>
         </p:txBody>
@@ -64586,7 +64586,7 @@
                   <a:srgbClr val="001F5B"/>
                 </a:solidFill>
               </a:rPr>
-              <a:t>↳ Mitigation: B&amp;McD running concurrent site designs. Weekly tracking calls. Phase 2 surveys completed early.</a:t>
+              <a:t>↳ Mitigation: B&amp;McD running concurrent site designs. Wave 1 IFR (Far Rockaway, Valley Stream, Cedarhurst) in PSEG LI review now.</a:t>
             </a:r>
           </a:p>
         </p:txBody>
@@ -64742,7 +64742,7 @@
                   <a:srgbClr val="1A1A2E"/>
                 </a:solidFill>
               </a:rPr>
-              <a:t>Site Access / Escort Delays</a:t>
+              <a:t>BGP Config Prerequisite — Ph1 Router Access</a:t>
             </a:r>
           </a:p>
         </p:txBody>
@@ -64776,7 +64776,7 @@
                   <a:srgbClr val="1A1A2E"/>
                 </a:solidFill>
               </a:rPr>
-              <a:t>Escort availability and weather can delay field work, triggering Hawkeye cost impacts per SOW.</a:t>
+              <a:t>Phase 1 remote router configuration via Nokia NSP cannot begin until BGP design and configuration at Hicksville &amp; Melville is completed. Sequencing dependency: Cat 6 cabling → BGP config → NSP remote access to all 31 Phase 1 routers.</a:t>
             </a:r>
           </a:p>
         </p:txBody>
@@ -64810,7 +64810,7 @@
                   <a:srgbClr val="001F5B"/>
                 </a:solidFill>
               </a:rPr>
-              <a:t>↳ Mitigation: Verify weekly before mobilizing. Adjust sequencing if sites inaccessible. Noted in B&amp;McD SOW constraint.</a:t>
+              <a:t>↳ Mitigation: BGP design and router configuration at Hicksville &amp; Melville scheduled for week of March 16. Hawkeye cabling at Hicksville completes March 13.</a:t>
             </a:r>
           </a:p>
         </p:txBody>
@@ -64901,7 +64901,231 @@
         <p:spPr>
           <a:xfrm>
             <a:off x="6263640" y="1554480"/>
-            <a:ext cx="5715000" cy="914400"/>
+            <a:ext cx="5715000" cy="768096"/>
+          </a:xfrm>
+          <a:prstGeom prst="rect">
+            <a:avLst/>
+          </a:prstGeom>
+          <a:solidFill>
+            <a:srgbClr val="E6F7F1"/>
+          </a:solidFill>
+          <a:ln w="25400">
+            <a:solidFill>
+              <a:srgbClr val="00965E"/>
+            </a:solidFill>
+          </a:ln>
+        </p:spPr>
+        <p:style>
+          <a:lnRef idx="1">
+            <a:schemeClr val="accent1"/>
+          </a:lnRef>
+          <a:fillRef idx="3">
+            <a:schemeClr val="accent1"/>
+          </a:fillRef>
+          <a:effectRef idx="2">
+            <a:schemeClr val="accent1"/>
+          </a:effectRef>
+          <a:fontRef idx="minor">
+            <a:schemeClr val="lt1"/>
+          </a:fontRef>
+        </p:style>
+        <p:txBody>
+          <a:bodyPr rtlCol="0" anchor="ctr"/>
+          <a:lstStyle/>
+          <a:p>
+            <a:pPr algn="ctr"/>
+          </a:p>
+        </p:txBody>
+      </p:sp>
+      <p:sp>
+        <p:nvSpPr>
+          <p:cNvPr id="40" name="Rectangle 39"/>
+          <p:cNvSpPr/>
+          <p:nvPr/>
+        </p:nvSpPr>
+        <p:spPr>
+          <a:xfrm>
+            <a:off x="6263640" y="1554480"/>
+            <a:ext cx="804672" cy="274320"/>
+          </a:xfrm>
+          <a:prstGeom prst="rect">
+            <a:avLst/>
+          </a:prstGeom>
+          <a:solidFill>
+            <a:srgbClr val="00965E"/>
+          </a:solidFill>
+          <a:ln>
+            <a:noFill/>
+          </a:ln>
+        </p:spPr>
+        <p:style>
+          <a:lnRef idx="1">
+            <a:schemeClr val="accent1"/>
+          </a:lnRef>
+          <a:fillRef idx="3">
+            <a:schemeClr val="accent1"/>
+          </a:fillRef>
+          <a:effectRef idx="2">
+            <a:schemeClr val="accent1"/>
+          </a:effectRef>
+          <a:fontRef idx="minor">
+            <a:schemeClr val="lt1"/>
+          </a:fontRef>
+        </p:style>
+        <p:txBody>
+          <a:bodyPr rtlCol="0" anchor="ctr"/>
+          <a:lstStyle/>
+          <a:p>
+            <a:pPr algn="ctr"/>
+          </a:p>
+        </p:txBody>
+      </p:sp>
+      <p:sp>
+        <p:nvSpPr>
+          <p:cNvPr id="41" name="TextBox 40"/>
+          <p:cNvSpPr txBox="1"/>
+          <p:nvPr/>
+        </p:nvSpPr>
+        <p:spPr>
+          <a:xfrm>
+            <a:off x="6281928" y="1581912"/>
+            <a:ext cx="768096" cy="219456"/>
+          </a:xfrm>
+          <a:prstGeom prst="rect">
+            <a:avLst/>
+          </a:prstGeom>
+          <a:noFill/>
+        </p:spPr>
+        <p:txBody>
+          <a:bodyPr wrap="square">
+            <a:spAutoFit/>
+          </a:bodyPr>
+          <a:lstStyle/>
+          <a:p>
+            <a:pPr algn="ctr"/>
+            <a:r>
+              <a:rPr sz="800" b="1" i="0">
+                <a:solidFill>
+                  <a:srgbClr val="FFFFFF"/>
+                </a:solidFill>
+              </a:rPr>
+              <a:t>GREEN</a:t>
+            </a:r>
+          </a:p>
+        </p:txBody>
+      </p:sp>
+      <p:sp>
+        <p:nvSpPr>
+          <p:cNvPr id="42" name="TextBox 41"/>
+          <p:cNvSpPr txBox="1"/>
+          <p:nvPr/>
+        </p:nvSpPr>
+        <p:spPr>
+          <a:xfrm>
+            <a:off x="7132320" y="1581912"/>
+            <a:ext cx="4736592" cy="237744"/>
+          </a:xfrm>
+          <a:prstGeom prst="rect">
+            <a:avLst/>
+          </a:prstGeom>
+          <a:noFill/>
+        </p:spPr>
+        <p:txBody>
+          <a:bodyPr wrap="square">
+            <a:spAutoFit/>
+          </a:bodyPr>
+          <a:lstStyle/>
+          <a:p>
+            <a:pPr algn="l"/>
+            <a:r>
+              <a:rPr sz="950" b="1" i="0">
+                <a:solidFill>
+                  <a:srgbClr val="1A1A2E"/>
+                </a:solidFill>
+              </a:rPr>
+              <a:t>Hicksville OTDR — Crown Castle Fiber</a:t>
+            </a:r>
+          </a:p>
+        </p:txBody>
+      </p:sp>
+      <p:sp>
+        <p:nvSpPr>
+          <p:cNvPr id="43" name="TextBox 42"/>
+          <p:cNvSpPr txBox="1"/>
+          <p:nvPr/>
+        </p:nvSpPr>
+        <p:spPr>
+          <a:xfrm>
+            <a:off x="6355080" y="1837943"/>
+            <a:ext cx="5532120" cy="274320"/>
+          </a:xfrm>
+          <a:prstGeom prst="rect">
+            <a:avLst/>
+          </a:prstGeom>
+          <a:noFill/>
+        </p:spPr>
+        <p:txBody>
+          <a:bodyPr wrap="square">
+            <a:spAutoFit/>
+          </a:bodyPr>
+          <a:lstStyle/>
+          <a:p>
+            <a:pPr algn="l"/>
+            <a:r>
+              <a:rPr sz="800" b="0" i="0">
+                <a:solidFill>
+                  <a:srgbClr val="1A1A2E"/>
+                </a:solidFill>
+              </a:rPr>
+              <a:t>OTDR testing completed March 9, 2026. Results confirmed. Crown Castle fiber issue identified and documented.</a:t>
+            </a:r>
+          </a:p>
+        </p:txBody>
+      </p:sp>
+      <p:sp>
+        <p:nvSpPr>
+          <p:cNvPr id="44" name="TextBox 43"/>
+          <p:cNvSpPr txBox="1"/>
+          <p:nvPr/>
+        </p:nvSpPr>
+        <p:spPr>
+          <a:xfrm>
+            <a:off x="6355080" y="2121408"/>
+            <a:ext cx="5532120" cy="182880"/>
+          </a:xfrm>
+          <a:prstGeom prst="rect">
+            <a:avLst/>
+          </a:prstGeom>
+          <a:noFill/>
+        </p:spPr>
+        <p:txBody>
+          <a:bodyPr wrap="square">
+            <a:spAutoFit/>
+          </a:bodyPr>
+          <a:lstStyle/>
+          <a:p>
+            <a:pPr algn="l"/>
+            <a:r>
+              <a:rPr sz="800" b="1" i="1">
+                <a:solidFill>
+                  <a:srgbClr val="00965E"/>
+                </a:solidFill>
+              </a:rPr>
+              <a:t>↳ COMPLETED 3/9/2026 ✓</a:t>
+            </a:r>
+          </a:p>
+        </p:txBody>
+      </p:sp>
+      <p:sp>
+        <p:nvSpPr>
+          <p:cNvPr id="45" name="Rectangle 44"/>
+          <p:cNvSpPr/>
+          <p:nvPr/>
+        </p:nvSpPr>
+        <p:spPr>
+          <a:xfrm>
+            <a:off x="6263640" y="2386584"/>
+            <a:ext cx="5715000" cy="768096"/>
           </a:xfrm>
           <a:prstGeom prst="rect">
             <a:avLst/>
@@ -64939,14 +65163,14 @@
       </p:sp>
       <p:sp>
         <p:nvSpPr>
-          <p:cNvPr id="40" name="Rectangle 39"/>
-          <p:cNvSpPr/>
-          <p:nvPr/>
-        </p:nvSpPr>
-        <p:spPr>
-          <a:xfrm>
-            <a:off x="6263640" y="1554480"/>
-            <a:ext cx="804672" cy="310896"/>
+          <p:cNvPr id="46" name="Rectangle 45"/>
+          <p:cNvSpPr/>
+          <p:nvPr/>
+        </p:nvSpPr>
+        <p:spPr>
+          <a:xfrm>
+            <a:off x="6263640" y="2386584"/>
+            <a:ext cx="804672" cy="274320"/>
           </a:xfrm>
           <a:prstGeom prst="rect">
             <a:avLst/>
@@ -64982,14 +65206,14 @@
       </p:sp>
       <p:sp>
         <p:nvSpPr>
-          <p:cNvPr id="41" name="TextBox 40"/>
+          <p:cNvPr id="47" name="TextBox 46"/>
           <p:cNvSpPr txBox="1"/>
           <p:nvPr/>
         </p:nvSpPr>
         <p:spPr>
           <a:xfrm>
-            <a:off x="6281928" y="1591056"/>
-            <a:ext cx="768096" cy="237744"/>
+            <a:off x="6281928" y="2414015"/>
+            <a:ext cx="768096" cy="219456"/>
           </a:xfrm>
           <a:prstGeom prst="rect">
             <a:avLst/>
@@ -65004,7 +65228,7 @@
           <a:p>
             <a:pPr algn="ctr"/>
             <a:r>
-              <a:rPr sz="850" b="1" i="0">
+              <a:rPr sz="800" b="1" i="0">
                 <a:solidFill>
                   <a:srgbClr val="FFFFFF"/>
                 </a:solidFill>
@@ -65016,14 +65240,14 @@
       </p:sp>
       <p:sp>
         <p:nvSpPr>
-          <p:cNvPr id="42" name="TextBox 41"/>
+          <p:cNvPr id="48" name="TextBox 47"/>
           <p:cNvSpPr txBox="1"/>
           <p:nvPr/>
         </p:nvSpPr>
         <p:spPr>
           <a:xfrm>
-            <a:off x="7132320" y="1591056"/>
-            <a:ext cx="4736592" cy="256032"/>
+            <a:off x="7132320" y="2414015"/>
+            <a:ext cx="4736592" cy="237744"/>
           </a:xfrm>
           <a:prstGeom prst="rect">
             <a:avLst/>
@@ -65038,26 +65262,26 @@
           <a:p>
             <a:pPr algn="l"/>
             <a:r>
-              <a:rPr sz="1000" b="1" i="0">
+              <a:rPr sz="950" b="1" i="0">
                 <a:solidFill>
                   <a:srgbClr val="1A1A2E"/>
                 </a:solidFill>
               </a:rPr>
-              <a:t>Hicksville Cat 6 Cabling</a:t>
+              <a:t>Hicksville Cat 6 Cabling (NSP)</a:t>
             </a:r>
           </a:p>
         </p:txBody>
       </p:sp>
       <p:sp>
         <p:nvSpPr>
-          <p:cNvPr id="43" name="TextBox 42"/>
+          <p:cNvPr id="49" name="TextBox 48"/>
           <p:cNvSpPr txBox="1"/>
           <p:nvPr/>
         </p:nvSpPr>
         <p:spPr>
           <a:xfrm>
-            <a:off x="6355080" y="1901952"/>
-            <a:ext cx="5532120" cy="292608"/>
+            <a:off x="6355080" y="2670048"/>
+            <a:ext cx="5532120" cy="274320"/>
           </a:xfrm>
           <a:prstGeom prst="rect">
             <a:avLst/>
@@ -65072,26 +65296,26 @@
           <a:p>
             <a:pPr algn="l"/>
             <a:r>
-              <a:rPr sz="850" b="0" i="0">
+              <a:rPr sz="800" b="0" i="0">
                 <a:solidFill>
                   <a:srgbClr val="1A1A2E"/>
                 </a:solidFill>
               </a:rPr>
-              <a:t>Hawkeye completing Cat 6 cabling for Nokia NSP at Hicksville.</a:t>
+              <a:t>Hawkeye completing Cat 6 cabling for Nokia NSP at Hicksville. Required before NSP can communicate with routers.</a:t>
             </a:r>
           </a:p>
         </p:txBody>
       </p:sp>
       <p:sp>
         <p:nvSpPr>
-          <p:cNvPr id="44" name="TextBox 43"/>
+          <p:cNvPr id="50" name="TextBox 49"/>
           <p:cNvSpPr txBox="1"/>
           <p:nvPr/>
         </p:nvSpPr>
         <p:spPr>
           <a:xfrm>
-            <a:off x="6355080" y="2212848"/>
-            <a:ext cx="5532120" cy="219456"/>
+            <a:off x="6355080" y="2953512"/>
+            <a:ext cx="5532120" cy="182880"/>
           </a:xfrm>
           <a:prstGeom prst="rect">
             <a:avLst/>
@@ -65106,26 +65330,26 @@
           <a:p>
             <a:pPr algn="l"/>
             <a:r>
-              <a:rPr sz="850" b="1" i="1">
+              <a:rPr sz="800" b="1" i="1">
                 <a:solidFill>
                   <a:srgbClr val="001F5B"/>
                 </a:solidFill>
               </a:rPr>
-              <a:t>↳ Hawkeye on-site. Target completion: early March 2026.</a:t>
+              <a:t>↳ Target completion: March 13, 2026 (tomorrow)</a:t>
             </a:r>
           </a:p>
         </p:txBody>
       </p:sp>
       <p:sp>
         <p:nvSpPr>
-          <p:cNvPr id="45" name="Rectangle 44"/>
-          <p:cNvSpPr/>
-          <p:nvPr/>
-        </p:nvSpPr>
-        <p:spPr>
-          <a:xfrm>
-            <a:off x="6263640" y="2542032"/>
-            <a:ext cx="5715000" cy="914400"/>
+          <p:cNvPr id="51" name="Rectangle 50"/>
+          <p:cNvSpPr/>
+          <p:nvPr/>
+        </p:nvSpPr>
+        <p:spPr>
+          <a:xfrm>
+            <a:off x="6263640" y="3218688"/>
+            <a:ext cx="5715000" cy="768096"/>
           </a:xfrm>
           <a:prstGeom prst="rect">
             <a:avLst/>
@@ -65163,14 +65387,14 @@
       </p:sp>
       <p:sp>
         <p:nvSpPr>
-          <p:cNvPr id="46" name="Rectangle 45"/>
-          <p:cNvSpPr/>
-          <p:nvPr/>
-        </p:nvSpPr>
-        <p:spPr>
-          <a:xfrm>
-            <a:off x="6263640" y="2542032"/>
-            <a:ext cx="804672" cy="310896"/>
+          <p:cNvPr id="52" name="Rectangle 51"/>
+          <p:cNvSpPr/>
+          <p:nvPr/>
+        </p:nvSpPr>
+        <p:spPr>
+          <a:xfrm>
+            <a:off x="6263640" y="3218688"/>
+            <a:ext cx="804672" cy="274320"/>
           </a:xfrm>
           <a:prstGeom prst="rect">
             <a:avLst/>
@@ -65206,14 +65430,14 @@
       </p:sp>
       <p:sp>
         <p:nvSpPr>
-          <p:cNvPr id="47" name="TextBox 46"/>
+          <p:cNvPr id="53" name="TextBox 52"/>
           <p:cNvSpPr txBox="1"/>
           <p:nvPr/>
         </p:nvSpPr>
         <p:spPr>
           <a:xfrm>
-            <a:off x="6281928" y="2578608"/>
-            <a:ext cx="768096" cy="237744"/>
+            <a:off x="6281928" y="3246120"/>
+            <a:ext cx="768096" cy="219456"/>
           </a:xfrm>
           <a:prstGeom prst="rect">
             <a:avLst/>
@@ -65228,7 +65452,7 @@
           <a:p>
             <a:pPr algn="ctr"/>
             <a:r>
-              <a:rPr sz="850" b="1" i="0">
+              <a:rPr sz="800" b="1" i="0">
                 <a:solidFill>
                   <a:srgbClr val="FFFFFF"/>
                 </a:solidFill>
@@ -65240,14 +65464,14 @@
       </p:sp>
       <p:sp>
         <p:nvSpPr>
-          <p:cNvPr id="48" name="TextBox 47"/>
+          <p:cNvPr id="54" name="TextBox 53"/>
           <p:cNvSpPr txBox="1"/>
           <p:nvPr/>
         </p:nvSpPr>
         <p:spPr>
           <a:xfrm>
-            <a:off x="7132320" y="2578608"/>
-            <a:ext cx="4736592" cy="256032"/>
+            <a:off x="7132320" y="3246120"/>
+            <a:ext cx="4736592" cy="237744"/>
           </a:xfrm>
           <a:prstGeom prst="rect">
             <a:avLst/>
@@ -65262,26 +65486,26 @@
           <a:p>
             <a:pPr algn="l"/>
             <a:r>
-              <a:rPr sz="1000" b="1" i="0">
+              <a:rPr sz="950" b="1" i="0">
                 <a:solidFill>
                   <a:srgbClr val="1A1A2E"/>
                 </a:solidFill>
               </a:rPr>
-              <a:t>Hicksville OTDR — Crown Castle Fiber</a:t>
+              <a:t>BGP Design &amp; Router Config — Hicksville &amp; Melville</a:t>
             </a:r>
           </a:p>
         </p:txBody>
       </p:sp>
       <p:sp>
         <p:nvSpPr>
-          <p:cNvPr id="49" name="TextBox 48"/>
+          <p:cNvPr id="55" name="TextBox 54"/>
           <p:cNvSpPr txBox="1"/>
           <p:nvPr/>
         </p:nvSpPr>
         <p:spPr>
           <a:xfrm>
-            <a:off x="6355080" y="2889504"/>
-            <a:ext cx="5532120" cy="292608"/>
+            <a:off x="6355080" y="3502152"/>
+            <a:ext cx="5532120" cy="274320"/>
           </a:xfrm>
           <a:prstGeom prst="rect">
             <a:avLst/>
@@ -65296,26 +65520,26 @@
           <a:p>
             <a:pPr algn="l"/>
             <a:r>
-              <a:rPr sz="850" b="0" i="0">
+              <a:rPr sz="800" b="0" i="0">
                 <a:solidFill>
                   <a:srgbClr val="1A1A2E"/>
                 </a:solidFill>
               </a:rPr>
-              <a:t>Low dB fiber levels at Hicksville. Crown Castle likely root cause. OTDR testing planned.</a:t>
+              <a:t>BGP design and router configuration at Hicksville and Melville substations must be completed before Nokia NSP can remotely connect to all 31 Phase 1 routers. Sequencing is critical — NSP access depends on BGP being live.</a:t>
             </a:r>
           </a:p>
         </p:txBody>
       </p:sp>
       <p:sp>
         <p:nvSpPr>
-          <p:cNvPr id="50" name="TextBox 49"/>
+          <p:cNvPr id="56" name="TextBox 55"/>
           <p:cNvSpPr txBox="1"/>
           <p:nvPr/>
         </p:nvSpPr>
         <p:spPr>
           <a:xfrm>
-            <a:off x="6355080" y="3200400"/>
-            <a:ext cx="5532120" cy="219456"/>
+            <a:off x="6355080" y="3785615"/>
+            <a:ext cx="5532120" cy="182880"/>
           </a:xfrm>
           <a:prstGeom prst="rect">
             <a:avLst/>
@@ -65330,26 +65554,26 @@
           <a:p>
             <a:pPr algn="l"/>
             <a:r>
-              <a:rPr sz="850" b="1" i="1">
+              <a:rPr sz="800" b="1" i="1">
                 <a:solidFill>
                   <a:srgbClr val="001F5B"/>
                 </a:solidFill>
               </a:rPr>
-              <a:t>↳ OTDR results expected Mar 2026. CIO escalation may be required if Crown Castle fault confirmed.</a:t>
+              <a:t>↳ Scheduled: Week of March 16, 2026 (after Cat 6 complete)</a:t>
             </a:r>
           </a:p>
         </p:txBody>
       </p:sp>
       <p:sp>
         <p:nvSpPr>
-          <p:cNvPr id="51" name="Rectangle 50"/>
-          <p:cNvSpPr/>
-          <p:nvPr/>
-        </p:nvSpPr>
-        <p:spPr>
-          <a:xfrm>
-            <a:off x="6263640" y="3529584"/>
-            <a:ext cx="5715000" cy="914400"/>
+          <p:cNvPr id="57" name="Rectangle 56"/>
+          <p:cNvSpPr/>
+          <p:nvPr/>
+        </p:nvSpPr>
+        <p:spPr>
+          <a:xfrm>
+            <a:off x="6263640" y="4050791"/>
+            <a:ext cx="5715000" cy="768096"/>
           </a:xfrm>
           <a:prstGeom prst="rect">
             <a:avLst/>
@@ -65387,14 +65611,14 @@
       </p:sp>
       <p:sp>
         <p:nvSpPr>
-          <p:cNvPr id="52" name="Rectangle 51"/>
-          <p:cNvSpPr/>
-          <p:nvPr/>
-        </p:nvSpPr>
-        <p:spPr>
-          <a:xfrm>
-            <a:off x="6263640" y="3529584"/>
-            <a:ext cx="804672" cy="310896"/>
+          <p:cNvPr id="58" name="Rectangle 57"/>
+          <p:cNvSpPr/>
+          <p:nvPr/>
+        </p:nvSpPr>
+        <p:spPr>
+          <a:xfrm>
+            <a:off x="6263640" y="4050791"/>
+            <a:ext cx="804672" cy="274320"/>
           </a:xfrm>
           <a:prstGeom prst="rect">
             <a:avLst/>
@@ -65430,14 +65654,14 @@
       </p:sp>
       <p:sp>
         <p:nvSpPr>
-          <p:cNvPr id="53" name="TextBox 52"/>
+          <p:cNvPr id="59" name="TextBox 58"/>
           <p:cNvSpPr txBox="1"/>
           <p:nvPr/>
         </p:nvSpPr>
         <p:spPr>
           <a:xfrm>
-            <a:off x="6281928" y="3566160"/>
-            <a:ext cx="768096" cy="237744"/>
+            <a:off x="6281928" y="4078224"/>
+            <a:ext cx="768096" cy="219456"/>
           </a:xfrm>
           <a:prstGeom prst="rect">
             <a:avLst/>
@@ -65452,7 +65676,7 @@
           <a:p>
             <a:pPr algn="ctr"/>
             <a:r>
-              <a:rPr sz="850" b="1" i="0">
+              <a:rPr sz="800" b="1" i="0">
                 <a:solidFill>
                   <a:srgbClr val="FFFFFF"/>
                 </a:solidFill>
@@ -65464,14 +65688,14 @@
       </p:sp>
       <p:sp>
         <p:nvSpPr>
-          <p:cNvPr id="54" name="TextBox 53"/>
+          <p:cNvPr id="60" name="TextBox 59"/>
           <p:cNvSpPr txBox="1"/>
           <p:nvPr/>
         </p:nvSpPr>
         <p:spPr>
           <a:xfrm>
-            <a:off x="7132320" y="3566160"/>
-            <a:ext cx="4736592" cy="256032"/>
+            <a:off x="7132320" y="4078224"/>
+            <a:ext cx="4736592" cy="237744"/>
           </a:xfrm>
           <a:prstGeom prst="rect">
             <a:avLst/>
@@ -65486,26 +65710,26 @@
           <a:p>
             <a:pPr algn="l"/>
             <a:r>
-              <a:rPr sz="1000" b="1" i="0">
+              <a:rPr sz="950" b="1" i="0">
                 <a:solidFill>
                   <a:srgbClr val="1A1A2E"/>
                 </a:solidFill>
               </a:rPr>
-              <a:t>NSP Remote Access — Hicksville &amp; Melville</a:t>
+              <a:t>Nokia NSP Remote Access — 31 Phase 1 Routers</a:t>
             </a:r>
           </a:p>
         </p:txBody>
       </p:sp>
       <p:sp>
         <p:nvSpPr>
-          <p:cNvPr id="55" name="TextBox 54"/>
+          <p:cNvPr id="61" name="TextBox 60"/>
           <p:cNvSpPr txBox="1"/>
           <p:nvPr/>
         </p:nvSpPr>
         <p:spPr>
           <a:xfrm>
-            <a:off x="6355080" y="3877056"/>
-            <a:ext cx="5532120" cy="292608"/>
+            <a:off x="6355080" y="4334255"/>
+            <a:ext cx="5532120" cy="274320"/>
           </a:xfrm>
           <a:prstGeom prst="rect">
             <a:avLst/>
@@ -65520,26 +65744,26 @@
           <a:p>
             <a:pPr algn="l"/>
             <a:r>
-              <a:rPr sz="850" b="0" i="0">
+              <a:rPr sz="800" b="0" i="0">
                 <a:solidFill>
                   <a:srgbClr val="1A1A2E"/>
                 </a:solidFill>
               </a:rPr>
-              <a:t>Remote connectivity to NSP nodes required before router config can begin.</a:t>
+              <a:t>Once BGP config is complete at Hicksville &amp; Melville, Nokia NSP will be used to remotely connect to and configure all 31 Phase 1 routers. This completes Phase 1 close-out.</a:t>
             </a:r>
           </a:p>
         </p:txBody>
       </p:sp>
       <p:sp>
         <p:nvSpPr>
-          <p:cNvPr id="56" name="TextBox 55"/>
+          <p:cNvPr id="62" name="TextBox 61"/>
           <p:cNvSpPr txBox="1"/>
           <p:nvPr/>
         </p:nvSpPr>
         <p:spPr>
           <a:xfrm>
-            <a:off x="6355080" y="4187952"/>
-            <a:ext cx="5532120" cy="219456"/>
+            <a:off x="6355080" y="4617720"/>
+            <a:ext cx="5532120" cy="182880"/>
           </a:xfrm>
           <a:prstGeom prst="rect">
             <a:avLst/>
@@ -65554,26 +65778,26 @@
           <a:p>
             <a:pPr algn="l"/>
             <a:r>
-              <a:rPr sz="850" b="1" i="1">
+              <a:rPr sz="800" b="1" i="1">
                 <a:solidFill>
                   <a:srgbClr val="001F5B"/>
                 </a:solidFill>
               </a:rPr>
-              <a:t>↳ Connectivity being established. Hawkeye Cat 6 work is prerequisite.</a:t>
+              <a:t>↳ Expected: Late March 2026 (follows BGP config week of 3/16)</a:t>
             </a:r>
           </a:p>
         </p:txBody>
       </p:sp>
       <p:sp>
         <p:nvSpPr>
-          <p:cNvPr id="57" name="Rectangle 56"/>
-          <p:cNvSpPr/>
-          <p:nvPr/>
-        </p:nvSpPr>
-        <p:spPr>
-          <a:xfrm>
-            <a:off x="6263640" y="4517136"/>
-            <a:ext cx="5715000" cy="914400"/>
+          <p:cNvPr id="63" name="Rectangle 62"/>
+          <p:cNvSpPr/>
+          <p:nvPr/>
+        </p:nvSpPr>
+        <p:spPr>
+          <a:xfrm>
+            <a:off x="6263640" y="4882896"/>
+            <a:ext cx="5715000" cy="768096"/>
           </a:xfrm>
           <a:prstGeom prst="rect">
             <a:avLst/>
@@ -65611,14 +65835,14 @@
       </p:sp>
       <p:sp>
         <p:nvSpPr>
-          <p:cNvPr id="58" name="Rectangle 57"/>
-          <p:cNvSpPr/>
-          <p:nvPr/>
-        </p:nvSpPr>
-        <p:spPr>
-          <a:xfrm>
-            <a:off x="6263640" y="4517136"/>
-            <a:ext cx="804672" cy="310896"/>
+          <p:cNvPr id="64" name="Rectangle 63"/>
+          <p:cNvSpPr/>
+          <p:nvPr/>
+        </p:nvSpPr>
+        <p:spPr>
+          <a:xfrm>
+            <a:off x="6263640" y="4882896"/>
+            <a:ext cx="804672" cy="274320"/>
           </a:xfrm>
           <a:prstGeom prst="rect">
             <a:avLst/>
@@ -65654,14 +65878,14 @@
       </p:sp>
       <p:sp>
         <p:nvSpPr>
-          <p:cNvPr id="59" name="TextBox 58"/>
+          <p:cNvPr id="65" name="TextBox 64"/>
           <p:cNvSpPr txBox="1"/>
           <p:nvPr/>
         </p:nvSpPr>
         <p:spPr>
           <a:xfrm>
-            <a:off x="6281928" y="4553712"/>
-            <a:ext cx="768096" cy="237744"/>
+            <a:off x="6281928" y="4910328"/>
+            <a:ext cx="768096" cy="219456"/>
           </a:xfrm>
           <a:prstGeom prst="rect">
             <a:avLst/>
@@ -65676,7 +65900,7 @@
           <a:p>
             <a:pPr algn="ctr"/>
             <a:r>
-              <a:rPr sz="850" b="1" i="0">
+              <a:rPr sz="800" b="1" i="0">
                 <a:solidFill>
                   <a:srgbClr val="FFFFFF"/>
                 </a:solidFill>
@@ -65688,14 +65912,14 @@
       </p:sp>
       <p:sp>
         <p:nvSpPr>
-          <p:cNvPr id="60" name="TextBox 59"/>
+          <p:cNvPr id="66" name="TextBox 65"/>
           <p:cNvSpPr txBox="1"/>
           <p:nvPr/>
         </p:nvSpPr>
         <p:spPr>
           <a:xfrm>
-            <a:off x="7132320" y="4553712"/>
-            <a:ext cx="4736592" cy="256032"/>
+            <a:off x="7132320" y="4910328"/>
+            <a:ext cx="4736592" cy="237744"/>
           </a:xfrm>
           <a:prstGeom prst="rect">
             <a:avLst/>
@@ -65710,7 +65934,7 @@
           <a:p>
             <a:pPr algn="l"/>
             <a:r>
-              <a:rPr sz="1000" b="1" i="0">
+              <a:rPr sz="950" b="1" i="0">
                 <a:solidFill>
                   <a:srgbClr val="1A1A2E"/>
                 </a:solidFill>
@@ -65722,14 +65946,14 @@
       </p:sp>
       <p:sp>
         <p:nvSpPr>
-          <p:cNvPr id="61" name="TextBox 60"/>
+          <p:cNvPr id="67" name="TextBox 66"/>
           <p:cNvSpPr txBox="1"/>
           <p:nvPr/>
         </p:nvSpPr>
         <p:spPr>
           <a:xfrm>
-            <a:off x="6355080" y="4864608"/>
-            <a:ext cx="5532120" cy="292608"/>
+            <a:off x="6355080" y="5166359"/>
+            <a:ext cx="5532120" cy="274320"/>
           </a:xfrm>
           <a:prstGeom prst="rect">
             <a:avLst/>
@@ -65744,26 +65968,26 @@
           <a:p>
             <a:pPr algn="l"/>
             <a:r>
-              <a:rPr sz="850" b="0" i="0">
+              <a:rPr sz="800" b="0" i="0">
                 <a:solidFill>
                   <a:srgbClr val="1A1A2E"/>
                 </a:solidFill>
               </a:rPr>
-              <a:t>Architecture review, security assessment, compliance readiness — all approved by SSP team.</a:t>
+              <a:t>Architecture review, security assessment and compliance readiness all approved by SSP team.</a:t>
             </a:r>
           </a:p>
         </p:txBody>
       </p:sp>
       <p:sp>
         <p:nvSpPr>
-          <p:cNvPr id="62" name="TextBox 61"/>
+          <p:cNvPr id="68" name="TextBox 67"/>
           <p:cNvSpPr txBox="1"/>
           <p:nvPr/>
         </p:nvSpPr>
         <p:spPr>
           <a:xfrm>
-            <a:off x="6355080" y="5175504"/>
-            <a:ext cx="5532120" cy="219456"/>
+            <a:off x="6355080" y="5449824"/>
+            <a:ext cx="5532120" cy="182880"/>
           </a:xfrm>
           <a:prstGeom prst="rect">
             <a:avLst/>
@@ -65778,26 +66002,26 @@
           <a:p>
             <a:pPr algn="l"/>
             <a:r>
-              <a:rPr sz="850" b="1" i="1">
+              <a:rPr sz="800" b="1" i="1">
                 <a:solidFill>
                   <a:srgbClr val="00965E"/>
                 </a:solidFill>
               </a:rPr>
-              <a:t>↳ Completed Feb 10, 2026.</a:t>
+              <a:t>↳ COMPLETED Feb 10, 2026 ✓</a:t>
             </a:r>
           </a:p>
         </p:txBody>
       </p:sp>
       <p:sp>
         <p:nvSpPr>
-          <p:cNvPr id="63" name="Rectangle 62"/>
-          <p:cNvSpPr/>
-          <p:nvPr/>
-        </p:nvSpPr>
-        <p:spPr>
-          <a:xfrm>
-            <a:off x="6263640" y="5504688"/>
-            <a:ext cx="5715000" cy="914400"/>
+          <p:cNvPr id="69" name="Rectangle 68"/>
+          <p:cNvSpPr/>
+          <p:nvPr/>
+        </p:nvSpPr>
+        <p:spPr>
+          <a:xfrm>
+            <a:off x="6263640" y="5715000"/>
+            <a:ext cx="5715000" cy="768096"/>
           </a:xfrm>
           <a:prstGeom prst="rect">
             <a:avLst/>
@@ -65835,14 +66059,14 @@
       </p:sp>
       <p:sp>
         <p:nvSpPr>
-          <p:cNvPr id="64" name="Rectangle 63"/>
-          <p:cNvSpPr/>
-          <p:nvPr/>
-        </p:nvSpPr>
-        <p:spPr>
-          <a:xfrm>
-            <a:off x="6263640" y="5504688"/>
-            <a:ext cx="804672" cy="310896"/>
+          <p:cNvPr id="70" name="Rectangle 69"/>
+          <p:cNvSpPr/>
+          <p:nvPr/>
+        </p:nvSpPr>
+        <p:spPr>
+          <a:xfrm>
+            <a:off x="6263640" y="5715000"/>
+            <a:ext cx="804672" cy="274320"/>
           </a:xfrm>
           <a:prstGeom prst="rect">
             <a:avLst/>
@@ -65878,14 +66102,14 @@
       </p:sp>
       <p:sp>
         <p:nvSpPr>
-          <p:cNvPr id="65" name="TextBox 64"/>
+          <p:cNvPr id="71" name="TextBox 70"/>
           <p:cNvSpPr txBox="1"/>
           <p:nvPr/>
         </p:nvSpPr>
         <p:spPr>
           <a:xfrm>
-            <a:off x="6281928" y="5541264"/>
-            <a:ext cx="768096" cy="237744"/>
+            <a:off x="6281928" y="5742432"/>
+            <a:ext cx="768096" cy="219456"/>
           </a:xfrm>
           <a:prstGeom prst="rect">
             <a:avLst/>
@@ -65900,7 +66124,7 @@
           <a:p>
             <a:pPr algn="ctr"/>
             <a:r>
-              <a:rPr sz="850" b="1" i="0">
+              <a:rPr sz="800" b="1" i="0">
                 <a:solidFill>
                   <a:srgbClr val="FFFFFF"/>
                 </a:solidFill>
@@ -65912,14 +66136,14 @@
       </p:sp>
       <p:sp>
         <p:nvSpPr>
-          <p:cNvPr id="66" name="TextBox 65"/>
+          <p:cNvPr id="72" name="TextBox 71"/>
           <p:cNvSpPr txBox="1"/>
           <p:nvPr/>
         </p:nvSpPr>
         <p:spPr>
           <a:xfrm>
-            <a:off x="7132320" y="5541264"/>
-            <a:ext cx="4736592" cy="256032"/>
+            <a:off x="7132320" y="5742432"/>
+            <a:ext cx="4736592" cy="237744"/>
           </a:xfrm>
           <a:prstGeom prst="rect">
             <a:avLst/>
@@ -65934,7 +66158,7 @@
           <a:p>
             <a:pPr algn="l"/>
             <a:r>
-              <a:rPr sz="1000" b="1" i="0">
+              <a:rPr sz="950" b="1" i="0">
                 <a:solidFill>
                   <a:srgbClr val="1A1A2E"/>
                 </a:solidFill>
@@ -65946,14 +66170,14 @@
       </p:sp>
       <p:sp>
         <p:nvSpPr>
-          <p:cNvPr id="67" name="TextBox 66"/>
+          <p:cNvPr id="73" name="TextBox 72"/>
           <p:cNvSpPr txBox="1"/>
           <p:nvPr/>
         </p:nvSpPr>
         <p:spPr>
           <a:xfrm>
-            <a:off x="6355080" y="5852160"/>
-            <a:ext cx="5532120" cy="292608"/>
+            <a:off x="6355080" y="5998464"/>
+            <a:ext cx="5532120" cy="274320"/>
           </a:xfrm>
           <a:prstGeom prst="rect">
             <a:avLst/>
@@ -65968,7 +66192,7 @@
           <a:p>
             <a:pPr algn="l"/>
             <a:r>
-              <a:rPr sz="850" b="0" i="0">
+              <a:rPr sz="800" b="0" i="0">
                 <a:solidFill>
                   <a:srgbClr val="1A1A2E"/>
                 </a:solidFill>
@@ -65980,14 +66204,14 @@
       </p:sp>
       <p:sp>
         <p:nvSpPr>
-          <p:cNvPr id="68" name="TextBox 67"/>
+          <p:cNvPr id="74" name="TextBox 73"/>
           <p:cNvSpPr txBox="1"/>
           <p:nvPr/>
         </p:nvSpPr>
         <p:spPr>
           <a:xfrm>
-            <a:off x="6355080" y="6163056"/>
-            <a:ext cx="5532120" cy="219456"/>
+            <a:off x="6355080" y="6281928"/>
+            <a:ext cx="5532120" cy="182880"/>
           </a:xfrm>
           <a:prstGeom prst="rect">
             <a:avLst/>
@@ -66002,12 +66226,12 @@
           <a:p>
             <a:pPr algn="l"/>
             <a:r>
-              <a:rPr sz="850" b="1" i="1">
+              <a:rPr sz="800" b="1" i="1">
                 <a:solidFill>
                   <a:srgbClr val="00965E"/>
                 </a:solidFill>
               </a:rPr>
-              <a:t>↳ Completed Feb 24, 2026.</a:t>
+              <a:t>↳ COMPLETED Feb 24, 2026 ✓</a:t>
             </a:r>
           </a:p>
         </p:txBody>

--- a/incoming_files/cio_jmux_presentation.pptx
+++ b/incoming_files/cio_jmux_presentation.pptx
@@ -58746,7 +58746,7 @@
                   <a:srgbClr val="1A1A2E"/>
                 </a:solidFill>
               </a:rPr>
-              <a:t>$137,500</a:t>
+              <a:t>$316,200</a:t>
             </a:r>
           </a:p>
         </p:txBody>
@@ -58904,7 +58904,7 @@
                   <a:srgbClr val="1A1A2E"/>
                 </a:solidFill>
               </a:rPr>
-              <a:t>$88,000</a:t>
+              <a:t>$266,700</a:t>
             </a:r>
           </a:p>
         </p:txBody>
@@ -63170,7 +63170,7 @@
                   <a:srgbClr val="FFFFFF"/>
                 </a:solidFill>
               </a:rPr>
-              <a:t>$5,164,397</a:t>
+              <a:t>$5,343,097</a:t>
             </a:r>
           </a:p>
         </p:txBody>
@@ -63328,7 +63328,7 @@
                   <a:srgbClr val="FFFFFF"/>
                 </a:solidFill>
               </a:rPr>
-              <a:t>$3,138,678</a:t>
+              <a:t>$3,317,378</a:t>
             </a:r>
           </a:p>
         </p:txBody>

--- a/incoming_files/cio_jmux_presentation.pptx
+++ b/incoming_files/cio_jmux_presentation.pptx
@@ -58825,7 +58825,7 @@
                   <a:srgbClr val="1A1A2E"/>
                 </a:solidFill>
               </a:rPr>
-              <a:t>$49,500</a:t>
+              <a:t>$250,200</a:t>
             </a:r>
           </a:p>
         </p:txBody>
@@ -58904,7 +58904,7 @@
                   <a:srgbClr val="1A1A2E"/>
                 </a:solidFill>
               </a:rPr>
-              <a:t>$266,700</a:t>
+              <a:t>$66,000</a:t>
             </a:r>
           </a:p>
         </p:txBody>
@@ -63249,7 +63249,7 @@
                   <a:srgbClr val="FFFFFF"/>
                 </a:solidFill>
               </a:rPr>
-              <a:t>$2,025,719</a:t>
+              <a:t>$2,226,419</a:t>
             </a:r>
           </a:p>
         </p:txBody>
@@ -63328,7 +63328,7 @@
                   <a:srgbClr val="FFFFFF"/>
                 </a:solidFill>
               </a:rPr>
-              <a:t>$3,317,378</a:t>
+              <a:t>$3,116,678</a:t>
             </a:r>
           </a:p>
         </p:txBody>

--- a/incoming_files/cio_jmux_presentation.pptx
+++ b/incoming_files/cio_jmux_presentation.pptx
@@ -58746,7 +58746,7 @@
                   <a:srgbClr val="1A1A2E"/>
                 </a:solidFill>
               </a:rPr>
-              <a:t>$316,200</a:t>
+              <a:t>$137,500</a:t>
             </a:r>
           </a:p>
         </p:txBody>
@@ -58825,7 +58825,7 @@
                   <a:srgbClr val="1A1A2E"/>
                 </a:solidFill>
               </a:rPr>
-              <a:t>$250,200</a:t>
+              <a:t>$49,500</a:t>
             </a:r>
           </a:p>
         </p:txBody>
@@ -58904,7 +58904,7 @@
                   <a:srgbClr val="1A1A2E"/>
                 </a:solidFill>
               </a:rPr>
-              <a:t>$66,000</a:t>
+              <a:t>$88,000</a:t>
             </a:r>
           </a:p>
         </p:txBody>
@@ -63170,7 +63170,7 @@
                   <a:srgbClr val="FFFFFF"/>
                 </a:solidFill>
               </a:rPr>
-              <a:t>$5,343,097</a:t>
+              <a:t>$5,164,397</a:t>
             </a:r>
           </a:p>
         </p:txBody>
@@ -63249,7 +63249,7 @@
                   <a:srgbClr val="FFFFFF"/>
                 </a:solidFill>
               </a:rPr>
-              <a:t>$2,226,419</a:t>
+              <a:t>$2,025,719</a:t>
             </a:r>
           </a:p>
         </p:txBody>
@@ -63328,7 +63328,7 @@
                   <a:srgbClr val="FFFFFF"/>
                 </a:solidFill>
               </a:rPr>
-              <a:t>$3,116,678</a:t>
+              <a:t>$3,138,678</a:t>
             </a:r>
           </a:p>
         </p:txBody>
